--- a/Specification/基本仕様.pptx
+++ b/Specification/基本仕様.pptx
@@ -5,7 +5,7 @@
     <p:sldMasterId id="2147483648" r:id="rId1"/>
   </p:sldMasterIdLst>
   <p:notesMasterIdLst>
-    <p:notesMasterId r:id="rId7"/>
+    <p:notesMasterId r:id="rId8"/>
   </p:notesMasterIdLst>
   <p:sldIdLst>
     <p:sldId id="258" r:id="rId2"/>
@@ -13,6 +13,7 @@
     <p:sldId id="262" r:id="rId4"/>
     <p:sldId id="267" r:id="rId5"/>
     <p:sldId id="263" r:id="rId6"/>
+    <p:sldId id="268" r:id="rId7"/>
   </p:sldIdLst>
   <p:sldSz cx="12192000" cy="6858000"/>
   <p:notesSz cx="6858000" cy="9144000"/>
@@ -201,7 +202,7 @@
           <a:p>
             <a:fld id="{DDC962EE-CD8D-4B91-A3DD-4C699082EA73}" type="datetimeFigureOut">
               <a:rPr kumimoji="1" lang="ja-JP" altLang="en-US" smtClean="0"/>
-              <a:t>2025/10/17</a:t>
+              <a:t>2025/10/20</a:t>
             </a:fld>
             <a:endParaRPr kumimoji="1" lang="ja-JP" altLang="en-US"/>
           </a:p>
@@ -629,7 +630,7 @@
           <a:p>
             <a:fld id="{F5AF9F5B-2404-485D-A870-3651691CD6B5}" type="datetime1">
               <a:rPr kumimoji="1" lang="ja-JP" altLang="en-US" smtClean="0"/>
-              <a:t>2025/10/17</a:t>
+              <a:t>2025/10/20</a:t>
             </a:fld>
             <a:endParaRPr kumimoji="1" lang="ja-JP" altLang="en-US"/>
           </a:p>
@@ -829,7 +830,7 @@
           <a:p>
             <a:fld id="{5747C4F4-5A8E-4D77-ABBE-A0BE847775D5}" type="datetime1">
               <a:rPr kumimoji="1" lang="ja-JP" altLang="en-US" smtClean="0"/>
-              <a:t>2025/10/17</a:t>
+              <a:t>2025/10/20</a:t>
             </a:fld>
             <a:endParaRPr kumimoji="1" lang="ja-JP" altLang="en-US"/>
           </a:p>
@@ -1039,7 +1040,7 @@
           <a:p>
             <a:fld id="{9A9AB05E-20D0-482C-BB40-3584160A1784}" type="datetime1">
               <a:rPr kumimoji="1" lang="ja-JP" altLang="en-US" smtClean="0"/>
-              <a:t>2025/10/17</a:t>
+              <a:t>2025/10/20</a:t>
             </a:fld>
             <a:endParaRPr kumimoji="1" lang="ja-JP" altLang="en-US"/>
           </a:p>
@@ -1239,7 +1240,7 @@
           <a:p>
             <a:fld id="{704830A0-5797-4E39-976B-196EBC8F12A5}" type="datetime1">
               <a:rPr kumimoji="1" lang="ja-JP" altLang="en-US" smtClean="0"/>
-              <a:t>2025/10/17</a:t>
+              <a:t>2025/10/20</a:t>
             </a:fld>
             <a:endParaRPr kumimoji="1" lang="ja-JP" altLang="en-US"/>
           </a:p>
@@ -1484,7 +1485,7 @@
           <a:p>
             <a:fld id="{3D3FFB79-61C9-4C9B-BB39-B3ADC33410DC}" type="datetime1">
               <a:rPr kumimoji="1" lang="ja-JP" altLang="en-US" smtClean="0"/>
-              <a:t>2025/10/17</a:t>
+              <a:t>2025/10/20</a:t>
             </a:fld>
             <a:endParaRPr kumimoji="1" lang="ja-JP" altLang="en-US"/>
           </a:p>
@@ -1777,7 +1778,7 @@
           <a:p>
             <a:fld id="{FA15C774-0875-42EB-AD6C-A573C6182984}" type="datetime1">
               <a:rPr kumimoji="1" lang="ja-JP" altLang="en-US" smtClean="0"/>
-              <a:t>2025/10/17</a:t>
+              <a:t>2025/10/20</a:t>
             </a:fld>
             <a:endParaRPr kumimoji="1" lang="ja-JP" altLang="en-US"/>
           </a:p>
@@ -2205,7 +2206,7 @@
           <a:p>
             <a:fld id="{698AFFEB-CD38-4777-8454-30081785CFFF}" type="datetime1">
               <a:rPr kumimoji="1" lang="ja-JP" altLang="en-US" smtClean="0"/>
-              <a:t>2025/10/17</a:t>
+              <a:t>2025/10/20</a:t>
             </a:fld>
             <a:endParaRPr kumimoji="1" lang="ja-JP" altLang="en-US"/>
           </a:p>
@@ -2336,7 +2337,7 @@
           <a:p>
             <a:fld id="{42D7B12B-7CA0-4414-AEAA-6D0AACA2052F}" type="datetime1">
               <a:rPr kumimoji="1" lang="ja-JP" altLang="en-US" smtClean="0"/>
-              <a:t>2025/10/17</a:t>
+              <a:t>2025/10/20</a:t>
             </a:fld>
             <a:endParaRPr kumimoji="1" lang="ja-JP" altLang="en-US"/>
           </a:p>
@@ -2431,7 +2432,7 @@
           <a:p>
             <a:fld id="{AFD3D29A-C4E2-4B84-B7FB-8D55DDD89BA5}" type="datetime1">
               <a:rPr kumimoji="1" lang="ja-JP" altLang="en-US" smtClean="0"/>
-              <a:t>2025/10/17</a:t>
+              <a:t>2025/10/20</a:t>
             </a:fld>
             <a:endParaRPr kumimoji="1" lang="ja-JP" altLang="en-US"/>
           </a:p>
@@ -2738,7 +2739,7 @@
           <a:p>
             <a:fld id="{D93CAB33-5415-4090-AE1B-2B4E589E017F}" type="datetime1">
               <a:rPr kumimoji="1" lang="ja-JP" altLang="en-US" smtClean="0"/>
-              <a:t>2025/10/17</a:t>
+              <a:t>2025/10/20</a:t>
             </a:fld>
             <a:endParaRPr kumimoji="1" lang="ja-JP" altLang="en-US"/>
           </a:p>
@@ -2990,7 +2991,7 @@
           <a:p>
             <a:fld id="{9AD6552B-56D1-4206-BF32-17E96CC146D1}" type="datetime1">
               <a:rPr kumimoji="1" lang="ja-JP" altLang="en-US" smtClean="0"/>
-              <a:t>2025/10/17</a:t>
+              <a:t>2025/10/20</a:t>
             </a:fld>
             <a:endParaRPr kumimoji="1" lang="ja-JP" altLang="en-US"/>
           </a:p>
@@ -3233,7 +3234,7 @@
           <a:p>
             <a:fld id="{B79ECCA8-2BE2-481B-9A14-A01B368CD589}" type="datetime1">
               <a:rPr kumimoji="1" lang="ja-JP" altLang="en-US" smtClean="0"/>
-              <a:t>2025/10/17</a:t>
+              <a:t>2025/10/20</a:t>
             </a:fld>
             <a:endParaRPr kumimoji="1" lang="ja-JP" altLang="en-US"/>
           </a:p>
@@ -18104,6 +18105,1564 @@
     <p:extLst>
       <p:ext uri="{BB962C8B-B14F-4D97-AF65-F5344CB8AC3E}">
         <p14:creationId xmlns:p14="http://schemas.microsoft.com/office/powerpoint/2010/main" val="116261769"/>
+      </p:ext>
+    </p:extLst>
+  </p:cSld>
+  <p:clrMapOvr>
+    <a:masterClrMapping/>
+  </p:clrMapOvr>
+</p:sld>
+</file>
+
+<file path=ppt/slides/slide6.xml><?xml version="1.0" encoding="utf-8"?>
+<p:sld xmlns:a="http://schemas.openxmlformats.org/drawingml/2006/main" xmlns:r="http://schemas.openxmlformats.org/officeDocument/2006/relationships" xmlns:p="http://schemas.openxmlformats.org/presentationml/2006/main">
+  <p:cSld>
+    <p:spTree>
+      <p:nvGrpSpPr>
+        <p:cNvPr id="1" name=""/>
+        <p:cNvGrpSpPr/>
+        <p:nvPr/>
+      </p:nvGrpSpPr>
+      <p:grpSpPr>
+        <a:xfrm>
+          <a:off x="0" y="0"/>
+          <a:ext cx="0" cy="0"/>
+          <a:chOff x="0" y="0"/>
+          <a:chExt cx="0" cy="0"/>
+        </a:xfrm>
+      </p:grpSpPr>
+      <p:sp>
+        <p:nvSpPr>
+          <p:cNvPr id="2" name="タイトル 1">
+            <a:extLst>
+              <a:ext uri="{FF2B5EF4-FFF2-40B4-BE49-F238E27FC236}">
+                <a16:creationId xmlns:a16="http://schemas.microsoft.com/office/drawing/2014/main" id="{69080C15-9A64-6F60-EABA-9325B14AD074}"/>
+              </a:ext>
+            </a:extLst>
+          </p:cNvPr>
+          <p:cNvSpPr>
+            <a:spLocks noGrp="1"/>
+          </p:cNvSpPr>
+          <p:nvPr>
+            <p:ph type="title"/>
+          </p:nvPr>
+        </p:nvSpPr>
+        <p:spPr/>
+        <p:txBody>
+          <a:bodyPr>
+            <a:normAutofit fontScale="90000"/>
+          </a:bodyPr>
+          <a:lstStyle/>
+          <a:p>
+            <a:r>
+              <a:rPr lang="ja-JP" altLang="en-US"/>
+              <a:t>使用ライブラリ</a:t>
+            </a:r>
+            <a:endParaRPr kumimoji="1" lang="ja-JP" altLang="en-US"/>
+          </a:p>
+        </p:txBody>
+      </p:sp>
+      <p:sp>
+        <p:nvSpPr>
+          <p:cNvPr id="3" name="スライド番号プレースホルダー 2">
+            <a:extLst>
+              <a:ext uri="{FF2B5EF4-FFF2-40B4-BE49-F238E27FC236}">
+                <a16:creationId xmlns:a16="http://schemas.microsoft.com/office/drawing/2014/main" id="{1BE054EF-65C3-08B9-FB0E-AFE674C1B5EB}"/>
+              </a:ext>
+            </a:extLst>
+          </p:cNvPr>
+          <p:cNvSpPr>
+            <a:spLocks noGrp="1"/>
+          </p:cNvSpPr>
+          <p:nvPr>
+            <p:ph type="sldNum" sz="quarter" idx="12"/>
+          </p:nvPr>
+        </p:nvSpPr>
+        <p:spPr/>
+        <p:txBody>
+          <a:bodyPr/>
+          <a:lstStyle/>
+          <a:p>
+            <a:fld id="{A99D720A-4AD5-4DCF-885F-DE5297996123}" type="slidenum">
+              <a:rPr kumimoji="1" lang="ja-JP" altLang="en-US" smtClean="0"/>
+              <a:t>6</a:t>
+            </a:fld>
+            <a:endParaRPr kumimoji="1" lang="ja-JP" altLang="en-US"/>
+          </a:p>
+        </p:txBody>
+      </p:sp>
+      <p:graphicFrame>
+        <p:nvGraphicFramePr>
+          <p:cNvPr id="4" name="表 3">
+            <a:extLst>
+              <a:ext uri="{FF2B5EF4-FFF2-40B4-BE49-F238E27FC236}">
+                <a16:creationId xmlns:a16="http://schemas.microsoft.com/office/drawing/2014/main" id="{DB4555DD-1E44-3AD8-01B2-04F77AD020A1}"/>
+              </a:ext>
+            </a:extLst>
+          </p:cNvPr>
+          <p:cNvGraphicFramePr>
+            <a:graphicFrameLocks noGrp="1"/>
+          </p:cNvGraphicFramePr>
+          <p:nvPr>
+            <p:extLst>
+              <p:ext uri="{D42A27DB-BD31-4B8C-83A1-F6EECF244321}">
+                <p14:modId xmlns:p14="http://schemas.microsoft.com/office/powerpoint/2010/main" val="2145433503"/>
+              </p:ext>
+            </p:extLst>
+          </p:nvPr>
+        </p:nvGraphicFramePr>
+        <p:xfrm>
+          <a:off x="673768" y="1101733"/>
+          <a:ext cx="8296977" cy="2042160"/>
+        </p:xfrm>
+        <a:graphic>
+          <a:graphicData uri="http://schemas.openxmlformats.org/drawingml/2006/table">
+            <a:tbl>
+              <a:tblPr firstRow="1">
+                <a:tableStyleId>{912C8C85-51F0-491E-9774-3900AFEF0FD7}</a:tableStyleId>
+              </a:tblPr>
+              <a:tblGrid>
+                <a:gridCol w="1838634">
+                  <a:extLst>
+                    <a:ext uri="{9D8B030D-6E8A-4147-A177-3AD203B41FA5}">
+                      <a16:colId xmlns:a16="http://schemas.microsoft.com/office/drawing/2014/main" val="6935548"/>
+                    </a:ext>
+                  </a:extLst>
+                </a:gridCol>
+                <a:gridCol w="1552005">
+                  <a:extLst>
+                    <a:ext uri="{9D8B030D-6E8A-4147-A177-3AD203B41FA5}">
+                      <a16:colId xmlns:a16="http://schemas.microsoft.com/office/drawing/2014/main" val="2184599737"/>
+                    </a:ext>
+                  </a:extLst>
+                </a:gridCol>
+                <a:gridCol w="1552005">
+                  <a:extLst>
+                    <a:ext uri="{9D8B030D-6E8A-4147-A177-3AD203B41FA5}">
+                      <a16:colId xmlns:a16="http://schemas.microsoft.com/office/drawing/2014/main" val="2311469129"/>
+                    </a:ext>
+                  </a:extLst>
+                </a:gridCol>
+                <a:gridCol w="3354333">
+                  <a:extLst>
+                    <a:ext uri="{9D8B030D-6E8A-4147-A177-3AD203B41FA5}">
+                      <a16:colId xmlns:a16="http://schemas.microsoft.com/office/drawing/2014/main" val="754341625"/>
+                    </a:ext>
+                  </a:extLst>
+                </a:gridCol>
+              </a:tblGrid>
+              <a:tr h="0">
+                <a:tc>
+                  <a:txBody>
+                    <a:bodyPr/>
+                    <a:lstStyle/>
+                    <a:p>
+                      <a:pPr>
+                        <a:buNone/>
+                      </a:pPr>
+                      <a:r>
+                        <a:rPr lang="ja-JP" altLang="en-US" sz="1400">
+                          <a:latin typeface="BIZ UDゴシック" panose="020B0400000000000000" pitchFamily="49" charset="-128"/>
+                          <a:ea typeface="BIZ UDゴシック" panose="020B0400000000000000" pitchFamily="49" charset="-128"/>
+                        </a:rPr>
+                        <a:t>名称</a:t>
+                      </a:r>
+                    </a:p>
+                  </a:txBody>
+                  <a:tcPr anchor="ctr">
+                    <a:lnL w="12700" cap="flat" cmpd="sng" algn="ctr">
+                      <a:solidFill>
+                        <a:schemeClr val="tx1"/>
+                      </a:solidFill>
+                      <a:prstDash val="solid"/>
+                      <a:round/>
+                      <a:headEnd type="none" w="med" len="med"/>
+                      <a:tailEnd type="none" w="med" len="med"/>
+                    </a:lnL>
+                    <a:lnR w="12700" cap="flat" cmpd="sng" algn="ctr">
+                      <a:solidFill>
+                        <a:schemeClr val="tx1"/>
+                      </a:solidFill>
+                      <a:prstDash val="solid"/>
+                      <a:round/>
+                      <a:headEnd type="none" w="med" len="med"/>
+                      <a:tailEnd type="none" w="med" len="med"/>
+                    </a:lnR>
+                    <a:lnT w="12700" cap="flat" cmpd="sng" algn="ctr">
+                      <a:solidFill>
+                        <a:schemeClr val="tx1"/>
+                      </a:solidFill>
+                      <a:prstDash val="solid"/>
+                      <a:round/>
+                      <a:headEnd type="none" w="med" len="med"/>
+                      <a:tailEnd type="none" w="med" len="med"/>
+                    </a:lnT>
+                    <a:lnB w="12700" cap="flat" cmpd="sng" algn="ctr">
+                      <a:solidFill>
+                        <a:schemeClr val="tx1"/>
+                      </a:solidFill>
+                      <a:prstDash val="solid"/>
+                      <a:round/>
+                      <a:headEnd type="none" w="med" len="med"/>
+                      <a:tailEnd type="none" w="med" len="med"/>
+                    </a:lnB>
+                  </a:tcPr>
+                </a:tc>
+                <a:tc>
+                  <a:txBody>
+                    <a:bodyPr/>
+                    <a:lstStyle/>
+                    <a:p>
+                      <a:pPr>
+                        <a:buNone/>
+                      </a:pPr>
+                      <a:r>
+                        <a:rPr lang="ja-JP" altLang="en-US" sz="1400">
+                          <a:latin typeface="BIZ UDゴシック" panose="020B0400000000000000" pitchFamily="49" charset="-128"/>
+                          <a:ea typeface="BIZ UDゴシック" panose="020B0400000000000000" pitchFamily="49" charset="-128"/>
+                        </a:rPr>
+                        <a:t>目的</a:t>
+                      </a:r>
+                    </a:p>
+                  </a:txBody>
+                  <a:tcPr anchor="ctr">
+                    <a:lnL w="12700" cap="flat" cmpd="sng" algn="ctr">
+                      <a:solidFill>
+                        <a:schemeClr val="tx1"/>
+                      </a:solidFill>
+                      <a:prstDash val="solid"/>
+                      <a:round/>
+                      <a:headEnd type="none" w="med" len="med"/>
+                      <a:tailEnd type="none" w="med" len="med"/>
+                    </a:lnL>
+                    <a:lnR w="12700" cap="flat" cmpd="sng" algn="ctr">
+                      <a:solidFill>
+                        <a:schemeClr val="tx1"/>
+                      </a:solidFill>
+                      <a:prstDash val="solid"/>
+                      <a:round/>
+                      <a:headEnd type="none" w="med" len="med"/>
+                      <a:tailEnd type="none" w="med" len="med"/>
+                    </a:lnR>
+                    <a:lnT w="12700" cap="flat" cmpd="sng" algn="ctr">
+                      <a:solidFill>
+                        <a:schemeClr val="tx1"/>
+                      </a:solidFill>
+                      <a:prstDash val="solid"/>
+                      <a:round/>
+                      <a:headEnd type="none" w="med" len="med"/>
+                      <a:tailEnd type="none" w="med" len="med"/>
+                    </a:lnT>
+                    <a:lnB w="12700" cap="flat" cmpd="sng" algn="ctr">
+                      <a:solidFill>
+                        <a:schemeClr val="tx1"/>
+                      </a:solidFill>
+                      <a:prstDash val="solid"/>
+                      <a:round/>
+                      <a:headEnd type="none" w="med" len="med"/>
+                      <a:tailEnd type="none" w="med" len="med"/>
+                    </a:lnB>
+                  </a:tcPr>
+                </a:tc>
+                <a:tc>
+                  <a:txBody>
+                    <a:bodyPr/>
+                    <a:lstStyle/>
+                    <a:p>
+                      <a:pPr>
+                        <a:buNone/>
+                      </a:pPr>
+                      <a:r>
+                        <a:rPr lang="ja-JP" altLang="en-US" sz="1400">
+                          <a:latin typeface="BIZ UDゴシック" panose="020B0400000000000000" pitchFamily="49" charset="-128"/>
+                          <a:ea typeface="BIZ UDゴシック" panose="020B0400000000000000" pitchFamily="49" charset="-128"/>
+                        </a:rPr>
+                        <a:t>言語</a:t>
+                      </a:r>
+                    </a:p>
+                  </a:txBody>
+                  <a:tcPr anchor="ctr">
+                    <a:lnL w="12700" cap="flat" cmpd="sng" algn="ctr">
+                      <a:solidFill>
+                        <a:schemeClr val="tx1"/>
+                      </a:solidFill>
+                      <a:prstDash val="solid"/>
+                      <a:round/>
+                      <a:headEnd type="none" w="med" len="med"/>
+                      <a:tailEnd type="none" w="med" len="med"/>
+                    </a:lnL>
+                    <a:lnR w="12700" cap="flat" cmpd="sng" algn="ctr">
+                      <a:solidFill>
+                        <a:schemeClr val="tx1"/>
+                      </a:solidFill>
+                      <a:prstDash val="solid"/>
+                      <a:round/>
+                      <a:headEnd type="none" w="med" len="med"/>
+                      <a:tailEnd type="none" w="med" len="med"/>
+                    </a:lnR>
+                    <a:lnT w="12700" cap="flat" cmpd="sng" algn="ctr">
+                      <a:solidFill>
+                        <a:schemeClr val="tx1"/>
+                      </a:solidFill>
+                      <a:prstDash val="solid"/>
+                      <a:round/>
+                      <a:headEnd type="none" w="med" len="med"/>
+                      <a:tailEnd type="none" w="med" len="med"/>
+                    </a:lnT>
+                    <a:lnB w="12700" cap="flat" cmpd="sng" algn="ctr">
+                      <a:solidFill>
+                        <a:schemeClr val="tx1"/>
+                      </a:solidFill>
+                      <a:prstDash val="solid"/>
+                      <a:round/>
+                      <a:headEnd type="none" w="med" len="med"/>
+                      <a:tailEnd type="none" w="med" len="med"/>
+                    </a:lnB>
+                  </a:tcPr>
+                </a:tc>
+                <a:tc>
+                  <a:txBody>
+                    <a:bodyPr/>
+                    <a:lstStyle/>
+                    <a:p>
+                      <a:pPr>
+                        <a:buNone/>
+                      </a:pPr>
+                      <a:r>
+                        <a:rPr lang="ja-JP" altLang="en-US" sz="1400">
+                          <a:latin typeface="BIZ UDゴシック" panose="020B0400000000000000" pitchFamily="49" charset="-128"/>
+                          <a:ea typeface="BIZ UDゴシック" panose="020B0400000000000000" pitchFamily="49" charset="-128"/>
+                        </a:rPr>
+                        <a:t>備考</a:t>
+                      </a:r>
+                    </a:p>
+                  </a:txBody>
+                  <a:tcPr anchor="ctr">
+                    <a:lnL w="12700" cap="flat" cmpd="sng" algn="ctr">
+                      <a:solidFill>
+                        <a:schemeClr val="tx1"/>
+                      </a:solidFill>
+                      <a:prstDash val="solid"/>
+                      <a:round/>
+                      <a:headEnd type="none" w="med" len="med"/>
+                      <a:tailEnd type="none" w="med" len="med"/>
+                    </a:lnL>
+                    <a:lnR w="12700" cap="flat" cmpd="sng" algn="ctr">
+                      <a:solidFill>
+                        <a:schemeClr val="tx1"/>
+                      </a:solidFill>
+                      <a:prstDash val="solid"/>
+                      <a:round/>
+                      <a:headEnd type="none" w="med" len="med"/>
+                      <a:tailEnd type="none" w="med" len="med"/>
+                    </a:lnR>
+                    <a:lnT w="12700" cap="flat" cmpd="sng" algn="ctr">
+                      <a:solidFill>
+                        <a:schemeClr val="tx1"/>
+                      </a:solidFill>
+                      <a:prstDash val="solid"/>
+                      <a:round/>
+                      <a:headEnd type="none" w="med" len="med"/>
+                      <a:tailEnd type="none" w="med" len="med"/>
+                    </a:lnT>
+                    <a:lnB w="12700" cap="flat" cmpd="sng" algn="ctr">
+                      <a:solidFill>
+                        <a:schemeClr val="tx1"/>
+                      </a:solidFill>
+                      <a:prstDash val="solid"/>
+                      <a:round/>
+                      <a:headEnd type="none" w="med" len="med"/>
+                      <a:tailEnd type="none" w="med" len="med"/>
+                    </a:lnB>
+                  </a:tcPr>
+                </a:tc>
+                <a:extLst>
+                  <a:ext uri="{0D108BD9-81ED-4DB2-BD59-A6C34878D82A}">
+                    <a16:rowId xmlns:a16="http://schemas.microsoft.com/office/drawing/2014/main" val="1513055026"/>
+                  </a:ext>
+                </a:extLst>
+              </a:tr>
+              <a:tr h="0">
+                <a:tc>
+                  <a:txBody>
+                    <a:bodyPr/>
+                    <a:lstStyle/>
+                    <a:p>
+                      <a:pPr>
+                        <a:buNone/>
+                      </a:pPr>
+                      <a:r>
+                        <a:rPr lang="en-US" altLang="ja-JP" sz="1400">
+                          <a:latin typeface="BIZ UDゴシック" panose="020B0400000000000000" pitchFamily="49" charset="-128"/>
+                          <a:ea typeface="BIZ UDゴシック" panose="020B0400000000000000" pitchFamily="49" charset="-128"/>
+                        </a:rPr>
+                        <a:t>simple-pid</a:t>
+                      </a:r>
+                      <a:endParaRPr lang="ja-JP" altLang="en-US" sz="1400">
+                        <a:latin typeface="BIZ UDゴシック" panose="020B0400000000000000" pitchFamily="49" charset="-128"/>
+                        <a:ea typeface="BIZ UDゴシック" panose="020B0400000000000000" pitchFamily="49" charset="-128"/>
+                      </a:endParaRPr>
+                    </a:p>
+                  </a:txBody>
+                  <a:tcPr anchor="ctr">
+                    <a:lnL w="12700" cap="flat" cmpd="sng" algn="ctr">
+                      <a:solidFill>
+                        <a:schemeClr val="tx1"/>
+                      </a:solidFill>
+                      <a:prstDash val="solid"/>
+                      <a:round/>
+                      <a:headEnd type="none" w="med" len="med"/>
+                      <a:tailEnd type="none" w="med" len="med"/>
+                    </a:lnL>
+                    <a:lnR w="12700" cap="flat" cmpd="sng" algn="ctr">
+                      <a:solidFill>
+                        <a:schemeClr val="tx1"/>
+                      </a:solidFill>
+                      <a:prstDash val="solid"/>
+                      <a:round/>
+                      <a:headEnd type="none" w="med" len="med"/>
+                      <a:tailEnd type="none" w="med" len="med"/>
+                    </a:lnR>
+                    <a:lnT w="12700" cap="flat" cmpd="sng" algn="ctr">
+                      <a:solidFill>
+                        <a:schemeClr val="tx1"/>
+                      </a:solidFill>
+                      <a:prstDash val="solid"/>
+                      <a:round/>
+                      <a:headEnd type="none" w="med" len="med"/>
+                      <a:tailEnd type="none" w="med" len="med"/>
+                    </a:lnT>
+                    <a:lnB w="12700" cap="flat" cmpd="sng" algn="ctr">
+                      <a:solidFill>
+                        <a:schemeClr val="tx1"/>
+                      </a:solidFill>
+                      <a:prstDash val="solid"/>
+                      <a:round/>
+                      <a:headEnd type="none" w="med" len="med"/>
+                      <a:tailEnd type="none" w="med" len="med"/>
+                    </a:lnB>
+                  </a:tcPr>
+                </a:tc>
+                <a:tc>
+                  <a:txBody>
+                    <a:bodyPr/>
+                    <a:lstStyle/>
+                    <a:p>
+                      <a:pPr>
+                        <a:buNone/>
+                      </a:pPr>
+                      <a:r>
+                        <a:rPr lang="ja-JP" altLang="en-US" sz="1400">
+                          <a:latin typeface="BIZ UDゴシック" panose="020B0400000000000000" pitchFamily="49" charset="-128"/>
+                          <a:ea typeface="BIZ UDゴシック" panose="020B0400000000000000" pitchFamily="49" charset="-128"/>
+                        </a:rPr>
+                        <a:t>温度管理</a:t>
+                      </a:r>
+                      <a:r>
+                        <a:rPr lang="en-US" altLang="ja-JP" sz="1400">
+                          <a:latin typeface="BIZ UDゴシック" panose="020B0400000000000000" pitchFamily="49" charset="-128"/>
+                          <a:ea typeface="BIZ UDゴシック" panose="020B0400000000000000" pitchFamily="49" charset="-128"/>
+                        </a:rPr>
+                        <a:t>PID</a:t>
+                      </a:r>
+                      <a:endParaRPr lang="en-US" sz="1400">
+                        <a:latin typeface="BIZ UDゴシック" panose="020B0400000000000000" pitchFamily="49" charset="-128"/>
+                        <a:ea typeface="BIZ UDゴシック" panose="020B0400000000000000" pitchFamily="49" charset="-128"/>
+                      </a:endParaRPr>
+                    </a:p>
+                  </a:txBody>
+                  <a:tcPr anchor="ctr">
+                    <a:lnL w="12700" cap="flat" cmpd="sng" algn="ctr">
+                      <a:solidFill>
+                        <a:schemeClr val="tx1"/>
+                      </a:solidFill>
+                      <a:prstDash val="solid"/>
+                      <a:round/>
+                      <a:headEnd type="none" w="med" len="med"/>
+                      <a:tailEnd type="none" w="med" len="med"/>
+                    </a:lnL>
+                    <a:lnR w="12700" cap="flat" cmpd="sng" algn="ctr">
+                      <a:solidFill>
+                        <a:schemeClr val="tx1"/>
+                      </a:solidFill>
+                      <a:prstDash val="solid"/>
+                      <a:round/>
+                      <a:headEnd type="none" w="med" len="med"/>
+                      <a:tailEnd type="none" w="med" len="med"/>
+                    </a:lnR>
+                    <a:lnT w="12700" cap="flat" cmpd="sng" algn="ctr">
+                      <a:solidFill>
+                        <a:schemeClr val="tx1"/>
+                      </a:solidFill>
+                      <a:prstDash val="solid"/>
+                      <a:round/>
+                      <a:headEnd type="none" w="med" len="med"/>
+                      <a:tailEnd type="none" w="med" len="med"/>
+                    </a:lnT>
+                    <a:lnB w="12700" cap="flat" cmpd="sng" algn="ctr">
+                      <a:solidFill>
+                        <a:schemeClr val="tx1"/>
+                      </a:solidFill>
+                      <a:prstDash val="solid"/>
+                      <a:round/>
+                      <a:headEnd type="none" w="med" len="med"/>
+                      <a:tailEnd type="none" w="med" len="med"/>
+                    </a:lnB>
+                  </a:tcPr>
+                </a:tc>
+                <a:tc>
+                  <a:txBody>
+                    <a:bodyPr/>
+                    <a:lstStyle/>
+                    <a:p>
+                      <a:pPr>
+                        <a:buNone/>
+                      </a:pPr>
+                      <a:r>
+                        <a:rPr lang="en-US" sz="1400">
+                          <a:latin typeface="BIZ UDゴシック" panose="020B0400000000000000" pitchFamily="49" charset="-128"/>
+                          <a:ea typeface="BIZ UDゴシック" panose="020B0400000000000000" pitchFamily="49" charset="-128"/>
+                        </a:rPr>
+                        <a:t>Python</a:t>
+                      </a:r>
+                    </a:p>
+                  </a:txBody>
+                  <a:tcPr anchor="ctr">
+                    <a:lnL w="12700" cap="flat" cmpd="sng" algn="ctr">
+                      <a:solidFill>
+                        <a:schemeClr val="tx1"/>
+                      </a:solidFill>
+                      <a:prstDash val="solid"/>
+                      <a:round/>
+                      <a:headEnd type="none" w="med" len="med"/>
+                      <a:tailEnd type="none" w="med" len="med"/>
+                    </a:lnL>
+                    <a:lnR w="12700" cap="flat" cmpd="sng" algn="ctr">
+                      <a:solidFill>
+                        <a:schemeClr val="tx1"/>
+                      </a:solidFill>
+                      <a:prstDash val="solid"/>
+                      <a:round/>
+                      <a:headEnd type="none" w="med" len="med"/>
+                      <a:tailEnd type="none" w="med" len="med"/>
+                    </a:lnR>
+                    <a:lnT w="12700" cap="flat" cmpd="sng" algn="ctr">
+                      <a:solidFill>
+                        <a:schemeClr val="tx1"/>
+                      </a:solidFill>
+                      <a:prstDash val="solid"/>
+                      <a:round/>
+                      <a:headEnd type="none" w="med" len="med"/>
+                      <a:tailEnd type="none" w="med" len="med"/>
+                    </a:lnT>
+                    <a:lnB w="12700" cap="flat" cmpd="sng" algn="ctr">
+                      <a:solidFill>
+                        <a:schemeClr val="tx1"/>
+                      </a:solidFill>
+                      <a:prstDash val="solid"/>
+                      <a:round/>
+                      <a:headEnd type="none" w="med" len="med"/>
+                      <a:tailEnd type="none" w="med" len="med"/>
+                    </a:lnB>
+                  </a:tcPr>
+                </a:tc>
+                <a:tc>
+                  <a:txBody>
+                    <a:bodyPr/>
+                    <a:lstStyle/>
+                    <a:p>
+                      <a:pPr>
+                        <a:buNone/>
+                      </a:pPr>
+                      <a:r>
+                        <a:rPr lang="en-US" altLang="ja-JP" sz="1400">
+                          <a:latin typeface="BIZ UDゴシック" panose="020B0400000000000000" pitchFamily="49" charset="-128"/>
+                          <a:ea typeface="BIZ UDゴシック" panose="020B0400000000000000" pitchFamily="49" charset="-128"/>
+                        </a:rPr>
+                        <a:t>DFD</a:t>
+                      </a:r>
+                      <a:r>
+                        <a:rPr lang="ja-JP" altLang="en-US" sz="1400">
+                          <a:latin typeface="BIZ UDゴシック" panose="020B0400000000000000" pitchFamily="49" charset="-128"/>
+                          <a:ea typeface="BIZ UDゴシック" panose="020B0400000000000000" pitchFamily="49" charset="-128"/>
+                        </a:rPr>
+                        <a:t>（データフローダイアグラム）</a:t>
+                      </a:r>
+                    </a:p>
+                  </a:txBody>
+                  <a:tcPr anchor="ctr">
+                    <a:lnL w="12700" cap="flat" cmpd="sng" algn="ctr">
+                      <a:solidFill>
+                        <a:schemeClr val="tx1"/>
+                      </a:solidFill>
+                      <a:prstDash val="solid"/>
+                      <a:round/>
+                      <a:headEnd type="none" w="med" len="med"/>
+                      <a:tailEnd type="none" w="med" len="med"/>
+                    </a:lnL>
+                    <a:lnR w="12700" cap="flat" cmpd="sng" algn="ctr">
+                      <a:solidFill>
+                        <a:schemeClr val="tx1"/>
+                      </a:solidFill>
+                      <a:prstDash val="solid"/>
+                      <a:round/>
+                      <a:headEnd type="none" w="med" len="med"/>
+                      <a:tailEnd type="none" w="med" len="med"/>
+                    </a:lnR>
+                    <a:lnT w="12700" cap="flat" cmpd="sng" algn="ctr">
+                      <a:solidFill>
+                        <a:schemeClr val="tx1"/>
+                      </a:solidFill>
+                      <a:prstDash val="solid"/>
+                      <a:round/>
+                      <a:headEnd type="none" w="med" len="med"/>
+                      <a:tailEnd type="none" w="med" len="med"/>
+                    </a:lnT>
+                    <a:lnB w="12700" cap="flat" cmpd="sng" algn="ctr">
+                      <a:solidFill>
+                        <a:schemeClr val="tx1"/>
+                      </a:solidFill>
+                      <a:prstDash val="solid"/>
+                      <a:round/>
+                      <a:headEnd type="none" w="med" len="med"/>
+                      <a:tailEnd type="none" w="med" len="med"/>
+                    </a:lnB>
+                  </a:tcPr>
+                </a:tc>
+                <a:extLst>
+                  <a:ext uri="{0D108BD9-81ED-4DB2-BD59-A6C34878D82A}">
+                    <a16:rowId xmlns:a16="http://schemas.microsoft.com/office/drawing/2014/main" val="433765498"/>
+                  </a:ext>
+                </a:extLst>
+              </a:tr>
+              <a:tr h="0">
+                <a:tc>
+                  <a:txBody>
+                    <a:bodyPr/>
+                    <a:lstStyle/>
+                    <a:p>
+                      <a:pPr>
+                        <a:buNone/>
+                      </a:pPr>
+                      <a:r>
+                        <a:rPr lang="en-US" altLang="ja-JP" sz="1400">
+                          <a:latin typeface="BIZ UDゴシック" panose="020B0400000000000000" pitchFamily="49" charset="-128"/>
+                          <a:ea typeface="BIZ UDゴシック" panose="020B0400000000000000" pitchFamily="49" charset="-128"/>
+                        </a:rPr>
+                        <a:t>transitions</a:t>
+                      </a:r>
+                      <a:endParaRPr lang="ja-JP" altLang="en-US" sz="1400">
+                        <a:latin typeface="BIZ UDゴシック" panose="020B0400000000000000" pitchFamily="49" charset="-128"/>
+                        <a:ea typeface="BIZ UDゴシック" panose="020B0400000000000000" pitchFamily="49" charset="-128"/>
+                      </a:endParaRPr>
+                    </a:p>
+                  </a:txBody>
+                  <a:tcPr anchor="ctr">
+                    <a:lnL w="12700" cap="flat" cmpd="sng" algn="ctr">
+                      <a:solidFill>
+                        <a:schemeClr val="tx1"/>
+                      </a:solidFill>
+                      <a:prstDash val="solid"/>
+                      <a:round/>
+                      <a:headEnd type="none" w="med" len="med"/>
+                      <a:tailEnd type="none" w="med" len="med"/>
+                    </a:lnL>
+                    <a:lnR w="12700" cap="flat" cmpd="sng" algn="ctr">
+                      <a:solidFill>
+                        <a:schemeClr val="tx1"/>
+                      </a:solidFill>
+                      <a:prstDash val="solid"/>
+                      <a:round/>
+                      <a:headEnd type="none" w="med" len="med"/>
+                      <a:tailEnd type="none" w="med" len="med"/>
+                    </a:lnR>
+                    <a:lnT w="12700" cap="flat" cmpd="sng" algn="ctr">
+                      <a:solidFill>
+                        <a:schemeClr val="tx1"/>
+                      </a:solidFill>
+                      <a:prstDash val="solid"/>
+                      <a:round/>
+                      <a:headEnd type="none" w="med" len="med"/>
+                      <a:tailEnd type="none" w="med" len="med"/>
+                    </a:lnT>
+                    <a:lnB w="12700" cap="flat" cmpd="sng" algn="ctr">
+                      <a:solidFill>
+                        <a:schemeClr val="tx1"/>
+                      </a:solidFill>
+                      <a:prstDash val="solid"/>
+                      <a:round/>
+                      <a:headEnd type="none" w="med" len="med"/>
+                      <a:tailEnd type="none" w="med" len="med"/>
+                    </a:lnB>
+                  </a:tcPr>
+                </a:tc>
+                <a:tc>
+                  <a:txBody>
+                    <a:bodyPr/>
+                    <a:lstStyle/>
+                    <a:p>
+                      <a:pPr>
+                        <a:buNone/>
+                      </a:pPr>
+                      <a:r>
+                        <a:rPr lang="ja-JP" altLang="en-US" sz="1400">
+                          <a:latin typeface="BIZ UDゴシック" panose="020B0400000000000000" pitchFamily="49" charset="-128"/>
+                          <a:ea typeface="BIZ UDゴシック" panose="020B0400000000000000" pitchFamily="49" charset="-128"/>
+                        </a:rPr>
+                        <a:t>状態遷移</a:t>
+                      </a:r>
+                    </a:p>
+                  </a:txBody>
+                  <a:tcPr anchor="ctr">
+                    <a:lnL w="12700" cap="flat" cmpd="sng" algn="ctr">
+                      <a:solidFill>
+                        <a:schemeClr val="tx1"/>
+                      </a:solidFill>
+                      <a:prstDash val="solid"/>
+                      <a:round/>
+                      <a:headEnd type="none" w="med" len="med"/>
+                      <a:tailEnd type="none" w="med" len="med"/>
+                    </a:lnL>
+                    <a:lnR w="12700" cap="flat" cmpd="sng" algn="ctr">
+                      <a:solidFill>
+                        <a:schemeClr val="tx1"/>
+                      </a:solidFill>
+                      <a:prstDash val="solid"/>
+                      <a:round/>
+                      <a:headEnd type="none" w="med" len="med"/>
+                      <a:tailEnd type="none" w="med" len="med"/>
+                    </a:lnR>
+                    <a:lnT w="12700" cap="flat" cmpd="sng" algn="ctr">
+                      <a:solidFill>
+                        <a:schemeClr val="tx1"/>
+                      </a:solidFill>
+                      <a:prstDash val="solid"/>
+                      <a:round/>
+                      <a:headEnd type="none" w="med" len="med"/>
+                      <a:tailEnd type="none" w="med" len="med"/>
+                    </a:lnT>
+                    <a:lnB w="12700" cap="flat" cmpd="sng" algn="ctr">
+                      <a:solidFill>
+                        <a:schemeClr val="tx1"/>
+                      </a:solidFill>
+                      <a:prstDash val="solid"/>
+                      <a:round/>
+                      <a:headEnd type="none" w="med" len="med"/>
+                      <a:tailEnd type="none" w="med" len="med"/>
+                    </a:lnB>
+                  </a:tcPr>
+                </a:tc>
+                <a:tc>
+                  <a:txBody>
+                    <a:bodyPr/>
+                    <a:lstStyle/>
+                    <a:p>
+                      <a:pPr>
+                        <a:buNone/>
+                      </a:pPr>
+                      <a:r>
+                        <a:rPr lang="en-US" altLang="ja-JP" sz="1400">
+                          <a:latin typeface="BIZ UDゴシック" panose="020B0400000000000000" pitchFamily="49" charset="-128"/>
+                          <a:ea typeface="BIZ UDゴシック" panose="020B0400000000000000" pitchFamily="49" charset="-128"/>
+                        </a:rPr>
+                        <a:t>Python</a:t>
+                      </a:r>
+                      <a:endParaRPr lang="ja-JP" altLang="en-US" sz="1400">
+                        <a:latin typeface="BIZ UDゴシック" panose="020B0400000000000000" pitchFamily="49" charset="-128"/>
+                        <a:ea typeface="BIZ UDゴシック" panose="020B0400000000000000" pitchFamily="49" charset="-128"/>
+                      </a:endParaRPr>
+                    </a:p>
+                  </a:txBody>
+                  <a:tcPr anchor="ctr">
+                    <a:lnL w="12700" cap="flat" cmpd="sng" algn="ctr">
+                      <a:solidFill>
+                        <a:schemeClr val="tx1"/>
+                      </a:solidFill>
+                      <a:prstDash val="solid"/>
+                      <a:round/>
+                      <a:headEnd type="none" w="med" len="med"/>
+                      <a:tailEnd type="none" w="med" len="med"/>
+                    </a:lnL>
+                    <a:lnR w="12700" cap="flat" cmpd="sng" algn="ctr">
+                      <a:solidFill>
+                        <a:schemeClr val="tx1"/>
+                      </a:solidFill>
+                      <a:prstDash val="solid"/>
+                      <a:round/>
+                      <a:headEnd type="none" w="med" len="med"/>
+                      <a:tailEnd type="none" w="med" len="med"/>
+                    </a:lnR>
+                    <a:lnT w="12700" cap="flat" cmpd="sng" algn="ctr">
+                      <a:solidFill>
+                        <a:schemeClr val="tx1"/>
+                      </a:solidFill>
+                      <a:prstDash val="solid"/>
+                      <a:round/>
+                      <a:headEnd type="none" w="med" len="med"/>
+                      <a:tailEnd type="none" w="med" len="med"/>
+                    </a:lnT>
+                    <a:lnB w="12700" cap="flat" cmpd="sng" algn="ctr">
+                      <a:solidFill>
+                        <a:schemeClr val="tx1"/>
+                      </a:solidFill>
+                      <a:prstDash val="solid"/>
+                      <a:round/>
+                      <a:headEnd type="none" w="med" len="med"/>
+                      <a:tailEnd type="none" w="med" len="med"/>
+                    </a:lnB>
+                  </a:tcPr>
+                </a:tc>
+                <a:tc>
+                  <a:txBody>
+                    <a:bodyPr/>
+                    <a:lstStyle/>
+                    <a:p>
+                      <a:pPr>
+                        <a:buNone/>
+                      </a:pPr>
+                      <a:r>
+                        <a:rPr lang="en-US" altLang="ja-JP" sz="1400">
+                          <a:latin typeface="BIZ UDゴシック" panose="020B0400000000000000" pitchFamily="49" charset="-128"/>
+                          <a:ea typeface="BIZ UDゴシック" panose="020B0400000000000000" pitchFamily="49" charset="-128"/>
+                        </a:rPr>
+                        <a:t>UML</a:t>
+                      </a:r>
+                      <a:r>
+                        <a:rPr lang="ja-JP" altLang="en-US" sz="1400">
+                          <a:latin typeface="BIZ UDゴシック" panose="020B0400000000000000" pitchFamily="49" charset="-128"/>
+                          <a:ea typeface="BIZ UDゴシック" panose="020B0400000000000000" pitchFamily="49" charset="-128"/>
+                        </a:rPr>
+                        <a:t>状態遷移図（</a:t>
+                      </a:r>
+                      <a:r>
+                        <a:rPr lang="en-US" altLang="ja-JP" sz="1400">
+                          <a:latin typeface="BIZ UDゴシック" panose="020B0400000000000000" pitchFamily="49" charset="-128"/>
+                          <a:ea typeface="BIZ UDゴシック" panose="020B0400000000000000" pitchFamily="49" charset="-128"/>
+                        </a:rPr>
+                        <a:t>State Machine Diagram</a:t>
+                      </a:r>
+                      <a:r>
+                        <a:rPr lang="ja-JP" altLang="en-US" sz="1400">
+                          <a:latin typeface="BIZ UDゴシック" panose="020B0400000000000000" pitchFamily="49" charset="-128"/>
+                          <a:ea typeface="BIZ UDゴシック" panose="020B0400000000000000" pitchFamily="49" charset="-128"/>
+                        </a:rPr>
+                        <a:t>）</a:t>
+                      </a:r>
+                    </a:p>
+                  </a:txBody>
+                  <a:tcPr anchor="ctr">
+                    <a:lnL w="12700" cap="flat" cmpd="sng" algn="ctr">
+                      <a:solidFill>
+                        <a:schemeClr val="tx1"/>
+                      </a:solidFill>
+                      <a:prstDash val="solid"/>
+                      <a:round/>
+                      <a:headEnd type="none" w="med" len="med"/>
+                      <a:tailEnd type="none" w="med" len="med"/>
+                    </a:lnL>
+                    <a:lnR w="12700" cap="flat" cmpd="sng" algn="ctr">
+                      <a:solidFill>
+                        <a:schemeClr val="tx1"/>
+                      </a:solidFill>
+                      <a:prstDash val="solid"/>
+                      <a:round/>
+                      <a:headEnd type="none" w="med" len="med"/>
+                      <a:tailEnd type="none" w="med" len="med"/>
+                    </a:lnR>
+                    <a:lnT w="12700" cap="flat" cmpd="sng" algn="ctr">
+                      <a:solidFill>
+                        <a:schemeClr val="tx1"/>
+                      </a:solidFill>
+                      <a:prstDash val="solid"/>
+                      <a:round/>
+                      <a:headEnd type="none" w="med" len="med"/>
+                      <a:tailEnd type="none" w="med" len="med"/>
+                    </a:lnT>
+                    <a:lnB w="12700" cap="flat" cmpd="sng" algn="ctr">
+                      <a:solidFill>
+                        <a:schemeClr val="tx1"/>
+                      </a:solidFill>
+                      <a:prstDash val="solid"/>
+                      <a:round/>
+                      <a:headEnd type="none" w="med" len="med"/>
+                      <a:tailEnd type="none" w="med" len="med"/>
+                    </a:lnB>
+                  </a:tcPr>
+                </a:tc>
+                <a:extLst>
+                  <a:ext uri="{0D108BD9-81ED-4DB2-BD59-A6C34878D82A}">
+                    <a16:rowId xmlns:a16="http://schemas.microsoft.com/office/drawing/2014/main" val="572808834"/>
+                  </a:ext>
+                </a:extLst>
+              </a:tr>
+              <a:tr h="0">
+                <a:tc>
+                  <a:txBody>
+                    <a:bodyPr/>
+                    <a:lstStyle/>
+                    <a:p>
+                      <a:pPr>
+                        <a:buNone/>
+                      </a:pPr>
+                      <a:r>
+                        <a:rPr lang="ja-JP" altLang="en-US" sz="1400">
+                          <a:latin typeface="BIZ UDゴシック" panose="020B0400000000000000" pitchFamily="49" charset="-128"/>
+                          <a:ea typeface="BIZ UDゴシック" panose="020B0400000000000000" pitchFamily="49" charset="-128"/>
+                        </a:rPr>
+                        <a:t>随時更新</a:t>
+                      </a:r>
+                    </a:p>
+                  </a:txBody>
+                  <a:tcPr anchor="ctr">
+                    <a:lnL w="12700" cap="flat" cmpd="sng" algn="ctr">
+                      <a:solidFill>
+                        <a:schemeClr val="tx1"/>
+                      </a:solidFill>
+                      <a:prstDash val="solid"/>
+                      <a:round/>
+                      <a:headEnd type="none" w="med" len="med"/>
+                      <a:tailEnd type="none" w="med" len="med"/>
+                    </a:lnL>
+                    <a:lnR w="12700" cap="flat" cmpd="sng" algn="ctr">
+                      <a:solidFill>
+                        <a:schemeClr val="tx1"/>
+                      </a:solidFill>
+                      <a:prstDash val="solid"/>
+                      <a:round/>
+                      <a:headEnd type="none" w="med" len="med"/>
+                      <a:tailEnd type="none" w="med" len="med"/>
+                    </a:lnR>
+                    <a:lnT w="12700" cap="flat" cmpd="sng" algn="ctr">
+                      <a:solidFill>
+                        <a:schemeClr val="tx1"/>
+                      </a:solidFill>
+                      <a:prstDash val="solid"/>
+                      <a:round/>
+                      <a:headEnd type="none" w="med" len="med"/>
+                      <a:tailEnd type="none" w="med" len="med"/>
+                    </a:lnT>
+                    <a:lnB w="12700" cap="flat" cmpd="sng" algn="ctr">
+                      <a:solidFill>
+                        <a:schemeClr val="tx1"/>
+                      </a:solidFill>
+                      <a:prstDash val="solid"/>
+                      <a:round/>
+                      <a:headEnd type="none" w="med" len="med"/>
+                      <a:tailEnd type="none" w="med" len="med"/>
+                    </a:lnB>
+                  </a:tcPr>
+                </a:tc>
+                <a:tc>
+                  <a:txBody>
+                    <a:bodyPr/>
+                    <a:lstStyle/>
+                    <a:p>
+                      <a:pPr>
+                        <a:buNone/>
+                      </a:pPr>
+                      <a:endParaRPr lang="ja-JP" altLang="en-US" sz="1400">
+                        <a:latin typeface="BIZ UDゴシック" panose="020B0400000000000000" pitchFamily="49" charset="-128"/>
+                        <a:ea typeface="BIZ UDゴシック" panose="020B0400000000000000" pitchFamily="49" charset="-128"/>
+                      </a:endParaRPr>
+                    </a:p>
+                  </a:txBody>
+                  <a:tcPr anchor="ctr">
+                    <a:lnL w="12700" cap="flat" cmpd="sng" algn="ctr">
+                      <a:solidFill>
+                        <a:schemeClr val="tx1"/>
+                      </a:solidFill>
+                      <a:prstDash val="solid"/>
+                      <a:round/>
+                      <a:headEnd type="none" w="med" len="med"/>
+                      <a:tailEnd type="none" w="med" len="med"/>
+                    </a:lnL>
+                    <a:lnR w="12700" cap="flat" cmpd="sng" algn="ctr">
+                      <a:solidFill>
+                        <a:schemeClr val="tx1"/>
+                      </a:solidFill>
+                      <a:prstDash val="solid"/>
+                      <a:round/>
+                      <a:headEnd type="none" w="med" len="med"/>
+                      <a:tailEnd type="none" w="med" len="med"/>
+                    </a:lnR>
+                    <a:lnT w="12700" cap="flat" cmpd="sng" algn="ctr">
+                      <a:solidFill>
+                        <a:schemeClr val="tx1"/>
+                      </a:solidFill>
+                      <a:prstDash val="solid"/>
+                      <a:round/>
+                      <a:headEnd type="none" w="med" len="med"/>
+                      <a:tailEnd type="none" w="med" len="med"/>
+                    </a:lnT>
+                    <a:lnB w="12700" cap="flat" cmpd="sng" algn="ctr">
+                      <a:solidFill>
+                        <a:schemeClr val="tx1"/>
+                      </a:solidFill>
+                      <a:prstDash val="solid"/>
+                      <a:round/>
+                      <a:headEnd type="none" w="med" len="med"/>
+                      <a:tailEnd type="none" w="med" len="med"/>
+                    </a:lnB>
+                  </a:tcPr>
+                </a:tc>
+                <a:tc>
+                  <a:txBody>
+                    <a:bodyPr/>
+                    <a:lstStyle/>
+                    <a:p>
+                      <a:pPr>
+                        <a:buNone/>
+                      </a:pPr>
+                      <a:endParaRPr lang="ja-JP" altLang="en-US" sz="1400">
+                        <a:latin typeface="BIZ UDゴシック" panose="020B0400000000000000" pitchFamily="49" charset="-128"/>
+                        <a:ea typeface="BIZ UDゴシック" panose="020B0400000000000000" pitchFamily="49" charset="-128"/>
+                      </a:endParaRPr>
+                    </a:p>
+                  </a:txBody>
+                  <a:tcPr anchor="ctr">
+                    <a:lnL w="12700" cap="flat" cmpd="sng" algn="ctr">
+                      <a:solidFill>
+                        <a:schemeClr val="tx1"/>
+                      </a:solidFill>
+                      <a:prstDash val="solid"/>
+                      <a:round/>
+                      <a:headEnd type="none" w="med" len="med"/>
+                      <a:tailEnd type="none" w="med" len="med"/>
+                    </a:lnL>
+                    <a:lnR w="12700" cap="flat" cmpd="sng" algn="ctr">
+                      <a:solidFill>
+                        <a:schemeClr val="tx1"/>
+                      </a:solidFill>
+                      <a:prstDash val="solid"/>
+                      <a:round/>
+                      <a:headEnd type="none" w="med" len="med"/>
+                      <a:tailEnd type="none" w="med" len="med"/>
+                    </a:lnR>
+                    <a:lnT w="12700" cap="flat" cmpd="sng" algn="ctr">
+                      <a:solidFill>
+                        <a:schemeClr val="tx1"/>
+                      </a:solidFill>
+                      <a:prstDash val="solid"/>
+                      <a:round/>
+                      <a:headEnd type="none" w="med" len="med"/>
+                      <a:tailEnd type="none" w="med" len="med"/>
+                    </a:lnT>
+                    <a:lnB w="12700" cap="flat" cmpd="sng" algn="ctr">
+                      <a:solidFill>
+                        <a:schemeClr val="tx1"/>
+                      </a:solidFill>
+                      <a:prstDash val="solid"/>
+                      <a:round/>
+                      <a:headEnd type="none" w="med" len="med"/>
+                      <a:tailEnd type="none" w="med" len="med"/>
+                    </a:lnB>
+                  </a:tcPr>
+                </a:tc>
+                <a:tc>
+                  <a:txBody>
+                    <a:bodyPr/>
+                    <a:lstStyle/>
+                    <a:p>
+                      <a:pPr>
+                        <a:buNone/>
+                      </a:pPr>
+                      <a:endParaRPr lang="ja-JP" altLang="en-US" sz="1400">
+                        <a:latin typeface="BIZ UDゴシック" panose="020B0400000000000000" pitchFamily="49" charset="-128"/>
+                        <a:ea typeface="BIZ UDゴシック" panose="020B0400000000000000" pitchFamily="49" charset="-128"/>
+                      </a:endParaRPr>
+                    </a:p>
+                  </a:txBody>
+                  <a:tcPr anchor="ctr">
+                    <a:lnL w="12700" cap="flat" cmpd="sng" algn="ctr">
+                      <a:solidFill>
+                        <a:schemeClr val="tx1"/>
+                      </a:solidFill>
+                      <a:prstDash val="solid"/>
+                      <a:round/>
+                      <a:headEnd type="none" w="med" len="med"/>
+                      <a:tailEnd type="none" w="med" len="med"/>
+                    </a:lnL>
+                    <a:lnR w="12700" cap="flat" cmpd="sng" algn="ctr">
+                      <a:solidFill>
+                        <a:schemeClr val="tx1"/>
+                      </a:solidFill>
+                      <a:prstDash val="solid"/>
+                      <a:round/>
+                      <a:headEnd type="none" w="med" len="med"/>
+                      <a:tailEnd type="none" w="med" len="med"/>
+                    </a:lnR>
+                    <a:lnT w="12700" cap="flat" cmpd="sng" algn="ctr">
+                      <a:solidFill>
+                        <a:schemeClr val="tx1"/>
+                      </a:solidFill>
+                      <a:prstDash val="solid"/>
+                      <a:round/>
+                      <a:headEnd type="none" w="med" len="med"/>
+                      <a:tailEnd type="none" w="med" len="med"/>
+                    </a:lnT>
+                    <a:lnB w="12700" cap="flat" cmpd="sng" algn="ctr">
+                      <a:solidFill>
+                        <a:schemeClr val="tx1"/>
+                      </a:solidFill>
+                      <a:prstDash val="solid"/>
+                      <a:round/>
+                      <a:headEnd type="none" w="med" len="med"/>
+                      <a:tailEnd type="none" w="med" len="med"/>
+                    </a:lnB>
+                  </a:tcPr>
+                </a:tc>
+                <a:extLst>
+                  <a:ext uri="{0D108BD9-81ED-4DB2-BD59-A6C34878D82A}">
+                    <a16:rowId xmlns:a16="http://schemas.microsoft.com/office/drawing/2014/main" val="1080130541"/>
+                  </a:ext>
+                </a:extLst>
+              </a:tr>
+              <a:tr h="0">
+                <a:tc>
+                  <a:txBody>
+                    <a:bodyPr/>
+                    <a:lstStyle/>
+                    <a:p>
+                      <a:pPr>
+                        <a:buNone/>
+                      </a:pPr>
+                      <a:endParaRPr lang="ja-JP" altLang="en-US" sz="1400">
+                        <a:latin typeface="BIZ UDゴシック" panose="020B0400000000000000" pitchFamily="49" charset="-128"/>
+                        <a:ea typeface="BIZ UDゴシック" panose="020B0400000000000000" pitchFamily="49" charset="-128"/>
+                      </a:endParaRPr>
+                    </a:p>
+                  </a:txBody>
+                  <a:tcPr anchor="ctr">
+                    <a:lnL w="12700" cap="flat" cmpd="sng" algn="ctr">
+                      <a:solidFill>
+                        <a:schemeClr val="tx1"/>
+                      </a:solidFill>
+                      <a:prstDash val="solid"/>
+                      <a:round/>
+                      <a:headEnd type="none" w="med" len="med"/>
+                      <a:tailEnd type="none" w="med" len="med"/>
+                    </a:lnL>
+                    <a:lnR w="12700" cap="flat" cmpd="sng" algn="ctr">
+                      <a:solidFill>
+                        <a:schemeClr val="tx1"/>
+                      </a:solidFill>
+                      <a:prstDash val="solid"/>
+                      <a:round/>
+                      <a:headEnd type="none" w="med" len="med"/>
+                      <a:tailEnd type="none" w="med" len="med"/>
+                    </a:lnR>
+                    <a:lnT w="12700" cap="flat" cmpd="sng" algn="ctr">
+                      <a:solidFill>
+                        <a:schemeClr val="tx1"/>
+                      </a:solidFill>
+                      <a:prstDash val="solid"/>
+                      <a:round/>
+                      <a:headEnd type="none" w="med" len="med"/>
+                      <a:tailEnd type="none" w="med" len="med"/>
+                    </a:lnT>
+                    <a:lnB w="12700" cap="flat" cmpd="sng" algn="ctr">
+                      <a:solidFill>
+                        <a:schemeClr val="tx1"/>
+                      </a:solidFill>
+                      <a:prstDash val="solid"/>
+                      <a:round/>
+                      <a:headEnd type="none" w="med" len="med"/>
+                      <a:tailEnd type="none" w="med" len="med"/>
+                    </a:lnB>
+                  </a:tcPr>
+                </a:tc>
+                <a:tc>
+                  <a:txBody>
+                    <a:bodyPr/>
+                    <a:lstStyle/>
+                    <a:p>
+                      <a:pPr>
+                        <a:buNone/>
+                      </a:pPr>
+                      <a:endParaRPr lang="ja-JP" altLang="en-US" sz="1400">
+                        <a:latin typeface="BIZ UDゴシック" panose="020B0400000000000000" pitchFamily="49" charset="-128"/>
+                        <a:ea typeface="BIZ UDゴシック" panose="020B0400000000000000" pitchFamily="49" charset="-128"/>
+                      </a:endParaRPr>
+                    </a:p>
+                  </a:txBody>
+                  <a:tcPr anchor="ctr">
+                    <a:lnL w="12700" cap="flat" cmpd="sng" algn="ctr">
+                      <a:solidFill>
+                        <a:schemeClr val="tx1"/>
+                      </a:solidFill>
+                      <a:prstDash val="solid"/>
+                      <a:round/>
+                      <a:headEnd type="none" w="med" len="med"/>
+                      <a:tailEnd type="none" w="med" len="med"/>
+                    </a:lnL>
+                    <a:lnR w="12700" cap="flat" cmpd="sng" algn="ctr">
+                      <a:solidFill>
+                        <a:schemeClr val="tx1"/>
+                      </a:solidFill>
+                      <a:prstDash val="solid"/>
+                      <a:round/>
+                      <a:headEnd type="none" w="med" len="med"/>
+                      <a:tailEnd type="none" w="med" len="med"/>
+                    </a:lnR>
+                    <a:lnT w="12700" cap="flat" cmpd="sng" algn="ctr">
+                      <a:solidFill>
+                        <a:schemeClr val="tx1"/>
+                      </a:solidFill>
+                      <a:prstDash val="solid"/>
+                      <a:round/>
+                      <a:headEnd type="none" w="med" len="med"/>
+                      <a:tailEnd type="none" w="med" len="med"/>
+                    </a:lnT>
+                    <a:lnB w="12700" cap="flat" cmpd="sng" algn="ctr">
+                      <a:solidFill>
+                        <a:schemeClr val="tx1"/>
+                      </a:solidFill>
+                      <a:prstDash val="solid"/>
+                      <a:round/>
+                      <a:headEnd type="none" w="med" len="med"/>
+                      <a:tailEnd type="none" w="med" len="med"/>
+                    </a:lnB>
+                  </a:tcPr>
+                </a:tc>
+                <a:tc>
+                  <a:txBody>
+                    <a:bodyPr/>
+                    <a:lstStyle/>
+                    <a:p>
+                      <a:pPr>
+                        <a:buNone/>
+                      </a:pPr>
+                      <a:endParaRPr lang="ja-JP" altLang="en-US" sz="1400">
+                        <a:latin typeface="BIZ UDゴシック" panose="020B0400000000000000" pitchFamily="49" charset="-128"/>
+                        <a:ea typeface="BIZ UDゴシック" panose="020B0400000000000000" pitchFamily="49" charset="-128"/>
+                      </a:endParaRPr>
+                    </a:p>
+                  </a:txBody>
+                  <a:tcPr anchor="ctr">
+                    <a:lnL w="12700" cap="flat" cmpd="sng" algn="ctr">
+                      <a:solidFill>
+                        <a:schemeClr val="tx1"/>
+                      </a:solidFill>
+                      <a:prstDash val="solid"/>
+                      <a:round/>
+                      <a:headEnd type="none" w="med" len="med"/>
+                      <a:tailEnd type="none" w="med" len="med"/>
+                    </a:lnL>
+                    <a:lnR w="12700" cap="flat" cmpd="sng" algn="ctr">
+                      <a:solidFill>
+                        <a:schemeClr val="tx1"/>
+                      </a:solidFill>
+                      <a:prstDash val="solid"/>
+                      <a:round/>
+                      <a:headEnd type="none" w="med" len="med"/>
+                      <a:tailEnd type="none" w="med" len="med"/>
+                    </a:lnR>
+                    <a:lnT w="12700" cap="flat" cmpd="sng" algn="ctr">
+                      <a:solidFill>
+                        <a:schemeClr val="tx1"/>
+                      </a:solidFill>
+                      <a:prstDash val="solid"/>
+                      <a:round/>
+                      <a:headEnd type="none" w="med" len="med"/>
+                      <a:tailEnd type="none" w="med" len="med"/>
+                    </a:lnT>
+                    <a:lnB w="12700" cap="flat" cmpd="sng" algn="ctr">
+                      <a:solidFill>
+                        <a:schemeClr val="tx1"/>
+                      </a:solidFill>
+                      <a:prstDash val="solid"/>
+                      <a:round/>
+                      <a:headEnd type="none" w="med" len="med"/>
+                      <a:tailEnd type="none" w="med" len="med"/>
+                    </a:lnB>
+                  </a:tcPr>
+                </a:tc>
+                <a:tc>
+                  <a:txBody>
+                    <a:bodyPr/>
+                    <a:lstStyle/>
+                    <a:p>
+                      <a:pPr>
+                        <a:buNone/>
+                      </a:pPr>
+                      <a:endParaRPr lang="ja-JP" altLang="en-US" sz="1400">
+                        <a:latin typeface="BIZ UDゴシック" panose="020B0400000000000000" pitchFamily="49" charset="-128"/>
+                        <a:ea typeface="BIZ UDゴシック" panose="020B0400000000000000" pitchFamily="49" charset="-128"/>
+                      </a:endParaRPr>
+                    </a:p>
+                  </a:txBody>
+                  <a:tcPr anchor="ctr">
+                    <a:lnL w="12700" cap="flat" cmpd="sng" algn="ctr">
+                      <a:solidFill>
+                        <a:schemeClr val="tx1"/>
+                      </a:solidFill>
+                      <a:prstDash val="solid"/>
+                      <a:round/>
+                      <a:headEnd type="none" w="med" len="med"/>
+                      <a:tailEnd type="none" w="med" len="med"/>
+                    </a:lnL>
+                    <a:lnR w="12700" cap="flat" cmpd="sng" algn="ctr">
+                      <a:solidFill>
+                        <a:schemeClr val="tx1"/>
+                      </a:solidFill>
+                      <a:prstDash val="solid"/>
+                      <a:round/>
+                      <a:headEnd type="none" w="med" len="med"/>
+                      <a:tailEnd type="none" w="med" len="med"/>
+                    </a:lnR>
+                    <a:lnT w="12700" cap="flat" cmpd="sng" algn="ctr">
+                      <a:solidFill>
+                        <a:schemeClr val="tx1"/>
+                      </a:solidFill>
+                      <a:prstDash val="solid"/>
+                      <a:round/>
+                      <a:headEnd type="none" w="med" len="med"/>
+                      <a:tailEnd type="none" w="med" len="med"/>
+                    </a:lnT>
+                    <a:lnB w="12700" cap="flat" cmpd="sng" algn="ctr">
+                      <a:solidFill>
+                        <a:schemeClr val="tx1"/>
+                      </a:solidFill>
+                      <a:prstDash val="solid"/>
+                      <a:round/>
+                      <a:headEnd type="none" w="med" len="med"/>
+                      <a:tailEnd type="none" w="med" len="med"/>
+                    </a:lnB>
+                  </a:tcPr>
+                </a:tc>
+                <a:extLst>
+                  <a:ext uri="{0D108BD9-81ED-4DB2-BD59-A6C34878D82A}">
+                    <a16:rowId xmlns:a16="http://schemas.microsoft.com/office/drawing/2014/main" val="350799095"/>
+                  </a:ext>
+                </a:extLst>
+              </a:tr>
+              <a:tr h="0">
+                <a:tc>
+                  <a:txBody>
+                    <a:bodyPr/>
+                    <a:lstStyle/>
+                    <a:p>
+                      <a:pPr>
+                        <a:buNone/>
+                      </a:pPr>
+                      <a:endParaRPr lang="ja-JP" altLang="en-US" sz="1400">
+                        <a:latin typeface="BIZ UDゴシック" panose="020B0400000000000000" pitchFamily="49" charset="-128"/>
+                        <a:ea typeface="BIZ UDゴシック" panose="020B0400000000000000" pitchFamily="49" charset="-128"/>
+                      </a:endParaRPr>
+                    </a:p>
+                  </a:txBody>
+                  <a:tcPr anchor="ctr">
+                    <a:lnL w="12700" cap="flat" cmpd="sng" algn="ctr">
+                      <a:solidFill>
+                        <a:schemeClr val="tx1"/>
+                      </a:solidFill>
+                      <a:prstDash val="solid"/>
+                      <a:round/>
+                      <a:headEnd type="none" w="med" len="med"/>
+                      <a:tailEnd type="none" w="med" len="med"/>
+                    </a:lnL>
+                    <a:lnR w="12700" cap="flat" cmpd="sng" algn="ctr">
+                      <a:solidFill>
+                        <a:schemeClr val="tx1"/>
+                      </a:solidFill>
+                      <a:prstDash val="solid"/>
+                      <a:round/>
+                      <a:headEnd type="none" w="med" len="med"/>
+                      <a:tailEnd type="none" w="med" len="med"/>
+                    </a:lnR>
+                    <a:lnT w="12700" cap="flat" cmpd="sng" algn="ctr">
+                      <a:solidFill>
+                        <a:schemeClr val="tx1"/>
+                      </a:solidFill>
+                      <a:prstDash val="solid"/>
+                      <a:round/>
+                      <a:headEnd type="none" w="med" len="med"/>
+                      <a:tailEnd type="none" w="med" len="med"/>
+                    </a:lnT>
+                    <a:lnB w="12700" cap="flat" cmpd="sng" algn="ctr">
+                      <a:solidFill>
+                        <a:schemeClr val="tx1"/>
+                      </a:solidFill>
+                      <a:prstDash val="solid"/>
+                      <a:round/>
+                      <a:headEnd type="none" w="med" len="med"/>
+                      <a:tailEnd type="none" w="med" len="med"/>
+                    </a:lnB>
+                  </a:tcPr>
+                </a:tc>
+                <a:tc>
+                  <a:txBody>
+                    <a:bodyPr/>
+                    <a:lstStyle/>
+                    <a:p>
+                      <a:pPr>
+                        <a:buNone/>
+                      </a:pPr>
+                      <a:endParaRPr lang="en-US" altLang="ja-JP" sz="1400">
+                        <a:latin typeface="BIZ UDゴシック" panose="020B0400000000000000" pitchFamily="49" charset="-128"/>
+                        <a:ea typeface="BIZ UDゴシック" panose="020B0400000000000000" pitchFamily="49" charset="-128"/>
+                      </a:endParaRPr>
+                    </a:p>
+                  </a:txBody>
+                  <a:tcPr anchor="ctr">
+                    <a:lnL w="12700" cap="flat" cmpd="sng" algn="ctr">
+                      <a:solidFill>
+                        <a:schemeClr val="tx1"/>
+                      </a:solidFill>
+                      <a:prstDash val="solid"/>
+                      <a:round/>
+                      <a:headEnd type="none" w="med" len="med"/>
+                      <a:tailEnd type="none" w="med" len="med"/>
+                    </a:lnL>
+                    <a:lnR w="12700" cap="flat" cmpd="sng" algn="ctr">
+                      <a:solidFill>
+                        <a:schemeClr val="tx1"/>
+                      </a:solidFill>
+                      <a:prstDash val="solid"/>
+                      <a:round/>
+                      <a:headEnd type="none" w="med" len="med"/>
+                      <a:tailEnd type="none" w="med" len="med"/>
+                    </a:lnR>
+                    <a:lnT w="12700" cap="flat" cmpd="sng" algn="ctr">
+                      <a:solidFill>
+                        <a:schemeClr val="tx1"/>
+                      </a:solidFill>
+                      <a:prstDash val="solid"/>
+                      <a:round/>
+                      <a:headEnd type="none" w="med" len="med"/>
+                      <a:tailEnd type="none" w="med" len="med"/>
+                    </a:lnT>
+                    <a:lnB w="12700" cap="flat" cmpd="sng" algn="ctr">
+                      <a:solidFill>
+                        <a:schemeClr val="tx1"/>
+                      </a:solidFill>
+                      <a:prstDash val="solid"/>
+                      <a:round/>
+                      <a:headEnd type="none" w="med" len="med"/>
+                      <a:tailEnd type="none" w="med" len="med"/>
+                    </a:lnB>
+                  </a:tcPr>
+                </a:tc>
+                <a:tc>
+                  <a:txBody>
+                    <a:bodyPr/>
+                    <a:lstStyle/>
+                    <a:p>
+                      <a:pPr>
+                        <a:buNone/>
+                      </a:pPr>
+                      <a:endParaRPr lang="en-US" altLang="ja-JP" sz="1400">
+                        <a:latin typeface="BIZ UDゴシック" panose="020B0400000000000000" pitchFamily="49" charset="-128"/>
+                        <a:ea typeface="BIZ UDゴシック" panose="020B0400000000000000" pitchFamily="49" charset="-128"/>
+                      </a:endParaRPr>
+                    </a:p>
+                  </a:txBody>
+                  <a:tcPr anchor="ctr">
+                    <a:lnL w="12700" cap="flat" cmpd="sng" algn="ctr">
+                      <a:solidFill>
+                        <a:schemeClr val="tx1"/>
+                      </a:solidFill>
+                      <a:prstDash val="solid"/>
+                      <a:round/>
+                      <a:headEnd type="none" w="med" len="med"/>
+                      <a:tailEnd type="none" w="med" len="med"/>
+                    </a:lnL>
+                    <a:lnR w="12700" cap="flat" cmpd="sng" algn="ctr">
+                      <a:solidFill>
+                        <a:schemeClr val="tx1"/>
+                      </a:solidFill>
+                      <a:prstDash val="solid"/>
+                      <a:round/>
+                      <a:headEnd type="none" w="med" len="med"/>
+                      <a:tailEnd type="none" w="med" len="med"/>
+                    </a:lnR>
+                    <a:lnT w="12700" cap="flat" cmpd="sng" algn="ctr">
+                      <a:solidFill>
+                        <a:schemeClr val="tx1"/>
+                      </a:solidFill>
+                      <a:prstDash val="solid"/>
+                      <a:round/>
+                      <a:headEnd type="none" w="med" len="med"/>
+                      <a:tailEnd type="none" w="med" len="med"/>
+                    </a:lnT>
+                    <a:lnB w="12700" cap="flat" cmpd="sng" algn="ctr">
+                      <a:solidFill>
+                        <a:schemeClr val="tx1"/>
+                      </a:solidFill>
+                      <a:prstDash val="solid"/>
+                      <a:round/>
+                      <a:headEnd type="none" w="med" len="med"/>
+                      <a:tailEnd type="none" w="med" len="med"/>
+                    </a:lnB>
+                  </a:tcPr>
+                </a:tc>
+                <a:tc>
+                  <a:txBody>
+                    <a:bodyPr/>
+                    <a:lstStyle/>
+                    <a:p>
+                      <a:pPr>
+                        <a:buNone/>
+                      </a:pPr>
+                      <a:endParaRPr lang="ja-JP" altLang="en-US" sz="1400">
+                        <a:latin typeface="BIZ UDゴシック" panose="020B0400000000000000" pitchFamily="49" charset="-128"/>
+                        <a:ea typeface="BIZ UDゴシック" panose="020B0400000000000000" pitchFamily="49" charset="-128"/>
+                      </a:endParaRPr>
+                    </a:p>
+                  </a:txBody>
+                  <a:tcPr anchor="ctr">
+                    <a:lnL w="12700" cap="flat" cmpd="sng" algn="ctr">
+                      <a:solidFill>
+                        <a:schemeClr val="tx1"/>
+                      </a:solidFill>
+                      <a:prstDash val="solid"/>
+                      <a:round/>
+                      <a:headEnd type="none" w="med" len="med"/>
+                      <a:tailEnd type="none" w="med" len="med"/>
+                    </a:lnL>
+                    <a:lnR w="12700" cap="flat" cmpd="sng" algn="ctr">
+                      <a:solidFill>
+                        <a:schemeClr val="tx1"/>
+                      </a:solidFill>
+                      <a:prstDash val="solid"/>
+                      <a:round/>
+                      <a:headEnd type="none" w="med" len="med"/>
+                      <a:tailEnd type="none" w="med" len="med"/>
+                    </a:lnR>
+                    <a:lnT w="12700" cap="flat" cmpd="sng" algn="ctr">
+                      <a:solidFill>
+                        <a:schemeClr val="tx1"/>
+                      </a:solidFill>
+                      <a:prstDash val="solid"/>
+                      <a:round/>
+                      <a:headEnd type="none" w="med" len="med"/>
+                      <a:tailEnd type="none" w="med" len="med"/>
+                    </a:lnT>
+                    <a:lnB w="12700" cap="flat" cmpd="sng" algn="ctr">
+                      <a:solidFill>
+                        <a:schemeClr val="tx1"/>
+                      </a:solidFill>
+                      <a:prstDash val="solid"/>
+                      <a:round/>
+                      <a:headEnd type="none" w="med" len="med"/>
+                      <a:tailEnd type="none" w="med" len="med"/>
+                    </a:lnB>
+                  </a:tcPr>
+                </a:tc>
+                <a:extLst>
+                  <a:ext uri="{0D108BD9-81ED-4DB2-BD59-A6C34878D82A}">
+                    <a16:rowId xmlns:a16="http://schemas.microsoft.com/office/drawing/2014/main" val="245562205"/>
+                  </a:ext>
+                </a:extLst>
+              </a:tr>
+            </a:tbl>
+          </a:graphicData>
+        </a:graphic>
+      </p:graphicFrame>
+    </p:spTree>
+    <p:extLst>
+      <p:ext uri="{BB962C8B-B14F-4D97-AF65-F5344CB8AC3E}">
+        <p14:creationId xmlns:p14="http://schemas.microsoft.com/office/powerpoint/2010/main" val="880899899"/>
       </p:ext>
     </p:extLst>
   </p:cSld>

--- a/Specification/基本仕様.pptx
+++ b/Specification/基本仕様.pptx
@@ -5,7 +5,7 @@
     <p:sldMasterId id="2147483648" r:id="rId1"/>
   </p:sldMasterIdLst>
   <p:notesMasterIdLst>
-    <p:notesMasterId r:id="rId8"/>
+    <p:notesMasterId r:id="rId9"/>
   </p:notesMasterIdLst>
   <p:sldIdLst>
     <p:sldId id="258" r:id="rId2"/>
@@ -14,6 +14,7 @@
     <p:sldId id="267" r:id="rId5"/>
     <p:sldId id="263" r:id="rId6"/>
     <p:sldId id="268" r:id="rId7"/>
+    <p:sldId id="269" r:id="rId8"/>
   </p:sldIdLst>
   <p:sldSz cx="12192000" cy="6858000"/>
   <p:notesSz cx="6858000" cy="9144000"/>
@@ -18206,14 +18207,14 @@
           <p:nvPr>
             <p:extLst>
               <p:ext uri="{D42A27DB-BD31-4B8C-83A1-F6EECF244321}">
-                <p14:modId xmlns:p14="http://schemas.microsoft.com/office/powerpoint/2010/main" val="2145433503"/>
+                <p14:modId xmlns:p14="http://schemas.microsoft.com/office/powerpoint/2010/main" val="211282526"/>
               </p:ext>
             </p:extLst>
           </p:nvPr>
         </p:nvGraphicFramePr>
         <p:xfrm>
           <a:off x="673768" y="1101733"/>
-          <a:ext cx="8296977" cy="2042160"/>
+          <a:ext cx="9423133" cy="1828800"/>
         </p:xfrm>
         <a:graphic>
           <a:graphicData uri="http://schemas.openxmlformats.org/drawingml/2006/table">
@@ -18222,28 +18223,28 @@
                 <a:tableStyleId>{912C8C85-51F0-491E-9774-3900AFEF0FD7}</a:tableStyleId>
               </a:tblPr>
               <a:tblGrid>
-                <a:gridCol w="1838634">
+                <a:gridCol w="2088193">
                   <a:extLst>
                     <a:ext uri="{9D8B030D-6E8A-4147-A177-3AD203B41FA5}">
                       <a16:colId xmlns:a16="http://schemas.microsoft.com/office/drawing/2014/main" val="6935548"/>
                     </a:ext>
                   </a:extLst>
                 </a:gridCol>
-                <a:gridCol w="1552005">
+                <a:gridCol w="1762660">
                   <a:extLst>
                     <a:ext uri="{9D8B030D-6E8A-4147-A177-3AD203B41FA5}">
                       <a16:colId xmlns:a16="http://schemas.microsoft.com/office/drawing/2014/main" val="2184599737"/>
                     </a:ext>
                   </a:extLst>
                 </a:gridCol>
-                <a:gridCol w="1552005">
+                <a:gridCol w="1762660">
                   <a:extLst>
                     <a:ext uri="{9D8B030D-6E8A-4147-A177-3AD203B41FA5}">
                       <a16:colId xmlns:a16="http://schemas.microsoft.com/office/drawing/2014/main" val="2311469129"/>
                     </a:ext>
                   </a:extLst>
                 </a:gridCol>
-                <a:gridCol w="3354333">
+                <a:gridCol w="3809620">
                   <a:extLst>
                     <a:ext uri="{9D8B030D-6E8A-4147-A177-3AD203B41FA5}">
                       <a16:colId xmlns:a16="http://schemas.microsoft.com/office/drawing/2014/main" val="754341625"/>
@@ -19663,6 +19664,1962 @@
     <p:extLst>
       <p:ext uri="{BB962C8B-B14F-4D97-AF65-F5344CB8AC3E}">
         <p14:creationId xmlns:p14="http://schemas.microsoft.com/office/powerpoint/2010/main" val="880899899"/>
+      </p:ext>
+    </p:extLst>
+  </p:cSld>
+  <p:clrMapOvr>
+    <a:masterClrMapping/>
+  </p:clrMapOvr>
+</p:sld>
+</file>
+
+<file path=ppt/slides/slide7.xml><?xml version="1.0" encoding="utf-8"?>
+<p:sld xmlns:a="http://schemas.openxmlformats.org/drawingml/2006/main" xmlns:r="http://schemas.openxmlformats.org/officeDocument/2006/relationships" xmlns:p="http://schemas.openxmlformats.org/presentationml/2006/main">
+  <p:cSld>
+    <p:spTree>
+      <p:nvGrpSpPr>
+        <p:cNvPr id="1" name=""/>
+        <p:cNvGrpSpPr/>
+        <p:nvPr/>
+      </p:nvGrpSpPr>
+      <p:grpSpPr>
+        <a:xfrm>
+          <a:off x="0" y="0"/>
+          <a:ext cx="0" cy="0"/>
+          <a:chOff x="0" y="0"/>
+          <a:chExt cx="0" cy="0"/>
+        </a:xfrm>
+      </p:grpSpPr>
+      <p:sp>
+        <p:nvSpPr>
+          <p:cNvPr id="2" name="タイトル 1">
+            <a:extLst>
+              <a:ext uri="{FF2B5EF4-FFF2-40B4-BE49-F238E27FC236}">
+                <a16:creationId xmlns:a16="http://schemas.microsoft.com/office/drawing/2014/main" id="{566FAFBA-C184-155C-795E-6E2E78F637EE}"/>
+              </a:ext>
+            </a:extLst>
+          </p:cNvPr>
+          <p:cNvSpPr>
+            <a:spLocks noGrp="1"/>
+          </p:cNvSpPr>
+          <p:nvPr>
+            <p:ph type="title"/>
+          </p:nvPr>
+        </p:nvSpPr>
+        <p:spPr/>
+        <p:txBody>
+          <a:bodyPr>
+            <a:normAutofit fontScale="90000"/>
+          </a:bodyPr>
+          <a:lstStyle/>
+          <a:p>
+            <a:r>
+              <a:rPr kumimoji="1" lang="en-US" altLang="ja-JP"/>
+              <a:t>method</a:t>
+            </a:r>
+            <a:endParaRPr kumimoji="1" lang="ja-JP" altLang="en-US"/>
+          </a:p>
+        </p:txBody>
+      </p:sp>
+      <p:sp>
+        <p:nvSpPr>
+          <p:cNvPr id="3" name="スライド番号プレースホルダー 2">
+            <a:extLst>
+              <a:ext uri="{FF2B5EF4-FFF2-40B4-BE49-F238E27FC236}">
+                <a16:creationId xmlns:a16="http://schemas.microsoft.com/office/drawing/2014/main" id="{B134482A-A0E1-241D-F93C-C26AA4D97A73}"/>
+              </a:ext>
+            </a:extLst>
+          </p:cNvPr>
+          <p:cNvSpPr>
+            <a:spLocks noGrp="1"/>
+          </p:cNvSpPr>
+          <p:nvPr>
+            <p:ph type="sldNum" sz="quarter" idx="12"/>
+          </p:nvPr>
+        </p:nvSpPr>
+        <p:spPr/>
+        <p:txBody>
+          <a:bodyPr/>
+          <a:lstStyle/>
+          <a:p>
+            <a:fld id="{A99D720A-4AD5-4DCF-885F-DE5297996123}" type="slidenum">
+              <a:rPr kumimoji="1" lang="ja-JP" altLang="en-US" smtClean="0"/>
+              <a:t>7</a:t>
+            </a:fld>
+            <a:endParaRPr kumimoji="1" lang="ja-JP" altLang="en-US"/>
+          </a:p>
+        </p:txBody>
+      </p:sp>
+      <p:graphicFrame>
+        <p:nvGraphicFramePr>
+          <p:cNvPr id="4" name="表 3">
+            <a:extLst>
+              <a:ext uri="{FF2B5EF4-FFF2-40B4-BE49-F238E27FC236}">
+                <a16:creationId xmlns:a16="http://schemas.microsoft.com/office/drawing/2014/main" id="{0C41E811-3044-1E4D-5DA8-369066B6FA65}"/>
+              </a:ext>
+            </a:extLst>
+          </p:cNvPr>
+          <p:cNvGraphicFramePr>
+            <a:graphicFrameLocks noGrp="1"/>
+          </p:cNvGraphicFramePr>
+          <p:nvPr>
+            <p:extLst>
+              <p:ext uri="{D42A27DB-BD31-4B8C-83A1-F6EECF244321}">
+                <p14:modId xmlns:p14="http://schemas.microsoft.com/office/powerpoint/2010/main" val="3188965736"/>
+              </p:ext>
+            </p:extLst>
+          </p:nvPr>
+        </p:nvGraphicFramePr>
+        <p:xfrm>
+          <a:off x="673768" y="1101733"/>
+          <a:ext cx="9465990" cy="1828800"/>
+        </p:xfrm>
+        <a:graphic>
+          <a:graphicData uri="http://schemas.openxmlformats.org/drawingml/2006/table">
+            <a:tbl>
+              <a:tblPr firstRow="1">
+                <a:tableStyleId>{912C8C85-51F0-491E-9774-3900AFEF0FD7}</a:tableStyleId>
+              </a:tblPr>
+              <a:tblGrid>
+                <a:gridCol w="1692000">
+                  <a:extLst>
+                    <a:ext uri="{9D8B030D-6E8A-4147-A177-3AD203B41FA5}">
+                      <a16:colId xmlns:a16="http://schemas.microsoft.com/office/drawing/2014/main" val="6935548"/>
+                    </a:ext>
+                  </a:extLst>
+                </a:gridCol>
+                <a:gridCol w="1229560">
+                  <a:extLst>
+                    <a:ext uri="{9D8B030D-6E8A-4147-A177-3AD203B41FA5}">
+                      <a16:colId xmlns:a16="http://schemas.microsoft.com/office/drawing/2014/main" val="2184599737"/>
+                    </a:ext>
+                  </a:extLst>
+                </a:gridCol>
+                <a:gridCol w="1229560">
+                  <a:extLst>
+                    <a:ext uri="{9D8B030D-6E8A-4147-A177-3AD203B41FA5}">
+                      <a16:colId xmlns:a16="http://schemas.microsoft.com/office/drawing/2014/main" val="2311469129"/>
+                    </a:ext>
+                  </a:extLst>
+                </a:gridCol>
+                <a:gridCol w="1142775">
+                  <a:extLst>
+                    <a:ext uri="{9D8B030D-6E8A-4147-A177-3AD203B41FA5}">
+                      <a16:colId xmlns:a16="http://schemas.microsoft.com/office/drawing/2014/main" val="754341625"/>
+                    </a:ext>
+                  </a:extLst>
+                </a:gridCol>
+                <a:gridCol w="4172095">
+                  <a:extLst>
+                    <a:ext uri="{9D8B030D-6E8A-4147-A177-3AD203B41FA5}">
+                      <a16:colId xmlns:a16="http://schemas.microsoft.com/office/drawing/2014/main" val="1960738261"/>
+                    </a:ext>
+                  </a:extLst>
+                </a:gridCol>
+              </a:tblGrid>
+              <a:tr h="0">
+                <a:tc>
+                  <a:txBody>
+                    <a:bodyPr/>
+                    <a:lstStyle/>
+                    <a:p>
+                      <a:pPr>
+                        <a:buNone/>
+                      </a:pPr>
+                      <a:r>
+                        <a:rPr lang="ja-JP" altLang="en-US" sz="1400">
+                          <a:latin typeface="BIZ UDゴシック" panose="020B0400000000000000" pitchFamily="49" charset="-128"/>
+                          <a:ea typeface="BIZ UDゴシック" panose="020B0400000000000000" pitchFamily="49" charset="-128"/>
+                        </a:rPr>
+                        <a:t>名称</a:t>
+                      </a:r>
+                    </a:p>
+                  </a:txBody>
+                  <a:tcPr anchor="ctr">
+                    <a:lnL w="12700" cap="flat" cmpd="sng" algn="ctr">
+                      <a:solidFill>
+                        <a:schemeClr val="tx1"/>
+                      </a:solidFill>
+                      <a:prstDash val="solid"/>
+                      <a:round/>
+                      <a:headEnd type="none" w="med" len="med"/>
+                      <a:tailEnd type="none" w="med" len="med"/>
+                    </a:lnL>
+                    <a:lnR w="12700" cap="flat" cmpd="sng" algn="ctr">
+                      <a:solidFill>
+                        <a:schemeClr val="tx1"/>
+                      </a:solidFill>
+                      <a:prstDash val="solid"/>
+                      <a:round/>
+                      <a:headEnd type="none" w="med" len="med"/>
+                      <a:tailEnd type="none" w="med" len="med"/>
+                    </a:lnR>
+                    <a:lnT w="12700" cap="flat" cmpd="sng" algn="ctr">
+                      <a:solidFill>
+                        <a:schemeClr val="tx1"/>
+                      </a:solidFill>
+                      <a:prstDash val="solid"/>
+                      <a:round/>
+                      <a:headEnd type="none" w="med" len="med"/>
+                      <a:tailEnd type="none" w="med" len="med"/>
+                    </a:lnT>
+                    <a:lnB w="12700" cap="flat" cmpd="sng" algn="ctr">
+                      <a:solidFill>
+                        <a:schemeClr val="tx1"/>
+                      </a:solidFill>
+                      <a:prstDash val="solid"/>
+                      <a:round/>
+                      <a:headEnd type="none" w="med" len="med"/>
+                      <a:tailEnd type="none" w="med" len="med"/>
+                    </a:lnB>
+                  </a:tcPr>
+                </a:tc>
+                <a:tc>
+                  <a:txBody>
+                    <a:bodyPr/>
+                    <a:lstStyle/>
+                    <a:p>
+                      <a:pPr>
+                        <a:buNone/>
+                      </a:pPr>
+                      <a:r>
+                        <a:rPr lang="ja-JP" altLang="en-US" sz="1400">
+                          <a:latin typeface="BIZ UDゴシック" panose="020B0400000000000000" pitchFamily="49" charset="-128"/>
+                          <a:ea typeface="BIZ UDゴシック" panose="020B0400000000000000" pitchFamily="49" charset="-128"/>
+                        </a:rPr>
+                        <a:t>目的</a:t>
+                      </a:r>
+                    </a:p>
+                  </a:txBody>
+                  <a:tcPr anchor="ctr">
+                    <a:lnL w="12700" cap="flat" cmpd="sng" algn="ctr">
+                      <a:solidFill>
+                        <a:schemeClr val="tx1"/>
+                      </a:solidFill>
+                      <a:prstDash val="solid"/>
+                      <a:round/>
+                      <a:headEnd type="none" w="med" len="med"/>
+                      <a:tailEnd type="none" w="med" len="med"/>
+                    </a:lnL>
+                    <a:lnR w="12700" cap="flat" cmpd="sng" algn="ctr">
+                      <a:solidFill>
+                        <a:schemeClr val="tx1"/>
+                      </a:solidFill>
+                      <a:prstDash val="solid"/>
+                      <a:round/>
+                      <a:headEnd type="none" w="med" len="med"/>
+                      <a:tailEnd type="none" w="med" len="med"/>
+                    </a:lnR>
+                    <a:lnT w="12700" cap="flat" cmpd="sng" algn="ctr">
+                      <a:solidFill>
+                        <a:schemeClr val="tx1"/>
+                      </a:solidFill>
+                      <a:prstDash val="solid"/>
+                      <a:round/>
+                      <a:headEnd type="none" w="med" len="med"/>
+                      <a:tailEnd type="none" w="med" len="med"/>
+                    </a:lnT>
+                    <a:lnB w="12700" cap="flat" cmpd="sng" algn="ctr">
+                      <a:solidFill>
+                        <a:schemeClr val="tx1"/>
+                      </a:solidFill>
+                      <a:prstDash val="solid"/>
+                      <a:round/>
+                      <a:headEnd type="none" w="med" len="med"/>
+                      <a:tailEnd type="none" w="med" len="med"/>
+                    </a:lnB>
+                  </a:tcPr>
+                </a:tc>
+                <a:tc>
+                  <a:txBody>
+                    <a:bodyPr/>
+                    <a:lstStyle/>
+                    <a:p>
+                      <a:pPr>
+                        <a:buNone/>
+                      </a:pPr>
+                      <a:r>
+                        <a:rPr lang="ja-JP" altLang="en-US" sz="1400">
+                          <a:latin typeface="BIZ UDゴシック" panose="020B0400000000000000" pitchFamily="49" charset="-128"/>
+                          <a:ea typeface="BIZ UDゴシック" panose="020B0400000000000000" pitchFamily="49" charset="-128"/>
+                        </a:rPr>
+                        <a:t>言語</a:t>
+                      </a:r>
+                    </a:p>
+                  </a:txBody>
+                  <a:tcPr anchor="ctr">
+                    <a:lnL w="12700" cap="flat" cmpd="sng" algn="ctr">
+                      <a:solidFill>
+                        <a:schemeClr val="tx1"/>
+                      </a:solidFill>
+                      <a:prstDash val="solid"/>
+                      <a:round/>
+                      <a:headEnd type="none" w="med" len="med"/>
+                      <a:tailEnd type="none" w="med" len="med"/>
+                    </a:lnL>
+                    <a:lnR w="12700" cap="flat" cmpd="sng" algn="ctr">
+                      <a:solidFill>
+                        <a:schemeClr val="tx1"/>
+                      </a:solidFill>
+                      <a:prstDash val="solid"/>
+                      <a:round/>
+                      <a:headEnd type="none" w="med" len="med"/>
+                      <a:tailEnd type="none" w="med" len="med"/>
+                    </a:lnR>
+                    <a:lnT w="12700" cap="flat" cmpd="sng" algn="ctr">
+                      <a:solidFill>
+                        <a:schemeClr val="tx1"/>
+                      </a:solidFill>
+                      <a:prstDash val="solid"/>
+                      <a:round/>
+                      <a:headEnd type="none" w="med" len="med"/>
+                      <a:tailEnd type="none" w="med" len="med"/>
+                    </a:lnT>
+                    <a:lnB w="12700" cap="flat" cmpd="sng" algn="ctr">
+                      <a:solidFill>
+                        <a:schemeClr val="tx1"/>
+                      </a:solidFill>
+                      <a:prstDash val="solid"/>
+                      <a:round/>
+                      <a:headEnd type="none" w="med" len="med"/>
+                      <a:tailEnd type="none" w="med" len="med"/>
+                    </a:lnB>
+                  </a:tcPr>
+                </a:tc>
+                <a:tc>
+                  <a:txBody>
+                    <a:bodyPr/>
+                    <a:lstStyle/>
+                    <a:p>
+                      <a:pPr>
+                        <a:buNone/>
+                      </a:pPr>
+                      <a:r>
+                        <a:rPr lang="ja-JP" altLang="en-US" sz="1400">
+                          <a:latin typeface="BIZ UDゴシック" panose="020B0400000000000000" pitchFamily="49" charset="-128"/>
+                          <a:ea typeface="BIZ UDゴシック" panose="020B0400000000000000" pitchFamily="49" charset="-128"/>
+                        </a:rPr>
+                        <a:t>戻り値型</a:t>
+                      </a:r>
+                    </a:p>
+                  </a:txBody>
+                  <a:tcPr anchor="ctr">
+                    <a:lnL w="12700" cap="flat" cmpd="sng" algn="ctr">
+                      <a:solidFill>
+                        <a:schemeClr val="tx1"/>
+                      </a:solidFill>
+                      <a:prstDash val="solid"/>
+                      <a:round/>
+                      <a:headEnd type="none" w="med" len="med"/>
+                      <a:tailEnd type="none" w="med" len="med"/>
+                    </a:lnL>
+                    <a:lnR w="12700" cap="flat" cmpd="sng" algn="ctr">
+                      <a:solidFill>
+                        <a:schemeClr val="tx1"/>
+                      </a:solidFill>
+                      <a:prstDash val="solid"/>
+                      <a:round/>
+                      <a:headEnd type="none" w="med" len="med"/>
+                      <a:tailEnd type="none" w="med" len="med"/>
+                    </a:lnR>
+                    <a:lnT w="12700" cap="flat" cmpd="sng" algn="ctr">
+                      <a:solidFill>
+                        <a:schemeClr val="tx1"/>
+                      </a:solidFill>
+                      <a:prstDash val="solid"/>
+                      <a:round/>
+                      <a:headEnd type="none" w="med" len="med"/>
+                      <a:tailEnd type="none" w="med" len="med"/>
+                    </a:lnT>
+                    <a:lnB w="12700" cap="flat" cmpd="sng" algn="ctr">
+                      <a:solidFill>
+                        <a:schemeClr val="tx1"/>
+                      </a:solidFill>
+                      <a:prstDash val="solid"/>
+                      <a:round/>
+                      <a:headEnd type="none" w="med" len="med"/>
+                      <a:tailEnd type="none" w="med" len="med"/>
+                    </a:lnB>
+                  </a:tcPr>
+                </a:tc>
+                <a:tc>
+                  <a:txBody>
+                    <a:bodyPr/>
+                    <a:lstStyle/>
+                    <a:p>
+                      <a:pPr>
+                        <a:buNone/>
+                      </a:pPr>
+                      <a:r>
+                        <a:rPr lang="ja-JP" altLang="en-US" sz="1400">
+                          <a:latin typeface="BIZ UDゴシック" panose="020B0400000000000000" pitchFamily="49" charset="-128"/>
+                          <a:ea typeface="BIZ UDゴシック" panose="020B0400000000000000" pitchFamily="49" charset="-128"/>
+                        </a:rPr>
+                        <a:t>意味</a:t>
+                      </a:r>
+                    </a:p>
+                  </a:txBody>
+                  <a:tcPr anchor="ctr">
+                    <a:lnL w="12700" cap="flat" cmpd="sng" algn="ctr">
+                      <a:solidFill>
+                        <a:schemeClr val="tx1"/>
+                      </a:solidFill>
+                      <a:prstDash val="solid"/>
+                      <a:round/>
+                      <a:headEnd type="none" w="med" len="med"/>
+                      <a:tailEnd type="none" w="med" len="med"/>
+                    </a:lnL>
+                    <a:lnR w="12700" cap="flat" cmpd="sng" algn="ctr">
+                      <a:solidFill>
+                        <a:schemeClr val="tx1"/>
+                      </a:solidFill>
+                      <a:prstDash val="solid"/>
+                      <a:round/>
+                      <a:headEnd type="none" w="med" len="med"/>
+                      <a:tailEnd type="none" w="med" len="med"/>
+                    </a:lnR>
+                    <a:lnT w="12700" cap="flat" cmpd="sng" algn="ctr">
+                      <a:solidFill>
+                        <a:schemeClr val="tx1"/>
+                      </a:solidFill>
+                      <a:prstDash val="solid"/>
+                      <a:round/>
+                      <a:headEnd type="none" w="med" len="med"/>
+                      <a:tailEnd type="none" w="med" len="med"/>
+                    </a:lnT>
+                    <a:lnB w="12700" cap="flat" cmpd="sng" algn="ctr">
+                      <a:solidFill>
+                        <a:schemeClr val="tx1"/>
+                      </a:solidFill>
+                      <a:prstDash val="solid"/>
+                      <a:round/>
+                      <a:headEnd type="none" w="med" len="med"/>
+                      <a:tailEnd type="none" w="med" len="med"/>
+                    </a:lnB>
+                  </a:tcPr>
+                </a:tc>
+                <a:extLst>
+                  <a:ext uri="{0D108BD9-81ED-4DB2-BD59-A6C34878D82A}">
+                    <a16:rowId xmlns:a16="http://schemas.microsoft.com/office/drawing/2014/main" val="1513055026"/>
+                  </a:ext>
+                </a:extLst>
+              </a:tr>
+              <a:tr h="0">
+                <a:tc>
+                  <a:txBody>
+                    <a:bodyPr/>
+                    <a:lstStyle/>
+                    <a:p>
+                      <a:pPr>
+                        <a:buNone/>
+                      </a:pPr>
+                      <a:r>
+                        <a:rPr lang="en-US" altLang="ja-JP" sz="1400">
+                          <a:latin typeface="BIZ UDゴシック" panose="020B0400000000000000" pitchFamily="49" charset="-128"/>
+                          <a:ea typeface="BIZ UDゴシック" panose="020B0400000000000000" pitchFamily="49" charset="-128"/>
+                        </a:rPr>
+                        <a:t>is_temp_high()</a:t>
+                      </a:r>
+                      <a:endParaRPr lang="ja-JP" altLang="en-US" sz="1400">
+                        <a:latin typeface="BIZ UDゴシック" panose="020B0400000000000000" pitchFamily="49" charset="-128"/>
+                        <a:ea typeface="BIZ UDゴシック" panose="020B0400000000000000" pitchFamily="49" charset="-128"/>
+                      </a:endParaRPr>
+                    </a:p>
+                  </a:txBody>
+                  <a:tcPr anchor="ctr">
+                    <a:lnL w="12700" cap="flat" cmpd="sng" algn="ctr">
+                      <a:solidFill>
+                        <a:schemeClr val="tx1"/>
+                      </a:solidFill>
+                      <a:prstDash val="solid"/>
+                      <a:round/>
+                      <a:headEnd type="none" w="med" len="med"/>
+                      <a:tailEnd type="none" w="med" len="med"/>
+                    </a:lnL>
+                    <a:lnR w="12700" cap="flat" cmpd="sng" algn="ctr">
+                      <a:solidFill>
+                        <a:schemeClr val="tx1"/>
+                      </a:solidFill>
+                      <a:prstDash val="solid"/>
+                      <a:round/>
+                      <a:headEnd type="none" w="med" len="med"/>
+                      <a:tailEnd type="none" w="med" len="med"/>
+                    </a:lnR>
+                    <a:lnT w="12700" cap="flat" cmpd="sng" algn="ctr">
+                      <a:solidFill>
+                        <a:schemeClr val="tx1"/>
+                      </a:solidFill>
+                      <a:prstDash val="solid"/>
+                      <a:round/>
+                      <a:headEnd type="none" w="med" len="med"/>
+                      <a:tailEnd type="none" w="med" len="med"/>
+                    </a:lnT>
+                    <a:lnB w="12700" cap="flat" cmpd="sng" algn="ctr">
+                      <a:solidFill>
+                        <a:schemeClr val="tx1"/>
+                      </a:solidFill>
+                      <a:prstDash val="solid"/>
+                      <a:round/>
+                      <a:headEnd type="none" w="med" len="med"/>
+                      <a:tailEnd type="none" w="med" len="med"/>
+                    </a:lnB>
+                  </a:tcPr>
+                </a:tc>
+                <a:tc>
+                  <a:txBody>
+                    <a:bodyPr/>
+                    <a:lstStyle/>
+                    <a:p>
+                      <a:pPr>
+                        <a:buNone/>
+                      </a:pPr>
+                      <a:endParaRPr lang="en-US" sz="1400">
+                        <a:latin typeface="BIZ UDゴシック" panose="020B0400000000000000" pitchFamily="49" charset="-128"/>
+                        <a:ea typeface="BIZ UDゴシック" panose="020B0400000000000000" pitchFamily="49" charset="-128"/>
+                      </a:endParaRPr>
+                    </a:p>
+                  </a:txBody>
+                  <a:tcPr anchor="ctr">
+                    <a:lnL w="12700" cap="flat" cmpd="sng" algn="ctr">
+                      <a:solidFill>
+                        <a:schemeClr val="tx1"/>
+                      </a:solidFill>
+                      <a:prstDash val="solid"/>
+                      <a:round/>
+                      <a:headEnd type="none" w="med" len="med"/>
+                      <a:tailEnd type="none" w="med" len="med"/>
+                    </a:lnL>
+                    <a:lnR w="12700" cap="flat" cmpd="sng" algn="ctr">
+                      <a:solidFill>
+                        <a:schemeClr val="tx1"/>
+                      </a:solidFill>
+                      <a:prstDash val="solid"/>
+                      <a:round/>
+                      <a:headEnd type="none" w="med" len="med"/>
+                      <a:tailEnd type="none" w="med" len="med"/>
+                    </a:lnR>
+                    <a:lnT w="12700" cap="flat" cmpd="sng" algn="ctr">
+                      <a:solidFill>
+                        <a:schemeClr val="tx1"/>
+                      </a:solidFill>
+                      <a:prstDash val="solid"/>
+                      <a:round/>
+                      <a:headEnd type="none" w="med" len="med"/>
+                      <a:tailEnd type="none" w="med" len="med"/>
+                    </a:lnT>
+                    <a:lnB w="12700" cap="flat" cmpd="sng" algn="ctr">
+                      <a:solidFill>
+                        <a:schemeClr val="tx1"/>
+                      </a:solidFill>
+                      <a:prstDash val="solid"/>
+                      <a:round/>
+                      <a:headEnd type="none" w="med" len="med"/>
+                      <a:tailEnd type="none" w="med" len="med"/>
+                    </a:lnB>
+                  </a:tcPr>
+                </a:tc>
+                <a:tc>
+                  <a:txBody>
+                    <a:bodyPr/>
+                    <a:lstStyle/>
+                    <a:p>
+                      <a:pPr>
+                        <a:buNone/>
+                      </a:pPr>
+                      <a:r>
+                        <a:rPr lang="en-US" sz="1400">
+                          <a:latin typeface="BIZ UDゴシック" panose="020B0400000000000000" pitchFamily="49" charset="-128"/>
+                          <a:ea typeface="BIZ UDゴシック" panose="020B0400000000000000" pitchFamily="49" charset="-128"/>
+                        </a:rPr>
+                        <a:t>python</a:t>
+                      </a:r>
+                    </a:p>
+                  </a:txBody>
+                  <a:tcPr anchor="ctr">
+                    <a:lnL w="12700" cap="flat" cmpd="sng" algn="ctr">
+                      <a:solidFill>
+                        <a:schemeClr val="tx1"/>
+                      </a:solidFill>
+                      <a:prstDash val="solid"/>
+                      <a:round/>
+                      <a:headEnd type="none" w="med" len="med"/>
+                      <a:tailEnd type="none" w="med" len="med"/>
+                    </a:lnL>
+                    <a:lnR w="12700" cap="flat" cmpd="sng" algn="ctr">
+                      <a:solidFill>
+                        <a:schemeClr val="tx1"/>
+                      </a:solidFill>
+                      <a:prstDash val="solid"/>
+                      <a:round/>
+                      <a:headEnd type="none" w="med" len="med"/>
+                      <a:tailEnd type="none" w="med" len="med"/>
+                    </a:lnR>
+                    <a:lnT w="12700" cap="flat" cmpd="sng" algn="ctr">
+                      <a:solidFill>
+                        <a:schemeClr val="tx1"/>
+                      </a:solidFill>
+                      <a:prstDash val="solid"/>
+                      <a:round/>
+                      <a:headEnd type="none" w="med" len="med"/>
+                      <a:tailEnd type="none" w="med" len="med"/>
+                    </a:lnT>
+                    <a:lnB w="12700" cap="flat" cmpd="sng" algn="ctr">
+                      <a:solidFill>
+                        <a:schemeClr val="tx1"/>
+                      </a:solidFill>
+                      <a:prstDash val="solid"/>
+                      <a:round/>
+                      <a:headEnd type="none" w="med" len="med"/>
+                      <a:tailEnd type="none" w="med" len="med"/>
+                    </a:lnB>
+                  </a:tcPr>
+                </a:tc>
+                <a:tc>
+                  <a:txBody>
+                    <a:bodyPr/>
+                    <a:lstStyle/>
+                    <a:p>
+                      <a:pPr>
+                        <a:buNone/>
+                      </a:pPr>
+                      <a:r>
+                        <a:rPr lang="en-US" altLang="ja-JP" sz="1400">
+                          <a:latin typeface="BIZ UDゴシック" panose="020B0400000000000000" pitchFamily="49" charset="-128"/>
+                          <a:ea typeface="BIZ UDゴシック" panose="020B0400000000000000" pitchFamily="49" charset="-128"/>
+                        </a:rPr>
+                        <a:t>Bool</a:t>
+                      </a:r>
+                      <a:endParaRPr lang="ja-JP" altLang="en-US" sz="1400">
+                        <a:latin typeface="BIZ UDゴシック" panose="020B0400000000000000" pitchFamily="49" charset="-128"/>
+                        <a:ea typeface="BIZ UDゴシック" panose="020B0400000000000000" pitchFamily="49" charset="-128"/>
+                      </a:endParaRPr>
+                    </a:p>
+                  </a:txBody>
+                  <a:tcPr anchor="ctr">
+                    <a:lnL w="12700" cap="flat" cmpd="sng" algn="ctr">
+                      <a:solidFill>
+                        <a:schemeClr val="tx1"/>
+                      </a:solidFill>
+                      <a:prstDash val="solid"/>
+                      <a:round/>
+                      <a:headEnd type="none" w="med" len="med"/>
+                      <a:tailEnd type="none" w="med" len="med"/>
+                    </a:lnL>
+                    <a:lnR w="12700" cap="flat" cmpd="sng" algn="ctr">
+                      <a:solidFill>
+                        <a:schemeClr val="tx1"/>
+                      </a:solidFill>
+                      <a:prstDash val="solid"/>
+                      <a:round/>
+                      <a:headEnd type="none" w="med" len="med"/>
+                      <a:tailEnd type="none" w="med" len="med"/>
+                    </a:lnR>
+                    <a:lnT w="12700" cap="flat" cmpd="sng" algn="ctr">
+                      <a:solidFill>
+                        <a:schemeClr val="tx1"/>
+                      </a:solidFill>
+                      <a:prstDash val="solid"/>
+                      <a:round/>
+                      <a:headEnd type="none" w="med" len="med"/>
+                      <a:tailEnd type="none" w="med" len="med"/>
+                    </a:lnT>
+                    <a:lnB w="12700" cap="flat" cmpd="sng" algn="ctr">
+                      <a:solidFill>
+                        <a:schemeClr val="tx1"/>
+                      </a:solidFill>
+                      <a:prstDash val="solid"/>
+                      <a:round/>
+                      <a:headEnd type="none" w="med" len="med"/>
+                      <a:tailEnd type="none" w="med" len="med"/>
+                    </a:lnB>
+                  </a:tcPr>
+                </a:tc>
+                <a:tc>
+                  <a:txBody>
+                    <a:bodyPr/>
+                    <a:lstStyle/>
+                    <a:p>
+                      <a:pPr>
+                        <a:buNone/>
+                      </a:pPr>
+                      <a:r>
+                        <a:rPr lang="en-US" altLang="ja-JP" sz="1400">
+                          <a:latin typeface="BIZ UDゴシック" panose="020B0400000000000000" pitchFamily="49" charset="-128"/>
+                          <a:ea typeface="BIZ UDゴシック" panose="020B0400000000000000" pitchFamily="49" charset="-128"/>
+                        </a:rPr>
+                        <a:t>TRUE:</a:t>
+                      </a:r>
+                      <a:r>
+                        <a:rPr lang="ja-JP" altLang="en-US" sz="1400">
+                          <a:latin typeface="BIZ UDゴシック" panose="020B0400000000000000" pitchFamily="49" charset="-128"/>
+                          <a:ea typeface="BIZ UDゴシック" panose="020B0400000000000000" pitchFamily="49" charset="-128"/>
+                        </a:rPr>
+                        <a:t>入力温度</a:t>
+                      </a:r>
+                      <a:r>
+                        <a:rPr lang="en-US" altLang="ja-JP" sz="1400">
+                          <a:latin typeface="BIZ UDゴシック" panose="020B0400000000000000" pitchFamily="49" charset="-128"/>
+                          <a:ea typeface="BIZ UDゴシック" panose="020B0400000000000000" pitchFamily="49" charset="-128"/>
+                        </a:rPr>
+                        <a:t>&gt;</a:t>
+                      </a:r>
+                      <a:endParaRPr lang="ja-JP" altLang="en-US" sz="1400">
+                        <a:latin typeface="BIZ UDゴシック" panose="020B0400000000000000" pitchFamily="49" charset="-128"/>
+                        <a:ea typeface="BIZ UDゴシック" panose="020B0400000000000000" pitchFamily="49" charset="-128"/>
+                      </a:endParaRPr>
+                    </a:p>
+                  </a:txBody>
+                  <a:tcPr anchor="ctr">
+                    <a:lnL w="12700" cap="flat" cmpd="sng" algn="ctr">
+                      <a:solidFill>
+                        <a:schemeClr val="tx1"/>
+                      </a:solidFill>
+                      <a:prstDash val="solid"/>
+                      <a:round/>
+                      <a:headEnd type="none" w="med" len="med"/>
+                      <a:tailEnd type="none" w="med" len="med"/>
+                    </a:lnL>
+                    <a:lnR w="12700" cap="flat" cmpd="sng" algn="ctr">
+                      <a:solidFill>
+                        <a:schemeClr val="tx1"/>
+                      </a:solidFill>
+                      <a:prstDash val="solid"/>
+                      <a:round/>
+                      <a:headEnd type="none" w="med" len="med"/>
+                      <a:tailEnd type="none" w="med" len="med"/>
+                    </a:lnR>
+                    <a:lnT w="12700" cap="flat" cmpd="sng" algn="ctr">
+                      <a:solidFill>
+                        <a:schemeClr val="tx1"/>
+                      </a:solidFill>
+                      <a:prstDash val="solid"/>
+                      <a:round/>
+                      <a:headEnd type="none" w="med" len="med"/>
+                      <a:tailEnd type="none" w="med" len="med"/>
+                    </a:lnT>
+                    <a:lnB w="12700" cap="flat" cmpd="sng" algn="ctr">
+                      <a:solidFill>
+                        <a:schemeClr val="tx1"/>
+                      </a:solidFill>
+                      <a:prstDash val="solid"/>
+                      <a:round/>
+                      <a:headEnd type="none" w="med" len="med"/>
+                      <a:tailEnd type="none" w="med" len="med"/>
+                    </a:lnB>
+                  </a:tcPr>
+                </a:tc>
+                <a:extLst>
+                  <a:ext uri="{0D108BD9-81ED-4DB2-BD59-A6C34878D82A}">
+                    <a16:rowId xmlns:a16="http://schemas.microsoft.com/office/drawing/2014/main" val="433765498"/>
+                  </a:ext>
+                </a:extLst>
+              </a:tr>
+              <a:tr h="0">
+                <a:tc>
+                  <a:txBody>
+                    <a:bodyPr/>
+                    <a:lstStyle/>
+                    <a:p>
+                      <a:pPr>
+                        <a:buNone/>
+                      </a:pPr>
+                      <a:r>
+                        <a:rPr lang="en-US" altLang="ja-JP" sz="1400">
+                          <a:latin typeface="BIZ UDゴシック" panose="020B0400000000000000" pitchFamily="49" charset="-128"/>
+                          <a:ea typeface="BIZ UDゴシック" panose="020B0400000000000000" pitchFamily="49" charset="-128"/>
+                        </a:rPr>
+                        <a:t>is_temp_low()</a:t>
+                      </a:r>
+                      <a:endParaRPr lang="ja-JP" altLang="en-US" sz="1400">
+                        <a:latin typeface="BIZ UDゴシック" panose="020B0400000000000000" pitchFamily="49" charset="-128"/>
+                        <a:ea typeface="BIZ UDゴシック" panose="020B0400000000000000" pitchFamily="49" charset="-128"/>
+                      </a:endParaRPr>
+                    </a:p>
+                  </a:txBody>
+                  <a:tcPr anchor="ctr">
+                    <a:lnL w="12700" cap="flat" cmpd="sng" algn="ctr">
+                      <a:solidFill>
+                        <a:schemeClr val="tx1"/>
+                      </a:solidFill>
+                      <a:prstDash val="solid"/>
+                      <a:round/>
+                      <a:headEnd type="none" w="med" len="med"/>
+                      <a:tailEnd type="none" w="med" len="med"/>
+                    </a:lnL>
+                    <a:lnR w="12700" cap="flat" cmpd="sng" algn="ctr">
+                      <a:solidFill>
+                        <a:schemeClr val="tx1"/>
+                      </a:solidFill>
+                      <a:prstDash val="solid"/>
+                      <a:round/>
+                      <a:headEnd type="none" w="med" len="med"/>
+                      <a:tailEnd type="none" w="med" len="med"/>
+                    </a:lnR>
+                    <a:lnT w="12700" cap="flat" cmpd="sng" algn="ctr">
+                      <a:solidFill>
+                        <a:schemeClr val="tx1"/>
+                      </a:solidFill>
+                      <a:prstDash val="solid"/>
+                      <a:round/>
+                      <a:headEnd type="none" w="med" len="med"/>
+                      <a:tailEnd type="none" w="med" len="med"/>
+                    </a:lnT>
+                    <a:lnB w="12700" cap="flat" cmpd="sng" algn="ctr">
+                      <a:solidFill>
+                        <a:schemeClr val="tx1"/>
+                      </a:solidFill>
+                      <a:prstDash val="solid"/>
+                      <a:round/>
+                      <a:headEnd type="none" w="med" len="med"/>
+                      <a:tailEnd type="none" w="med" len="med"/>
+                    </a:lnB>
+                  </a:tcPr>
+                </a:tc>
+                <a:tc>
+                  <a:txBody>
+                    <a:bodyPr/>
+                    <a:lstStyle/>
+                    <a:p>
+                      <a:pPr>
+                        <a:buNone/>
+                      </a:pPr>
+                      <a:endParaRPr lang="ja-JP" altLang="en-US" sz="1400">
+                        <a:latin typeface="BIZ UDゴシック" panose="020B0400000000000000" pitchFamily="49" charset="-128"/>
+                        <a:ea typeface="BIZ UDゴシック" panose="020B0400000000000000" pitchFamily="49" charset="-128"/>
+                      </a:endParaRPr>
+                    </a:p>
+                  </a:txBody>
+                  <a:tcPr anchor="ctr">
+                    <a:lnL w="12700" cap="flat" cmpd="sng" algn="ctr">
+                      <a:solidFill>
+                        <a:schemeClr val="tx1"/>
+                      </a:solidFill>
+                      <a:prstDash val="solid"/>
+                      <a:round/>
+                      <a:headEnd type="none" w="med" len="med"/>
+                      <a:tailEnd type="none" w="med" len="med"/>
+                    </a:lnL>
+                    <a:lnR w="12700" cap="flat" cmpd="sng" algn="ctr">
+                      <a:solidFill>
+                        <a:schemeClr val="tx1"/>
+                      </a:solidFill>
+                      <a:prstDash val="solid"/>
+                      <a:round/>
+                      <a:headEnd type="none" w="med" len="med"/>
+                      <a:tailEnd type="none" w="med" len="med"/>
+                    </a:lnR>
+                    <a:lnT w="12700" cap="flat" cmpd="sng" algn="ctr">
+                      <a:solidFill>
+                        <a:schemeClr val="tx1"/>
+                      </a:solidFill>
+                      <a:prstDash val="solid"/>
+                      <a:round/>
+                      <a:headEnd type="none" w="med" len="med"/>
+                      <a:tailEnd type="none" w="med" len="med"/>
+                    </a:lnT>
+                    <a:lnB w="12700" cap="flat" cmpd="sng" algn="ctr">
+                      <a:solidFill>
+                        <a:schemeClr val="tx1"/>
+                      </a:solidFill>
+                      <a:prstDash val="solid"/>
+                      <a:round/>
+                      <a:headEnd type="none" w="med" len="med"/>
+                      <a:tailEnd type="none" w="med" len="med"/>
+                    </a:lnB>
+                  </a:tcPr>
+                </a:tc>
+                <a:tc>
+                  <a:txBody>
+                    <a:bodyPr/>
+                    <a:lstStyle/>
+                    <a:p>
+                      <a:pPr marL="0" marR="0" lvl="0" indent="0" algn="l" defTabSz="914400" rtl="0" eaLnBrk="1" fontAlgn="auto" latinLnBrk="0" hangingPunct="1">
+                        <a:lnSpc>
+                          <a:spcPct val="100000"/>
+                        </a:lnSpc>
+                        <a:spcBef>
+                          <a:spcPts val="0"/>
+                        </a:spcBef>
+                        <a:spcAft>
+                          <a:spcPts val="0"/>
+                        </a:spcAft>
+                        <a:buClrTx/>
+                        <a:buSzTx/>
+                        <a:buFontTx/>
+                        <a:buNone/>
+                        <a:tabLst/>
+                        <a:defRPr/>
+                      </a:pPr>
+                      <a:r>
+                        <a:rPr kumimoji="1" lang="en-US" altLang="ja-JP" sz="1400" b="0" i="0" u="none" strike="noStrike" kern="1200" cap="none" spc="0" normalizeH="0" baseline="0" noProof="0">
+                          <a:ln>
+                            <a:noFill/>
+                          </a:ln>
+                          <a:solidFill>
+                            <a:prstClr val="black"/>
+                          </a:solidFill>
+                          <a:effectLst/>
+                          <a:uLnTx/>
+                          <a:uFillTx/>
+                          <a:latin typeface="BIZ UDゴシック" panose="020B0400000000000000" pitchFamily="49" charset="-128"/>
+                          <a:ea typeface="BIZ UDゴシック" panose="020B0400000000000000" pitchFamily="49" charset="-128"/>
+                          <a:cs typeface="+mn-cs"/>
+                        </a:rPr>
+                        <a:t>python</a:t>
+                      </a:r>
+                    </a:p>
+                  </a:txBody>
+                  <a:tcPr anchor="ctr">
+                    <a:lnL w="12700" cap="flat" cmpd="sng" algn="ctr">
+                      <a:solidFill>
+                        <a:schemeClr val="tx1"/>
+                      </a:solidFill>
+                      <a:prstDash val="solid"/>
+                      <a:round/>
+                      <a:headEnd type="none" w="med" len="med"/>
+                      <a:tailEnd type="none" w="med" len="med"/>
+                    </a:lnL>
+                    <a:lnR w="12700" cap="flat" cmpd="sng" algn="ctr">
+                      <a:solidFill>
+                        <a:schemeClr val="tx1"/>
+                      </a:solidFill>
+                      <a:prstDash val="solid"/>
+                      <a:round/>
+                      <a:headEnd type="none" w="med" len="med"/>
+                      <a:tailEnd type="none" w="med" len="med"/>
+                    </a:lnR>
+                    <a:lnT w="12700" cap="flat" cmpd="sng" algn="ctr">
+                      <a:solidFill>
+                        <a:schemeClr val="tx1"/>
+                      </a:solidFill>
+                      <a:prstDash val="solid"/>
+                      <a:round/>
+                      <a:headEnd type="none" w="med" len="med"/>
+                      <a:tailEnd type="none" w="med" len="med"/>
+                    </a:lnT>
+                    <a:lnB w="12700" cap="flat" cmpd="sng" algn="ctr">
+                      <a:solidFill>
+                        <a:schemeClr val="tx1"/>
+                      </a:solidFill>
+                      <a:prstDash val="solid"/>
+                      <a:round/>
+                      <a:headEnd type="none" w="med" len="med"/>
+                      <a:tailEnd type="none" w="med" len="med"/>
+                    </a:lnB>
+                  </a:tcPr>
+                </a:tc>
+                <a:tc>
+                  <a:txBody>
+                    <a:bodyPr/>
+                    <a:lstStyle/>
+                    <a:p>
+                      <a:pPr marL="0" marR="0" lvl="0" indent="0" algn="l" defTabSz="914400" rtl="0" eaLnBrk="1" fontAlgn="auto" latinLnBrk="0" hangingPunct="1">
+                        <a:lnSpc>
+                          <a:spcPct val="100000"/>
+                        </a:lnSpc>
+                        <a:spcBef>
+                          <a:spcPts val="0"/>
+                        </a:spcBef>
+                        <a:spcAft>
+                          <a:spcPts val="0"/>
+                        </a:spcAft>
+                        <a:buClrTx/>
+                        <a:buSzTx/>
+                        <a:buFontTx/>
+                        <a:buNone/>
+                        <a:tabLst/>
+                        <a:defRPr/>
+                      </a:pPr>
+                      <a:r>
+                        <a:rPr lang="en-US" altLang="ja-JP" sz="1400">
+                          <a:latin typeface="BIZ UDゴシック" panose="020B0400000000000000" pitchFamily="49" charset="-128"/>
+                          <a:ea typeface="BIZ UDゴシック" panose="020B0400000000000000" pitchFamily="49" charset="-128"/>
+                        </a:rPr>
+                        <a:t>Bool</a:t>
+                      </a:r>
+                      <a:endParaRPr lang="ja-JP" altLang="en-US" sz="1400">
+                        <a:latin typeface="BIZ UDゴシック" panose="020B0400000000000000" pitchFamily="49" charset="-128"/>
+                        <a:ea typeface="BIZ UDゴシック" panose="020B0400000000000000" pitchFamily="49" charset="-128"/>
+                      </a:endParaRPr>
+                    </a:p>
+                  </a:txBody>
+                  <a:tcPr anchor="ctr">
+                    <a:lnL w="12700" cap="flat" cmpd="sng" algn="ctr">
+                      <a:solidFill>
+                        <a:schemeClr val="tx1"/>
+                      </a:solidFill>
+                      <a:prstDash val="solid"/>
+                      <a:round/>
+                      <a:headEnd type="none" w="med" len="med"/>
+                      <a:tailEnd type="none" w="med" len="med"/>
+                    </a:lnL>
+                    <a:lnR w="12700" cap="flat" cmpd="sng" algn="ctr">
+                      <a:solidFill>
+                        <a:schemeClr val="tx1"/>
+                      </a:solidFill>
+                      <a:prstDash val="solid"/>
+                      <a:round/>
+                      <a:headEnd type="none" w="med" len="med"/>
+                      <a:tailEnd type="none" w="med" len="med"/>
+                    </a:lnR>
+                    <a:lnT w="12700" cap="flat" cmpd="sng" algn="ctr">
+                      <a:solidFill>
+                        <a:schemeClr val="tx1"/>
+                      </a:solidFill>
+                      <a:prstDash val="solid"/>
+                      <a:round/>
+                      <a:headEnd type="none" w="med" len="med"/>
+                      <a:tailEnd type="none" w="med" len="med"/>
+                    </a:lnT>
+                    <a:lnB w="12700" cap="flat" cmpd="sng" algn="ctr">
+                      <a:solidFill>
+                        <a:schemeClr val="tx1"/>
+                      </a:solidFill>
+                      <a:prstDash val="solid"/>
+                      <a:round/>
+                      <a:headEnd type="none" w="med" len="med"/>
+                      <a:tailEnd type="none" w="med" len="med"/>
+                    </a:lnB>
+                  </a:tcPr>
+                </a:tc>
+                <a:tc>
+                  <a:txBody>
+                    <a:bodyPr/>
+                    <a:lstStyle/>
+                    <a:p>
+                      <a:pPr>
+                        <a:buNone/>
+                      </a:pPr>
+                      <a:endParaRPr lang="ja-JP" altLang="en-US" sz="1400">
+                        <a:latin typeface="BIZ UDゴシック" panose="020B0400000000000000" pitchFamily="49" charset="-128"/>
+                        <a:ea typeface="BIZ UDゴシック" panose="020B0400000000000000" pitchFamily="49" charset="-128"/>
+                      </a:endParaRPr>
+                    </a:p>
+                  </a:txBody>
+                  <a:tcPr anchor="ctr">
+                    <a:lnL w="12700" cap="flat" cmpd="sng" algn="ctr">
+                      <a:solidFill>
+                        <a:schemeClr val="tx1"/>
+                      </a:solidFill>
+                      <a:prstDash val="solid"/>
+                      <a:round/>
+                      <a:headEnd type="none" w="med" len="med"/>
+                      <a:tailEnd type="none" w="med" len="med"/>
+                    </a:lnL>
+                    <a:lnR w="12700" cap="flat" cmpd="sng" algn="ctr">
+                      <a:solidFill>
+                        <a:schemeClr val="tx1"/>
+                      </a:solidFill>
+                      <a:prstDash val="solid"/>
+                      <a:round/>
+                      <a:headEnd type="none" w="med" len="med"/>
+                      <a:tailEnd type="none" w="med" len="med"/>
+                    </a:lnR>
+                    <a:lnT w="12700" cap="flat" cmpd="sng" algn="ctr">
+                      <a:solidFill>
+                        <a:schemeClr val="tx1"/>
+                      </a:solidFill>
+                      <a:prstDash val="solid"/>
+                      <a:round/>
+                      <a:headEnd type="none" w="med" len="med"/>
+                      <a:tailEnd type="none" w="med" len="med"/>
+                    </a:lnT>
+                    <a:lnB w="12700" cap="flat" cmpd="sng" algn="ctr">
+                      <a:solidFill>
+                        <a:schemeClr val="tx1"/>
+                      </a:solidFill>
+                      <a:prstDash val="solid"/>
+                      <a:round/>
+                      <a:headEnd type="none" w="med" len="med"/>
+                      <a:tailEnd type="none" w="med" len="med"/>
+                    </a:lnB>
+                  </a:tcPr>
+                </a:tc>
+                <a:extLst>
+                  <a:ext uri="{0D108BD9-81ED-4DB2-BD59-A6C34878D82A}">
+                    <a16:rowId xmlns:a16="http://schemas.microsoft.com/office/drawing/2014/main" val="572808834"/>
+                  </a:ext>
+                </a:extLst>
+              </a:tr>
+              <a:tr h="0">
+                <a:tc>
+                  <a:txBody>
+                    <a:bodyPr/>
+                    <a:lstStyle/>
+                    <a:p>
+                      <a:pPr>
+                        <a:buNone/>
+                      </a:pPr>
+                      <a:r>
+                        <a:rPr lang="en-US" altLang="ja-JP" sz="1400">
+                          <a:latin typeface="BIZ UDゴシック" panose="020B0400000000000000" pitchFamily="49" charset="-128"/>
+                          <a:ea typeface="BIZ UDゴシック" panose="020B0400000000000000" pitchFamily="49" charset="-128"/>
+                        </a:rPr>
+                        <a:t>is_temp_normal()</a:t>
+                      </a:r>
+                      <a:endParaRPr lang="ja-JP" altLang="en-US" sz="1400">
+                        <a:latin typeface="BIZ UDゴシック" panose="020B0400000000000000" pitchFamily="49" charset="-128"/>
+                        <a:ea typeface="BIZ UDゴシック" panose="020B0400000000000000" pitchFamily="49" charset="-128"/>
+                      </a:endParaRPr>
+                    </a:p>
+                  </a:txBody>
+                  <a:tcPr anchor="ctr">
+                    <a:lnL w="12700" cap="flat" cmpd="sng" algn="ctr">
+                      <a:solidFill>
+                        <a:schemeClr val="tx1"/>
+                      </a:solidFill>
+                      <a:prstDash val="solid"/>
+                      <a:round/>
+                      <a:headEnd type="none" w="med" len="med"/>
+                      <a:tailEnd type="none" w="med" len="med"/>
+                    </a:lnL>
+                    <a:lnR w="12700" cap="flat" cmpd="sng" algn="ctr">
+                      <a:solidFill>
+                        <a:schemeClr val="tx1"/>
+                      </a:solidFill>
+                      <a:prstDash val="solid"/>
+                      <a:round/>
+                      <a:headEnd type="none" w="med" len="med"/>
+                      <a:tailEnd type="none" w="med" len="med"/>
+                    </a:lnR>
+                    <a:lnT w="12700" cap="flat" cmpd="sng" algn="ctr">
+                      <a:solidFill>
+                        <a:schemeClr val="tx1"/>
+                      </a:solidFill>
+                      <a:prstDash val="solid"/>
+                      <a:round/>
+                      <a:headEnd type="none" w="med" len="med"/>
+                      <a:tailEnd type="none" w="med" len="med"/>
+                    </a:lnT>
+                    <a:lnB w="12700" cap="flat" cmpd="sng" algn="ctr">
+                      <a:solidFill>
+                        <a:schemeClr val="tx1"/>
+                      </a:solidFill>
+                      <a:prstDash val="solid"/>
+                      <a:round/>
+                      <a:headEnd type="none" w="med" len="med"/>
+                      <a:tailEnd type="none" w="med" len="med"/>
+                    </a:lnB>
+                  </a:tcPr>
+                </a:tc>
+                <a:tc>
+                  <a:txBody>
+                    <a:bodyPr/>
+                    <a:lstStyle/>
+                    <a:p>
+                      <a:pPr>
+                        <a:buNone/>
+                      </a:pPr>
+                      <a:endParaRPr lang="ja-JP" altLang="en-US" sz="1400">
+                        <a:latin typeface="BIZ UDゴシック" panose="020B0400000000000000" pitchFamily="49" charset="-128"/>
+                        <a:ea typeface="BIZ UDゴシック" panose="020B0400000000000000" pitchFamily="49" charset="-128"/>
+                      </a:endParaRPr>
+                    </a:p>
+                  </a:txBody>
+                  <a:tcPr anchor="ctr">
+                    <a:lnL w="12700" cap="flat" cmpd="sng" algn="ctr">
+                      <a:solidFill>
+                        <a:schemeClr val="tx1"/>
+                      </a:solidFill>
+                      <a:prstDash val="solid"/>
+                      <a:round/>
+                      <a:headEnd type="none" w="med" len="med"/>
+                      <a:tailEnd type="none" w="med" len="med"/>
+                    </a:lnL>
+                    <a:lnR w="12700" cap="flat" cmpd="sng" algn="ctr">
+                      <a:solidFill>
+                        <a:schemeClr val="tx1"/>
+                      </a:solidFill>
+                      <a:prstDash val="solid"/>
+                      <a:round/>
+                      <a:headEnd type="none" w="med" len="med"/>
+                      <a:tailEnd type="none" w="med" len="med"/>
+                    </a:lnR>
+                    <a:lnT w="12700" cap="flat" cmpd="sng" algn="ctr">
+                      <a:solidFill>
+                        <a:schemeClr val="tx1"/>
+                      </a:solidFill>
+                      <a:prstDash val="solid"/>
+                      <a:round/>
+                      <a:headEnd type="none" w="med" len="med"/>
+                      <a:tailEnd type="none" w="med" len="med"/>
+                    </a:lnT>
+                    <a:lnB w="12700" cap="flat" cmpd="sng" algn="ctr">
+                      <a:solidFill>
+                        <a:schemeClr val="tx1"/>
+                      </a:solidFill>
+                      <a:prstDash val="solid"/>
+                      <a:round/>
+                      <a:headEnd type="none" w="med" len="med"/>
+                      <a:tailEnd type="none" w="med" len="med"/>
+                    </a:lnB>
+                  </a:tcPr>
+                </a:tc>
+                <a:tc>
+                  <a:txBody>
+                    <a:bodyPr/>
+                    <a:lstStyle/>
+                    <a:p>
+                      <a:pPr marL="0" marR="0" lvl="0" indent="0" algn="l" defTabSz="914400" rtl="0" eaLnBrk="1" fontAlgn="auto" latinLnBrk="0" hangingPunct="1">
+                        <a:lnSpc>
+                          <a:spcPct val="100000"/>
+                        </a:lnSpc>
+                        <a:spcBef>
+                          <a:spcPts val="0"/>
+                        </a:spcBef>
+                        <a:spcAft>
+                          <a:spcPts val="0"/>
+                        </a:spcAft>
+                        <a:buClrTx/>
+                        <a:buSzTx/>
+                        <a:buFontTx/>
+                        <a:buNone/>
+                        <a:tabLst/>
+                        <a:defRPr/>
+                      </a:pPr>
+                      <a:r>
+                        <a:rPr kumimoji="1" lang="en-US" altLang="ja-JP" sz="1400" b="0" i="0" u="none" strike="noStrike" kern="1200" cap="none" spc="0" normalizeH="0" baseline="0" noProof="0">
+                          <a:ln>
+                            <a:noFill/>
+                          </a:ln>
+                          <a:solidFill>
+                            <a:prstClr val="black"/>
+                          </a:solidFill>
+                          <a:effectLst/>
+                          <a:uLnTx/>
+                          <a:uFillTx/>
+                          <a:latin typeface="BIZ UDゴシック" panose="020B0400000000000000" pitchFamily="49" charset="-128"/>
+                          <a:ea typeface="BIZ UDゴシック" panose="020B0400000000000000" pitchFamily="49" charset="-128"/>
+                          <a:cs typeface="+mn-cs"/>
+                        </a:rPr>
+                        <a:t>python</a:t>
+                      </a:r>
+                    </a:p>
+                  </a:txBody>
+                  <a:tcPr anchor="ctr">
+                    <a:lnL w="12700" cap="flat" cmpd="sng" algn="ctr">
+                      <a:solidFill>
+                        <a:schemeClr val="tx1"/>
+                      </a:solidFill>
+                      <a:prstDash val="solid"/>
+                      <a:round/>
+                      <a:headEnd type="none" w="med" len="med"/>
+                      <a:tailEnd type="none" w="med" len="med"/>
+                    </a:lnL>
+                    <a:lnR w="12700" cap="flat" cmpd="sng" algn="ctr">
+                      <a:solidFill>
+                        <a:schemeClr val="tx1"/>
+                      </a:solidFill>
+                      <a:prstDash val="solid"/>
+                      <a:round/>
+                      <a:headEnd type="none" w="med" len="med"/>
+                      <a:tailEnd type="none" w="med" len="med"/>
+                    </a:lnR>
+                    <a:lnT w="12700" cap="flat" cmpd="sng" algn="ctr">
+                      <a:solidFill>
+                        <a:schemeClr val="tx1"/>
+                      </a:solidFill>
+                      <a:prstDash val="solid"/>
+                      <a:round/>
+                      <a:headEnd type="none" w="med" len="med"/>
+                      <a:tailEnd type="none" w="med" len="med"/>
+                    </a:lnT>
+                    <a:lnB w="12700" cap="flat" cmpd="sng" algn="ctr">
+                      <a:solidFill>
+                        <a:schemeClr val="tx1"/>
+                      </a:solidFill>
+                      <a:prstDash val="solid"/>
+                      <a:round/>
+                      <a:headEnd type="none" w="med" len="med"/>
+                      <a:tailEnd type="none" w="med" len="med"/>
+                    </a:lnB>
+                  </a:tcPr>
+                </a:tc>
+                <a:tc>
+                  <a:txBody>
+                    <a:bodyPr/>
+                    <a:lstStyle/>
+                    <a:p>
+                      <a:pPr marL="0" marR="0" lvl="0" indent="0" algn="l" defTabSz="914400" rtl="0" eaLnBrk="1" fontAlgn="auto" latinLnBrk="0" hangingPunct="1">
+                        <a:lnSpc>
+                          <a:spcPct val="100000"/>
+                        </a:lnSpc>
+                        <a:spcBef>
+                          <a:spcPts val="0"/>
+                        </a:spcBef>
+                        <a:spcAft>
+                          <a:spcPts val="0"/>
+                        </a:spcAft>
+                        <a:buClrTx/>
+                        <a:buSzTx/>
+                        <a:buFontTx/>
+                        <a:buNone/>
+                        <a:tabLst/>
+                        <a:defRPr/>
+                      </a:pPr>
+                      <a:r>
+                        <a:rPr lang="en-US" altLang="ja-JP" sz="1400">
+                          <a:latin typeface="BIZ UDゴシック" panose="020B0400000000000000" pitchFamily="49" charset="-128"/>
+                          <a:ea typeface="BIZ UDゴシック" panose="020B0400000000000000" pitchFamily="49" charset="-128"/>
+                        </a:rPr>
+                        <a:t>Bool</a:t>
+                      </a:r>
+                      <a:endParaRPr lang="ja-JP" altLang="en-US" sz="1400">
+                        <a:latin typeface="BIZ UDゴシック" panose="020B0400000000000000" pitchFamily="49" charset="-128"/>
+                        <a:ea typeface="BIZ UDゴシック" panose="020B0400000000000000" pitchFamily="49" charset="-128"/>
+                      </a:endParaRPr>
+                    </a:p>
+                  </a:txBody>
+                  <a:tcPr anchor="ctr">
+                    <a:lnL w="12700" cap="flat" cmpd="sng" algn="ctr">
+                      <a:solidFill>
+                        <a:schemeClr val="tx1"/>
+                      </a:solidFill>
+                      <a:prstDash val="solid"/>
+                      <a:round/>
+                      <a:headEnd type="none" w="med" len="med"/>
+                      <a:tailEnd type="none" w="med" len="med"/>
+                    </a:lnL>
+                    <a:lnR w="12700" cap="flat" cmpd="sng" algn="ctr">
+                      <a:solidFill>
+                        <a:schemeClr val="tx1"/>
+                      </a:solidFill>
+                      <a:prstDash val="solid"/>
+                      <a:round/>
+                      <a:headEnd type="none" w="med" len="med"/>
+                      <a:tailEnd type="none" w="med" len="med"/>
+                    </a:lnR>
+                    <a:lnT w="12700" cap="flat" cmpd="sng" algn="ctr">
+                      <a:solidFill>
+                        <a:schemeClr val="tx1"/>
+                      </a:solidFill>
+                      <a:prstDash val="solid"/>
+                      <a:round/>
+                      <a:headEnd type="none" w="med" len="med"/>
+                      <a:tailEnd type="none" w="med" len="med"/>
+                    </a:lnT>
+                    <a:lnB w="12700" cap="flat" cmpd="sng" algn="ctr">
+                      <a:solidFill>
+                        <a:schemeClr val="tx1"/>
+                      </a:solidFill>
+                      <a:prstDash val="solid"/>
+                      <a:round/>
+                      <a:headEnd type="none" w="med" len="med"/>
+                      <a:tailEnd type="none" w="med" len="med"/>
+                    </a:lnB>
+                  </a:tcPr>
+                </a:tc>
+                <a:tc>
+                  <a:txBody>
+                    <a:bodyPr/>
+                    <a:lstStyle/>
+                    <a:p>
+                      <a:pPr>
+                        <a:buNone/>
+                      </a:pPr>
+                      <a:endParaRPr lang="ja-JP" altLang="en-US" sz="1400">
+                        <a:latin typeface="BIZ UDゴシック" panose="020B0400000000000000" pitchFamily="49" charset="-128"/>
+                        <a:ea typeface="BIZ UDゴシック" panose="020B0400000000000000" pitchFamily="49" charset="-128"/>
+                      </a:endParaRPr>
+                    </a:p>
+                  </a:txBody>
+                  <a:tcPr anchor="ctr">
+                    <a:lnL w="12700" cap="flat" cmpd="sng" algn="ctr">
+                      <a:solidFill>
+                        <a:schemeClr val="tx1"/>
+                      </a:solidFill>
+                      <a:prstDash val="solid"/>
+                      <a:round/>
+                      <a:headEnd type="none" w="med" len="med"/>
+                      <a:tailEnd type="none" w="med" len="med"/>
+                    </a:lnL>
+                    <a:lnR w="12700" cap="flat" cmpd="sng" algn="ctr">
+                      <a:solidFill>
+                        <a:schemeClr val="tx1"/>
+                      </a:solidFill>
+                      <a:prstDash val="solid"/>
+                      <a:round/>
+                      <a:headEnd type="none" w="med" len="med"/>
+                      <a:tailEnd type="none" w="med" len="med"/>
+                    </a:lnR>
+                    <a:lnT w="12700" cap="flat" cmpd="sng" algn="ctr">
+                      <a:solidFill>
+                        <a:schemeClr val="tx1"/>
+                      </a:solidFill>
+                      <a:prstDash val="solid"/>
+                      <a:round/>
+                      <a:headEnd type="none" w="med" len="med"/>
+                      <a:tailEnd type="none" w="med" len="med"/>
+                    </a:lnT>
+                    <a:lnB w="12700" cap="flat" cmpd="sng" algn="ctr">
+                      <a:solidFill>
+                        <a:schemeClr val="tx1"/>
+                      </a:solidFill>
+                      <a:prstDash val="solid"/>
+                      <a:round/>
+                      <a:headEnd type="none" w="med" len="med"/>
+                      <a:tailEnd type="none" w="med" len="med"/>
+                    </a:lnB>
+                  </a:tcPr>
+                </a:tc>
+                <a:extLst>
+                  <a:ext uri="{0D108BD9-81ED-4DB2-BD59-A6C34878D82A}">
+                    <a16:rowId xmlns:a16="http://schemas.microsoft.com/office/drawing/2014/main" val="1080130541"/>
+                  </a:ext>
+                </a:extLst>
+              </a:tr>
+              <a:tr h="0">
+                <a:tc>
+                  <a:txBody>
+                    <a:bodyPr/>
+                    <a:lstStyle/>
+                    <a:p>
+                      <a:pPr>
+                        <a:buNone/>
+                      </a:pPr>
+                      <a:endParaRPr lang="ja-JP" altLang="en-US" sz="1400">
+                        <a:latin typeface="BIZ UDゴシック" panose="020B0400000000000000" pitchFamily="49" charset="-128"/>
+                        <a:ea typeface="BIZ UDゴシック" panose="020B0400000000000000" pitchFamily="49" charset="-128"/>
+                      </a:endParaRPr>
+                    </a:p>
+                  </a:txBody>
+                  <a:tcPr anchor="ctr">
+                    <a:lnL w="12700" cap="flat" cmpd="sng" algn="ctr">
+                      <a:solidFill>
+                        <a:schemeClr val="tx1"/>
+                      </a:solidFill>
+                      <a:prstDash val="solid"/>
+                      <a:round/>
+                      <a:headEnd type="none" w="med" len="med"/>
+                      <a:tailEnd type="none" w="med" len="med"/>
+                    </a:lnL>
+                    <a:lnR w="12700" cap="flat" cmpd="sng" algn="ctr">
+                      <a:solidFill>
+                        <a:schemeClr val="tx1"/>
+                      </a:solidFill>
+                      <a:prstDash val="solid"/>
+                      <a:round/>
+                      <a:headEnd type="none" w="med" len="med"/>
+                      <a:tailEnd type="none" w="med" len="med"/>
+                    </a:lnR>
+                    <a:lnT w="12700" cap="flat" cmpd="sng" algn="ctr">
+                      <a:solidFill>
+                        <a:schemeClr val="tx1"/>
+                      </a:solidFill>
+                      <a:prstDash val="solid"/>
+                      <a:round/>
+                      <a:headEnd type="none" w="med" len="med"/>
+                      <a:tailEnd type="none" w="med" len="med"/>
+                    </a:lnT>
+                    <a:lnB w="12700" cap="flat" cmpd="sng" algn="ctr">
+                      <a:solidFill>
+                        <a:schemeClr val="tx1"/>
+                      </a:solidFill>
+                      <a:prstDash val="solid"/>
+                      <a:round/>
+                      <a:headEnd type="none" w="med" len="med"/>
+                      <a:tailEnd type="none" w="med" len="med"/>
+                    </a:lnB>
+                  </a:tcPr>
+                </a:tc>
+                <a:tc>
+                  <a:txBody>
+                    <a:bodyPr/>
+                    <a:lstStyle/>
+                    <a:p>
+                      <a:pPr>
+                        <a:buNone/>
+                      </a:pPr>
+                      <a:endParaRPr lang="ja-JP" altLang="en-US" sz="1400">
+                        <a:latin typeface="BIZ UDゴシック" panose="020B0400000000000000" pitchFamily="49" charset="-128"/>
+                        <a:ea typeface="BIZ UDゴシック" panose="020B0400000000000000" pitchFamily="49" charset="-128"/>
+                      </a:endParaRPr>
+                    </a:p>
+                  </a:txBody>
+                  <a:tcPr anchor="ctr">
+                    <a:lnL w="12700" cap="flat" cmpd="sng" algn="ctr">
+                      <a:solidFill>
+                        <a:schemeClr val="tx1"/>
+                      </a:solidFill>
+                      <a:prstDash val="solid"/>
+                      <a:round/>
+                      <a:headEnd type="none" w="med" len="med"/>
+                      <a:tailEnd type="none" w="med" len="med"/>
+                    </a:lnL>
+                    <a:lnR w="12700" cap="flat" cmpd="sng" algn="ctr">
+                      <a:solidFill>
+                        <a:schemeClr val="tx1"/>
+                      </a:solidFill>
+                      <a:prstDash val="solid"/>
+                      <a:round/>
+                      <a:headEnd type="none" w="med" len="med"/>
+                      <a:tailEnd type="none" w="med" len="med"/>
+                    </a:lnR>
+                    <a:lnT w="12700" cap="flat" cmpd="sng" algn="ctr">
+                      <a:solidFill>
+                        <a:schemeClr val="tx1"/>
+                      </a:solidFill>
+                      <a:prstDash val="solid"/>
+                      <a:round/>
+                      <a:headEnd type="none" w="med" len="med"/>
+                      <a:tailEnd type="none" w="med" len="med"/>
+                    </a:lnT>
+                    <a:lnB w="12700" cap="flat" cmpd="sng" algn="ctr">
+                      <a:solidFill>
+                        <a:schemeClr val="tx1"/>
+                      </a:solidFill>
+                      <a:prstDash val="solid"/>
+                      <a:round/>
+                      <a:headEnd type="none" w="med" len="med"/>
+                      <a:tailEnd type="none" w="med" len="med"/>
+                    </a:lnB>
+                  </a:tcPr>
+                </a:tc>
+                <a:tc>
+                  <a:txBody>
+                    <a:bodyPr/>
+                    <a:lstStyle/>
+                    <a:p>
+                      <a:pPr>
+                        <a:buNone/>
+                      </a:pPr>
+                      <a:endParaRPr lang="ja-JP" altLang="en-US" sz="1400">
+                        <a:latin typeface="BIZ UDゴシック" panose="020B0400000000000000" pitchFamily="49" charset="-128"/>
+                        <a:ea typeface="BIZ UDゴシック" panose="020B0400000000000000" pitchFamily="49" charset="-128"/>
+                      </a:endParaRPr>
+                    </a:p>
+                  </a:txBody>
+                  <a:tcPr anchor="ctr">
+                    <a:lnL w="12700" cap="flat" cmpd="sng" algn="ctr">
+                      <a:solidFill>
+                        <a:schemeClr val="tx1"/>
+                      </a:solidFill>
+                      <a:prstDash val="solid"/>
+                      <a:round/>
+                      <a:headEnd type="none" w="med" len="med"/>
+                      <a:tailEnd type="none" w="med" len="med"/>
+                    </a:lnL>
+                    <a:lnR w="12700" cap="flat" cmpd="sng" algn="ctr">
+                      <a:solidFill>
+                        <a:schemeClr val="tx1"/>
+                      </a:solidFill>
+                      <a:prstDash val="solid"/>
+                      <a:round/>
+                      <a:headEnd type="none" w="med" len="med"/>
+                      <a:tailEnd type="none" w="med" len="med"/>
+                    </a:lnR>
+                    <a:lnT w="12700" cap="flat" cmpd="sng" algn="ctr">
+                      <a:solidFill>
+                        <a:schemeClr val="tx1"/>
+                      </a:solidFill>
+                      <a:prstDash val="solid"/>
+                      <a:round/>
+                      <a:headEnd type="none" w="med" len="med"/>
+                      <a:tailEnd type="none" w="med" len="med"/>
+                    </a:lnT>
+                    <a:lnB w="12700" cap="flat" cmpd="sng" algn="ctr">
+                      <a:solidFill>
+                        <a:schemeClr val="tx1"/>
+                      </a:solidFill>
+                      <a:prstDash val="solid"/>
+                      <a:round/>
+                      <a:headEnd type="none" w="med" len="med"/>
+                      <a:tailEnd type="none" w="med" len="med"/>
+                    </a:lnB>
+                  </a:tcPr>
+                </a:tc>
+                <a:tc>
+                  <a:txBody>
+                    <a:bodyPr/>
+                    <a:lstStyle/>
+                    <a:p>
+                      <a:pPr>
+                        <a:buNone/>
+                      </a:pPr>
+                      <a:endParaRPr lang="ja-JP" altLang="en-US" sz="1400">
+                        <a:latin typeface="BIZ UDゴシック" panose="020B0400000000000000" pitchFamily="49" charset="-128"/>
+                        <a:ea typeface="BIZ UDゴシック" panose="020B0400000000000000" pitchFamily="49" charset="-128"/>
+                      </a:endParaRPr>
+                    </a:p>
+                  </a:txBody>
+                  <a:tcPr anchor="ctr">
+                    <a:lnL w="12700" cap="flat" cmpd="sng" algn="ctr">
+                      <a:solidFill>
+                        <a:schemeClr val="tx1"/>
+                      </a:solidFill>
+                      <a:prstDash val="solid"/>
+                      <a:round/>
+                      <a:headEnd type="none" w="med" len="med"/>
+                      <a:tailEnd type="none" w="med" len="med"/>
+                    </a:lnL>
+                    <a:lnR w="12700" cap="flat" cmpd="sng" algn="ctr">
+                      <a:solidFill>
+                        <a:schemeClr val="tx1"/>
+                      </a:solidFill>
+                      <a:prstDash val="solid"/>
+                      <a:round/>
+                      <a:headEnd type="none" w="med" len="med"/>
+                      <a:tailEnd type="none" w="med" len="med"/>
+                    </a:lnR>
+                    <a:lnT w="12700" cap="flat" cmpd="sng" algn="ctr">
+                      <a:solidFill>
+                        <a:schemeClr val="tx1"/>
+                      </a:solidFill>
+                      <a:prstDash val="solid"/>
+                      <a:round/>
+                      <a:headEnd type="none" w="med" len="med"/>
+                      <a:tailEnd type="none" w="med" len="med"/>
+                    </a:lnT>
+                    <a:lnB w="12700" cap="flat" cmpd="sng" algn="ctr">
+                      <a:solidFill>
+                        <a:schemeClr val="tx1"/>
+                      </a:solidFill>
+                      <a:prstDash val="solid"/>
+                      <a:round/>
+                      <a:headEnd type="none" w="med" len="med"/>
+                      <a:tailEnd type="none" w="med" len="med"/>
+                    </a:lnB>
+                  </a:tcPr>
+                </a:tc>
+                <a:tc>
+                  <a:txBody>
+                    <a:bodyPr/>
+                    <a:lstStyle/>
+                    <a:p>
+                      <a:pPr>
+                        <a:buNone/>
+                      </a:pPr>
+                      <a:endParaRPr lang="ja-JP" altLang="en-US" sz="1400">
+                        <a:latin typeface="BIZ UDゴシック" panose="020B0400000000000000" pitchFamily="49" charset="-128"/>
+                        <a:ea typeface="BIZ UDゴシック" panose="020B0400000000000000" pitchFamily="49" charset="-128"/>
+                      </a:endParaRPr>
+                    </a:p>
+                  </a:txBody>
+                  <a:tcPr anchor="ctr">
+                    <a:lnL w="12700" cap="flat" cmpd="sng" algn="ctr">
+                      <a:solidFill>
+                        <a:schemeClr val="tx1"/>
+                      </a:solidFill>
+                      <a:prstDash val="solid"/>
+                      <a:round/>
+                      <a:headEnd type="none" w="med" len="med"/>
+                      <a:tailEnd type="none" w="med" len="med"/>
+                    </a:lnL>
+                    <a:lnR w="12700" cap="flat" cmpd="sng" algn="ctr">
+                      <a:solidFill>
+                        <a:schemeClr val="tx1"/>
+                      </a:solidFill>
+                      <a:prstDash val="solid"/>
+                      <a:round/>
+                      <a:headEnd type="none" w="med" len="med"/>
+                      <a:tailEnd type="none" w="med" len="med"/>
+                    </a:lnR>
+                    <a:lnT w="12700" cap="flat" cmpd="sng" algn="ctr">
+                      <a:solidFill>
+                        <a:schemeClr val="tx1"/>
+                      </a:solidFill>
+                      <a:prstDash val="solid"/>
+                      <a:round/>
+                      <a:headEnd type="none" w="med" len="med"/>
+                      <a:tailEnd type="none" w="med" len="med"/>
+                    </a:lnT>
+                    <a:lnB w="12700" cap="flat" cmpd="sng" algn="ctr">
+                      <a:solidFill>
+                        <a:schemeClr val="tx1"/>
+                      </a:solidFill>
+                      <a:prstDash val="solid"/>
+                      <a:round/>
+                      <a:headEnd type="none" w="med" len="med"/>
+                      <a:tailEnd type="none" w="med" len="med"/>
+                    </a:lnB>
+                  </a:tcPr>
+                </a:tc>
+                <a:extLst>
+                  <a:ext uri="{0D108BD9-81ED-4DB2-BD59-A6C34878D82A}">
+                    <a16:rowId xmlns:a16="http://schemas.microsoft.com/office/drawing/2014/main" val="350799095"/>
+                  </a:ext>
+                </a:extLst>
+              </a:tr>
+              <a:tr h="0">
+                <a:tc>
+                  <a:txBody>
+                    <a:bodyPr/>
+                    <a:lstStyle/>
+                    <a:p>
+                      <a:pPr>
+                        <a:buNone/>
+                      </a:pPr>
+                      <a:endParaRPr lang="ja-JP" altLang="en-US" sz="1400">
+                        <a:latin typeface="BIZ UDゴシック" panose="020B0400000000000000" pitchFamily="49" charset="-128"/>
+                        <a:ea typeface="BIZ UDゴシック" panose="020B0400000000000000" pitchFamily="49" charset="-128"/>
+                      </a:endParaRPr>
+                    </a:p>
+                  </a:txBody>
+                  <a:tcPr anchor="ctr">
+                    <a:lnL w="12700" cap="flat" cmpd="sng" algn="ctr">
+                      <a:solidFill>
+                        <a:schemeClr val="tx1"/>
+                      </a:solidFill>
+                      <a:prstDash val="solid"/>
+                      <a:round/>
+                      <a:headEnd type="none" w="med" len="med"/>
+                      <a:tailEnd type="none" w="med" len="med"/>
+                    </a:lnL>
+                    <a:lnR w="12700" cap="flat" cmpd="sng" algn="ctr">
+                      <a:solidFill>
+                        <a:schemeClr val="tx1"/>
+                      </a:solidFill>
+                      <a:prstDash val="solid"/>
+                      <a:round/>
+                      <a:headEnd type="none" w="med" len="med"/>
+                      <a:tailEnd type="none" w="med" len="med"/>
+                    </a:lnR>
+                    <a:lnT w="12700" cap="flat" cmpd="sng" algn="ctr">
+                      <a:solidFill>
+                        <a:schemeClr val="tx1"/>
+                      </a:solidFill>
+                      <a:prstDash val="solid"/>
+                      <a:round/>
+                      <a:headEnd type="none" w="med" len="med"/>
+                      <a:tailEnd type="none" w="med" len="med"/>
+                    </a:lnT>
+                    <a:lnB w="12700" cap="flat" cmpd="sng" algn="ctr">
+                      <a:solidFill>
+                        <a:schemeClr val="tx1"/>
+                      </a:solidFill>
+                      <a:prstDash val="solid"/>
+                      <a:round/>
+                      <a:headEnd type="none" w="med" len="med"/>
+                      <a:tailEnd type="none" w="med" len="med"/>
+                    </a:lnB>
+                  </a:tcPr>
+                </a:tc>
+                <a:tc>
+                  <a:txBody>
+                    <a:bodyPr/>
+                    <a:lstStyle/>
+                    <a:p>
+                      <a:pPr>
+                        <a:buNone/>
+                      </a:pPr>
+                      <a:endParaRPr lang="en-US" altLang="ja-JP" sz="1400">
+                        <a:latin typeface="BIZ UDゴシック" panose="020B0400000000000000" pitchFamily="49" charset="-128"/>
+                        <a:ea typeface="BIZ UDゴシック" panose="020B0400000000000000" pitchFamily="49" charset="-128"/>
+                      </a:endParaRPr>
+                    </a:p>
+                  </a:txBody>
+                  <a:tcPr anchor="ctr">
+                    <a:lnL w="12700" cap="flat" cmpd="sng" algn="ctr">
+                      <a:solidFill>
+                        <a:schemeClr val="tx1"/>
+                      </a:solidFill>
+                      <a:prstDash val="solid"/>
+                      <a:round/>
+                      <a:headEnd type="none" w="med" len="med"/>
+                      <a:tailEnd type="none" w="med" len="med"/>
+                    </a:lnL>
+                    <a:lnR w="12700" cap="flat" cmpd="sng" algn="ctr">
+                      <a:solidFill>
+                        <a:schemeClr val="tx1"/>
+                      </a:solidFill>
+                      <a:prstDash val="solid"/>
+                      <a:round/>
+                      <a:headEnd type="none" w="med" len="med"/>
+                      <a:tailEnd type="none" w="med" len="med"/>
+                    </a:lnR>
+                    <a:lnT w="12700" cap="flat" cmpd="sng" algn="ctr">
+                      <a:solidFill>
+                        <a:schemeClr val="tx1"/>
+                      </a:solidFill>
+                      <a:prstDash val="solid"/>
+                      <a:round/>
+                      <a:headEnd type="none" w="med" len="med"/>
+                      <a:tailEnd type="none" w="med" len="med"/>
+                    </a:lnT>
+                    <a:lnB w="12700" cap="flat" cmpd="sng" algn="ctr">
+                      <a:solidFill>
+                        <a:schemeClr val="tx1"/>
+                      </a:solidFill>
+                      <a:prstDash val="solid"/>
+                      <a:round/>
+                      <a:headEnd type="none" w="med" len="med"/>
+                      <a:tailEnd type="none" w="med" len="med"/>
+                    </a:lnB>
+                  </a:tcPr>
+                </a:tc>
+                <a:tc>
+                  <a:txBody>
+                    <a:bodyPr/>
+                    <a:lstStyle/>
+                    <a:p>
+                      <a:pPr>
+                        <a:buNone/>
+                      </a:pPr>
+                      <a:endParaRPr lang="en-US" altLang="ja-JP" sz="1400">
+                        <a:latin typeface="BIZ UDゴシック" panose="020B0400000000000000" pitchFamily="49" charset="-128"/>
+                        <a:ea typeface="BIZ UDゴシック" panose="020B0400000000000000" pitchFamily="49" charset="-128"/>
+                      </a:endParaRPr>
+                    </a:p>
+                  </a:txBody>
+                  <a:tcPr anchor="ctr">
+                    <a:lnL w="12700" cap="flat" cmpd="sng" algn="ctr">
+                      <a:solidFill>
+                        <a:schemeClr val="tx1"/>
+                      </a:solidFill>
+                      <a:prstDash val="solid"/>
+                      <a:round/>
+                      <a:headEnd type="none" w="med" len="med"/>
+                      <a:tailEnd type="none" w="med" len="med"/>
+                    </a:lnL>
+                    <a:lnR w="12700" cap="flat" cmpd="sng" algn="ctr">
+                      <a:solidFill>
+                        <a:schemeClr val="tx1"/>
+                      </a:solidFill>
+                      <a:prstDash val="solid"/>
+                      <a:round/>
+                      <a:headEnd type="none" w="med" len="med"/>
+                      <a:tailEnd type="none" w="med" len="med"/>
+                    </a:lnR>
+                    <a:lnT w="12700" cap="flat" cmpd="sng" algn="ctr">
+                      <a:solidFill>
+                        <a:schemeClr val="tx1"/>
+                      </a:solidFill>
+                      <a:prstDash val="solid"/>
+                      <a:round/>
+                      <a:headEnd type="none" w="med" len="med"/>
+                      <a:tailEnd type="none" w="med" len="med"/>
+                    </a:lnT>
+                    <a:lnB w="12700" cap="flat" cmpd="sng" algn="ctr">
+                      <a:solidFill>
+                        <a:schemeClr val="tx1"/>
+                      </a:solidFill>
+                      <a:prstDash val="solid"/>
+                      <a:round/>
+                      <a:headEnd type="none" w="med" len="med"/>
+                      <a:tailEnd type="none" w="med" len="med"/>
+                    </a:lnB>
+                  </a:tcPr>
+                </a:tc>
+                <a:tc>
+                  <a:txBody>
+                    <a:bodyPr/>
+                    <a:lstStyle/>
+                    <a:p>
+                      <a:pPr>
+                        <a:buNone/>
+                      </a:pPr>
+                      <a:endParaRPr lang="ja-JP" altLang="en-US" sz="1400">
+                        <a:latin typeface="BIZ UDゴシック" panose="020B0400000000000000" pitchFamily="49" charset="-128"/>
+                        <a:ea typeface="BIZ UDゴシック" panose="020B0400000000000000" pitchFamily="49" charset="-128"/>
+                      </a:endParaRPr>
+                    </a:p>
+                  </a:txBody>
+                  <a:tcPr anchor="ctr">
+                    <a:lnL w="12700" cap="flat" cmpd="sng" algn="ctr">
+                      <a:solidFill>
+                        <a:schemeClr val="tx1"/>
+                      </a:solidFill>
+                      <a:prstDash val="solid"/>
+                      <a:round/>
+                      <a:headEnd type="none" w="med" len="med"/>
+                      <a:tailEnd type="none" w="med" len="med"/>
+                    </a:lnL>
+                    <a:lnR w="12700" cap="flat" cmpd="sng" algn="ctr">
+                      <a:solidFill>
+                        <a:schemeClr val="tx1"/>
+                      </a:solidFill>
+                      <a:prstDash val="solid"/>
+                      <a:round/>
+                      <a:headEnd type="none" w="med" len="med"/>
+                      <a:tailEnd type="none" w="med" len="med"/>
+                    </a:lnR>
+                    <a:lnT w="12700" cap="flat" cmpd="sng" algn="ctr">
+                      <a:solidFill>
+                        <a:schemeClr val="tx1"/>
+                      </a:solidFill>
+                      <a:prstDash val="solid"/>
+                      <a:round/>
+                      <a:headEnd type="none" w="med" len="med"/>
+                      <a:tailEnd type="none" w="med" len="med"/>
+                    </a:lnT>
+                    <a:lnB w="12700" cap="flat" cmpd="sng" algn="ctr">
+                      <a:solidFill>
+                        <a:schemeClr val="tx1"/>
+                      </a:solidFill>
+                      <a:prstDash val="solid"/>
+                      <a:round/>
+                      <a:headEnd type="none" w="med" len="med"/>
+                      <a:tailEnd type="none" w="med" len="med"/>
+                    </a:lnB>
+                  </a:tcPr>
+                </a:tc>
+                <a:tc>
+                  <a:txBody>
+                    <a:bodyPr/>
+                    <a:lstStyle/>
+                    <a:p>
+                      <a:pPr>
+                        <a:buNone/>
+                      </a:pPr>
+                      <a:endParaRPr lang="ja-JP" altLang="en-US" sz="1400">
+                        <a:latin typeface="BIZ UDゴシック" panose="020B0400000000000000" pitchFamily="49" charset="-128"/>
+                        <a:ea typeface="BIZ UDゴシック" panose="020B0400000000000000" pitchFamily="49" charset="-128"/>
+                      </a:endParaRPr>
+                    </a:p>
+                  </a:txBody>
+                  <a:tcPr anchor="ctr">
+                    <a:lnL w="12700" cap="flat" cmpd="sng" algn="ctr">
+                      <a:solidFill>
+                        <a:schemeClr val="tx1"/>
+                      </a:solidFill>
+                      <a:prstDash val="solid"/>
+                      <a:round/>
+                      <a:headEnd type="none" w="med" len="med"/>
+                      <a:tailEnd type="none" w="med" len="med"/>
+                    </a:lnL>
+                    <a:lnR w="12700" cap="flat" cmpd="sng" algn="ctr">
+                      <a:solidFill>
+                        <a:schemeClr val="tx1"/>
+                      </a:solidFill>
+                      <a:prstDash val="solid"/>
+                      <a:round/>
+                      <a:headEnd type="none" w="med" len="med"/>
+                      <a:tailEnd type="none" w="med" len="med"/>
+                    </a:lnR>
+                    <a:lnT w="12700" cap="flat" cmpd="sng" algn="ctr">
+                      <a:solidFill>
+                        <a:schemeClr val="tx1"/>
+                      </a:solidFill>
+                      <a:prstDash val="solid"/>
+                      <a:round/>
+                      <a:headEnd type="none" w="med" len="med"/>
+                      <a:tailEnd type="none" w="med" len="med"/>
+                    </a:lnT>
+                    <a:lnB w="12700" cap="flat" cmpd="sng" algn="ctr">
+                      <a:solidFill>
+                        <a:schemeClr val="tx1"/>
+                      </a:solidFill>
+                      <a:prstDash val="solid"/>
+                      <a:round/>
+                      <a:headEnd type="none" w="med" len="med"/>
+                      <a:tailEnd type="none" w="med" len="med"/>
+                    </a:lnB>
+                  </a:tcPr>
+                </a:tc>
+                <a:extLst>
+                  <a:ext uri="{0D108BD9-81ED-4DB2-BD59-A6C34878D82A}">
+                    <a16:rowId xmlns:a16="http://schemas.microsoft.com/office/drawing/2014/main" val="245562205"/>
+                  </a:ext>
+                </a:extLst>
+              </a:tr>
+            </a:tbl>
+          </a:graphicData>
+        </a:graphic>
+      </p:graphicFrame>
+    </p:spTree>
+    <p:extLst>
+      <p:ext uri="{BB962C8B-B14F-4D97-AF65-F5344CB8AC3E}">
+        <p14:creationId xmlns:p14="http://schemas.microsoft.com/office/powerpoint/2010/main" val="2111349220"/>
       </p:ext>
     </p:extLst>
   </p:cSld>

--- a/Specification/基本仕様.pptx
+++ b/Specification/基本仕様.pptx
@@ -5606,7 +5606,7 @@
           <p:nvPr>
             <p:extLst>
               <p:ext uri="{D42A27DB-BD31-4B8C-83A1-F6EECF244321}">
-                <p14:modId xmlns:p14="http://schemas.microsoft.com/office/powerpoint/2010/main" val="4265653889"/>
+                <p14:modId xmlns:p14="http://schemas.microsoft.com/office/powerpoint/2010/main" val="3285984987"/>
               </p:ext>
             </p:extLst>
           </p:nvPr>
@@ -7164,7 +7164,7 @@
                           <a:latin typeface="BIZ UDゴシック" panose="020B0400000000000000" pitchFamily="49" charset="-128"/>
                           <a:ea typeface="BIZ UDゴシック" panose="020B0400000000000000" pitchFamily="49" charset="-128"/>
                         </a:rPr>
-                        <a:t>ｓ高温閾値</a:t>
+                        <a:t>高温閾値</a:t>
                       </a:r>
                     </a:p>
                   </a:txBody>
@@ -19765,14 +19765,14 @@
           <p:nvPr>
             <p:extLst>
               <p:ext uri="{D42A27DB-BD31-4B8C-83A1-F6EECF244321}">
-                <p14:modId xmlns:p14="http://schemas.microsoft.com/office/powerpoint/2010/main" val="3188965736"/>
+                <p14:modId xmlns:p14="http://schemas.microsoft.com/office/powerpoint/2010/main" val="2197362660"/>
               </p:ext>
             </p:extLst>
           </p:nvPr>
         </p:nvGraphicFramePr>
         <p:xfrm>
           <a:off x="673768" y="1101733"/>
-          <a:ext cx="9465990" cy="1828800"/>
+          <a:ext cx="11044430" cy="1828800"/>
         </p:xfrm>
         <a:graphic>
           <a:graphicData uri="http://schemas.openxmlformats.org/drawingml/2006/table">
@@ -19781,14 +19781,14 @@
                 <a:tableStyleId>{912C8C85-51F0-491E-9774-3900AFEF0FD7}</a:tableStyleId>
               </a:tblPr>
               <a:tblGrid>
-                <a:gridCol w="1692000">
+                <a:gridCol w="2052000">
                   <a:extLst>
                     <a:ext uri="{9D8B030D-6E8A-4147-A177-3AD203B41FA5}">
                       <a16:colId xmlns:a16="http://schemas.microsoft.com/office/drawing/2014/main" val="6935548"/>
                     </a:ext>
                   </a:extLst>
                 </a:gridCol>
-                <a:gridCol w="1229560">
+                <a:gridCol w="2448000">
                   <a:extLst>
                     <a:ext uri="{9D8B030D-6E8A-4147-A177-3AD203B41FA5}">
                       <a16:colId xmlns:a16="http://schemas.microsoft.com/office/drawing/2014/main" val="2184599737"/>
@@ -20173,6 +20173,20 @@
                       <a:pPr>
                         <a:buNone/>
                       </a:pPr>
+                      <a:r>
+                        <a:rPr lang="en-US" altLang="ja-JP" sz="1400">
+                          <a:latin typeface="BIZ UDゴシック" panose="020B0400000000000000" pitchFamily="49" charset="-128"/>
+                          <a:ea typeface="BIZ UDゴシック" panose="020B0400000000000000" pitchFamily="49" charset="-128"/>
+                        </a:rPr>
+                        <a:t>S2:</a:t>
+                      </a:r>
+                      <a:r>
+                        <a:rPr lang="ja-JP" altLang="en-US" sz="1400">
+                          <a:latin typeface="BIZ UDゴシック" panose="020B0400000000000000" pitchFamily="49" charset="-128"/>
+                          <a:ea typeface="BIZ UDゴシック" panose="020B0400000000000000" pitchFamily="49" charset="-128"/>
+                        </a:rPr>
+                        <a:t>高温制御 に移るべきか</a:t>
+                      </a:r>
                       <a:endParaRPr lang="en-US" sz="1400">
                         <a:latin typeface="BIZ UDゴシック" panose="020B0400000000000000" pitchFamily="49" charset="-128"/>
                         <a:ea typeface="BIZ UDゴシック" panose="020B0400000000000000" pitchFamily="49" charset="-128"/>
@@ -20362,6 +20376,17 @@
                           <a:ea typeface="BIZ UDゴシック" panose="020B0400000000000000" pitchFamily="49" charset="-128"/>
                         </a:rPr>
                         <a:t>&gt;</a:t>
+                      </a:r>
+                      <a:r>
+                        <a:rPr lang="ja-JP" altLang="en-US" sz="1400" b="0" i="0" u="none" strike="noStrike">
+                          <a:solidFill>
+                            <a:srgbClr val="000000"/>
+                          </a:solidFill>
+                          <a:effectLst/>
+                          <a:latin typeface="BIZ UDゴシック" panose="020B0400000000000000" pitchFamily="49" charset="-128"/>
+                          <a:ea typeface="BIZ UDゴシック" panose="020B0400000000000000" pitchFamily="49" charset="-128"/>
+                        </a:rPr>
+                        <a:t>高温閾値</a:t>
                       </a:r>
                       <a:endParaRPr lang="ja-JP" altLang="en-US" sz="1400">
                         <a:latin typeface="BIZ UDゴシック" panose="020B0400000000000000" pitchFamily="49" charset="-128"/>
@@ -20430,59 +20455,6 @@
                         </a:rPr>
                         <a:t>is_temp_low()</a:t>
                       </a:r>
-                      <a:endParaRPr lang="ja-JP" altLang="en-US" sz="1400">
-                        <a:latin typeface="BIZ UDゴシック" panose="020B0400000000000000" pitchFamily="49" charset="-128"/>
-                        <a:ea typeface="BIZ UDゴシック" panose="020B0400000000000000" pitchFamily="49" charset="-128"/>
-                      </a:endParaRPr>
-                    </a:p>
-                  </a:txBody>
-                  <a:tcPr anchor="ctr">
-                    <a:lnL w="12700" cap="flat" cmpd="sng" algn="ctr">
-                      <a:solidFill>
-                        <a:schemeClr val="tx1"/>
-                      </a:solidFill>
-                      <a:prstDash val="solid"/>
-                      <a:round/>
-                      <a:headEnd type="none" w="med" len="med"/>
-                      <a:tailEnd type="none" w="med" len="med"/>
-                    </a:lnL>
-                    <a:lnR w="12700" cap="flat" cmpd="sng" algn="ctr">
-                      <a:solidFill>
-                        <a:schemeClr val="tx1"/>
-                      </a:solidFill>
-                      <a:prstDash val="solid"/>
-                      <a:round/>
-                      <a:headEnd type="none" w="med" len="med"/>
-                      <a:tailEnd type="none" w="med" len="med"/>
-                    </a:lnR>
-                    <a:lnT w="12700" cap="flat" cmpd="sng" algn="ctr">
-                      <a:solidFill>
-                        <a:schemeClr val="tx1"/>
-                      </a:solidFill>
-                      <a:prstDash val="solid"/>
-                      <a:round/>
-                      <a:headEnd type="none" w="med" len="med"/>
-                      <a:tailEnd type="none" w="med" len="med"/>
-                    </a:lnT>
-                    <a:lnB w="12700" cap="flat" cmpd="sng" algn="ctr">
-                      <a:solidFill>
-                        <a:schemeClr val="tx1"/>
-                      </a:solidFill>
-                      <a:prstDash val="solid"/>
-                      <a:round/>
-                      <a:headEnd type="none" w="med" len="med"/>
-                      <a:tailEnd type="none" w="med" len="med"/>
-                    </a:lnB>
-                  </a:tcPr>
-                </a:tc>
-                <a:tc>
-                  <a:txBody>
-                    <a:bodyPr/>
-                    <a:lstStyle/>
-                    <a:p>
-                      <a:pPr>
-                        <a:buNone/>
-                      </a:pPr>
                       <a:endParaRPr lang="ja-JP" altLang="en-US" sz="1400">
                         <a:latin typeface="BIZ UDゴシック" panose="020B0400000000000000" pitchFamily="49" charset="-128"/>
                         <a:ea typeface="BIZ UDゴシック" panose="020B0400000000000000" pitchFamily="49" charset="-128"/>
@@ -20565,8 +20537,39 @@
                           <a:ea typeface="BIZ UDゴシック" panose="020B0400000000000000" pitchFamily="49" charset="-128"/>
                           <a:cs typeface="+mn-cs"/>
                         </a:rPr>
-                        <a:t>python</a:t>
-                      </a:r>
+                        <a:t>S3:</a:t>
+                      </a:r>
+                      <a:r>
+                        <a:rPr kumimoji="1" lang="ja-JP" altLang="en-US" sz="1400" b="0" i="0" u="none" strike="noStrike" kern="1200" cap="none" spc="0" normalizeH="0" baseline="0" noProof="0">
+                          <a:ln>
+                            <a:noFill/>
+                          </a:ln>
+                          <a:solidFill>
+                            <a:prstClr val="black"/>
+                          </a:solidFill>
+                          <a:effectLst/>
+                          <a:uLnTx/>
+                          <a:uFillTx/>
+                          <a:latin typeface="BIZ UDゴシック" panose="020B0400000000000000" pitchFamily="49" charset="-128"/>
+                          <a:ea typeface="BIZ UDゴシック" panose="020B0400000000000000" pitchFamily="49" charset="-128"/>
+                          <a:cs typeface="+mn-cs"/>
+                        </a:rPr>
+                        <a:t>低温制御 に移るべきか</a:t>
+                      </a:r>
+                      <a:endParaRPr kumimoji="1" lang="en-US" altLang="ja-JP" sz="1400" b="0" i="0" u="none" strike="noStrike" kern="1200" cap="none" spc="0" normalizeH="0" baseline="0" noProof="0">
+                        <a:ln>
+                          <a:noFill/>
+                        </a:ln>
+                        <a:solidFill>
+                          <a:prstClr val="black"/>
+                        </a:solidFill>
+                        <a:effectLst/>
+                        <a:uLnTx/>
+                        <a:uFillTx/>
+                        <a:latin typeface="BIZ UDゴシック" panose="020B0400000000000000" pitchFamily="49" charset="-128"/>
+                        <a:ea typeface="BIZ UDゴシック" panose="020B0400000000000000" pitchFamily="49" charset="-128"/>
+                        <a:cs typeface="+mn-cs"/>
+                      </a:endParaRPr>
                     </a:p>
                   </a:txBody>
                   <a:tcPr anchor="ctr">
@@ -20631,189 +20634,22 @@
                         <a:defRPr/>
                       </a:pPr>
                       <a:r>
-                        <a:rPr lang="en-US" altLang="ja-JP" sz="1400">
-                          <a:latin typeface="BIZ UDゴシック" panose="020B0400000000000000" pitchFamily="49" charset="-128"/>
-                          <a:ea typeface="BIZ UDゴシック" panose="020B0400000000000000" pitchFamily="49" charset="-128"/>
-                        </a:rPr>
-                        <a:t>Bool</a:t>
-                      </a:r>
-                      <a:endParaRPr lang="ja-JP" altLang="en-US" sz="1400">
-                        <a:latin typeface="BIZ UDゴシック" panose="020B0400000000000000" pitchFamily="49" charset="-128"/>
-                        <a:ea typeface="BIZ UDゴシック" panose="020B0400000000000000" pitchFamily="49" charset="-128"/>
-                      </a:endParaRPr>
-                    </a:p>
-                  </a:txBody>
-                  <a:tcPr anchor="ctr">
-                    <a:lnL w="12700" cap="flat" cmpd="sng" algn="ctr">
-                      <a:solidFill>
-                        <a:schemeClr val="tx1"/>
-                      </a:solidFill>
-                      <a:prstDash val="solid"/>
-                      <a:round/>
-                      <a:headEnd type="none" w="med" len="med"/>
-                      <a:tailEnd type="none" w="med" len="med"/>
-                    </a:lnL>
-                    <a:lnR w="12700" cap="flat" cmpd="sng" algn="ctr">
-                      <a:solidFill>
-                        <a:schemeClr val="tx1"/>
-                      </a:solidFill>
-                      <a:prstDash val="solid"/>
-                      <a:round/>
-                      <a:headEnd type="none" w="med" len="med"/>
-                      <a:tailEnd type="none" w="med" len="med"/>
-                    </a:lnR>
-                    <a:lnT w="12700" cap="flat" cmpd="sng" algn="ctr">
-                      <a:solidFill>
-                        <a:schemeClr val="tx1"/>
-                      </a:solidFill>
-                      <a:prstDash val="solid"/>
-                      <a:round/>
-                      <a:headEnd type="none" w="med" len="med"/>
-                      <a:tailEnd type="none" w="med" len="med"/>
-                    </a:lnT>
-                    <a:lnB w="12700" cap="flat" cmpd="sng" algn="ctr">
-                      <a:solidFill>
-                        <a:schemeClr val="tx1"/>
-                      </a:solidFill>
-                      <a:prstDash val="solid"/>
-                      <a:round/>
-                      <a:headEnd type="none" w="med" len="med"/>
-                      <a:tailEnd type="none" w="med" len="med"/>
-                    </a:lnB>
-                  </a:tcPr>
-                </a:tc>
-                <a:tc>
-                  <a:txBody>
-                    <a:bodyPr/>
-                    <a:lstStyle/>
-                    <a:p>
-                      <a:pPr>
-                        <a:buNone/>
-                      </a:pPr>
-                      <a:endParaRPr lang="ja-JP" altLang="en-US" sz="1400">
-                        <a:latin typeface="BIZ UDゴシック" panose="020B0400000000000000" pitchFamily="49" charset="-128"/>
-                        <a:ea typeface="BIZ UDゴシック" panose="020B0400000000000000" pitchFamily="49" charset="-128"/>
-                      </a:endParaRPr>
-                    </a:p>
-                  </a:txBody>
-                  <a:tcPr anchor="ctr">
-                    <a:lnL w="12700" cap="flat" cmpd="sng" algn="ctr">
-                      <a:solidFill>
-                        <a:schemeClr val="tx1"/>
-                      </a:solidFill>
-                      <a:prstDash val="solid"/>
-                      <a:round/>
-                      <a:headEnd type="none" w="med" len="med"/>
-                      <a:tailEnd type="none" w="med" len="med"/>
-                    </a:lnL>
-                    <a:lnR w="12700" cap="flat" cmpd="sng" algn="ctr">
-                      <a:solidFill>
-                        <a:schemeClr val="tx1"/>
-                      </a:solidFill>
-                      <a:prstDash val="solid"/>
-                      <a:round/>
-                      <a:headEnd type="none" w="med" len="med"/>
-                      <a:tailEnd type="none" w="med" len="med"/>
-                    </a:lnR>
-                    <a:lnT w="12700" cap="flat" cmpd="sng" algn="ctr">
-                      <a:solidFill>
-                        <a:schemeClr val="tx1"/>
-                      </a:solidFill>
-                      <a:prstDash val="solid"/>
-                      <a:round/>
-                      <a:headEnd type="none" w="med" len="med"/>
-                      <a:tailEnd type="none" w="med" len="med"/>
-                    </a:lnT>
-                    <a:lnB w="12700" cap="flat" cmpd="sng" algn="ctr">
-                      <a:solidFill>
-                        <a:schemeClr val="tx1"/>
-                      </a:solidFill>
-                      <a:prstDash val="solid"/>
-                      <a:round/>
-                      <a:headEnd type="none" w="med" len="med"/>
-                      <a:tailEnd type="none" w="med" len="med"/>
-                    </a:lnB>
-                  </a:tcPr>
-                </a:tc>
-                <a:extLst>
-                  <a:ext uri="{0D108BD9-81ED-4DB2-BD59-A6C34878D82A}">
-                    <a16:rowId xmlns:a16="http://schemas.microsoft.com/office/drawing/2014/main" val="572808834"/>
-                  </a:ext>
-                </a:extLst>
-              </a:tr>
-              <a:tr h="0">
-                <a:tc>
-                  <a:txBody>
-                    <a:bodyPr/>
-                    <a:lstStyle/>
-                    <a:p>
-                      <a:pPr>
-                        <a:buNone/>
-                      </a:pPr>
-                      <a:r>
-                        <a:rPr lang="en-US" altLang="ja-JP" sz="1400">
-                          <a:latin typeface="BIZ UDゴシック" panose="020B0400000000000000" pitchFamily="49" charset="-128"/>
-                          <a:ea typeface="BIZ UDゴシック" panose="020B0400000000000000" pitchFamily="49" charset="-128"/>
-                        </a:rPr>
-                        <a:t>is_temp_normal()</a:t>
-                      </a:r>
-                      <a:endParaRPr lang="ja-JP" altLang="en-US" sz="1400">
-                        <a:latin typeface="BIZ UDゴシック" panose="020B0400000000000000" pitchFamily="49" charset="-128"/>
-                        <a:ea typeface="BIZ UDゴシック" panose="020B0400000000000000" pitchFamily="49" charset="-128"/>
-                      </a:endParaRPr>
-                    </a:p>
-                  </a:txBody>
-                  <a:tcPr anchor="ctr">
-                    <a:lnL w="12700" cap="flat" cmpd="sng" algn="ctr">
-                      <a:solidFill>
-                        <a:schemeClr val="tx1"/>
-                      </a:solidFill>
-                      <a:prstDash val="solid"/>
-                      <a:round/>
-                      <a:headEnd type="none" w="med" len="med"/>
-                      <a:tailEnd type="none" w="med" len="med"/>
-                    </a:lnL>
-                    <a:lnR w="12700" cap="flat" cmpd="sng" algn="ctr">
-                      <a:solidFill>
-                        <a:schemeClr val="tx1"/>
-                      </a:solidFill>
-                      <a:prstDash val="solid"/>
-                      <a:round/>
-                      <a:headEnd type="none" w="med" len="med"/>
-                      <a:tailEnd type="none" w="med" len="med"/>
-                    </a:lnR>
-                    <a:lnT w="12700" cap="flat" cmpd="sng" algn="ctr">
-                      <a:solidFill>
-                        <a:schemeClr val="tx1"/>
-                      </a:solidFill>
-                      <a:prstDash val="solid"/>
-                      <a:round/>
-                      <a:headEnd type="none" w="med" len="med"/>
-                      <a:tailEnd type="none" w="med" len="med"/>
-                    </a:lnT>
-                    <a:lnB w="12700" cap="flat" cmpd="sng" algn="ctr">
-                      <a:solidFill>
-                        <a:schemeClr val="tx1"/>
-                      </a:solidFill>
-                      <a:prstDash val="solid"/>
-                      <a:round/>
-                      <a:headEnd type="none" w="med" len="med"/>
-                      <a:tailEnd type="none" w="med" len="med"/>
-                    </a:lnB>
-                  </a:tcPr>
-                </a:tc>
-                <a:tc>
-                  <a:txBody>
-                    <a:bodyPr/>
-                    <a:lstStyle/>
-                    <a:p>
-                      <a:pPr>
-                        <a:buNone/>
-                      </a:pPr>
-                      <a:endParaRPr lang="ja-JP" altLang="en-US" sz="1400">
-                        <a:latin typeface="BIZ UDゴシック" panose="020B0400000000000000" pitchFamily="49" charset="-128"/>
-                        <a:ea typeface="BIZ UDゴシック" panose="020B0400000000000000" pitchFamily="49" charset="-128"/>
-                      </a:endParaRPr>
+                        <a:rPr kumimoji="1" lang="en-US" altLang="ja-JP" sz="1400" b="0" i="0" u="none" strike="noStrike" kern="1200" cap="none" spc="0" normalizeH="0" baseline="0" noProof="0">
+                          <a:ln>
+                            <a:noFill/>
+                          </a:ln>
+                          <a:solidFill>
+                            <a:prstClr val="black"/>
+                          </a:solidFill>
+                          <a:effectLst/>
+                          <a:uLnTx/>
+                          <a:uFillTx/>
+                          <a:latin typeface="BIZ UDゴシック" panose="020B0400000000000000" pitchFamily="49" charset="-128"/>
+                          <a:ea typeface="BIZ UDゴシック" panose="020B0400000000000000" pitchFamily="49" charset="-128"/>
+                          <a:cs typeface="+mn-cs"/>
+                        </a:rPr>
+                        <a:t>python</a:t>
+                      </a:r>
                     </a:p>
                   </a:txBody>
                   <a:tcPr anchor="ctr">
@@ -20878,22 +20714,16 @@
                         <a:defRPr/>
                       </a:pPr>
                       <a:r>
-                        <a:rPr kumimoji="1" lang="en-US" altLang="ja-JP" sz="1400" b="0" i="0" u="none" strike="noStrike" kern="1200" cap="none" spc="0" normalizeH="0" baseline="0" noProof="0">
-                          <a:ln>
-                            <a:noFill/>
-                          </a:ln>
-                          <a:solidFill>
-                            <a:prstClr val="black"/>
-                          </a:solidFill>
-                          <a:effectLst/>
-                          <a:uLnTx/>
-                          <a:uFillTx/>
-                          <a:latin typeface="BIZ UDゴシック" panose="020B0400000000000000" pitchFamily="49" charset="-128"/>
-                          <a:ea typeface="BIZ UDゴシック" panose="020B0400000000000000" pitchFamily="49" charset="-128"/>
-                          <a:cs typeface="+mn-cs"/>
-                        </a:rPr>
-                        <a:t>python</a:t>
-                      </a:r>
+                        <a:rPr lang="en-US" altLang="ja-JP" sz="1400">
+                          <a:latin typeface="BIZ UDゴシック" panose="020B0400000000000000" pitchFamily="49" charset="-128"/>
+                          <a:ea typeface="BIZ UDゴシック" panose="020B0400000000000000" pitchFamily="49" charset="-128"/>
+                        </a:rPr>
+                        <a:t>Bool</a:t>
+                      </a:r>
+                      <a:endParaRPr lang="ja-JP" altLang="en-US" sz="1400">
+                        <a:latin typeface="BIZ UDゴシック" panose="020B0400000000000000" pitchFamily="49" charset="-128"/>
+                        <a:ea typeface="BIZ UDゴシック" panose="020B0400000000000000" pitchFamily="49" charset="-128"/>
+                      </a:endParaRPr>
                     </a:p>
                   </a:txBody>
                   <a:tcPr anchor="ctr">
@@ -20962,7 +20792,25 @@
                           <a:latin typeface="BIZ UDゴシック" panose="020B0400000000000000" pitchFamily="49" charset="-128"/>
                           <a:ea typeface="BIZ UDゴシック" panose="020B0400000000000000" pitchFamily="49" charset="-128"/>
                         </a:rPr>
-                        <a:t>Bool</a:t>
+                        <a:t>TRUE:</a:t>
+                      </a:r>
+                      <a:r>
+                        <a:rPr lang="ja-JP" altLang="en-US" sz="1400">
+                          <a:latin typeface="BIZ UDゴシック" panose="020B0400000000000000" pitchFamily="49" charset="-128"/>
+                          <a:ea typeface="BIZ UDゴシック" panose="020B0400000000000000" pitchFamily="49" charset="-128"/>
+                        </a:rPr>
+                        <a:t>入力温度＜低温</a:t>
+                      </a:r>
+                      <a:r>
+                        <a:rPr lang="ja-JP" altLang="en-US" sz="1400" b="0" i="0" u="none" strike="noStrike">
+                          <a:solidFill>
+                            <a:srgbClr val="000000"/>
+                          </a:solidFill>
+                          <a:effectLst/>
+                          <a:latin typeface="BIZ UDゴシック" panose="020B0400000000000000" pitchFamily="49" charset="-128"/>
+                          <a:ea typeface="BIZ UDゴシック" panose="020B0400000000000000" pitchFamily="49" charset="-128"/>
+                        </a:rPr>
+                        <a:t>閾値</a:t>
                       </a:r>
                       <a:endParaRPr lang="ja-JP" altLang="en-US" sz="1400">
                         <a:latin typeface="BIZ UDゴシック" panose="020B0400000000000000" pitchFamily="49" charset="-128"/>
@@ -21009,6 +20857,13 @@
                     </a:lnB>
                   </a:tcPr>
                 </a:tc>
+                <a:extLst>
+                  <a:ext uri="{0D108BD9-81ED-4DB2-BD59-A6C34878D82A}">
+                    <a16:rowId xmlns:a16="http://schemas.microsoft.com/office/drawing/2014/main" val="572808834"/>
+                  </a:ext>
+                </a:extLst>
+              </a:tr>
+              <a:tr h="0">
                 <a:tc>
                   <a:txBody>
                     <a:bodyPr/>
@@ -21017,6 +20872,399 @@
                       <a:pPr>
                         <a:buNone/>
                       </a:pPr>
+                      <a:r>
+                        <a:rPr lang="en-US" altLang="ja-JP" sz="1400">
+                          <a:latin typeface="BIZ UDゴシック" panose="020B0400000000000000" pitchFamily="49" charset="-128"/>
+                          <a:ea typeface="BIZ UDゴシック" panose="020B0400000000000000" pitchFamily="49" charset="-128"/>
+                        </a:rPr>
+                        <a:t>is_temp_normal()</a:t>
+                      </a:r>
+                      <a:endParaRPr lang="ja-JP" altLang="en-US" sz="1400">
+                        <a:latin typeface="BIZ UDゴシック" panose="020B0400000000000000" pitchFamily="49" charset="-128"/>
+                        <a:ea typeface="BIZ UDゴシック" panose="020B0400000000000000" pitchFamily="49" charset="-128"/>
+                      </a:endParaRPr>
+                    </a:p>
+                  </a:txBody>
+                  <a:tcPr anchor="ctr">
+                    <a:lnL w="12700" cap="flat" cmpd="sng" algn="ctr">
+                      <a:solidFill>
+                        <a:schemeClr val="tx1"/>
+                      </a:solidFill>
+                      <a:prstDash val="solid"/>
+                      <a:round/>
+                      <a:headEnd type="none" w="med" len="med"/>
+                      <a:tailEnd type="none" w="med" len="med"/>
+                    </a:lnL>
+                    <a:lnR w="12700" cap="flat" cmpd="sng" algn="ctr">
+                      <a:solidFill>
+                        <a:schemeClr val="tx1"/>
+                      </a:solidFill>
+                      <a:prstDash val="solid"/>
+                      <a:round/>
+                      <a:headEnd type="none" w="med" len="med"/>
+                      <a:tailEnd type="none" w="med" len="med"/>
+                    </a:lnR>
+                    <a:lnT w="12700" cap="flat" cmpd="sng" algn="ctr">
+                      <a:solidFill>
+                        <a:schemeClr val="tx1"/>
+                      </a:solidFill>
+                      <a:prstDash val="solid"/>
+                      <a:round/>
+                      <a:headEnd type="none" w="med" len="med"/>
+                      <a:tailEnd type="none" w="med" len="med"/>
+                    </a:lnT>
+                    <a:lnB w="12700" cap="flat" cmpd="sng" algn="ctr">
+                      <a:solidFill>
+                        <a:schemeClr val="tx1"/>
+                      </a:solidFill>
+                      <a:prstDash val="solid"/>
+                      <a:round/>
+                      <a:headEnd type="none" w="med" len="med"/>
+                      <a:tailEnd type="none" w="med" len="med"/>
+                    </a:lnB>
+                  </a:tcPr>
+                </a:tc>
+                <a:tc>
+                  <a:txBody>
+                    <a:bodyPr/>
+                    <a:lstStyle/>
+                    <a:p>
+                      <a:pPr marL="0" marR="0" lvl="0" indent="0" algn="l" defTabSz="914400" rtl="0" eaLnBrk="1" fontAlgn="auto" latinLnBrk="0" hangingPunct="1">
+                        <a:lnSpc>
+                          <a:spcPct val="100000"/>
+                        </a:lnSpc>
+                        <a:spcBef>
+                          <a:spcPts val="0"/>
+                        </a:spcBef>
+                        <a:spcAft>
+                          <a:spcPts val="0"/>
+                        </a:spcAft>
+                        <a:buClrTx/>
+                        <a:buSzTx/>
+                        <a:buFontTx/>
+                        <a:buNone/>
+                        <a:tabLst/>
+                        <a:defRPr/>
+                      </a:pPr>
+                      <a:r>
+                        <a:rPr kumimoji="1" lang="en-US" altLang="ja-JP" sz="1400" b="0" i="0" u="none" strike="noStrike" kern="1200" cap="none" spc="0" normalizeH="0" baseline="0" noProof="0">
+                          <a:ln>
+                            <a:noFill/>
+                          </a:ln>
+                          <a:solidFill>
+                            <a:prstClr val="black"/>
+                          </a:solidFill>
+                          <a:effectLst/>
+                          <a:uLnTx/>
+                          <a:uFillTx/>
+                          <a:latin typeface="BIZ UDゴシック" panose="020B0400000000000000" pitchFamily="49" charset="-128"/>
+                          <a:ea typeface="BIZ UDゴシック" panose="020B0400000000000000" pitchFamily="49" charset="-128"/>
+                          <a:cs typeface="+mn-cs"/>
+                        </a:rPr>
+                        <a:t>S1:</a:t>
+                      </a:r>
+                      <a:r>
+                        <a:rPr kumimoji="1" lang="ja-JP" altLang="en-US" sz="1400" b="0" i="0" u="none" strike="noStrike" kern="1200" cap="none" spc="0" normalizeH="0" baseline="0" noProof="0">
+                          <a:ln>
+                            <a:noFill/>
+                          </a:ln>
+                          <a:solidFill>
+                            <a:prstClr val="black"/>
+                          </a:solidFill>
+                          <a:effectLst/>
+                          <a:uLnTx/>
+                          <a:uFillTx/>
+                          <a:latin typeface="BIZ UDゴシック" panose="020B0400000000000000" pitchFamily="49" charset="-128"/>
+                          <a:ea typeface="BIZ UDゴシック" panose="020B0400000000000000" pitchFamily="49" charset="-128"/>
+                          <a:cs typeface="+mn-cs"/>
+                        </a:rPr>
+                        <a:t>通常監視 に戻るべきか</a:t>
+                      </a:r>
+                      <a:endParaRPr kumimoji="1" lang="en-US" altLang="ja-JP" sz="1400" b="0" i="0" u="none" strike="noStrike" kern="1200" cap="none" spc="0" normalizeH="0" baseline="0" noProof="0">
+                        <a:ln>
+                          <a:noFill/>
+                        </a:ln>
+                        <a:solidFill>
+                          <a:prstClr val="black"/>
+                        </a:solidFill>
+                        <a:effectLst/>
+                        <a:uLnTx/>
+                        <a:uFillTx/>
+                        <a:latin typeface="BIZ UDゴシック" panose="020B0400000000000000" pitchFamily="49" charset="-128"/>
+                        <a:ea typeface="BIZ UDゴシック" panose="020B0400000000000000" pitchFamily="49" charset="-128"/>
+                        <a:cs typeface="+mn-cs"/>
+                      </a:endParaRPr>
+                    </a:p>
+                  </a:txBody>
+                  <a:tcPr anchor="ctr">
+                    <a:lnL w="12700" cap="flat" cmpd="sng" algn="ctr">
+                      <a:solidFill>
+                        <a:schemeClr val="tx1"/>
+                      </a:solidFill>
+                      <a:prstDash val="solid"/>
+                      <a:round/>
+                      <a:headEnd type="none" w="med" len="med"/>
+                      <a:tailEnd type="none" w="med" len="med"/>
+                    </a:lnL>
+                    <a:lnR w="12700" cap="flat" cmpd="sng" algn="ctr">
+                      <a:solidFill>
+                        <a:schemeClr val="tx1"/>
+                      </a:solidFill>
+                      <a:prstDash val="solid"/>
+                      <a:round/>
+                      <a:headEnd type="none" w="med" len="med"/>
+                      <a:tailEnd type="none" w="med" len="med"/>
+                    </a:lnR>
+                    <a:lnT w="12700" cap="flat" cmpd="sng" algn="ctr">
+                      <a:solidFill>
+                        <a:schemeClr val="tx1"/>
+                      </a:solidFill>
+                      <a:prstDash val="solid"/>
+                      <a:round/>
+                      <a:headEnd type="none" w="med" len="med"/>
+                      <a:tailEnd type="none" w="med" len="med"/>
+                    </a:lnT>
+                    <a:lnB w="12700" cap="flat" cmpd="sng" algn="ctr">
+                      <a:solidFill>
+                        <a:schemeClr val="tx1"/>
+                      </a:solidFill>
+                      <a:prstDash val="solid"/>
+                      <a:round/>
+                      <a:headEnd type="none" w="med" len="med"/>
+                      <a:tailEnd type="none" w="med" len="med"/>
+                    </a:lnB>
+                  </a:tcPr>
+                </a:tc>
+                <a:tc>
+                  <a:txBody>
+                    <a:bodyPr/>
+                    <a:lstStyle/>
+                    <a:p>
+                      <a:pPr marL="0" marR="0" lvl="0" indent="0" algn="l" defTabSz="914400" rtl="0" eaLnBrk="1" fontAlgn="auto" latinLnBrk="0" hangingPunct="1">
+                        <a:lnSpc>
+                          <a:spcPct val="100000"/>
+                        </a:lnSpc>
+                        <a:spcBef>
+                          <a:spcPts val="0"/>
+                        </a:spcBef>
+                        <a:spcAft>
+                          <a:spcPts val="0"/>
+                        </a:spcAft>
+                        <a:buClrTx/>
+                        <a:buSzTx/>
+                        <a:buFontTx/>
+                        <a:buNone/>
+                        <a:tabLst/>
+                        <a:defRPr/>
+                      </a:pPr>
+                      <a:r>
+                        <a:rPr kumimoji="1" lang="en-US" altLang="ja-JP" sz="1400" b="0" i="0" u="none" strike="noStrike" kern="1200" cap="none" spc="0" normalizeH="0" baseline="0" noProof="0">
+                          <a:ln>
+                            <a:noFill/>
+                          </a:ln>
+                          <a:solidFill>
+                            <a:prstClr val="black"/>
+                          </a:solidFill>
+                          <a:effectLst/>
+                          <a:uLnTx/>
+                          <a:uFillTx/>
+                          <a:latin typeface="BIZ UDゴシック" panose="020B0400000000000000" pitchFamily="49" charset="-128"/>
+                          <a:ea typeface="BIZ UDゴシック" panose="020B0400000000000000" pitchFamily="49" charset="-128"/>
+                          <a:cs typeface="+mn-cs"/>
+                        </a:rPr>
+                        <a:t>python</a:t>
+                      </a:r>
+                    </a:p>
+                  </a:txBody>
+                  <a:tcPr anchor="ctr">
+                    <a:lnL w="12700" cap="flat" cmpd="sng" algn="ctr">
+                      <a:solidFill>
+                        <a:schemeClr val="tx1"/>
+                      </a:solidFill>
+                      <a:prstDash val="solid"/>
+                      <a:round/>
+                      <a:headEnd type="none" w="med" len="med"/>
+                      <a:tailEnd type="none" w="med" len="med"/>
+                    </a:lnL>
+                    <a:lnR w="12700" cap="flat" cmpd="sng" algn="ctr">
+                      <a:solidFill>
+                        <a:schemeClr val="tx1"/>
+                      </a:solidFill>
+                      <a:prstDash val="solid"/>
+                      <a:round/>
+                      <a:headEnd type="none" w="med" len="med"/>
+                      <a:tailEnd type="none" w="med" len="med"/>
+                    </a:lnR>
+                    <a:lnT w="12700" cap="flat" cmpd="sng" algn="ctr">
+                      <a:solidFill>
+                        <a:schemeClr val="tx1"/>
+                      </a:solidFill>
+                      <a:prstDash val="solid"/>
+                      <a:round/>
+                      <a:headEnd type="none" w="med" len="med"/>
+                      <a:tailEnd type="none" w="med" len="med"/>
+                    </a:lnT>
+                    <a:lnB w="12700" cap="flat" cmpd="sng" algn="ctr">
+                      <a:solidFill>
+                        <a:schemeClr val="tx1"/>
+                      </a:solidFill>
+                      <a:prstDash val="solid"/>
+                      <a:round/>
+                      <a:headEnd type="none" w="med" len="med"/>
+                      <a:tailEnd type="none" w="med" len="med"/>
+                    </a:lnB>
+                  </a:tcPr>
+                </a:tc>
+                <a:tc>
+                  <a:txBody>
+                    <a:bodyPr/>
+                    <a:lstStyle/>
+                    <a:p>
+                      <a:pPr marL="0" marR="0" lvl="0" indent="0" algn="l" defTabSz="914400" rtl="0" eaLnBrk="1" fontAlgn="auto" latinLnBrk="0" hangingPunct="1">
+                        <a:lnSpc>
+                          <a:spcPct val="100000"/>
+                        </a:lnSpc>
+                        <a:spcBef>
+                          <a:spcPts val="0"/>
+                        </a:spcBef>
+                        <a:spcAft>
+                          <a:spcPts val="0"/>
+                        </a:spcAft>
+                        <a:buClrTx/>
+                        <a:buSzTx/>
+                        <a:buFontTx/>
+                        <a:buNone/>
+                        <a:tabLst/>
+                        <a:defRPr/>
+                      </a:pPr>
+                      <a:r>
+                        <a:rPr lang="en-US" altLang="ja-JP" sz="1400">
+                          <a:latin typeface="BIZ UDゴシック" panose="020B0400000000000000" pitchFamily="49" charset="-128"/>
+                          <a:ea typeface="BIZ UDゴシック" panose="020B0400000000000000" pitchFamily="49" charset="-128"/>
+                        </a:rPr>
+                        <a:t>Bool</a:t>
+                      </a:r>
+                      <a:endParaRPr lang="ja-JP" altLang="en-US" sz="1400">
+                        <a:latin typeface="BIZ UDゴシック" panose="020B0400000000000000" pitchFamily="49" charset="-128"/>
+                        <a:ea typeface="BIZ UDゴシック" panose="020B0400000000000000" pitchFamily="49" charset="-128"/>
+                      </a:endParaRPr>
+                    </a:p>
+                  </a:txBody>
+                  <a:tcPr anchor="ctr">
+                    <a:lnL w="12700" cap="flat" cmpd="sng" algn="ctr">
+                      <a:solidFill>
+                        <a:schemeClr val="tx1"/>
+                      </a:solidFill>
+                      <a:prstDash val="solid"/>
+                      <a:round/>
+                      <a:headEnd type="none" w="med" len="med"/>
+                      <a:tailEnd type="none" w="med" len="med"/>
+                    </a:lnL>
+                    <a:lnR w="12700" cap="flat" cmpd="sng" algn="ctr">
+                      <a:solidFill>
+                        <a:schemeClr val="tx1"/>
+                      </a:solidFill>
+                      <a:prstDash val="solid"/>
+                      <a:round/>
+                      <a:headEnd type="none" w="med" len="med"/>
+                      <a:tailEnd type="none" w="med" len="med"/>
+                    </a:lnR>
+                    <a:lnT w="12700" cap="flat" cmpd="sng" algn="ctr">
+                      <a:solidFill>
+                        <a:schemeClr val="tx1"/>
+                      </a:solidFill>
+                      <a:prstDash val="solid"/>
+                      <a:round/>
+                      <a:headEnd type="none" w="med" len="med"/>
+                      <a:tailEnd type="none" w="med" len="med"/>
+                    </a:lnT>
+                    <a:lnB w="12700" cap="flat" cmpd="sng" algn="ctr">
+                      <a:solidFill>
+                        <a:schemeClr val="tx1"/>
+                      </a:solidFill>
+                      <a:prstDash val="solid"/>
+                      <a:round/>
+                      <a:headEnd type="none" w="med" len="med"/>
+                      <a:tailEnd type="none" w="med" len="med"/>
+                    </a:lnB>
+                  </a:tcPr>
+                </a:tc>
+                <a:tc>
+                  <a:txBody>
+                    <a:bodyPr/>
+                    <a:lstStyle/>
+                    <a:p>
+                      <a:pPr marL="0" marR="0" lvl="0" indent="0" algn="l" defTabSz="914400" rtl="0" eaLnBrk="1" fontAlgn="auto" latinLnBrk="0" hangingPunct="1">
+                        <a:lnSpc>
+                          <a:spcPct val="100000"/>
+                        </a:lnSpc>
+                        <a:spcBef>
+                          <a:spcPts val="0"/>
+                        </a:spcBef>
+                        <a:spcAft>
+                          <a:spcPts val="0"/>
+                        </a:spcAft>
+                        <a:buClrTx/>
+                        <a:buSzTx/>
+                        <a:buFontTx/>
+                        <a:buNone/>
+                        <a:tabLst/>
+                        <a:defRPr/>
+                      </a:pPr>
+                      <a:r>
+                        <a:rPr lang="en-US" altLang="ja-JP" sz="1400">
+                          <a:latin typeface="BIZ UDゴシック" panose="020B0400000000000000" pitchFamily="49" charset="-128"/>
+                          <a:ea typeface="BIZ UDゴシック" panose="020B0400000000000000" pitchFamily="49" charset="-128"/>
+                        </a:rPr>
+                        <a:t>TRUE:</a:t>
+                      </a:r>
+                      <a:r>
+                        <a:rPr lang="ja-JP" altLang="en-US" sz="1400">
+                          <a:latin typeface="BIZ UDゴシック" panose="020B0400000000000000" pitchFamily="49" charset="-128"/>
+                          <a:ea typeface="BIZ UDゴシック" panose="020B0400000000000000" pitchFamily="49" charset="-128"/>
+                        </a:rPr>
+                        <a:t>入力温度</a:t>
+                      </a:r>
+                      <a:r>
+                        <a:rPr lang="en-US" altLang="ja-JP" sz="1400">
+                          <a:latin typeface="BIZ UDゴシック" panose="020B0400000000000000" pitchFamily="49" charset="-128"/>
+                          <a:ea typeface="BIZ UDゴシック" panose="020B0400000000000000" pitchFamily="49" charset="-128"/>
+                        </a:rPr>
+                        <a:t>=</a:t>
+                      </a:r>
+                      <a:r>
+                        <a:rPr lang="ja-JP" altLang="en-US" sz="1400" b="0" i="0" u="none" strike="noStrike">
+                          <a:solidFill>
+                            <a:srgbClr val="000000"/>
+                          </a:solidFill>
+                          <a:effectLst/>
+                          <a:latin typeface="BIZ UDゴシック" panose="020B0400000000000000" pitchFamily="49" charset="-128"/>
+                          <a:ea typeface="BIZ UDゴシック" panose="020B0400000000000000" pitchFamily="49" charset="-128"/>
+                        </a:rPr>
+                        <a:t>最適充電温度</a:t>
+                      </a:r>
+                      <a:r>
+                        <a:rPr lang="en-US" altLang="ja-JP" sz="1400" b="0" i="0" u="none" strike="noStrike">
+                          <a:solidFill>
+                            <a:srgbClr val="000000"/>
+                          </a:solidFill>
+                          <a:effectLst/>
+                          <a:latin typeface="BIZ UDゴシック" panose="020B0400000000000000" pitchFamily="49" charset="-128"/>
+                          <a:ea typeface="BIZ UDゴシック" panose="020B0400000000000000" pitchFamily="49" charset="-128"/>
+                        </a:rPr>
+                        <a:t>±</a:t>
+                      </a:r>
+                      <a:r>
+                        <a:rPr lang="ja-JP" altLang="en-US" sz="1400" b="0" i="0" u="none" strike="noStrike">
+                          <a:solidFill>
+                            <a:srgbClr val="000000"/>
+                          </a:solidFill>
+                          <a:effectLst/>
+                          <a:latin typeface="BIZ UDゴシック" panose="020B0400000000000000" pitchFamily="49" charset="-128"/>
+                          <a:ea typeface="BIZ UDゴシック" panose="020B0400000000000000" pitchFamily="49" charset="-128"/>
+                        </a:rPr>
+                        <a:t>範囲内</a:t>
+                      </a:r>
                       <a:endParaRPr lang="ja-JP" altLang="en-US" sz="1400">
                         <a:latin typeface="BIZ UDゴシック" panose="020B0400000000000000" pitchFamily="49" charset="-128"/>
                         <a:ea typeface="BIZ UDゴシック" panose="020B0400000000000000" pitchFamily="49" charset="-128"/>
@@ -21074,9 +21322,30 @@
                     <a:bodyPr/>
                     <a:lstStyle/>
                     <a:p>
-                      <a:pPr>
-                        <a:buNone/>
-                      </a:pPr>
+                      <a:pPr marL="0" marR="0" lvl="0" indent="0" algn="l" defTabSz="914400" rtl="0" eaLnBrk="1" fontAlgn="auto" latinLnBrk="0" hangingPunct="1">
+                        <a:lnSpc>
+                          <a:spcPct val="100000"/>
+                        </a:lnSpc>
+                        <a:spcBef>
+                          <a:spcPts val="0"/>
+                        </a:spcBef>
+                        <a:spcAft>
+                          <a:spcPts val="0"/>
+                        </a:spcAft>
+                        <a:buClrTx/>
+                        <a:buSzTx/>
+                        <a:buFontTx/>
+                        <a:buNone/>
+                        <a:tabLst/>
+                        <a:defRPr/>
+                      </a:pPr>
+                      <a:r>
+                        <a:rPr lang="en-US" altLang="ja-JP" sz="1400">
+                          <a:latin typeface="BIZ UDゴシック" panose="020B0400000000000000" pitchFamily="49" charset="-128"/>
+                          <a:ea typeface="BIZ UDゴシック" panose="020B0400000000000000" pitchFamily="49" charset="-128"/>
+                        </a:rPr>
+                        <a:t>is_temp_arart()</a:t>
+                      </a:r>
                       <a:endParaRPr lang="ja-JP" altLang="en-US" sz="1400">
                         <a:latin typeface="BIZ UDゴシック" panose="020B0400000000000000" pitchFamily="49" charset="-128"/>
                         <a:ea typeface="BIZ UDゴシック" panose="020B0400000000000000" pitchFamily="49" charset="-128"/>
@@ -21130,115 +21399,193 @@
                       <a:pPr>
                         <a:buNone/>
                       </a:pPr>
-                      <a:endParaRPr lang="ja-JP" altLang="en-US" sz="1400">
+                      <a:r>
+                        <a:rPr lang="en-US" altLang="ja-JP" sz="1400">
+                          <a:latin typeface="BIZ UDゴシック" panose="020B0400000000000000" pitchFamily="49" charset="-128"/>
+                          <a:ea typeface="BIZ UDゴシック" panose="020B0400000000000000" pitchFamily="49" charset="-128"/>
+                        </a:rPr>
+                        <a:t>E8:</a:t>
+                      </a:r>
+                      <a:r>
+                        <a:rPr lang="ja-JP" altLang="en-US" sz="1400">
+                          <a:latin typeface="BIZ UDゴシック" panose="020B0400000000000000" pitchFamily="49" charset="-128"/>
+                          <a:ea typeface="BIZ UDゴシック" panose="020B0400000000000000" pitchFamily="49" charset="-128"/>
+                        </a:rPr>
+                        <a:t>警告表示に移るべきか</a:t>
+                      </a:r>
+                    </a:p>
+                  </a:txBody>
+                  <a:tcPr anchor="ctr">
+                    <a:lnL w="12700" cap="flat" cmpd="sng" algn="ctr">
+                      <a:solidFill>
+                        <a:schemeClr val="tx1"/>
+                      </a:solidFill>
+                      <a:prstDash val="solid"/>
+                      <a:round/>
+                      <a:headEnd type="none" w="med" len="med"/>
+                      <a:tailEnd type="none" w="med" len="med"/>
+                    </a:lnL>
+                    <a:lnR w="12700" cap="flat" cmpd="sng" algn="ctr">
+                      <a:solidFill>
+                        <a:schemeClr val="tx1"/>
+                      </a:solidFill>
+                      <a:prstDash val="solid"/>
+                      <a:round/>
+                      <a:headEnd type="none" w="med" len="med"/>
+                      <a:tailEnd type="none" w="med" len="med"/>
+                    </a:lnR>
+                    <a:lnT w="12700" cap="flat" cmpd="sng" algn="ctr">
+                      <a:solidFill>
+                        <a:schemeClr val="tx1"/>
+                      </a:solidFill>
+                      <a:prstDash val="solid"/>
+                      <a:round/>
+                      <a:headEnd type="none" w="med" len="med"/>
+                      <a:tailEnd type="none" w="med" len="med"/>
+                    </a:lnT>
+                    <a:lnB w="12700" cap="flat" cmpd="sng" algn="ctr">
+                      <a:solidFill>
+                        <a:schemeClr val="tx1"/>
+                      </a:solidFill>
+                      <a:prstDash val="solid"/>
+                      <a:round/>
+                      <a:headEnd type="none" w="med" len="med"/>
+                      <a:tailEnd type="none" w="med" len="med"/>
+                    </a:lnB>
+                  </a:tcPr>
+                </a:tc>
+                <a:tc>
+                  <a:txBody>
+                    <a:bodyPr/>
+                    <a:lstStyle/>
+                    <a:p>
+                      <a:pPr marL="0" marR="0" lvl="0" indent="0" algn="l" defTabSz="914400" rtl="0" eaLnBrk="1" fontAlgn="auto" latinLnBrk="0" hangingPunct="1">
+                        <a:lnSpc>
+                          <a:spcPct val="100000"/>
+                        </a:lnSpc>
+                        <a:spcBef>
+                          <a:spcPts val="0"/>
+                        </a:spcBef>
+                        <a:spcAft>
+                          <a:spcPts val="0"/>
+                        </a:spcAft>
+                        <a:buClrTx/>
+                        <a:buSzTx/>
+                        <a:buFontTx/>
+                        <a:buNone/>
+                        <a:tabLst/>
+                        <a:defRPr/>
+                      </a:pPr>
+                      <a:r>
+                        <a:rPr kumimoji="1" lang="en-US" altLang="ja-JP" sz="1400" b="0" i="0" u="none" strike="noStrike" kern="1200" cap="none" spc="0" normalizeH="0" baseline="0" noProof="0">
+                          <a:ln>
+                            <a:noFill/>
+                          </a:ln>
+                          <a:solidFill>
+                            <a:prstClr val="black"/>
+                          </a:solidFill>
+                          <a:effectLst/>
+                          <a:uLnTx/>
+                          <a:uFillTx/>
+                          <a:latin typeface="BIZ UDゴシック" panose="020B0400000000000000" pitchFamily="49" charset="-128"/>
+                          <a:ea typeface="BIZ UDゴシック" panose="020B0400000000000000" pitchFamily="49" charset="-128"/>
+                          <a:cs typeface="+mn-cs"/>
+                        </a:rPr>
+                        <a:t>python</a:t>
+                      </a:r>
+                    </a:p>
+                  </a:txBody>
+                  <a:tcPr anchor="ctr">
+                    <a:lnL w="12700" cap="flat" cmpd="sng" algn="ctr">
+                      <a:solidFill>
+                        <a:schemeClr val="tx1"/>
+                      </a:solidFill>
+                      <a:prstDash val="solid"/>
+                      <a:round/>
+                      <a:headEnd type="none" w="med" len="med"/>
+                      <a:tailEnd type="none" w="med" len="med"/>
+                    </a:lnL>
+                    <a:lnR w="12700" cap="flat" cmpd="sng" algn="ctr">
+                      <a:solidFill>
+                        <a:schemeClr val="tx1"/>
+                      </a:solidFill>
+                      <a:prstDash val="solid"/>
+                      <a:round/>
+                      <a:headEnd type="none" w="med" len="med"/>
+                      <a:tailEnd type="none" w="med" len="med"/>
+                    </a:lnR>
+                    <a:lnT w="12700" cap="flat" cmpd="sng" algn="ctr">
+                      <a:solidFill>
+                        <a:schemeClr val="tx1"/>
+                      </a:solidFill>
+                      <a:prstDash val="solid"/>
+                      <a:round/>
+                      <a:headEnd type="none" w="med" len="med"/>
+                      <a:tailEnd type="none" w="med" len="med"/>
+                    </a:lnT>
+                    <a:lnB w="12700" cap="flat" cmpd="sng" algn="ctr">
+                      <a:solidFill>
+                        <a:schemeClr val="tx1"/>
+                      </a:solidFill>
+                      <a:prstDash val="solid"/>
+                      <a:round/>
+                      <a:headEnd type="none" w="med" len="med"/>
+                      <a:tailEnd type="none" w="med" len="med"/>
+                    </a:lnB>
+                  </a:tcPr>
+                </a:tc>
+                <a:tc>
+                  <a:txBody>
+                    <a:bodyPr/>
+                    <a:lstStyle/>
+                    <a:p>
+                      <a:pPr marL="0" marR="0" lvl="0" indent="0" algn="l" defTabSz="914400" rtl="0" eaLnBrk="1" fontAlgn="auto" latinLnBrk="0" hangingPunct="1">
+                        <a:lnSpc>
+                          <a:spcPct val="100000"/>
+                        </a:lnSpc>
+                        <a:spcBef>
+                          <a:spcPts val="0"/>
+                        </a:spcBef>
+                        <a:spcAft>
+                          <a:spcPts val="0"/>
+                        </a:spcAft>
+                        <a:buClrTx/>
+                        <a:buSzTx/>
+                        <a:buFontTx/>
+                        <a:buNone/>
+                        <a:tabLst/>
+                        <a:defRPr/>
+                      </a:pPr>
+                      <a:r>
+                        <a:rPr kumimoji="1" lang="en-US" altLang="ja-JP" sz="1400" b="0" i="0" u="none" strike="noStrike" kern="1200" cap="none" spc="0" normalizeH="0" baseline="0" noProof="0">
+                          <a:ln>
+                            <a:noFill/>
+                          </a:ln>
+                          <a:solidFill>
+                            <a:prstClr val="black"/>
+                          </a:solidFill>
+                          <a:effectLst/>
+                          <a:uLnTx/>
+                          <a:uFillTx/>
+                          <a:latin typeface="BIZ UDゴシック" panose="020B0400000000000000" pitchFamily="49" charset="-128"/>
+                          <a:ea typeface="BIZ UDゴシック" panose="020B0400000000000000" pitchFamily="49" charset="-128"/>
+                          <a:cs typeface="+mn-cs"/>
+                        </a:rPr>
+                        <a:t>Bool</a:t>
+                      </a:r>
+                      <a:endParaRPr kumimoji="1" lang="ja-JP" altLang="en-US" sz="1400" b="0" i="0" u="none" strike="noStrike" kern="1200" cap="none" spc="0" normalizeH="0" baseline="0" noProof="0">
+                        <a:ln>
+                          <a:noFill/>
+                        </a:ln>
+                        <a:solidFill>
+                          <a:prstClr val="black"/>
+                        </a:solidFill>
+                        <a:effectLst/>
+                        <a:uLnTx/>
+                        <a:uFillTx/>
                         <a:latin typeface="BIZ UDゴシック" panose="020B0400000000000000" pitchFamily="49" charset="-128"/>
                         <a:ea typeface="BIZ UDゴシック" panose="020B0400000000000000" pitchFamily="49" charset="-128"/>
-                      </a:endParaRPr>
-                    </a:p>
-                  </a:txBody>
-                  <a:tcPr anchor="ctr">
-                    <a:lnL w="12700" cap="flat" cmpd="sng" algn="ctr">
-                      <a:solidFill>
-                        <a:schemeClr val="tx1"/>
-                      </a:solidFill>
-                      <a:prstDash val="solid"/>
-                      <a:round/>
-                      <a:headEnd type="none" w="med" len="med"/>
-                      <a:tailEnd type="none" w="med" len="med"/>
-                    </a:lnL>
-                    <a:lnR w="12700" cap="flat" cmpd="sng" algn="ctr">
-                      <a:solidFill>
-                        <a:schemeClr val="tx1"/>
-                      </a:solidFill>
-                      <a:prstDash val="solid"/>
-                      <a:round/>
-                      <a:headEnd type="none" w="med" len="med"/>
-                      <a:tailEnd type="none" w="med" len="med"/>
-                    </a:lnR>
-                    <a:lnT w="12700" cap="flat" cmpd="sng" algn="ctr">
-                      <a:solidFill>
-                        <a:schemeClr val="tx1"/>
-                      </a:solidFill>
-                      <a:prstDash val="solid"/>
-                      <a:round/>
-                      <a:headEnd type="none" w="med" len="med"/>
-                      <a:tailEnd type="none" w="med" len="med"/>
-                    </a:lnT>
-                    <a:lnB w="12700" cap="flat" cmpd="sng" algn="ctr">
-                      <a:solidFill>
-                        <a:schemeClr val="tx1"/>
-                      </a:solidFill>
-                      <a:prstDash val="solid"/>
-                      <a:round/>
-                      <a:headEnd type="none" w="med" len="med"/>
-                      <a:tailEnd type="none" w="med" len="med"/>
-                    </a:lnB>
-                  </a:tcPr>
-                </a:tc>
-                <a:tc>
-                  <a:txBody>
-                    <a:bodyPr/>
-                    <a:lstStyle/>
-                    <a:p>
-                      <a:pPr>
-                        <a:buNone/>
-                      </a:pPr>
-                      <a:endParaRPr lang="ja-JP" altLang="en-US" sz="1400">
-                        <a:latin typeface="BIZ UDゴシック" panose="020B0400000000000000" pitchFamily="49" charset="-128"/>
-                        <a:ea typeface="BIZ UDゴシック" panose="020B0400000000000000" pitchFamily="49" charset="-128"/>
-                      </a:endParaRPr>
-                    </a:p>
-                  </a:txBody>
-                  <a:tcPr anchor="ctr">
-                    <a:lnL w="12700" cap="flat" cmpd="sng" algn="ctr">
-                      <a:solidFill>
-                        <a:schemeClr val="tx1"/>
-                      </a:solidFill>
-                      <a:prstDash val="solid"/>
-                      <a:round/>
-                      <a:headEnd type="none" w="med" len="med"/>
-                      <a:tailEnd type="none" w="med" len="med"/>
-                    </a:lnL>
-                    <a:lnR w="12700" cap="flat" cmpd="sng" algn="ctr">
-                      <a:solidFill>
-                        <a:schemeClr val="tx1"/>
-                      </a:solidFill>
-                      <a:prstDash val="solid"/>
-                      <a:round/>
-                      <a:headEnd type="none" w="med" len="med"/>
-                      <a:tailEnd type="none" w="med" len="med"/>
-                    </a:lnR>
-                    <a:lnT w="12700" cap="flat" cmpd="sng" algn="ctr">
-                      <a:solidFill>
-                        <a:schemeClr val="tx1"/>
-                      </a:solidFill>
-                      <a:prstDash val="solid"/>
-                      <a:round/>
-                      <a:headEnd type="none" w="med" len="med"/>
-                      <a:tailEnd type="none" w="med" len="med"/>
-                    </a:lnT>
-                    <a:lnB w="12700" cap="flat" cmpd="sng" algn="ctr">
-                      <a:solidFill>
-                        <a:schemeClr val="tx1"/>
-                      </a:solidFill>
-                      <a:prstDash val="solid"/>
-                      <a:round/>
-                      <a:headEnd type="none" w="med" len="med"/>
-                      <a:tailEnd type="none" w="med" len="med"/>
-                    </a:lnB>
-                  </a:tcPr>
-                </a:tc>
-                <a:tc>
-                  <a:txBody>
-                    <a:bodyPr/>
-                    <a:lstStyle/>
-                    <a:p>
-                      <a:pPr>
-                        <a:buNone/>
-                      </a:pPr>
-                      <a:endParaRPr lang="ja-JP" altLang="en-US" sz="1400">
-                        <a:latin typeface="BIZ UDゴシック" panose="020B0400000000000000" pitchFamily="49" charset="-128"/>
-                        <a:ea typeface="BIZ UDゴシック" panose="020B0400000000000000" pitchFamily="49" charset="-128"/>
+                        <a:cs typeface="+mn-cs"/>
                       </a:endParaRPr>
                     </a:p>
                   </a:txBody>
@@ -21346,9 +21693,30 @@
                     <a:bodyPr/>
                     <a:lstStyle/>
                     <a:p>
-                      <a:pPr>
-                        <a:buNone/>
-                      </a:pPr>
+                      <a:pPr marL="0" marR="0" lvl="0" indent="0" algn="l" defTabSz="914400" rtl="0" eaLnBrk="1" fontAlgn="auto" latinLnBrk="0" hangingPunct="1">
+                        <a:lnSpc>
+                          <a:spcPct val="100000"/>
+                        </a:lnSpc>
+                        <a:spcBef>
+                          <a:spcPts val="0"/>
+                        </a:spcBef>
+                        <a:spcAft>
+                          <a:spcPts val="0"/>
+                        </a:spcAft>
+                        <a:buClrTx/>
+                        <a:buSzTx/>
+                        <a:buFontTx/>
+                        <a:buNone/>
+                        <a:tabLst/>
+                        <a:defRPr/>
+                      </a:pPr>
+                      <a:r>
+                        <a:rPr lang="en-US" altLang="ja-JP" sz="1400">
+                          <a:latin typeface="BIZ UDゴシック" panose="020B0400000000000000" pitchFamily="49" charset="-128"/>
+                          <a:ea typeface="BIZ UDゴシック" panose="020B0400000000000000" pitchFamily="49" charset="-128"/>
+                        </a:rPr>
+                        <a:t>is_temp_error_Stop()</a:t>
+                      </a:r>
                       <a:endParaRPr lang="ja-JP" altLang="en-US" sz="1400">
                         <a:latin typeface="BIZ UDゴシック" panose="020B0400000000000000" pitchFamily="49" charset="-128"/>
                         <a:ea typeface="BIZ UDゴシック" panose="020B0400000000000000" pitchFamily="49" charset="-128"/>
@@ -21402,6 +21770,20 @@
                       <a:pPr>
                         <a:buNone/>
                       </a:pPr>
+                      <a:r>
+                        <a:rPr lang="en-US" altLang="ja-JP" sz="1400">
+                          <a:latin typeface="BIZ UDゴシック" panose="020B0400000000000000" pitchFamily="49" charset="-128"/>
+                          <a:ea typeface="BIZ UDゴシック" panose="020B0400000000000000" pitchFamily="49" charset="-128"/>
+                        </a:rPr>
+                        <a:t>E9:</a:t>
+                      </a:r>
+                      <a:r>
+                        <a:rPr lang="ja-JP" altLang="en-US" sz="1400">
+                          <a:latin typeface="BIZ UDゴシック" panose="020B0400000000000000" pitchFamily="49" charset="-128"/>
+                          <a:ea typeface="BIZ UDゴシック" panose="020B0400000000000000" pitchFamily="49" charset="-128"/>
+                        </a:rPr>
+                        <a:t>エラー停止に移るべきか</a:t>
+                      </a:r>
                       <a:endParaRPr lang="en-US" altLang="ja-JP" sz="1400">
                         <a:latin typeface="BIZ UDゴシック" panose="020B0400000000000000" pitchFamily="49" charset="-128"/>
                         <a:ea typeface="BIZ UDゴシック" panose="020B0400000000000000" pitchFamily="49" charset="-128"/>
@@ -21452,65 +21834,133 @@
                     <a:bodyPr/>
                     <a:lstStyle/>
                     <a:p>
-                      <a:pPr>
-                        <a:buNone/>
-                      </a:pPr>
-                      <a:endParaRPr lang="en-US" altLang="ja-JP" sz="1400">
+                      <a:pPr marL="0" marR="0" lvl="0" indent="0" algn="l" defTabSz="914400" rtl="0" eaLnBrk="1" fontAlgn="auto" latinLnBrk="0" hangingPunct="1">
+                        <a:lnSpc>
+                          <a:spcPct val="100000"/>
+                        </a:lnSpc>
+                        <a:spcBef>
+                          <a:spcPts val="0"/>
+                        </a:spcBef>
+                        <a:spcAft>
+                          <a:spcPts val="0"/>
+                        </a:spcAft>
+                        <a:buClrTx/>
+                        <a:buSzTx/>
+                        <a:buFontTx/>
+                        <a:buNone/>
+                        <a:tabLst/>
+                        <a:defRPr/>
+                      </a:pPr>
+                      <a:r>
+                        <a:rPr kumimoji="1" lang="en-US" altLang="ja-JP" sz="1400" b="0" i="0" u="none" strike="noStrike" kern="1200" cap="none" spc="0" normalizeH="0" baseline="0" noProof="0">
+                          <a:ln>
+                            <a:noFill/>
+                          </a:ln>
+                          <a:solidFill>
+                            <a:prstClr val="black"/>
+                          </a:solidFill>
+                          <a:effectLst/>
+                          <a:uLnTx/>
+                          <a:uFillTx/>
+                          <a:latin typeface="BIZ UDゴシック" panose="020B0400000000000000" pitchFamily="49" charset="-128"/>
+                          <a:ea typeface="BIZ UDゴシック" panose="020B0400000000000000" pitchFamily="49" charset="-128"/>
+                          <a:cs typeface="+mn-cs"/>
+                        </a:rPr>
+                        <a:t>python</a:t>
+                      </a:r>
+                    </a:p>
+                  </a:txBody>
+                  <a:tcPr anchor="ctr">
+                    <a:lnL w="12700" cap="flat" cmpd="sng" algn="ctr">
+                      <a:solidFill>
+                        <a:schemeClr val="tx1"/>
+                      </a:solidFill>
+                      <a:prstDash val="solid"/>
+                      <a:round/>
+                      <a:headEnd type="none" w="med" len="med"/>
+                      <a:tailEnd type="none" w="med" len="med"/>
+                    </a:lnL>
+                    <a:lnR w="12700" cap="flat" cmpd="sng" algn="ctr">
+                      <a:solidFill>
+                        <a:schemeClr val="tx1"/>
+                      </a:solidFill>
+                      <a:prstDash val="solid"/>
+                      <a:round/>
+                      <a:headEnd type="none" w="med" len="med"/>
+                      <a:tailEnd type="none" w="med" len="med"/>
+                    </a:lnR>
+                    <a:lnT w="12700" cap="flat" cmpd="sng" algn="ctr">
+                      <a:solidFill>
+                        <a:schemeClr val="tx1"/>
+                      </a:solidFill>
+                      <a:prstDash val="solid"/>
+                      <a:round/>
+                      <a:headEnd type="none" w="med" len="med"/>
+                      <a:tailEnd type="none" w="med" len="med"/>
+                    </a:lnT>
+                    <a:lnB w="12700" cap="flat" cmpd="sng" algn="ctr">
+                      <a:solidFill>
+                        <a:schemeClr val="tx1"/>
+                      </a:solidFill>
+                      <a:prstDash val="solid"/>
+                      <a:round/>
+                      <a:headEnd type="none" w="med" len="med"/>
+                      <a:tailEnd type="none" w="med" len="med"/>
+                    </a:lnB>
+                  </a:tcPr>
+                </a:tc>
+                <a:tc>
+                  <a:txBody>
+                    <a:bodyPr/>
+                    <a:lstStyle/>
+                    <a:p>
+                      <a:pPr marL="0" marR="0" lvl="0" indent="0" algn="l" defTabSz="914400" rtl="0" eaLnBrk="1" fontAlgn="auto" latinLnBrk="0" hangingPunct="1">
+                        <a:lnSpc>
+                          <a:spcPct val="100000"/>
+                        </a:lnSpc>
+                        <a:spcBef>
+                          <a:spcPts val="0"/>
+                        </a:spcBef>
+                        <a:spcAft>
+                          <a:spcPts val="0"/>
+                        </a:spcAft>
+                        <a:buClrTx/>
+                        <a:buSzTx/>
+                        <a:buFontTx/>
+                        <a:buNone/>
+                        <a:tabLst/>
+                        <a:defRPr/>
+                      </a:pPr>
+                      <a:r>
+                        <a:rPr kumimoji="1" lang="en-US" altLang="ja-JP" sz="1400" b="0" i="0" u="none" strike="noStrike" kern="1200" cap="none" spc="0" normalizeH="0" baseline="0" noProof="0">
+                          <a:ln>
+                            <a:noFill/>
+                          </a:ln>
+                          <a:solidFill>
+                            <a:prstClr val="black"/>
+                          </a:solidFill>
+                          <a:effectLst/>
+                          <a:uLnTx/>
+                          <a:uFillTx/>
+                          <a:latin typeface="BIZ UDゴシック" panose="020B0400000000000000" pitchFamily="49" charset="-128"/>
+                          <a:ea typeface="BIZ UDゴシック" panose="020B0400000000000000" pitchFamily="49" charset="-128"/>
+                          <a:cs typeface="+mn-cs"/>
+                        </a:rPr>
+                        <a:t>Bool</a:t>
+                      </a:r>
+                      <a:endParaRPr kumimoji="1" lang="ja-JP" altLang="en-US" sz="1400" b="0" i="0" u="none" strike="noStrike" kern="1200" cap="none" spc="0" normalizeH="0" baseline="0" noProof="0">
+                        <a:ln>
+                          <a:noFill/>
+                        </a:ln>
+                        <a:solidFill>
+                          <a:prstClr val="black"/>
+                        </a:solidFill>
+                        <a:effectLst/>
+                        <a:uLnTx/>
+                        <a:uFillTx/>
                         <a:latin typeface="BIZ UDゴシック" panose="020B0400000000000000" pitchFamily="49" charset="-128"/>
                         <a:ea typeface="BIZ UDゴシック" panose="020B0400000000000000" pitchFamily="49" charset="-128"/>
-                      </a:endParaRPr>
-                    </a:p>
-                  </a:txBody>
-                  <a:tcPr anchor="ctr">
-                    <a:lnL w="12700" cap="flat" cmpd="sng" algn="ctr">
-                      <a:solidFill>
-                        <a:schemeClr val="tx1"/>
-                      </a:solidFill>
-                      <a:prstDash val="solid"/>
-                      <a:round/>
-                      <a:headEnd type="none" w="med" len="med"/>
-                      <a:tailEnd type="none" w="med" len="med"/>
-                    </a:lnL>
-                    <a:lnR w="12700" cap="flat" cmpd="sng" algn="ctr">
-                      <a:solidFill>
-                        <a:schemeClr val="tx1"/>
-                      </a:solidFill>
-                      <a:prstDash val="solid"/>
-                      <a:round/>
-                      <a:headEnd type="none" w="med" len="med"/>
-                      <a:tailEnd type="none" w="med" len="med"/>
-                    </a:lnR>
-                    <a:lnT w="12700" cap="flat" cmpd="sng" algn="ctr">
-                      <a:solidFill>
-                        <a:schemeClr val="tx1"/>
-                      </a:solidFill>
-                      <a:prstDash val="solid"/>
-                      <a:round/>
-                      <a:headEnd type="none" w="med" len="med"/>
-                      <a:tailEnd type="none" w="med" len="med"/>
-                    </a:lnT>
-                    <a:lnB w="12700" cap="flat" cmpd="sng" algn="ctr">
-                      <a:solidFill>
-                        <a:schemeClr val="tx1"/>
-                      </a:solidFill>
-                      <a:prstDash val="solid"/>
-                      <a:round/>
-                      <a:headEnd type="none" w="med" len="med"/>
-                      <a:tailEnd type="none" w="med" len="med"/>
-                    </a:lnB>
-                  </a:tcPr>
-                </a:tc>
-                <a:tc>
-                  <a:txBody>
-                    <a:bodyPr/>
-                    <a:lstStyle/>
-                    <a:p>
-                      <a:pPr>
-                        <a:buNone/>
-                      </a:pPr>
-                      <a:endParaRPr lang="ja-JP" altLang="en-US" sz="1400">
-                        <a:latin typeface="BIZ UDゴシック" panose="020B0400000000000000" pitchFamily="49" charset="-128"/>
-                        <a:ea typeface="BIZ UDゴシック" panose="020B0400000000000000" pitchFamily="49" charset="-128"/>
+                        <a:cs typeface="+mn-cs"/>
                       </a:endParaRPr>
                     </a:p>
                   </a:txBody>

--- a/Specification/基本仕様.pptx
+++ b/Specification/基本仕様.pptx
@@ -203,7 +203,7 @@
           <a:p>
             <a:fld id="{DDC962EE-CD8D-4B91-A3DD-4C699082EA73}" type="datetimeFigureOut">
               <a:rPr kumimoji="1" lang="ja-JP" altLang="en-US" smtClean="0"/>
-              <a:t>2025/10/20</a:t>
+              <a:t>2025/10/21</a:t>
             </a:fld>
             <a:endParaRPr kumimoji="1" lang="ja-JP" altLang="en-US"/>
           </a:p>
@@ -631,7 +631,7 @@
           <a:p>
             <a:fld id="{F5AF9F5B-2404-485D-A870-3651691CD6B5}" type="datetime1">
               <a:rPr kumimoji="1" lang="ja-JP" altLang="en-US" smtClean="0"/>
-              <a:t>2025/10/20</a:t>
+              <a:t>2025/10/21</a:t>
             </a:fld>
             <a:endParaRPr kumimoji="1" lang="ja-JP" altLang="en-US"/>
           </a:p>
@@ -831,7 +831,7 @@
           <a:p>
             <a:fld id="{5747C4F4-5A8E-4D77-ABBE-A0BE847775D5}" type="datetime1">
               <a:rPr kumimoji="1" lang="ja-JP" altLang="en-US" smtClean="0"/>
-              <a:t>2025/10/20</a:t>
+              <a:t>2025/10/21</a:t>
             </a:fld>
             <a:endParaRPr kumimoji="1" lang="ja-JP" altLang="en-US"/>
           </a:p>
@@ -1041,7 +1041,7 @@
           <a:p>
             <a:fld id="{9A9AB05E-20D0-482C-BB40-3584160A1784}" type="datetime1">
               <a:rPr kumimoji="1" lang="ja-JP" altLang="en-US" smtClean="0"/>
-              <a:t>2025/10/20</a:t>
+              <a:t>2025/10/21</a:t>
             </a:fld>
             <a:endParaRPr kumimoji="1" lang="ja-JP" altLang="en-US"/>
           </a:p>
@@ -1241,7 +1241,7 @@
           <a:p>
             <a:fld id="{704830A0-5797-4E39-976B-196EBC8F12A5}" type="datetime1">
               <a:rPr kumimoji="1" lang="ja-JP" altLang="en-US" smtClean="0"/>
-              <a:t>2025/10/20</a:t>
+              <a:t>2025/10/21</a:t>
             </a:fld>
             <a:endParaRPr kumimoji="1" lang="ja-JP" altLang="en-US"/>
           </a:p>
@@ -1486,7 +1486,7 @@
           <a:p>
             <a:fld id="{3D3FFB79-61C9-4C9B-BB39-B3ADC33410DC}" type="datetime1">
               <a:rPr kumimoji="1" lang="ja-JP" altLang="en-US" smtClean="0"/>
-              <a:t>2025/10/20</a:t>
+              <a:t>2025/10/21</a:t>
             </a:fld>
             <a:endParaRPr kumimoji="1" lang="ja-JP" altLang="en-US"/>
           </a:p>
@@ -1779,7 +1779,7 @@
           <a:p>
             <a:fld id="{FA15C774-0875-42EB-AD6C-A573C6182984}" type="datetime1">
               <a:rPr kumimoji="1" lang="ja-JP" altLang="en-US" smtClean="0"/>
-              <a:t>2025/10/20</a:t>
+              <a:t>2025/10/21</a:t>
             </a:fld>
             <a:endParaRPr kumimoji="1" lang="ja-JP" altLang="en-US"/>
           </a:p>
@@ -2207,7 +2207,7 @@
           <a:p>
             <a:fld id="{698AFFEB-CD38-4777-8454-30081785CFFF}" type="datetime1">
               <a:rPr kumimoji="1" lang="ja-JP" altLang="en-US" smtClean="0"/>
-              <a:t>2025/10/20</a:t>
+              <a:t>2025/10/21</a:t>
             </a:fld>
             <a:endParaRPr kumimoji="1" lang="ja-JP" altLang="en-US"/>
           </a:p>
@@ -2338,7 +2338,7 @@
           <a:p>
             <a:fld id="{42D7B12B-7CA0-4414-AEAA-6D0AACA2052F}" type="datetime1">
               <a:rPr kumimoji="1" lang="ja-JP" altLang="en-US" smtClean="0"/>
-              <a:t>2025/10/20</a:t>
+              <a:t>2025/10/21</a:t>
             </a:fld>
             <a:endParaRPr kumimoji="1" lang="ja-JP" altLang="en-US"/>
           </a:p>
@@ -2433,7 +2433,7 @@
           <a:p>
             <a:fld id="{AFD3D29A-C4E2-4B84-B7FB-8D55DDD89BA5}" type="datetime1">
               <a:rPr kumimoji="1" lang="ja-JP" altLang="en-US" smtClean="0"/>
-              <a:t>2025/10/20</a:t>
+              <a:t>2025/10/21</a:t>
             </a:fld>
             <a:endParaRPr kumimoji="1" lang="ja-JP" altLang="en-US"/>
           </a:p>
@@ -2740,7 +2740,7 @@
           <a:p>
             <a:fld id="{D93CAB33-5415-4090-AE1B-2B4E589E017F}" type="datetime1">
               <a:rPr kumimoji="1" lang="ja-JP" altLang="en-US" smtClean="0"/>
-              <a:t>2025/10/20</a:t>
+              <a:t>2025/10/21</a:t>
             </a:fld>
             <a:endParaRPr kumimoji="1" lang="ja-JP" altLang="en-US"/>
           </a:p>
@@ -2992,7 +2992,7 @@
           <a:p>
             <a:fld id="{9AD6552B-56D1-4206-BF32-17E96CC146D1}" type="datetime1">
               <a:rPr kumimoji="1" lang="ja-JP" altLang="en-US" smtClean="0"/>
-              <a:t>2025/10/20</a:t>
+              <a:t>2025/10/21</a:t>
             </a:fld>
             <a:endParaRPr kumimoji="1" lang="ja-JP" altLang="en-US"/>
           </a:p>
@@ -3235,7 +3235,7 @@
           <a:p>
             <a:fld id="{B79ECCA8-2BE2-481B-9A14-A01B368CD589}" type="datetime1">
               <a:rPr kumimoji="1" lang="ja-JP" altLang="en-US" smtClean="0"/>
-              <a:t>2025/10/20</a:t>
+              <a:t>2025/10/21</a:t>
             </a:fld>
             <a:endParaRPr kumimoji="1" lang="ja-JP" altLang="en-US"/>
           </a:p>
@@ -18207,7 +18207,7 @@
           <p:nvPr>
             <p:extLst>
               <p:ext uri="{D42A27DB-BD31-4B8C-83A1-F6EECF244321}">
-                <p14:modId xmlns:p14="http://schemas.microsoft.com/office/powerpoint/2010/main" val="211282526"/>
+                <p14:modId xmlns:p14="http://schemas.microsoft.com/office/powerpoint/2010/main" val="1484264177"/>
               </p:ext>
             </p:extLst>
           </p:nvPr>
@@ -19005,13 +19005,10 @@
                       <a:pPr>
                         <a:buNone/>
                       </a:pPr>
-                      <a:r>
-                        <a:rPr lang="ja-JP" altLang="en-US" sz="1400">
-                          <a:latin typeface="BIZ UDゴシック" panose="020B0400000000000000" pitchFamily="49" charset="-128"/>
-                          <a:ea typeface="BIZ UDゴシック" panose="020B0400000000000000" pitchFamily="49" charset="-128"/>
-                        </a:rPr>
-                        <a:t>随時更新</a:t>
-                      </a:r>
+                      <a:endParaRPr lang="ja-JP" altLang="en-US" sz="1400">
+                        <a:latin typeface="BIZ UDゴシック" panose="020B0400000000000000" pitchFamily="49" charset="-128"/>
+                        <a:ea typeface="BIZ UDゴシック" panose="020B0400000000000000" pitchFamily="49" charset="-128"/>
+                      </a:endParaRPr>
                     </a:p>
                   </a:txBody>
                   <a:tcPr anchor="ctr">
@@ -19660,6 +19657,1451 @@
           </a:graphicData>
         </a:graphic>
       </p:graphicFrame>
+      <p:graphicFrame>
+        <p:nvGraphicFramePr>
+          <p:cNvPr id="5" name="表 4">
+            <a:extLst>
+              <a:ext uri="{FF2B5EF4-FFF2-40B4-BE49-F238E27FC236}">
+                <a16:creationId xmlns:a16="http://schemas.microsoft.com/office/drawing/2014/main" id="{8219CE7D-5F9D-B9DE-AA1F-6266F40F836C}"/>
+              </a:ext>
+            </a:extLst>
+          </p:cNvPr>
+          <p:cNvGraphicFramePr>
+            <a:graphicFrameLocks noGrp="1"/>
+          </p:cNvGraphicFramePr>
+          <p:nvPr>
+            <p:extLst>
+              <p:ext uri="{D42A27DB-BD31-4B8C-83A1-F6EECF244321}">
+                <p14:modId xmlns:p14="http://schemas.microsoft.com/office/powerpoint/2010/main" val="3855686481"/>
+              </p:ext>
+            </p:extLst>
+          </p:nvPr>
+        </p:nvGraphicFramePr>
+        <p:xfrm>
+          <a:off x="673768" y="3429000"/>
+          <a:ext cx="10070940" cy="1828800"/>
+        </p:xfrm>
+        <a:graphic>
+          <a:graphicData uri="http://schemas.openxmlformats.org/drawingml/2006/table">
+            <a:tbl>
+              <a:tblPr firstRow="1">
+                <a:tableStyleId>{912C8C85-51F0-491E-9774-3900AFEF0FD7}</a:tableStyleId>
+              </a:tblPr>
+              <a:tblGrid>
+                <a:gridCol w="2736000">
+                  <a:extLst>
+                    <a:ext uri="{9D8B030D-6E8A-4147-A177-3AD203B41FA5}">
+                      <a16:colId xmlns:a16="http://schemas.microsoft.com/office/drawing/2014/main" val="6935548"/>
+                    </a:ext>
+                  </a:extLst>
+                </a:gridCol>
+                <a:gridCol w="1762660">
+                  <a:extLst>
+                    <a:ext uri="{9D8B030D-6E8A-4147-A177-3AD203B41FA5}">
+                      <a16:colId xmlns:a16="http://schemas.microsoft.com/office/drawing/2014/main" val="2184599737"/>
+                    </a:ext>
+                  </a:extLst>
+                </a:gridCol>
+                <a:gridCol w="1762660">
+                  <a:extLst>
+                    <a:ext uri="{9D8B030D-6E8A-4147-A177-3AD203B41FA5}">
+                      <a16:colId xmlns:a16="http://schemas.microsoft.com/office/drawing/2014/main" val="2311469129"/>
+                    </a:ext>
+                  </a:extLst>
+                </a:gridCol>
+                <a:gridCol w="3809620">
+                  <a:extLst>
+                    <a:ext uri="{9D8B030D-6E8A-4147-A177-3AD203B41FA5}">
+                      <a16:colId xmlns:a16="http://schemas.microsoft.com/office/drawing/2014/main" val="754341625"/>
+                    </a:ext>
+                  </a:extLst>
+                </a:gridCol>
+              </a:tblGrid>
+              <a:tr h="0">
+                <a:tc>
+                  <a:txBody>
+                    <a:bodyPr/>
+                    <a:lstStyle/>
+                    <a:p>
+                      <a:pPr>
+                        <a:buNone/>
+                      </a:pPr>
+                      <a:r>
+                        <a:rPr lang="ja-JP" altLang="en-US" sz="1400">
+                          <a:latin typeface="BIZ UDゴシック" panose="020B0400000000000000" pitchFamily="49" charset="-128"/>
+                          <a:ea typeface="BIZ UDゴシック" panose="020B0400000000000000" pitchFamily="49" charset="-128"/>
+                        </a:rPr>
+                        <a:t>名称</a:t>
+                      </a:r>
+                    </a:p>
+                  </a:txBody>
+                  <a:tcPr anchor="ctr">
+                    <a:lnL w="12700" cap="flat" cmpd="sng" algn="ctr">
+                      <a:solidFill>
+                        <a:schemeClr val="tx1"/>
+                      </a:solidFill>
+                      <a:prstDash val="solid"/>
+                      <a:round/>
+                      <a:headEnd type="none" w="med" len="med"/>
+                      <a:tailEnd type="none" w="med" len="med"/>
+                    </a:lnL>
+                    <a:lnR w="12700" cap="flat" cmpd="sng" algn="ctr">
+                      <a:solidFill>
+                        <a:schemeClr val="tx1"/>
+                      </a:solidFill>
+                      <a:prstDash val="solid"/>
+                      <a:round/>
+                      <a:headEnd type="none" w="med" len="med"/>
+                      <a:tailEnd type="none" w="med" len="med"/>
+                    </a:lnR>
+                    <a:lnT w="12700" cap="flat" cmpd="sng" algn="ctr">
+                      <a:solidFill>
+                        <a:schemeClr val="tx1"/>
+                      </a:solidFill>
+                      <a:prstDash val="solid"/>
+                      <a:round/>
+                      <a:headEnd type="none" w="med" len="med"/>
+                      <a:tailEnd type="none" w="med" len="med"/>
+                    </a:lnT>
+                    <a:lnB w="12700" cap="flat" cmpd="sng" algn="ctr">
+                      <a:solidFill>
+                        <a:schemeClr val="tx1"/>
+                      </a:solidFill>
+                      <a:prstDash val="solid"/>
+                      <a:round/>
+                      <a:headEnd type="none" w="med" len="med"/>
+                      <a:tailEnd type="none" w="med" len="med"/>
+                    </a:lnB>
+                  </a:tcPr>
+                </a:tc>
+                <a:tc>
+                  <a:txBody>
+                    <a:bodyPr/>
+                    <a:lstStyle/>
+                    <a:p>
+                      <a:pPr>
+                        <a:buNone/>
+                      </a:pPr>
+                      <a:r>
+                        <a:rPr lang="ja-JP" altLang="en-US" sz="1400">
+                          <a:latin typeface="BIZ UDゴシック" panose="020B0400000000000000" pitchFamily="49" charset="-128"/>
+                          <a:ea typeface="BIZ UDゴシック" panose="020B0400000000000000" pitchFamily="49" charset="-128"/>
+                        </a:rPr>
+                        <a:t>目的</a:t>
+                      </a:r>
+                    </a:p>
+                  </a:txBody>
+                  <a:tcPr anchor="ctr">
+                    <a:lnL w="12700" cap="flat" cmpd="sng" algn="ctr">
+                      <a:solidFill>
+                        <a:schemeClr val="tx1"/>
+                      </a:solidFill>
+                      <a:prstDash val="solid"/>
+                      <a:round/>
+                      <a:headEnd type="none" w="med" len="med"/>
+                      <a:tailEnd type="none" w="med" len="med"/>
+                    </a:lnL>
+                    <a:lnR w="12700" cap="flat" cmpd="sng" algn="ctr">
+                      <a:solidFill>
+                        <a:schemeClr val="tx1"/>
+                      </a:solidFill>
+                      <a:prstDash val="solid"/>
+                      <a:round/>
+                      <a:headEnd type="none" w="med" len="med"/>
+                      <a:tailEnd type="none" w="med" len="med"/>
+                    </a:lnR>
+                    <a:lnT w="12700" cap="flat" cmpd="sng" algn="ctr">
+                      <a:solidFill>
+                        <a:schemeClr val="tx1"/>
+                      </a:solidFill>
+                      <a:prstDash val="solid"/>
+                      <a:round/>
+                      <a:headEnd type="none" w="med" len="med"/>
+                      <a:tailEnd type="none" w="med" len="med"/>
+                    </a:lnT>
+                    <a:lnB w="12700" cap="flat" cmpd="sng" algn="ctr">
+                      <a:solidFill>
+                        <a:schemeClr val="tx1"/>
+                      </a:solidFill>
+                      <a:prstDash val="solid"/>
+                      <a:round/>
+                      <a:headEnd type="none" w="med" len="med"/>
+                      <a:tailEnd type="none" w="med" len="med"/>
+                    </a:lnB>
+                  </a:tcPr>
+                </a:tc>
+                <a:tc>
+                  <a:txBody>
+                    <a:bodyPr/>
+                    <a:lstStyle/>
+                    <a:p>
+                      <a:pPr>
+                        <a:buNone/>
+                      </a:pPr>
+                      <a:r>
+                        <a:rPr lang="ja-JP" altLang="en-US" sz="1400">
+                          <a:latin typeface="BIZ UDゴシック" panose="020B0400000000000000" pitchFamily="49" charset="-128"/>
+                          <a:ea typeface="BIZ UDゴシック" panose="020B0400000000000000" pitchFamily="49" charset="-128"/>
+                        </a:rPr>
+                        <a:t>言語</a:t>
+                      </a:r>
+                    </a:p>
+                  </a:txBody>
+                  <a:tcPr anchor="ctr">
+                    <a:lnL w="12700" cap="flat" cmpd="sng" algn="ctr">
+                      <a:solidFill>
+                        <a:schemeClr val="tx1"/>
+                      </a:solidFill>
+                      <a:prstDash val="solid"/>
+                      <a:round/>
+                      <a:headEnd type="none" w="med" len="med"/>
+                      <a:tailEnd type="none" w="med" len="med"/>
+                    </a:lnL>
+                    <a:lnR w="12700" cap="flat" cmpd="sng" algn="ctr">
+                      <a:solidFill>
+                        <a:schemeClr val="tx1"/>
+                      </a:solidFill>
+                      <a:prstDash val="solid"/>
+                      <a:round/>
+                      <a:headEnd type="none" w="med" len="med"/>
+                      <a:tailEnd type="none" w="med" len="med"/>
+                    </a:lnR>
+                    <a:lnT w="12700" cap="flat" cmpd="sng" algn="ctr">
+                      <a:solidFill>
+                        <a:schemeClr val="tx1"/>
+                      </a:solidFill>
+                      <a:prstDash val="solid"/>
+                      <a:round/>
+                      <a:headEnd type="none" w="med" len="med"/>
+                      <a:tailEnd type="none" w="med" len="med"/>
+                    </a:lnT>
+                    <a:lnB w="12700" cap="flat" cmpd="sng" algn="ctr">
+                      <a:solidFill>
+                        <a:schemeClr val="tx1"/>
+                      </a:solidFill>
+                      <a:prstDash val="solid"/>
+                      <a:round/>
+                      <a:headEnd type="none" w="med" len="med"/>
+                      <a:tailEnd type="none" w="med" len="med"/>
+                    </a:lnB>
+                  </a:tcPr>
+                </a:tc>
+                <a:tc>
+                  <a:txBody>
+                    <a:bodyPr/>
+                    <a:lstStyle/>
+                    <a:p>
+                      <a:pPr>
+                        <a:buNone/>
+                      </a:pPr>
+                      <a:r>
+                        <a:rPr lang="ja-JP" altLang="en-US" sz="1400">
+                          <a:latin typeface="BIZ UDゴシック" panose="020B0400000000000000" pitchFamily="49" charset="-128"/>
+                          <a:ea typeface="BIZ UDゴシック" panose="020B0400000000000000" pitchFamily="49" charset="-128"/>
+                        </a:rPr>
+                        <a:t>備考</a:t>
+                      </a:r>
+                    </a:p>
+                  </a:txBody>
+                  <a:tcPr anchor="ctr">
+                    <a:lnL w="12700" cap="flat" cmpd="sng" algn="ctr">
+                      <a:solidFill>
+                        <a:schemeClr val="tx1"/>
+                      </a:solidFill>
+                      <a:prstDash val="solid"/>
+                      <a:round/>
+                      <a:headEnd type="none" w="med" len="med"/>
+                      <a:tailEnd type="none" w="med" len="med"/>
+                    </a:lnL>
+                    <a:lnR w="12700" cap="flat" cmpd="sng" algn="ctr">
+                      <a:solidFill>
+                        <a:schemeClr val="tx1"/>
+                      </a:solidFill>
+                      <a:prstDash val="solid"/>
+                      <a:round/>
+                      <a:headEnd type="none" w="med" len="med"/>
+                      <a:tailEnd type="none" w="med" len="med"/>
+                    </a:lnR>
+                    <a:lnT w="12700" cap="flat" cmpd="sng" algn="ctr">
+                      <a:solidFill>
+                        <a:schemeClr val="tx1"/>
+                      </a:solidFill>
+                      <a:prstDash val="solid"/>
+                      <a:round/>
+                      <a:headEnd type="none" w="med" len="med"/>
+                      <a:tailEnd type="none" w="med" len="med"/>
+                    </a:lnT>
+                    <a:lnB w="12700" cap="flat" cmpd="sng" algn="ctr">
+                      <a:solidFill>
+                        <a:schemeClr val="tx1"/>
+                      </a:solidFill>
+                      <a:prstDash val="solid"/>
+                      <a:round/>
+                      <a:headEnd type="none" w="med" len="med"/>
+                      <a:tailEnd type="none" w="med" len="med"/>
+                    </a:lnB>
+                  </a:tcPr>
+                </a:tc>
+                <a:extLst>
+                  <a:ext uri="{0D108BD9-81ED-4DB2-BD59-A6C34878D82A}">
+                    <a16:rowId xmlns:a16="http://schemas.microsoft.com/office/drawing/2014/main" val="1513055026"/>
+                  </a:ext>
+                </a:extLst>
+              </a:tr>
+              <a:tr h="0">
+                <a:tc>
+                  <a:txBody>
+                    <a:bodyPr/>
+                    <a:lstStyle/>
+                    <a:p>
+                      <a:pPr>
+                        <a:buNone/>
+                      </a:pPr>
+                      <a:r>
+                        <a:rPr kumimoji="1" lang="en-US" altLang="ja-JP" sz="1400">
+                          <a:latin typeface="BIZ UDゴシック" panose="020B0400000000000000" pitchFamily="49" charset="-128"/>
+                          <a:ea typeface="BIZ UDゴシック" panose="020B0400000000000000" pitchFamily="49" charset="-128"/>
+                        </a:rPr>
+                        <a:t>BatteryTemperatureControl .c</a:t>
+                      </a:r>
+                      <a:endParaRPr lang="ja-JP" altLang="en-US" sz="1400">
+                        <a:latin typeface="BIZ UDゴシック" panose="020B0400000000000000" pitchFamily="49" charset="-128"/>
+                        <a:ea typeface="BIZ UDゴシック" panose="020B0400000000000000" pitchFamily="49" charset="-128"/>
+                      </a:endParaRPr>
+                    </a:p>
+                  </a:txBody>
+                  <a:tcPr anchor="ctr">
+                    <a:lnL w="12700" cap="flat" cmpd="sng" algn="ctr">
+                      <a:solidFill>
+                        <a:schemeClr val="tx1"/>
+                      </a:solidFill>
+                      <a:prstDash val="solid"/>
+                      <a:round/>
+                      <a:headEnd type="none" w="med" len="med"/>
+                      <a:tailEnd type="none" w="med" len="med"/>
+                    </a:lnL>
+                    <a:lnR w="12700" cap="flat" cmpd="sng" algn="ctr">
+                      <a:solidFill>
+                        <a:schemeClr val="tx1"/>
+                      </a:solidFill>
+                      <a:prstDash val="solid"/>
+                      <a:round/>
+                      <a:headEnd type="none" w="med" len="med"/>
+                      <a:tailEnd type="none" w="med" len="med"/>
+                    </a:lnR>
+                    <a:lnT w="12700" cap="flat" cmpd="sng" algn="ctr">
+                      <a:solidFill>
+                        <a:schemeClr val="tx1"/>
+                      </a:solidFill>
+                      <a:prstDash val="solid"/>
+                      <a:round/>
+                      <a:headEnd type="none" w="med" len="med"/>
+                      <a:tailEnd type="none" w="med" len="med"/>
+                    </a:lnT>
+                    <a:lnB w="12700" cap="flat" cmpd="sng" algn="ctr">
+                      <a:solidFill>
+                        <a:schemeClr val="tx1"/>
+                      </a:solidFill>
+                      <a:prstDash val="solid"/>
+                      <a:round/>
+                      <a:headEnd type="none" w="med" len="med"/>
+                      <a:tailEnd type="none" w="med" len="med"/>
+                    </a:lnB>
+                  </a:tcPr>
+                </a:tc>
+                <a:tc>
+                  <a:txBody>
+                    <a:bodyPr/>
+                    <a:lstStyle/>
+                    <a:p>
+                      <a:pPr>
+                        <a:buNone/>
+                      </a:pPr>
+                      <a:r>
+                        <a:rPr lang="ja-JP" altLang="en-US" sz="1400">
+                          <a:latin typeface="BIZ UDゴシック" panose="020B0400000000000000" pitchFamily="49" charset="-128"/>
+                          <a:ea typeface="BIZ UDゴシック" panose="020B0400000000000000" pitchFamily="49" charset="-128"/>
+                        </a:rPr>
+                        <a:t>バッテリ温度制御</a:t>
+                      </a:r>
+                      <a:endParaRPr lang="en-US" sz="1400">
+                        <a:latin typeface="BIZ UDゴシック" panose="020B0400000000000000" pitchFamily="49" charset="-128"/>
+                        <a:ea typeface="BIZ UDゴシック" panose="020B0400000000000000" pitchFamily="49" charset="-128"/>
+                      </a:endParaRPr>
+                    </a:p>
+                  </a:txBody>
+                  <a:tcPr anchor="ctr">
+                    <a:lnL w="12700" cap="flat" cmpd="sng" algn="ctr">
+                      <a:solidFill>
+                        <a:schemeClr val="tx1"/>
+                      </a:solidFill>
+                      <a:prstDash val="solid"/>
+                      <a:round/>
+                      <a:headEnd type="none" w="med" len="med"/>
+                      <a:tailEnd type="none" w="med" len="med"/>
+                    </a:lnL>
+                    <a:lnR w="12700" cap="flat" cmpd="sng" algn="ctr">
+                      <a:solidFill>
+                        <a:schemeClr val="tx1"/>
+                      </a:solidFill>
+                      <a:prstDash val="solid"/>
+                      <a:round/>
+                      <a:headEnd type="none" w="med" len="med"/>
+                      <a:tailEnd type="none" w="med" len="med"/>
+                    </a:lnR>
+                    <a:lnT w="12700" cap="flat" cmpd="sng" algn="ctr">
+                      <a:solidFill>
+                        <a:schemeClr val="tx1"/>
+                      </a:solidFill>
+                      <a:prstDash val="solid"/>
+                      <a:round/>
+                      <a:headEnd type="none" w="med" len="med"/>
+                      <a:tailEnd type="none" w="med" len="med"/>
+                    </a:lnT>
+                    <a:lnB w="12700" cap="flat" cmpd="sng" algn="ctr">
+                      <a:solidFill>
+                        <a:schemeClr val="tx1"/>
+                      </a:solidFill>
+                      <a:prstDash val="solid"/>
+                      <a:round/>
+                      <a:headEnd type="none" w="med" len="med"/>
+                      <a:tailEnd type="none" w="med" len="med"/>
+                    </a:lnB>
+                  </a:tcPr>
+                </a:tc>
+                <a:tc>
+                  <a:txBody>
+                    <a:bodyPr/>
+                    <a:lstStyle/>
+                    <a:p>
+                      <a:pPr>
+                        <a:buNone/>
+                      </a:pPr>
+                      <a:r>
+                        <a:rPr lang="en-US" sz="1400">
+                          <a:latin typeface="BIZ UDゴシック" panose="020B0400000000000000" pitchFamily="49" charset="-128"/>
+                          <a:ea typeface="BIZ UDゴシック" panose="020B0400000000000000" pitchFamily="49" charset="-128"/>
+                        </a:rPr>
+                        <a:t>C</a:t>
+                      </a:r>
+                    </a:p>
+                  </a:txBody>
+                  <a:tcPr anchor="ctr">
+                    <a:lnL w="12700" cap="flat" cmpd="sng" algn="ctr">
+                      <a:solidFill>
+                        <a:schemeClr val="tx1"/>
+                      </a:solidFill>
+                      <a:prstDash val="solid"/>
+                      <a:round/>
+                      <a:headEnd type="none" w="med" len="med"/>
+                      <a:tailEnd type="none" w="med" len="med"/>
+                    </a:lnL>
+                    <a:lnR w="12700" cap="flat" cmpd="sng" algn="ctr">
+                      <a:solidFill>
+                        <a:schemeClr val="tx1"/>
+                      </a:solidFill>
+                      <a:prstDash val="solid"/>
+                      <a:round/>
+                      <a:headEnd type="none" w="med" len="med"/>
+                      <a:tailEnd type="none" w="med" len="med"/>
+                    </a:lnR>
+                    <a:lnT w="12700" cap="flat" cmpd="sng" algn="ctr">
+                      <a:solidFill>
+                        <a:schemeClr val="tx1"/>
+                      </a:solidFill>
+                      <a:prstDash val="solid"/>
+                      <a:round/>
+                      <a:headEnd type="none" w="med" len="med"/>
+                      <a:tailEnd type="none" w="med" len="med"/>
+                    </a:lnT>
+                    <a:lnB w="12700" cap="flat" cmpd="sng" algn="ctr">
+                      <a:solidFill>
+                        <a:schemeClr val="tx1"/>
+                      </a:solidFill>
+                      <a:prstDash val="solid"/>
+                      <a:round/>
+                      <a:headEnd type="none" w="med" len="med"/>
+                      <a:tailEnd type="none" w="med" len="med"/>
+                    </a:lnB>
+                  </a:tcPr>
+                </a:tc>
+                <a:tc>
+                  <a:txBody>
+                    <a:bodyPr/>
+                    <a:lstStyle/>
+                    <a:p>
+                      <a:pPr>
+                        <a:buNone/>
+                      </a:pPr>
+                      <a:endParaRPr lang="ja-JP" altLang="en-US" sz="1400">
+                        <a:latin typeface="BIZ UDゴシック" panose="020B0400000000000000" pitchFamily="49" charset="-128"/>
+                        <a:ea typeface="BIZ UDゴシック" panose="020B0400000000000000" pitchFamily="49" charset="-128"/>
+                      </a:endParaRPr>
+                    </a:p>
+                  </a:txBody>
+                  <a:tcPr anchor="ctr">
+                    <a:lnL w="12700" cap="flat" cmpd="sng" algn="ctr">
+                      <a:solidFill>
+                        <a:schemeClr val="tx1"/>
+                      </a:solidFill>
+                      <a:prstDash val="solid"/>
+                      <a:round/>
+                      <a:headEnd type="none" w="med" len="med"/>
+                      <a:tailEnd type="none" w="med" len="med"/>
+                    </a:lnL>
+                    <a:lnR w="12700" cap="flat" cmpd="sng" algn="ctr">
+                      <a:solidFill>
+                        <a:schemeClr val="tx1"/>
+                      </a:solidFill>
+                      <a:prstDash val="solid"/>
+                      <a:round/>
+                      <a:headEnd type="none" w="med" len="med"/>
+                      <a:tailEnd type="none" w="med" len="med"/>
+                    </a:lnR>
+                    <a:lnT w="12700" cap="flat" cmpd="sng" algn="ctr">
+                      <a:solidFill>
+                        <a:schemeClr val="tx1"/>
+                      </a:solidFill>
+                      <a:prstDash val="solid"/>
+                      <a:round/>
+                      <a:headEnd type="none" w="med" len="med"/>
+                      <a:tailEnd type="none" w="med" len="med"/>
+                    </a:lnT>
+                    <a:lnB w="12700" cap="flat" cmpd="sng" algn="ctr">
+                      <a:solidFill>
+                        <a:schemeClr val="tx1"/>
+                      </a:solidFill>
+                      <a:prstDash val="solid"/>
+                      <a:round/>
+                      <a:headEnd type="none" w="med" len="med"/>
+                      <a:tailEnd type="none" w="med" len="med"/>
+                    </a:lnB>
+                  </a:tcPr>
+                </a:tc>
+                <a:extLst>
+                  <a:ext uri="{0D108BD9-81ED-4DB2-BD59-A6C34878D82A}">
+                    <a16:rowId xmlns:a16="http://schemas.microsoft.com/office/drawing/2014/main" val="433765498"/>
+                  </a:ext>
+                </a:extLst>
+              </a:tr>
+              <a:tr h="0">
+                <a:tc>
+                  <a:txBody>
+                    <a:bodyPr/>
+                    <a:lstStyle/>
+                    <a:p>
+                      <a:pPr>
+                        <a:buNone/>
+                      </a:pPr>
+                      <a:endParaRPr lang="ja-JP" altLang="en-US" sz="1400">
+                        <a:latin typeface="BIZ UDゴシック" panose="020B0400000000000000" pitchFamily="49" charset="-128"/>
+                        <a:ea typeface="BIZ UDゴシック" panose="020B0400000000000000" pitchFamily="49" charset="-128"/>
+                      </a:endParaRPr>
+                    </a:p>
+                  </a:txBody>
+                  <a:tcPr anchor="ctr">
+                    <a:lnL w="12700" cap="flat" cmpd="sng" algn="ctr">
+                      <a:solidFill>
+                        <a:schemeClr val="tx1"/>
+                      </a:solidFill>
+                      <a:prstDash val="solid"/>
+                      <a:round/>
+                      <a:headEnd type="none" w="med" len="med"/>
+                      <a:tailEnd type="none" w="med" len="med"/>
+                    </a:lnL>
+                    <a:lnR w="12700" cap="flat" cmpd="sng" algn="ctr">
+                      <a:solidFill>
+                        <a:schemeClr val="tx1"/>
+                      </a:solidFill>
+                      <a:prstDash val="solid"/>
+                      <a:round/>
+                      <a:headEnd type="none" w="med" len="med"/>
+                      <a:tailEnd type="none" w="med" len="med"/>
+                    </a:lnR>
+                    <a:lnT w="12700" cap="flat" cmpd="sng" algn="ctr">
+                      <a:solidFill>
+                        <a:schemeClr val="tx1"/>
+                      </a:solidFill>
+                      <a:prstDash val="solid"/>
+                      <a:round/>
+                      <a:headEnd type="none" w="med" len="med"/>
+                      <a:tailEnd type="none" w="med" len="med"/>
+                    </a:lnT>
+                    <a:lnB w="12700" cap="flat" cmpd="sng" algn="ctr">
+                      <a:solidFill>
+                        <a:schemeClr val="tx1"/>
+                      </a:solidFill>
+                      <a:prstDash val="solid"/>
+                      <a:round/>
+                      <a:headEnd type="none" w="med" len="med"/>
+                      <a:tailEnd type="none" w="med" len="med"/>
+                    </a:lnB>
+                  </a:tcPr>
+                </a:tc>
+                <a:tc>
+                  <a:txBody>
+                    <a:bodyPr/>
+                    <a:lstStyle/>
+                    <a:p>
+                      <a:pPr>
+                        <a:buNone/>
+                      </a:pPr>
+                      <a:endParaRPr lang="ja-JP" altLang="en-US" sz="1400">
+                        <a:latin typeface="BIZ UDゴシック" panose="020B0400000000000000" pitchFamily="49" charset="-128"/>
+                        <a:ea typeface="BIZ UDゴシック" panose="020B0400000000000000" pitchFamily="49" charset="-128"/>
+                      </a:endParaRPr>
+                    </a:p>
+                  </a:txBody>
+                  <a:tcPr anchor="ctr">
+                    <a:lnL w="12700" cap="flat" cmpd="sng" algn="ctr">
+                      <a:solidFill>
+                        <a:schemeClr val="tx1"/>
+                      </a:solidFill>
+                      <a:prstDash val="solid"/>
+                      <a:round/>
+                      <a:headEnd type="none" w="med" len="med"/>
+                      <a:tailEnd type="none" w="med" len="med"/>
+                    </a:lnL>
+                    <a:lnR w="12700" cap="flat" cmpd="sng" algn="ctr">
+                      <a:solidFill>
+                        <a:schemeClr val="tx1"/>
+                      </a:solidFill>
+                      <a:prstDash val="solid"/>
+                      <a:round/>
+                      <a:headEnd type="none" w="med" len="med"/>
+                      <a:tailEnd type="none" w="med" len="med"/>
+                    </a:lnR>
+                    <a:lnT w="12700" cap="flat" cmpd="sng" algn="ctr">
+                      <a:solidFill>
+                        <a:schemeClr val="tx1"/>
+                      </a:solidFill>
+                      <a:prstDash val="solid"/>
+                      <a:round/>
+                      <a:headEnd type="none" w="med" len="med"/>
+                      <a:tailEnd type="none" w="med" len="med"/>
+                    </a:lnT>
+                    <a:lnB w="12700" cap="flat" cmpd="sng" algn="ctr">
+                      <a:solidFill>
+                        <a:schemeClr val="tx1"/>
+                      </a:solidFill>
+                      <a:prstDash val="solid"/>
+                      <a:round/>
+                      <a:headEnd type="none" w="med" len="med"/>
+                      <a:tailEnd type="none" w="med" len="med"/>
+                    </a:lnB>
+                  </a:tcPr>
+                </a:tc>
+                <a:tc>
+                  <a:txBody>
+                    <a:bodyPr/>
+                    <a:lstStyle/>
+                    <a:p>
+                      <a:pPr>
+                        <a:buNone/>
+                      </a:pPr>
+                      <a:endParaRPr lang="ja-JP" altLang="en-US" sz="1400">
+                        <a:latin typeface="BIZ UDゴシック" panose="020B0400000000000000" pitchFamily="49" charset="-128"/>
+                        <a:ea typeface="BIZ UDゴシック" panose="020B0400000000000000" pitchFamily="49" charset="-128"/>
+                      </a:endParaRPr>
+                    </a:p>
+                  </a:txBody>
+                  <a:tcPr anchor="ctr">
+                    <a:lnL w="12700" cap="flat" cmpd="sng" algn="ctr">
+                      <a:solidFill>
+                        <a:schemeClr val="tx1"/>
+                      </a:solidFill>
+                      <a:prstDash val="solid"/>
+                      <a:round/>
+                      <a:headEnd type="none" w="med" len="med"/>
+                      <a:tailEnd type="none" w="med" len="med"/>
+                    </a:lnL>
+                    <a:lnR w="12700" cap="flat" cmpd="sng" algn="ctr">
+                      <a:solidFill>
+                        <a:schemeClr val="tx1"/>
+                      </a:solidFill>
+                      <a:prstDash val="solid"/>
+                      <a:round/>
+                      <a:headEnd type="none" w="med" len="med"/>
+                      <a:tailEnd type="none" w="med" len="med"/>
+                    </a:lnR>
+                    <a:lnT w="12700" cap="flat" cmpd="sng" algn="ctr">
+                      <a:solidFill>
+                        <a:schemeClr val="tx1"/>
+                      </a:solidFill>
+                      <a:prstDash val="solid"/>
+                      <a:round/>
+                      <a:headEnd type="none" w="med" len="med"/>
+                      <a:tailEnd type="none" w="med" len="med"/>
+                    </a:lnT>
+                    <a:lnB w="12700" cap="flat" cmpd="sng" algn="ctr">
+                      <a:solidFill>
+                        <a:schemeClr val="tx1"/>
+                      </a:solidFill>
+                      <a:prstDash val="solid"/>
+                      <a:round/>
+                      <a:headEnd type="none" w="med" len="med"/>
+                      <a:tailEnd type="none" w="med" len="med"/>
+                    </a:lnB>
+                  </a:tcPr>
+                </a:tc>
+                <a:tc>
+                  <a:txBody>
+                    <a:bodyPr/>
+                    <a:lstStyle/>
+                    <a:p>
+                      <a:pPr>
+                        <a:buNone/>
+                      </a:pPr>
+                      <a:endParaRPr lang="ja-JP" altLang="en-US" sz="1400">
+                        <a:latin typeface="BIZ UDゴシック" panose="020B0400000000000000" pitchFamily="49" charset="-128"/>
+                        <a:ea typeface="BIZ UDゴシック" panose="020B0400000000000000" pitchFamily="49" charset="-128"/>
+                      </a:endParaRPr>
+                    </a:p>
+                  </a:txBody>
+                  <a:tcPr anchor="ctr">
+                    <a:lnL w="12700" cap="flat" cmpd="sng" algn="ctr">
+                      <a:solidFill>
+                        <a:schemeClr val="tx1"/>
+                      </a:solidFill>
+                      <a:prstDash val="solid"/>
+                      <a:round/>
+                      <a:headEnd type="none" w="med" len="med"/>
+                      <a:tailEnd type="none" w="med" len="med"/>
+                    </a:lnL>
+                    <a:lnR w="12700" cap="flat" cmpd="sng" algn="ctr">
+                      <a:solidFill>
+                        <a:schemeClr val="tx1"/>
+                      </a:solidFill>
+                      <a:prstDash val="solid"/>
+                      <a:round/>
+                      <a:headEnd type="none" w="med" len="med"/>
+                      <a:tailEnd type="none" w="med" len="med"/>
+                    </a:lnR>
+                    <a:lnT w="12700" cap="flat" cmpd="sng" algn="ctr">
+                      <a:solidFill>
+                        <a:schemeClr val="tx1"/>
+                      </a:solidFill>
+                      <a:prstDash val="solid"/>
+                      <a:round/>
+                      <a:headEnd type="none" w="med" len="med"/>
+                      <a:tailEnd type="none" w="med" len="med"/>
+                    </a:lnT>
+                    <a:lnB w="12700" cap="flat" cmpd="sng" algn="ctr">
+                      <a:solidFill>
+                        <a:schemeClr val="tx1"/>
+                      </a:solidFill>
+                      <a:prstDash val="solid"/>
+                      <a:round/>
+                      <a:headEnd type="none" w="med" len="med"/>
+                      <a:tailEnd type="none" w="med" len="med"/>
+                    </a:lnB>
+                  </a:tcPr>
+                </a:tc>
+                <a:extLst>
+                  <a:ext uri="{0D108BD9-81ED-4DB2-BD59-A6C34878D82A}">
+                    <a16:rowId xmlns:a16="http://schemas.microsoft.com/office/drawing/2014/main" val="572808834"/>
+                  </a:ext>
+                </a:extLst>
+              </a:tr>
+              <a:tr h="0">
+                <a:tc>
+                  <a:txBody>
+                    <a:bodyPr/>
+                    <a:lstStyle/>
+                    <a:p>
+                      <a:pPr>
+                        <a:buNone/>
+                      </a:pPr>
+                      <a:endParaRPr lang="ja-JP" altLang="en-US" sz="1400">
+                        <a:latin typeface="BIZ UDゴシック" panose="020B0400000000000000" pitchFamily="49" charset="-128"/>
+                        <a:ea typeface="BIZ UDゴシック" panose="020B0400000000000000" pitchFamily="49" charset="-128"/>
+                      </a:endParaRPr>
+                    </a:p>
+                  </a:txBody>
+                  <a:tcPr anchor="ctr">
+                    <a:lnL w="12700" cap="flat" cmpd="sng" algn="ctr">
+                      <a:solidFill>
+                        <a:schemeClr val="tx1"/>
+                      </a:solidFill>
+                      <a:prstDash val="solid"/>
+                      <a:round/>
+                      <a:headEnd type="none" w="med" len="med"/>
+                      <a:tailEnd type="none" w="med" len="med"/>
+                    </a:lnL>
+                    <a:lnR w="12700" cap="flat" cmpd="sng" algn="ctr">
+                      <a:solidFill>
+                        <a:schemeClr val="tx1"/>
+                      </a:solidFill>
+                      <a:prstDash val="solid"/>
+                      <a:round/>
+                      <a:headEnd type="none" w="med" len="med"/>
+                      <a:tailEnd type="none" w="med" len="med"/>
+                    </a:lnR>
+                    <a:lnT w="12700" cap="flat" cmpd="sng" algn="ctr">
+                      <a:solidFill>
+                        <a:schemeClr val="tx1"/>
+                      </a:solidFill>
+                      <a:prstDash val="solid"/>
+                      <a:round/>
+                      <a:headEnd type="none" w="med" len="med"/>
+                      <a:tailEnd type="none" w="med" len="med"/>
+                    </a:lnT>
+                    <a:lnB w="12700" cap="flat" cmpd="sng" algn="ctr">
+                      <a:solidFill>
+                        <a:schemeClr val="tx1"/>
+                      </a:solidFill>
+                      <a:prstDash val="solid"/>
+                      <a:round/>
+                      <a:headEnd type="none" w="med" len="med"/>
+                      <a:tailEnd type="none" w="med" len="med"/>
+                    </a:lnB>
+                  </a:tcPr>
+                </a:tc>
+                <a:tc>
+                  <a:txBody>
+                    <a:bodyPr/>
+                    <a:lstStyle/>
+                    <a:p>
+                      <a:pPr>
+                        <a:buNone/>
+                      </a:pPr>
+                      <a:endParaRPr lang="ja-JP" altLang="en-US" sz="1400">
+                        <a:latin typeface="BIZ UDゴシック" panose="020B0400000000000000" pitchFamily="49" charset="-128"/>
+                        <a:ea typeface="BIZ UDゴシック" panose="020B0400000000000000" pitchFamily="49" charset="-128"/>
+                      </a:endParaRPr>
+                    </a:p>
+                  </a:txBody>
+                  <a:tcPr anchor="ctr">
+                    <a:lnL w="12700" cap="flat" cmpd="sng" algn="ctr">
+                      <a:solidFill>
+                        <a:schemeClr val="tx1"/>
+                      </a:solidFill>
+                      <a:prstDash val="solid"/>
+                      <a:round/>
+                      <a:headEnd type="none" w="med" len="med"/>
+                      <a:tailEnd type="none" w="med" len="med"/>
+                    </a:lnL>
+                    <a:lnR w="12700" cap="flat" cmpd="sng" algn="ctr">
+                      <a:solidFill>
+                        <a:schemeClr val="tx1"/>
+                      </a:solidFill>
+                      <a:prstDash val="solid"/>
+                      <a:round/>
+                      <a:headEnd type="none" w="med" len="med"/>
+                      <a:tailEnd type="none" w="med" len="med"/>
+                    </a:lnR>
+                    <a:lnT w="12700" cap="flat" cmpd="sng" algn="ctr">
+                      <a:solidFill>
+                        <a:schemeClr val="tx1"/>
+                      </a:solidFill>
+                      <a:prstDash val="solid"/>
+                      <a:round/>
+                      <a:headEnd type="none" w="med" len="med"/>
+                      <a:tailEnd type="none" w="med" len="med"/>
+                    </a:lnT>
+                    <a:lnB w="12700" cap="flat" cmpd="sng" algn="ctr">
+                      <a:solidFill>
+                        <a:schemeClr val="tx1"/>
+                      </a:solidFill>
+                      <a:prstDash val="solid"/>
+                      <a:round/>
+                      <a:headEnd type="none" w="med" len="med"/>
+                      <a:tailEnd type="none" w="med" len="med"/>
+                    </a:lnB>
+                  </a:tcPr>
+                </a:tc>
+                <a:tc>
+                  <a:txBody>
+                    <a:bodyPr/>
+                    <a:lstStyle/>
+                    <a:p>
+                      <a:pPr>
+                        <a:buNone/>
+                      </a:pPr>
+                      <a:endParaRPr lang="ja-JP" altLang="en-US" sz="1400">
+                        <a:latin typeface="BIZ UDゴシック" panose="020B0400000000000000" pitchFamily="49" charset="-128"/>
+                        <a:ea typeface="BIZ UDゴシック" panose="020B0400000000000000" pitchFamily="49" charset="-128"/>
+                      </a:endParaRPr>
+                    </a:p>
+                  </a:txBody>
+                  <a:tcPr anchor="ctr">
+                    <a:lnL w="12700" cap="flat" cmpd="sng" algn="ctr">
+                      <a:solidFill>
+                        <a:schemeClr val="tx1"/>
+                      </a:solidFill>
+                      <a:prstDash val="solid"/>
+                      <a:round/>
+                      <a:headEnd type="none" w="med" len="med"/>
+                      <a:tailEnd type="none" w="med" len="med"/>
+                    </a:lnL>
+                    <a:lnR w="12700" cap="flat" cmpd="sng" algn="ctr">
+                      <a:solidFill>
+                        <a:schemeClr val="tx1"/>
+                      </a:solidFill>
+                      <a:prstDash val="solid"/>
+                      <a:round/>
+                      <a:headEnd type="none" w="med" len="med"/>
+                      <a:tailEnd type="none" w="med" len="med"/>
+                    </a:lnR>
+                    <a:lnT w="12700" cap="flat" cmpd="sng" algn="ctr">
+                      <a:solidFill>
+                        <a:schemeClr val="tx1"/>
+                      </a:solidFill>
+                      <a:prstDash val="solid"/>
+                      <a:round/>
+                      <a:headEnd type="none" w="med" len="med"/>
+                      <a:tailEnd type="none" w="med" len="med"/>
+                    </a:lnT>
+                    <a:lnB w="12700" cap="flat" cmpd="sng" algn="ctr">
+                      <a:solidFill>
+                        <a:schemeClr val="tx1"/>
+                      </a:solidFill>
+                      <a:prstDash val="solid"/>
+                      <a:round/>
+                      <a:headEnd type="none" w="med" len="med"/>
+                      <a:tailEnd type="none" w="med" len="med"/>
+                    </a:lnB>
+                  </a:tcPr>
+                </a:tc>
+                <a:tc>
+                  <a:txBody>
+                    <a:bodyPr/>
+                    <a:lstStyle/>
+                    <a:p>
+                      <a:pPr>
+                        <a:buNone/>
+                      </a:pPr>
+                      <a:endParaRPr lang="ja-JP" altLang="en-US" sz="1400">
+                        <a:latin typeface="BIZ UDゴシック" panose="020B0400000000000000" pitchFamily="49" charset="-128"/>
+                        <a:ea typeface="BIZ UDゴシック" panose="020B0400000000000000" pitchFamily="49" charset="-128"/>
+                      </a:endParaRPr>
+                    </a:p>
+                  </a:txBody>
+                  <a:tcPr anchor="ctr">
+                    <a:lnL w="12700" cap="flat" cmpd="sng" algn="ctr">
+                      <a:solidFill>
+                        <a:schemeClr val="tx1"/>
+                      </a:solidFill>
+                      <a:prstDash val="solid"/>
+                      <a:round/>
+                      <a:headEnd type="none" w="med" len="med"/>
+                      <a:tailEnd type="none" w="med" len="med"/>
+                    </a:lnL>
+                    <a:lnR w="12700" cap="flat" cmpd="sng" algn="ctr">
+                      <a:solidFill>
+                        <a:schemeClr val="tx1"/>
+                      </a:solidFill>
+                      <a:prstDash val="solid"/>
+                      <a:round/>
+                      <a:headEnd type="none" w="med" len="med"/>
+                      <a:tailEnd type="none" w="med" len="med"/>
+                    </a:lnR>
+                    <a:lnT w="12700" cap="flat" cmpd="sng" algn="ctr">
+                      <a:solidFill>
+                        <a:schemeClr val="tx1"/>
+                      </a:solidFill>
+                      <a:prstDash val="solid"/>
+                      <a:round/>
+                      <a:headEnd type="none" w="med" len="med"/>
+                      <a:tailEnd type="none" w="med" len="med"/>
+                    </a:lnT>
+                    <a:lnB w="12700" cap="flat" cmpd="sng" algn="ctr">
+                      <a:solidFill>
+                        <a:schemeClr val="tx1"/>
+                      </a:solidFill>
+                      <a:prstDash val="solid"/>
+                      <a:round/>
+                      <a:headEnd type="none" w="med" len="med"/>
+                      <a:tailEnd type="none" w="med" len="med"/>
+                    </a:lnB>
+                  </a:tcPr>
+                </a:tc>
+                <a:extLst>
+                  <a:ext uri="{0D108BD9-81ED-4DB2-BD59-A6C34878D82A}">
+                    <a16:rowId xmlns:a16="http://schemas.microsoft.com/office/drawing/2014/main" val="1080130541"/>
+                  </a:ext>
+                </a:extLst>
+              </a:tr>
+              <a:tr h="0">
+                <a:tc>
+                  <a:txBody>
+                    <a:bodyPr/>
+                    <a:lstStyle/>
+                    <a:p>
+                      <a:pPr>
+                        <a:buNone/>
+                      </a:pPr>
+                      <a:endParaRPr lang="ja-JP" altLang="en-US" sz="1400">
+                        <a:latin typeface="BIZ UDゴシック" panose="020B0400000000000000" pitchFamily="49" charset="-128"/>
+                        <a:ea typeface="BIZ UDゴシック" panose="020B0400000000000000" pitchFamily="49" charset="-128"/>
+                      </a:endParaRPr>
+                    </a:p>
+                  </a:txBody>
+                  <a:tcPr anchor="ctr">
+                    <a:lnL w="12700" cap="flat" cmpd="sng" algn="ctr">
+                      <a:solidFill>
+                        <a:schemeClr val="tx1"/>
+                      </a:solidFill>
+                      <a:prstDash val="solid"/>
+                      <a:round/>
+                      <a:headEnd type="none" w="med" len="med"/>
+                      <a:tailEnd type="none" w="med" len="med"/>
+                    </a:lnL>
+                    <a:lnR w="12700" cap="flat" cmpd="sng" algn="ctr">
+                      <a:solidFill>
+                        <a:schemeClr val="tx1"/>
+                      </a:solidFill>
+                      <a:prstDash val="solid"/>
+                      <a:round/>
+                      <a:headEnd type="none" w="med" len="med"/>
+                      <a:tailEnd type="none" w="med" len="med"/>
+                    </a:lnR>
+                    <a:lnT w="12700" cap="flat" cmpd="sng" algn="ctr">
+                      <a:solidFill>
+                        <a:schemeClr val="tx1"/>
+                      </a:solidFill>
+                      <a:prstDash val="solid"/>
+                      <a:round/>
+                      <a:headEnd type="none" w="med" len="med"/>
+                      <a:tailEnd type="none" w="med" len="med"/>
+                    </a:lnT>
+                    <a:lnB w="12700" cap="flat" cmpd="sng" algn="ctr">
+                      <a:solidFill>
+                        <a:schemeClr val="tx1"/>
+                      </a:solidFill>
+                      <a:prstDash val="solid"/>
+                      <a:round/>
+                      <a:headEnd type="none" w="med" len="med"/>
+                      <a:tailEnd type="none" w="med" len="med"/>
+                    </a:lnB>
+                  </a:tcPr>
+                </a:tc>
+                <a:tc>
+                  <a:txBody>
+                    <a:bodyPr/>
+                    <a:lstStyle/>
+                    <a:p>
+                      <a:pPr>
+                        <a:buNone/>
+                      </a:pPr>
+                      <a:endParaRPr lang="ja-JP" altLang="en-US" sz="1400">
+                        <a:latin typeface="BIZ UDゴシック" panose="020B0400000000000000" pitchFamily="49" charset="-128"/>
+                        <a:ea typeface="BIZ UDゴシック" panose="020B0400000000000000" pitchFamily="49" charset="-128"/>
+                      </a:endParaRPr>
+                    </a:p>
+                  </a:txBody>
+                  <a:tcPr anchor="ctr">
+                    <a:lnL w="12700" cap="flat" cmpd="sng" algn="ctr">
+                      <a:solidFill>
+                        <a:schemeClr val="tx1"/>
+                      </a:solidFill>
+                      <a:prstDash val="solid"/>
+                      <a:round/>
+                      <a:headEnd type="none" w="med" len="med"/>
+                      <a:tailEnd type="none" w="med" len="med"/>
+                    </a:lnL>
+                    <a:lnR w="12700" cap="flat" cmpd="sng" algn="ctr">
+                      <a:solidFill>
+                        <a:schemeClr val="tx1"/>
+                      </a:solidFill>
+                      <a:prstDash val="solid"/>
+                      <a:round/>
+                      <a:headEnd type="none" w="med" len="med"/>
+                      <a:tailEnd type="none" w="med" len="med"/>
+                    </a:lnR>
+                    <a:lnT w="12700" cap="flat" cmpd="sng" algn="ctr">
+                      <a:solidFill>
+                        <a:schemeClr val="tx1"/>
+                      </a:solidFill>
+                      <a:prstDash val="solid"/>
+                      <a:round/>
+                      <a:headEnd type="none" w="med" len="med"/>
+                      <a:tailEnd type="none" w="med" len="med"/>
+                    </a:lnT>
+                    <a:lnB w="12700" cap="flat" cmpd="sng" algn="ctr">
+                      <a:solidFill>
+                        <a:schemeClr val="tx1"/>
+                      </a:solidFill>
+                      <a:prstDash val="solid"/>
+                      <a:round/>
+                      <a:headEnd type="none" w="med" len="med"/>
+                      <a:tailEnd type="none" w="med" len="med"/>
+                    </a:lnB>
+                  </a:tcPr>
+                </a:tc>
+                <a:tc>
+                  <a:txBody>
+                    <a:bodyPr/>
+                    <a:lstStyle/>
+                    <a:p>
+                      <a:pPr>
+                        <a:buNone/>
+                      </a:pPr>
+                      <a:endParaRPr lang="ja-JP" altLang="en-US" sz="1400">
+                        <a:latin typeface="BIZ UDゴシック" panose="020B0400000000000000" pitchFamily="49" charset="-128"/>
+                        <a:ea typeface="BIZ UDゴシック" panose="020B0400000000000000" pitchFamily="49" charset="-128"/>
+                      </a:endParaRPr>
+                    </a:p>
+                  </a:txBody>
+                  <a:tcPr anchor="ctr">
+                    <a:lnL w="12700" cap="flat" cmpd="sng" algn="ctr">
+                      <a:solidFill>
+                        <a:schemeClr val="tx1"/>
+                      </a:solidFill>
+                      <a:prstDash val="solid"/>
+                      <a:round/>
+                      <a:headEnd type="none" w="med" len="med"/>
+                      <a:tailEnd type="none" w="med" len="med"/>
+                    </a:lnL>
+                    <a:lnR w="12700" cap="flat" cmpd="sng" algn="ctr">
+                      <a:solidFill>
+                        <a:schemeClr val="tx1"/>
+                      </a:solidFill>
+                      <a:prstDash val="solid"/>
+                      <a:round/>
+                      <a:headEnd type="none" w="med" len="med"/>
+                      <a:tailEnd type="none" w="med" len="med"/>
+                    </a:lnR>
+                    <a:lnT w="12700" cap="flat" cmpd="sng" algn="ctr">
+                      <a:solidFill>
+                        <a:schemeClr val="tx1"/>
+                      </a:solidFill>
+                      <a:prstDash val="solid"/>
+                      <a:round/>
+                      <a:headEnd type="none" w="med" len="med"/>
+                      <a:tailEnd type="none" w="med" len="med"/>
+                    </a:lnT>
+                    <a:lnB w="12700" cap="flat" cmpd="sng" algn="ctr">
+                      <a:solidFill>
+                        <a:schemeClr val="tx1"/>
+                      </a:solidFill>
+                      <a:prstDash val="solid"/>
+                      <a:round/>
+                      <a:headEnd type="none" w="med" len="med"/>
+                      <a:tailEnd type="none" w="med" len="med"/>
+                    </a:lnB>
+                  </a:tcPr>
+                </a:tc>
+                <a:tc>
+                  <a:txBody>
+                    <a:bodyPr/>
+                    <a:lstStyle/>
+                    <a:p>
+                      <a:pPr>
+                        <a:buNone/>
+                      </a:pPr>
+                      <a:endParaRPr lang="ja-JP" altLang="en-US" sz="1400">
+                        <a:latin typeface="BIZ UDゴシック" panose="020B0400000000000000" pitchFamily="49" charset="-128"/>
+                        <a:ea typeface="BIZ UDゴシック" panose="020B0400000000000000" pitchFamily="49" charset="-128"/>
+                      </a:endParaRPr>
+                    </a:p>
+                  </a:txBody>
+                  <a:tcPr anchor="ctr">
+                    <a:lnL w="12700" cap="flat" cmpd="sng" algn="ctr">
+                      <a:solidFill>
+                        <a:schemeClr val="tx1"/>
+                      </a:solidFill>
+                      <a:prstDash val="solid"/>
+                      <a:round/>
+                      <a:headEnd type="none" w="med" len="med"/>
+                      <a:tailEnd type="none" w="med" len="med"/>
+                    </a:lnL>
+                    <a:lnR w="12700" cap="flat" cmpd="sng" algn="ctr">
+                      <a:solidFill>
+                        <a:schemeClr val="tx1"/>
+                      </a:solidFill>
+                      <a:prstDash val="solid"/>
+                      <a:round/>
+                      <a:headEnd type="none" w="med" len="med"/>
+                      <a:tailEnd type="none" w="med" len="med"/>
+                    </a:lnR>
+                    <a:lnT w="12700" cap="flat" cmpd="sng" algn="ctr">
+                      <a:solidFill>
+                        <a:schemeClr val="tx1"/>
+                      </a:solidFill>
+                      <a:prstDash val="solid"/>
+                      <a:round/>
+                      <a:headEnd type="none" w="med" len="med"/>
+                      <a:tailEnd type="none" w="med" len="med"/>
+                    </a:lnT>
+                    <a:lnB w="12700" cap="flat" cmpd="sng" algn="ctr">
+                      <a:solidFill>
+                        <a:schemeClr val="tx1"/>
+                      </a:solidFill>
+                      <a:prstDash val="solid"/>
+                      <a:round/>
+                      <a:headEnd type="none" w="med" len="med"/>
+                      <a:tailEnd type="none" w="med" len="med"/>
+                    </a:lnB>
+                  </a:tcPr>
+                </a:tc>
+                <a:extLst>
+                  <a:ext uri="{0D108BD9-81ED-4DB2-BD59-A6C34878D82A}">
+                    <a16:rowId xmlns:a16="http://schemas.microsoft.com/office/drawing/2014/main" val="350799095"/>
+                  </a:ext>
+                </a:extLst>
+              </a:tr>
+              <a:tr h="0">
+                <a:tc>
+                  <a:txBody>
+                    <a:bodyPr/>
+                    <a:lstStyle/>
+                    <a:p>
+                      <a:pPr>
+                        <a:buNone/>
+                      </a:pPr>
+                      <a:endParaRPr lang="ja-JP" altLang="en-US" sz="1400">
+                        <a:latin typeface="BIZ UDゴシック" panose="020B0400000000000000" pitchFamily="49" charset="-128"/>
+                        <a:ea typeface="BIZ UDゴシック" panose="020B0400000000000000" pitchFamily="49" charset="-128"/>
+                      </a:endParaRPr>
+                    </a:p>
+                  </a:txBody>
+                  <a:tcPr anchor="ctr">
+                    <a:lnL w="12700" cap="flat" cmpd="sng" algn="ctr">
+                      <a:solidFill>
+                        <a:schemeClr val="tx1"/>
+                      </a:solidFill>
+                      <a:prstDash val="solid"/>
+                      <a:round/>
+                      <a:headEnd type="none" w="med" len="med"/>
+                      <a:tailEnd type="none" w="med" len="med"/>
+                    </a:lnL>
+                    <a:lnR w="12700" cap="flat" cmpd="sng" algn="ctr">
+                      <a:solidFill>
+                        <a:schemeClr val="tx1"/>
+                      </a:solidFill>
+                      <a:prstDash val="solid"/>
+                      <a:round/>
+                      <a:headEnd type="none" w="med" len="med"/>
+                      <a:tailEnd type="none" w="med" len="med"/>
+                    </a:lnR>
+                    <a:lnT w="12700" cap="flat" cmpd="sng" algn="ctr">
+                      <a:solidFill>
+                        <a:schemeClr val="tx1"/>
+                      </a:solidFill>
+                      <a:prstDash val="solid"/>
+                      <a:round/>
+                      <a:headEnd type="none" w="med" len="med"/>
+                      <a:tailEnd type="none" w="med" len="med"/>
+                    </a:lnT>
+                    <a:lnB w="12700" cap="flat" cmpd="sng" algn="ctr">
+                      <a:solidFill>
+                        <a:schemeClr val="tx1"/>
+                      </a:solidFill>
+                      <a:prstDash val="solid"/>
+                      <a:round/>
+                      <a:headEnd type="none" w="med" len="med"/>
+                      <a:tailEnd type="none" w="med" len="med"/>
+                    </a:lnB>
+                  </a:tcPr>
+                </a:tc>
+                <a:tc>
+                  <a:txBody>
+                    <a:bodyPr/>
+                    <a:lstStyle/>
+                    <a:p>
+                      <a:pPr>
+                        <a:buNone/>
+                      </a:pPr>
+                      <a:endParaRPr lang="en-US" altLang="ja-JP" sz="1400">
+                        <a:latin typeface="BIZ UDゴシック" panose="020B0400000000000000" pitchFamily="49" charset="-128"/>
+                        <a:ea typeface="BIZ UDゴシック" panose="020B0400000000000000" pitchFamily="49" charset="-128"/>
+                      </a:endParaRPr>
+                    </a:p>
+                  </a:txBody>
+                  <a:tcPr anchor="ctr">
+                    <a:lnL w="12700" cap="flat" cmpd="sng" algn="ctr">
+                      <a:solidFill>
+                        <a:schemeClr val="tx1"/>
+                      </a:solidFill>
+                      <a:prstDash val="solid"/>
+                      <a:round/>
+                      <a:headEnd type="none" w="med" len="med"/>
+                      <a:tailEnd type="none" w="med" len="med"/>
+                    </a:lnL>
+                    <a:lnR w="12700" cap="flat" cmpd="sng" algn="ctr">
+                      <a:solidFill>
+                        <a:schemeClr val="tx1"/>
+                      </a:solidFill>
+                      <a:prstDash val="solid"/>
+                      <a:round/>
+                      <a:headEnd type="none" w="med" len="med"/>
+                      <a:tailEnd type="none" w="med" len="med"/>
+                    </a:lnR>
+                    <a:lnT w="12700" cap="flat" cmpd="sng" algn="ctr">
+                      <a:solidFill>
+                        <a:schemeClr val="tx1"/>
+                      </a:solidFill>
+                      <a:prstDash val="solid"/>
+                      <a:round/>
+                      <a:headEnd type="none" w="med" len="med"/>
+                      <a:tailEnd type="none" w="med" len="med"/>
+                    </a:lnT>
+                    <a:lnB w="12700" cap="flat" cmpd="sng" algn="ctr">
+                      <a:solidFill>
+                        <a:schemeClr val="tx1"/>
+                      </a:solidFill>
+                      <a:prstDash val="solid"/>
+                      <a:round/>
+                      <a:headEnd type="none" w="med" len="med"/>
+                      <a:tailEnd type="none" w="med" len="med"/>
+                    </a:lnB>
+                  </a:tcPr>
+                </a:tc>
+                <a:tc>
+                  <a:txBody>
+                    <a:bodyPr/>
+                    <a:lstStyle/>
+                    <a:p>
+                      <a:pPr>
+                        <a:buNone/>
+                      </a:pPr>
+                      <a:endParaRPr lang="en-US" altLang="ja-JP" sz="1400">
+                        <a:latin typeface="BIZ UDゴシック" panose="020B0400000000000000" pitchFamily="49" charset="-128"/>
+                        <a:ea typeface="BIZ UDゴシック" panose="020B0400000000000000" pitchFamily="49" charset="-128"/>
+                      </a:endParaRPr>
+                    </a:p>
+                  </a:txBody>
+                  <a:tcPr anchor="ctr">
+                    <a:lnL w="12700" cap="flat" cmpd="sng" algn="ctr">
+                      <a:solidFill>
+                        <a:schemeClr val="tx1"/>
+                      </a:solidFill>
+                      <a:prstDash val="solid"/>
+                      <a:round/>
+                      <a:headEnd type="none" w="med" len="med"/>
+                      <a:tailEnd type="none" w="med" len="med"/>
+                    </a:lnL>
+                    <a:lnR w="12700" cap="flat" cmpd="sng" algn="ctr">
+                      <a:solidFill>
+                        <a:schemeClr val="tx1"/>
+                      </a:solidFill>
+                      <a:prstDash val="solid"/>
+                      <a:round/>
+                      <a:headEnd type="none" w="med" len="med"/>
+                      <a:tailEnd type="none" w="med" len="med"/>
+                    </a:lnR>
+                    <a:lnT w="12700" cap="flat" cmpd="sng" algn="ctr">
+                      <a:solidFill>
+                        <a:schemeClr val="tx1"/>
+                      </a:solidFill>
+                      <a:prstDash val="solid"/>
+                      <a:round/>
+                      <a:headEnd type="none" w="med" len="med"/>
+                      <a:tailEnd type="none" w="med" len="med"/>
+                    </a:lnT>
+                    <a:lnB w="12700" cap="flat" cmpd="sng" algn="ctr">
+                      <a:solidFill>
+                        <a:schemeClr val="tx1"/>
+                      </a:solidFill>
+                      <a:prstDash val="solid"/>
+                      <a:round/>
+                      <a:headEnd type="none" w="med" len="med"/>
+                      <a:tailEnd type="none" w="med" len="med"/>
+                    </a:lnB>
+                  </a:tcPr>
+                </a:tc>
+                <a:tc>
+                  <a:txBody>
+                    <a:bodyPr/>
+                    <a:lstStyle/>
+                    <a:p>
+                      <a:pPr>
+                        <a:buNone/>
+                      </a:pPr>
+                      <a:endParaRPr lang="ja-JP" altLang="en-US" sz="1400">
+                        <a:latin typeface="BIZ UDゴシック" panose="020B0400000000000000" pitchFamily="49" charset="-128"/>
+                        <a:ea typeface="BIZ UDゴシック" panose="020B0400000000000000" pitchFamily="49" charset="-128"/>
+                      </a:endParaRPr>
+                    </a:p>
+                  </a:txBody>
+                  <a:tcPr anchor="ctr">
+                    <a:lnL w="12700" cap="flat" cmpd="sng" algn="ctr">
+                      <a:solidFill>
+                        <a:schemeClr val="tx1"/>
+                      </a:solidFill>
+                      <a:prstDash val="solid"/>
+                      <a:round/>
+                      <a:headEnd type="none" w="med" len="med"/>
+                      <a:tailEnd type="none" w="med" len="med"/>
+                    </a:lnL>
+                    <a:lnR w="12700" cap="flat" cmpd="sng" algn="ctr">
+                      <a:solidFill>
+                        <a:schemeClr val="tx1"/>
+                      </a:solidFill>
+                      <a:prstDash val="solid"/>
+                      <a:round/>
+                      <a:headEnd type="none" w="med" len="med"/>
+                      <a:tailEnd type="none" w="med" len="med"/>
+                    </a:lnR>
+                    <a:lnT w="12700" cap="flat" cmpd="sng" algn="ctr">
+                      <a:solidFill>
+                        <a:schemeClr val="tx1"/>
+                      </a:solidFill>
+                      <a:prstDash val="solid"/>
+                      <a:round/>
+                      <a:headEnd type="none" w="med" len="med"/>
+                      <a:tailEnd type="none" w="med" len="med"/>
+                    </a:lnT>
+                    <a:lnB w="12700" cap="flat" cmpd="sng" algn="ctr">
+                      <a:solidFill>
+                        <a:schemeClr val="tx1"/>
+                      </a:solidFill>
+                      <a:prstDash val="solid"/>
+                      <a:round/>
+                      <a:headEnd type="none" w="med" len="med"/>
+                      <a:tailEnd type="none" w="med" len="med"/>
+                    </a:lnB>
+                  </a:tcPr>
+                </a:tc>
+                <a:extLst>
+                  <a:ext uri="{0D108BD9-81ED-4DB2-BD59-A6C34878D82A}">
+                    <a16:rowId xmlns:a16="http://schemas.microsoft.com/office/drawing/2014/main" val="245562205"/>
+                  </a:ext>
+                </a:extLst>
+              </a:tr>
+            </a:tbl>
+          </a:graphicData>
+        </a:graphic>
+      </p:graphicFrame>
+      <p:sp>
+        <p:nvSpPr>
+          <p:cNvPr id="6" name="テキスト ボックス 5">
+            <a:extLst>
+              <a:ext uri="{FF2B5EF4-FFF2-40B4-BE49-F238E27FC236}">
+                <a16:creationId xmlns:a16="http://schemas.microsoft.com/office/drawing/2014/main" id="{1B894B55-F6E2-E309-9D7E-14D06D7DD178}"/>
+              </a:ext>
+            </a:extLst>
+          </p:cNvPr>
+          <p:cNvSpPr txBox="1"/>
+          <p:nvPr/>
+        </p:nvSpPr>
+        <p:spPr>
+          <a:xfrm>
+            <a:off x="363836" y="3048961"/>
+            <a:ext cx="3252260" cy="261610"/>
+          </a:xfrm>
+          <a:prstGeom prst="rect">
+            <a:avLst/>
+          </a:prstGeom>
+          <a:noFill/>
+        </p:spPr>
+        <p:txBody>
+          <a:bodyPr wrap="square" rtlCol="0">
+            <a:spAutoFit/>
+          </a:bodyPr>
+          <a:lstStyle/>
+          <a:p>
+            <a:r>
+              <a:rPr kumimoji="1" lang="ja-JP" altLang="en-US" sz="1100">
+                <a:latin typeface="BIZ UDゴシック" panose="020B0400000000000000" pitchFamily="49" charset="-128"/>
+                <a:ea typeface="BIZ UDゴシック" panose="020B0400000000000000" pitchFamily="49" charset="-128"/>
+              </a:rPr>
+              <a:t>バッテリ温度制御モジュール</a:t>
+            </a:r>
+          </a:p>
+        </p:txBody>
+      </p:sp>
     </p:spTree>
     <p:extLst>
       <p:ext uri="{BB962C8B-B14F-4D97-AF65-F5344CB8AC3E}">

--- a/Specification/基本仕様.pptx
+++ b/Specification/基本仕様.pptx
@@ -629,7 +629,7 @@
           <a:bodyPr/>
           <a:lstStyle/>
           <a:p>
-            <a:fld id="{F5AF9F5B-2404-485D-A870-3651691CD6B5}" type="datetime1">
+            <a:fld id="{129F32E0-C2E8-4242-AC1F-A409A214FAD9}" type="datetime1">
               <a:rPr kumimoji="1" lang="ja-JP" altLang="en-US" smtClean="0"/>
               <a:t>2025/10/21</a:t>
             </a:fld>
@@ -829,7 +829,7 @@
           <a:bodyPr/>
           <a:lstStyle/>
           <a:p>
-            <a:fld id="{5747C4F4-5A8E-4D77-ABBE-A0BE847775D5}" type="datetime1">
+            <a:fld id="{8D1877CE-4617-4C8C-B4B4-4A6BFB6210D6}" type="datetime1">
               <a:rPr kumimoji="1" lang="ja-JP" altLang="en-US" smtClean="0"/>
               <a:t>2025/10/21</a:t>
             </a:fld>
@@ -1039,7 +1039,7 @@
           <a:bodyPr/>
           <a:lstStyle/>
           <a:p>
-            <a:fld id="{9A9AB05E-20D0-482C-BB40-3584160A1784}" type="datetime1">
+            <a:fld id="{125C360C-7E95-41B1-9894-D5B08D2C9336}" type="datetime1">
               <a:rPr kumimoji="1" lang="ja-JP" altLang="en-US" smtClean="0"/>
               <a:t>2025/10/21</a:t>
             </a:fld>
@@ -1239,7 +1239,7 @@
           <a:bodyPr/>
           <a:lstStyle/>
           <a:p>
-            <a:fld id="{704830A0-5797-4E39-976B-196EBC8F12A5}" type="datetime1">
+            <a:fld id="{4D8A2533-61B8-4130-8AE8-C0E953C2863F}" type="datetime1">
               <a:rPr kumimoji="1" lang="ja-JP" altLang="en-US" smtClean="0"/>
               <a:t>2025/10/21</a:t>
             </a:fld>
@@ -1484,7 +1484,7 @@
           <a:bodyPr/>
           <a:lstStyle/>
           <a:p>
-            <a:fld id="{3D3FFB79-61C9-4C9B-BB39-B3ADC33410DC}" type="datetime1">
+            <a:fld id="{5BA37F75-6A8A-44B6-81A0-F01AE9A15952}" type="datetime1">
               <a:rPr kumimoji="1" lang="ja-JP" altLang="en-US" smtClean="0"/>
               <a:t>2025/10/21</a:t>
             </a:fld>
@@ -1777,7 +1777,7 @@
           <a:bodyPr/>
           <a:lstStyle/>
           <a:p>
-            <a:fld id="{FA15C774-0875-42EB-AD6C-A573C6182984}" type="datetime1">
+            <a:fld id="{6B6692D1-488E-400C-A3B7-12316802EE0E}" type="datetime1">
               <a:rPr kumimoji="1" lang="ja-JP" altLang="en-US" smtClean="0"/>
               <a:t>2025/10/21</a:t>
             </a:fld>
@@ -2205,7 +2205,7 @@
           <a:bodyPr/>
           <a:lstStyle/>
           <a:p>
-            <a:fld id="{698AFFEB-CD38-4777-8454-30081785CFFF}" type="datetime1">
+            <a:fld id="{BFCAF897-2775-4370-811C-D54EFC08864D}" type="datetime1">
               <a:rPr kumimoji="1" lang="ja-JP" altLang="en-US" smtClean="0"/>
               <a:t>2025/10/21</a:t>
             </a:fld>
@@ -2336,7 +2336,7 @@
           <a:bodyPr/>
           <a:lstStyle/>
           <a:p>
-            <a:fld id="{42D7B12B-7CA0-4414-AEAA-6D0AACA2052F}" type="datetime1">
+            <a:fld id="{8A8FDD99-561F-41AB-B3A7-0EEEF5779D1E}" type="datetime1">
               <a:rPr kumimoji="1" lang="ja-JP" altLang="en-US" smtClean="0"/>
               <a:t>2025/10/21</a:t>
             </a:fld>
@@ -2431,7 +2431,7 @@
           <a:bodyPr/>
           <a:lstStyle/>
           <a:p>
-            <a:fld id="{AFD3D29A-C4E2-4B84-B7FB-8D55DDD89BA5}" type="datetime1">
+            <a:fld id="{69298230-AF5F-4371-A15E-14F7D666A1E9}" type="datetime1">
               <a:rPr kumimoji="1" lang="ja-JP" altLang="en-US" smtClean="0"/>
               <a:t>2025/10/21</a:t>
             </a:fld>
@@ -2738,7 +2738,7 @@
           <a:bodyPr/>
           <a:lstStyle/>
           <a:p>
-            <a:fld id="{D93CAB33-5415-4090-AE1B-2B4E589E017F}" type="datetime1">
+            <a:fld id="{493F381F-BD65-4948-8AA9-32B16F2D5C98}" type="datetime1">
               <a:rPr kumimoji="1" lang="ja-JP" altLang="en-US" smtClean="0"/>
               <a:t>2025/10/21</a:t>
             </a:fld>
@@ -2990,7 +2990,7 @@
           <a:bodyPr/>
           <a:lstStyle/>
           <a:p>
-            <a:fld id="{9AD6552B-56D1-4206-BF32-17E96CC146D1}" type="datetime1">
+            <a:fld id="{DA1513CA-C190-486F-BD2A-798F90F2F896}" type="datetime1">
               <a:rPr kumimoji="1" lang="ja-JP" altLang="en-US" smtClean="0"/>
               <a:t>2025/10/21</a:t>
             </a:fld>
@@ -3233,7 +3233,7 @@
             </a:lvl1pPr>
           </a:lstStyle>
           <a:p>
-            <a:fld id="{B79ECCA8-2BE2-481B-9A14-A01B368CD589}" type="datetime1">
+            <a:fld id="{2E167B46-2EB4-4DB4-9CDA-53249C7AEAAE}" type="datetime1">
               <a:rPr kumimoji="1" lang="ja-JP" altLang="en-US" smtClean="0"/>
               <a:t>2025/10/21</a:t>
             </a:fld>
@@ -19672,7 +19672,7 @@
           <p:nvPr>
             <p:extLst>
               <p:ext uri="{D42A27DB-BD31-4B8C-83A1-F6EECF244321}">
-                <p14:modId xmlns:p14="http://schemas.microsoft.com/office/powerpoint/2010/main" val="3855686481"/>
+                <p14:modId xmlns:p14="http://schemas.microsoft.com/office/powerpoint/2010/main" val="440778988"/>
               </p:ext>
             </p:extLst>
           </p:nvPr>
@@ -19688,21 +19688,21 @@
                 <a:tableStyleId>{912C8C85-51F0-491E-9774-3900AFEF0FD7}</a:tableStyleId>
               </a:tblPr>
               <a:tblGrid>
-                <a:gridCol w="2736000">
+                <a:gridCol w="2944075">
                   <a:extLst>
                     <a:ext uri="{9D8B030D-6E8A-4147-A177-3AD203B41FA5}">
                       <a16:colId xmlns:a16="http://schemas.microsoft.com/office/drawing/2014/main" val="6935548"/>
                     </a:ext>
                   </a:extLst>
                 </a:gridCol>
-                <a:gridCol w="1762660">
+                <a:gridCol w="1769166">
                   <a:extLst>
                     <a:ext uri="{9D8B030D-6E8A-4147-A177-3AD203B41FA5}">
                       <a16:colId xmlns:a16="http://schemas.microsoft.com/office/drawing/2014/main" val="2184599737"/>
                     </a:ext>
                   </a:extLst>
                 </a:gridCol>
-                <a:gridCol w="1762660">
+                <a:gridCol w="1548079">
                   <a:extLst>
                     <a:ext uri="{9D8B030D-6E8A-4147-A177-3AD203B41FA5}">
                       <a16:colId xmlns:a16="http://schemas.microsoft.com/office/drawing/2014/main" val="2311469129"/>
@@ -19962,7 +19962,7 @@
                           <a:latin typeface="BIZ UDゴシック" panose="020B0400000000000000" pitchFamily="49" charset="-128"/>
                           <a:ea typeface="BIZ UDゴシック" panose="020B0400000000000000" pitchFamily="49" charset="-128"/>
                         </a:rPr>
-                        <a:t>BatteryTemperatureControl .c</a:t>
+                        <a:t>BatteryTemperatureControl .py</a:t>
                       </a:r>
                       <a:endParaRPr lang="ja-JP" altLang="en-US" sz="1400">
                         <a:latin typeface="BIZ UDゴシック" panose="020B0400000000000000" pitchFamily="49" charset="-128"/>
@@ -20078,65 +20078,72 @@
                         <a:buNone/>
                       </a:pPr>
                       <a:r>
-                        <a:rPr lang="en-US" sz="1400">
-                          <a:latin typeface="BIZ UDゴシック" panose="020B0400000000000000" pitchFamily="49" charset="-128"/>
-                          <a:ea typeface="BIZ UDゴシック" panose="020B0400000000000000" pitchFamily="49" charset="-128"/>
-                        </a:rPr>
-                        <a:t>C</a:t>
-                      </a:r>
-                    </a:p>
-                  </a:txBody>
-                  <a:tcPr anchor="ctr">
-                    <a:lnL w="12700" cap="flat" cmpd="sng" algn="ctr">
-                      <a:solidFill>
-                        <a:schemeClr val="tx1"/>
-                      </a:solidFill>
-                      <a:prstDash val="solid"/>
-                      <a:round/>
-                      <a:headEnd type="none" w="med" len="med"/>
-                      <a:tailEnd type="none" w="med" len="med"/>
-                    </a:lnL>
-                    <a:lnR w="12700" cap="flat" cmpd="sng" algn="ctr">
-                      <a:solidFill>
-                        <a:schemeClr val="tx1"/>
-                      </a:solidFill>
-                      <a:prstDash val="solid"/>
-                      <a:round/>
-                      <a:headEnd type="none" w="med" len="med"/>
-                      <a:tailEnd type="none" w="med" len="med"/>
-                    </a:lnR>
-                    <a:lnT w="12700" cap="flat" cmpd="sng" algn="ctr">
-                      <a:solidFill>
-                        <a:schemeClr val="tx1"/>
-                      </a:solidFill>
-                      <a:prstDash val="solid"/>
-                      <a:round/>
-                      <a:headEnd type="none" w="med" len="med"/>
-                      <a:tailEnd type="none" w="med" len="med"/>
-                    </a:lnT>
-                    <a:lnB w="12700" cap="flat" cmpd="sng" algn="ctr">
-                      <a:solidFill>
-                        <a:schemeClr val="tx1"/>
-                      </a:solidFill>
-                      <a:prstDash val="solid"/>
-                      <a:round/>
-                      <a:headEnd type="none" w="med" len="med"/>
-                      <a:tailEnd type="none" w="med" len="med"/>
-                    </a:lnB>
-                  </a:tcPr>
-                </a:tc>
-                <a:tc>
-                  <a:txBody>
-                    <a:bodyPr/>
-                    <a:lstStyle/>
-                    <a:p>
-                      <a:pPr>
-                        <a:buNone/>
-                      </a:pPr>
+                        <a:rPr lang="en-US" altLang="ja-JP" sz="1400">
+                          <a:latin typeface="BIZ UDゴシック" panose="020B0400000000000000" pitchFamily="49" charset="-128"/>
+                          <a:ea typeface="BIZ UDゴシック" panose="020B0400000000000000" pitchFamily="49" charset="-128"/>
+                        </a:rPr>
+                        <a:t>Python</a:t>
+                      </a:r>
                       <a:endParaRPr lang="ja-JP" altLang="en-US" sz="1400">
                         <a:latin typeface="BIZ UDゴシック" panose="020B0400000000000000" pitchFamily="49" charset="-128"/>
                         <a:ea typeface="BIZ UDゴシック" panose="020B0400000000000000" pitchFamily="49" charset="-128"/>
                       </a:endParaRPr>
+                    </a:p>
+                  </a:txBody>
+                  <a:tcPr anchor="ctr">
+                    <a:lnL w="12700" cap="flat" cmpd="sng" algn="ctr">
+                      <a:solidFill>
+                        <a:schemeClr val="tx1"/>
+                      </a:solidFill>
+                      <a:prstDash val="solid"/>
+                      <a:round/>
+                      <a:headEnd type="none" w="med" len="med"/>
+                      <a:tailEnd type="none" w="med" len="med"/>
+                    </a:lnL>
+                    <a:lnR w="12700" cap="flat" cmpd="sng" algn="ctr">
+                      <a:solidFill>
+                        <a:schemeClr val="tx1"/>
+                      </a:solidFill>
+                      <a:prstDash val="solid"/>
+                      <a:round/>
+                      <a:headEnd type="none" w="med" len="med"/>
+                      <a:tailEnd type="none" w="med" len="med"/>
+                    </a:lnR>
+                    <a:lnT w="12700" cap="flat" cmpd="sng" algn="ctr">
+                      <a:solidFill>
+                        <a:schemeClr val="tx1"/>
+                      </a:solidFill>
+                      <a:prstDash val="solid"/>
+                      <a:round/>
+                      <a:headEnd type="none" w="med" len="med"/>
+                      <a:tailEnd type="none" w="med" len="med"/>
+                    </a:lnT>
+                    <a:lnB w="12700" cap="flat" cmpd="sng" algn="ctr">
+                      <a:solidFill>
+                        <a:schemeClr val="tx1"/>
+                      </a:solidFill>
+                      <a:prstDash val="solid"/>
+                      <a:round/>
+                      <a:headEnd type="none" w="med" len="med"/>
+                      <a:tailEnd type="none" w="med" len="med"/>
+                    </a:lnB>
+                  </a:tcPr>
+                </a:tc>
+                <a:tc>
+                  <a:txBody>
+                    <a:bodyPr/>
+                    <a:lstStyle/>
+                    <a:p>
+                      <a:pPr>
+                        <a:buNone/>
+                      </a:pPr>
+                      <a:r>
+                        <a:rPr lang="ja-JP" altLang="en-US" sz="1400">
+                          <a:latin typeface="BIZ UDゴシック" panose="020B0400000000000000" pitchFamily="49" charset="-128"/>
+                          <a:ea typeface="BIZ UDゴシック" panose="020B0400000000000000" pitchFamily="49" charset="-128"/>
+                        </a:rPr>
+                        <a:t>状態遷移</a:t>
+                      </a:r>
                     </a:p>
                   </a:txBody>
                   <a:tcPr anchor="ctr">

--- a/Specification/基本仕様.pptx
+++ b/Specification/基本仕様.pptx
@@ -5,16 +5,14 @@
     <p:sldMasterId id="2147483648" r:id="rId1"/>
   </p:sldMasterIdLst>
   <p:notesMasterIdLst>
-    <p:notesMasterId r:id="rId9"/>
+    <p:notesMasterId r:id="rId7"/>
   </p:notesMasterIdLst>
   <p:sldIdLst>
     <p:sldId id="258" r:id="rId2"/>
     <p:sldId id="259" r:id="rId3"/>
-    <p:sldId id="262" r:id="rId4"/>
-    <p:sldId id="267" r:id="rId5"/>
-    <p:sldId id="263" r:id="rId6"/>
-    <p:sldId id="268" r:id="rId7"/>
-    <p:sldId id="269" r:id="rId8"/>
+    <p:sldId id="267" r:id="rId4"/>
+    <p:sldId id="268" r:id="rId5"/>
+    <p:sldId id="269" r:id="rId6"/>
   </p:sldIdLst>
   <p:sldSz cx="12192000" cy="6858000"/>
   <p:notesSz cx="6858000" cy="9144000"/>
@@ -203,7 +201,7 @@
           <a:p>
             <a:fld id="{DDC962EE-CD8D-4B91-A3DD-4C699082EA73}" type="datetimeFigureOut">
               <a:rPr kumimoji="1" lang="ja-JP" altLang="en-US" smtClean="0"/>
-              <a:t>2025/10/21</a:t>
+              <a:t>2025/10/23</a:t>
             </a:fld>
             <a:endParaRPr kumimoji="1" lang="ja-JP" altLang="en-US"/>
           </a:p>
@@ -631,7 +629,7 @@
           <a:p>
             <a:fld id="{129F32E0-C2E8-4242-AC1F-A409A214FAD9}" type="datetime1">
               <a:rPr kumimoji="1" lang="ja-JP" altLang="en-US" smtClean="0"/>
-              <a:t>2025/10/21</a:t>
+              <a:t>2025/10/23</a:t>
             </a:fld>
             <a:endParaRPr kumimoji="1" lang="ja-JP" altLang="en-US"/>
           </a:p>
@@ -831,7 +829,7 @@
           <a:p>
             <a:fld id="{8D1877CE-4617-4C8C-B4B4-4A6BFB6210D6}" type="datetime1">
               <a:rPr kumimoji="1" lang="ja-JP" altLang="en-US" smtClean="0"/>
-              <a:t>2025/10/21</a:t>
+              <a:t>2025/10/23</a:t>
             </a:fld>
             <a:endParaRPr kumimoji="1" lang="ja-JP" altLang="en-US"/>
           </a:p>
@@ -1041,7 +1039,7 @@
           <a:p>
             <a:fld id="{125C360C-7E95-41B1-9894-D5B08D2C9336}" type="datetime1">
               <a:rPr kumimoji="1" lang="ja-JP" altLang="en-US" smtClean="0"/>
-              <a:t>2025/10/21</a:t>
+              <a:t>2025/10/23</a:t>
             </a:fld>
             <a:endParaRPr kumimoji="1" lang="ja-JP" altLang="en-US"/>
           </a:p>
@@ -1241,7 +1239,7 @@
           <a:p>
             <a:fld id="{4D8A2533-61B8-4130-8AE8-C0E953C2863F}" type="datetime1">
               <a:rPr kumimoji="1" lang="ja-JP" altLang="en-US" smtClean="0"/>
-              <a:t>2025/10/21</a:t>
+              <a:t>2025/10/23</a:t>
             </a:fld>
             <a:endParaRPr kumimoji="1" lang="ja-JP" altLang="en-US"/>
           </a:p>
@@ -1486,7 +1484,7 @@
           <a:p>
             <a:fld id="{5BA37F75-6A8A-44B6-81A0-F01AE9A15952}" type="datetime1">
               <a:rPr kumimoji="1" lang="ja-JP" altLang="en-US" smtClean="0"/>
-              <a:t>2025/10/21</a:t>
+              <a:t>2025/10/23</a:t>
             </a:fld>
             <a:endParaRPr kumimoji="1" lang="ja-JP" altLang="en-US"/>
           </a:p>
@@ -1779,7 +1777,7 @@
           <a:p>
             <a:fld id="{6B6692D1-488E-400C-A3B7-12316802EE0E}" type="datetime1">
               <a:rPr kumimoji="1" lang="ja-JP" altLang="en-US" smtClean="0"/>
-              <a:t>2025/10/21</a:t>
+              <a:t>2025/10/23</a:t>
             </a:fld>
             <a:endParaRPr kumimoji="1" lang="ja-JP" altLang="en-US"/>
           </a:p>
@@ -2207,7 +2205,7 @@
           <a:p>
             <a:fld id="{BFCAF897-2775-4370-811C-D54EFC08864D}" type="datetime1">
               <a:rPr kumimoji="1" lang="ja-JP" altLang="en-US" smtClean="0"/>
-              <a:t>2025/10/21</a:t>
+              <a:t>2025/10/23</a:t>
             </a:fld>
             <a:endParaRPr kumimoji="1" lang="ja-JP" altLang="en-US"/>
           </a:p>
@@ -2338,7 +2336,7 @@
           <a:p>
             <a:fld id="{8A8FDD99-561F-41AB-B3A7-0EEEF5779D1E}" type="datetime1">
               <a:rPr kumimoji="1" lang="ja-JP" altLang="en-US" smtClean="0"/>
-              <a:t>2025/10/21</a:t>
+              <a:t>2025/10/23</a:t>
             </a:fld>
             <a:endParaRPr kumimoji="1" lang="ja-JP" altLang="en-US"/>
           </a:p>
@@ -2433,7 +2431,7 @@
           <a:p>
             <a:fld id="{69298230-AF5F-4371-A15E-14F7D666A1E9}" type="datetime1">
               <a:rPr kumimoji="1" lang="ja-JP" altLang="en-US" smtClean="0"/>
-              <a:t>2025/10/21</a:t>
+              <a:t>2025/10/23</a:t>
             </a:fld>
             <a:endParaRPr kumimoji="1" lang="ja-JP" altLang="en-US"/>
           </a:p>
@@ -2740,7 +2738,7 @@
           <a:p>
             <a:fld id="{493F381F-BD65-4948-8AA9-32B16F2D5C98}" type="datetime1">
               <a:rPr kumimoji="1" lang="ja-JP" altLang="en-US" smtClean="0"/>
-              <a:t>2025/10/21</a:t>
+              <a:t>2025/10/23</a:t>
             </a:fld>
             <a:endParaRPr kumimoji="1" lang="ja-JP" altLang="en-US"/>
           </a:p>
@@ -2992,7 +2990,7 @@
           <a:p>
             <a:fld id="{DA1513CA-C190-486F-BD2A-798F90F2F896}" type="datetime1">
               <a:rPr kumimoji="1" lang="ja-JP" altLang="en-US" smtClean="0"/>
-              <a:t>2025/10/21</a:t>
+              <a:t>2025/10/23</a:t>
             </a:fld>
             <a:endParaRPr kumimoji="1" lang="ja-JP" altLang="en-US"/>
           </a:p>
@@ -3235,7 +3233,7 @@
           <a:p>
             <a:fld id="{2E167B46-2EB4-4DB4-9CDA-53249C7AEAAE}" type="datetime1">
               <a:rPr kumimoji="1" lang="ja-JP" altLang="en-US" smtClean="0"/>
-              <a:t>2025/10/21</a:t>
+              <a:t>2025/10/23</a:t>
             </a:fld>
             <a:endParaRPr kumimoji="1" lang="ja-JP" altLang="en-US"/>
           </a:p>
@@ -3947,7 +3945,7 @@
           <p:nvPr>
             <p:extLst>
               <p:ext uri="{D42A27DB-BD31-4B8C-83A1-F6EECF244321}">
-                <p14:modId xmlns:p14="http://schemas.microsoft.com/office/powerpoint/2010/main" val="3927066856"/>
+                <p14:modId xmlns:p14="http://schemas.microsoft.com/office/powerpoint/2010/main" val="1873581969"/>
               </p:ext>
             </p:extLst>
           </p:nvPr>
@@ -4335,8 +4333,27 @@
                           <a:latin typeface="BIZ UDゴシック" panose="020B0400000000000000" pitchFamily="49" charset="-128"/>
                           <a:ea typeface="BIZ UDゴシック" panose="020B0400000000000000" pitchFamily="49" charset="-128"/>
                         </a:rPr>
-                        <a:t>STATE_NORMAL_MONITOR</a:t>
-                      </a:r>
+                        <a:t>STATE_</a:t>
+                      </a:r>
+                      <a:r>
+                        <a:rPr lang="en-US" altLang="ja-JP" sz="1200" b="0" i="0" u="none" strike="noStrike">
+                          <a:solidFill>
+                            <a:srgbClr val="000000"/>
+                          </a:solidFill>
+                          <a:effectLst/>
+                          <a:latin typeface="BIZ UDゴシック" panose="020B0400000000000000" pitchFamily="49" charset="-128"/>
+                          <a:ea typeface="BIZ UDゴシック" panose="020B0400000000000000" pitchFamily="49" charset="-128"/>
+                        </a:rPr>
+                        <a:t>INIT</a:t>
+                      </a:r>
+                      <a:endParaRPr lang="en-US" sz="1200" b="0" i="0" u="none" strike="noStrike">
+                        <a:solidFill>
+                          <a:srgbClr val="000000"/>
+                        </a:solidFill>
+                        <a:effectLst/>
+                        <a:latin typeface="BIZ UDゴシック" panose="020B0400000000000000" pitchFamily="49" charset="-128"/>
+                        <a:ea typeface="BIZ UDゴシック" panose="020B0400000000000000" pitchFamily="49" charset="-128"/>
+                      </a:endParaRPr>
                     </a:p>
                   </a:txBody>
                   <a:tcPr marL="9525" marR="9525" marT="9525" marB="0" anchor="ctr">
@@ -10006,4343 +10023,6 @@
           <p:cNvPr id="2" name="タイトル 1">
             <a:extLst>
               <a:ext uri="{FF2B5EF4-FFF2-40B4-BE49-F238E27FC236}">
-                <a16:creationId xmlns:a16="http://schemas.microsoft.com/office/drawing/2014/main" id="{8C4B0A6D-8774-4559-FC13-E4B5D742E58A}"/>
-              </a:ext>
-            </a:extLst>
-          </p:cNvPr>
-          <p:cNvSpPr>
-            <a:spLocks noGrp="1"/>
-          </p:cNvSpPr>
-          <p:nvPr>
-            <p:ph type="title"/>
-          </p:nvPr>
-        </p:nvSpPr>
-        <p:spPr/>
-        <p:txBody>
-          <a:bodyPr>
-            <a:normAutofit fontScale="90000"/>
-          </a:bodyPr>
-          <a:lstStyle/>
-          <a:p>
-            <a:r>
-              <a:rPr lang="ja-JP" altLang="en-US"/>
-              <a:t>参考：</a:t>
-            </a:r>
-            <a:r>
-              <a:rPr lang="en-US" altLang="ja-JP"/>
-              <a:t>UML</a:t>
-            </a:r>
-            <a:r>
-              <a:rPr lang="ja-JP" altLang="en-US"/>
-              <a:t>状態遷移図テンプレート（</a:t>
-            </a:r>
-            <a:r>
-              <a:rPr lang="en-US" altLang="ja-JP"/>
-              <a:t>State Machine Diagram</a:t>
-            </a:r>
-            <a:r>
-              <a:rPr lang="ja-JP" altLang="en-US"/>
-              <a:t>）</a:t>
-            </a:r>
-            <a:endParaRPr kumimoji="1" lang="ja-JP" altLang="en-US"/>
-          </a:p>
-        </p:txBody>
-      </p:sp>
-      <p:sp>
-        <p:nvSpPr>
-          <p:cNvPr id="4" name="テキスト ボックス 3">
-            <a:extLst>
-              <a:ext uri="{FF2B5EF4-FFF2-40B4-BE49-F238E27FC236}">
-                <a16:creationId xmlns:a16="http://schemas.microsoft.com/office/drawing/2014/main" id="{54637583-D507-7DE8-8E89-823B1E6D20B7}"/>
-              </a:ext>
-            </a:extLst>
-          </p:cNvPr>
-          <p:cNvSpPr txBox="1"/>
-          <p:nvPr/>
-        </p:nvSpPr>
-        <p:spPr>
-          <a:xfrm>
-            <a:off x="737007" y="1609344"/>
-            <a:ext cx="2130551" cy="3508653"/>
-          </a:xfrm>
-          <a:prstGeom prst="rect">
-            <a:avLst/>
-          </a:prstGeom>
-          <a:solidFill>
-            <a:schemeClr val="accent6">
-              <a:lumMod val="20000"/>
-              <a:lumOff val="80000"/>
-            </a:schemeClr>
-          </a:solidFill>
-        </p:spPr>
-        <p:txBody>
-          <a:bodyPr wrap="square">
-            <a:spAutoFit/>
-          </a:bodyPr>
-          <a:lstStyle/>
-          <a:p>
-            <a:r>
-              <a:rPr lang="ja-JP" altLang="en-US" sz="1200">
-                <a:solidFill>
-                  <a:schemeClr val="accent6">
-                    <a:lumMod val="75000"/>
-                  </a:schemeClr>
-                </a:solidFill>
-                <a:latin typeface="BIZ UDゴシック" panose="020B0400000000000000" pitchFamily="49" charset="-128"/>
-                <a:ea typeface="BIZ UDゴシック" panose="020B0400000000000000" pitchFamily="49" charset="-128"/>
-              </a:rPr>
-              <a:t>状態（</a:t>
-            </a:r>
-            <a:r>
-              <a:rPr lang="en-US" altLang="ja-JP" sz="1200">
-                <a:solidFill>
-                  <a:schemeClr val="accent6">
-                    <a:lumMod val="75000"/>
-                  </a:schemeClr>
-                </a:solidFill>
-                <a:latin typeface="BIZ UDゴシック" panose="020B0400000000000000" pitchFamily="49" charset="-128"/>
-                <a:ea typeface="BIZ UDゴシック" panose="020B0400000000000000" pitchFamily="49" charset="-128"/>
-              </a:rPr>
-              <a:t>State</a:t>
-            </a:r>
-            <a:r>
-              <a:rPr lang="ja-JP" altLang="en-US" sz="1200">
-                <a:solidFill>
-                  <a:schemeClr val="accent6">
-                    <a:lumMod val="75000"/>
-                  </a:schemeClr>
-                </a:solidFill>
-                <a:latin typeface="BIZ UDゴシック" panose="020B0400000000000000" pitchFamily="49" charset="-128"/>
-                <a:ea typeface="BIZ UDゴシック" panose="020B0400000000000000" pitchFamily="49" charset="-128"/>
-              </a:rPr>
-              <a:t>）ノード：</a:t>
-            </a:r>
-            <a:endParaRPr lang="en-US" altLang="ja-JP" sz="1200">
-              <a:solidFill>
-                <a:schemeClr val="accent6">
-                  <a:lumMod val="75000"/>
-                </a:schemeClr>
-              </a:solidFill>
-              <a:latin typeface="BIZ UDゴシック" panose="020B0400000000000000" pitchFamily="49" charset="-128"/>
-              <a:ea typeface="BIZ UDゴシック" panose="020B0400000000000000" pitchFamily="49" charset="-128"/>
-            </a:endParaRPr>
-          </a:p>
-          <a:p>
-            <a:r>
-              <a:rPr lang="en-US" altLang="ja-JP" sz="1000">
-                <a:latin typeface="BIZ UDゴシック" panose="020B0400000000000000" pitchFamily="49" charset="-128"/>
-                <a:ea typeface="BIZ UDゴシック" panose="020B0400000000000000" pitchFamily="49" charset="-128"/>
-              </a:rPr>
-              <a:t>[Normal Monitoring]</a:t>
-            </a:r>
-          </a:p>
-          <a:p>
-            <a:r>
-              <a:rPr lang="en-US" altLang="ja-JP" sz="1000">
-                <a:latin typeface="BIZ UDゴシック" panose="020B0400000000000000" pitchFamily="49" charset="-128"/>
-                <a:ea typeface="BIZ UDゴシック" panose="020B0400000000000000" pitchFamily="49" charset="-128"/>
-              </a:rPr>
-              <a:t>↓ </a:t>
-            </a:r>
-            <a:r>
-              <a:rPr lang="ja-JP" altLang="en-US" sz="1000">
-                <a:latin typeface="BIZ UDゴシック" panose="020B0400000000000000" pitchFamily="49" charset="-128"/>
-                <a:ea typeface="BIZ UDゴシック" panose="020B0400000000000000" pitchFamily="49" charset="-128"/>
-              </a:rPr>
-              <a:t>温度 </a:t>
-            </a:r>
-            <a:r>
-              <a:rPr lang="en-US" altLang="ja-JP" sz="1000">
-                <a:latin typeface="BIZ UDゴシック" panose="020B0400000000000000" pitchFamily="49" charset="-128"/>
-                <a:ea typeface="BIZ UDゴシック" panose="020B0400000000000000" pitchFamily="49" charset="-128"/>
-              </a:rPr>
-              <a:t>&gt; </a:t>
-            </a:r>
-            <a:r>
-              <a:rPr lang="ja-JP" altLang="en-US" sz="1000">
-                <a:latin typeface="BIZ UDゴシック" panose="020B0400000000000000" pitchFamily="49" charset="-128"/>
-                <a:ea typeface="BIZ UDゴシック" panose="020B0400000000000000" pitchFamily="49" charset="-128"/>
-              </a:rPr>
-              <a:t>高温閾値</a:t>
-            </a:r>
-          </a:p>
-          <a:p>
-            <a:r>
-              <a:rPr lang="en-US" altLang="ja-JP" sz="1000">
-                <a:latin typeface="BIZ UDゴシック" panose="020B0400000000000000" pitchFamily="49" charset="-128"/>
-                <a:ea typeface="BIZ UDゴシック" panose="020B0400000000000000" pitchFamily="49" charset="-128"/>
-              </a:rPr>
-              <a:t>[High Temp Control]</a:t>
-            </a:r>
-          </a:p>
-          <a:p>
-            <a:r>
-              <a:rPr lang="en-US" altLang="ja-JP" sz="1000">
-                <a:latin typeface="BIZ UDゴシック" panose="020B0400000000000000" pitchFamily="49" charset="-128"/>
-                <a:ea typeface="BIZ UDゴシック" panose="020B0400000000000000" pitchFamily="49" charset="-128"/>
-              </a:rPr>
-              <a:t>↓ </a:t>
-            </a:r>
-            <a:r>
-              <a:rPr lang="ja-JP" altLang="en-US" sz="1000">
-                <a:latin typeface="BIZ UDゴシック" panose="020B0400000000000000" pitchFamily="49" charset="-128"/>
-                <a:ea typeface="BIZ UDゴシック" panose="020B0400000000000000" pitchFamily="49" charset="-128"/>
-              </a:rPr>
-              <a:t>温度が範囲内</a:t>
-            </a:r>
-          </a:p>
-          <a:p>
-            <a:r>
-              <a:rPr lang="en-US" altLang="ja-JP" sz="1000">
-                <a:latin typeface="BIZ UDゴシック" panose="020B0400000000000000" pitchFamily="49" charset="-128"/>
-                <a:ea typeface="BIZ UDゴシック" panose="020B0400000000000000" pitchFamily="49" charset="-128"/>
-              </a:rPr>
-              <a:t>[Normal Monitoring]</a:t>
-            </a:r>
-          </a:p>
-          <a:p>
-            <a:endParaRPr lang="en-US" altLang="ja-JP" sz="1000">
-              <a:latin typeface="BIZ UDゴシック" panose="020B0400000000000000" pitchFamily="49" charset="-128"/>
-              <a:ea typeface="BIZ UDゴシック" panose="020B0400000000000000" pitchFamily="49" charset="-128"/>
-            </a:endParaRPr>
-          </a:p>
-          <a:p>
-            <a:r>
-              <a:rPr lang="en-US" altLang="ja-JP" sz="1000">
-                <a:latin typeface="BIZ UDゴシック" panose="020B0400000000000000" pitchFamily="49" charset="-128"/>
-                <a:ea typeface="BIZ UDゴシック" panose="020B0400000000000000" pitchFamily="49" charset="-128"/>
-              </a:rPr>
-              <a:t>[Normal Monitoring]</a:t>
-            </a:r>
-          </a:p>
-          <a:p>
-            <a:r>
-              <a:rPr lang="en-US" altLang="ja-JP" sz="1000">
-                <a:latin typeface="BIZ UDゴシック" panose="020B0400000000000000" pitchFamily="49" charset="-128"/>
-                <a:ea typeface="BIZ UDゴシック" panose="020B0400000000000000" pitchFamily="49" charset="-128"/>
-              </a:rPr>
-              <a:t>↓ </a:t>
-            </a:r>
-            <a:r>
-              <a:rPr lang="ja-JP" altLang="en-US" sz="1000">
-                <a:latin typeface="BIZ UDゴシック" panose="020B0400000000000000" pitchFamily="49" charset="-128"/>
-                <a:ea typeface="BIZ UDゴシック" panose="020B0400000000000000" pitchFamily="49" charset="-128"/>
-              </a:rPr>
-              <a:t>温度 </a:t>
-            </a:r>
-            <a:r>
-              <a:rPr lang="en-US" altLang="ja-JP" sz="1000">
-                <a:latin typeface="BIZ UDゴシック" panose="020B0400000000000000" pitchFamily="49" charset="-128"/>
-                <a:ea typeface="BIZ UDゴシック" panose="020B0400000000000000" pitchFamily="49" charset="-128"/>
-              </a:rPr>
-              <a:t>&lt; </a:t>
-            </a:r>
-            <a:r>
-              <a:rPr lang="ja-JP" altLang="en-US" sz="1000">
-                <a:latin typeface="BIZ UDゴシック" panose="020B0400000000000000" pitchFamily="49" charset="-128"/>
-                <a:ea typeface="BIZ UDゴシック" panose="020B0400000000000000" pitchFamily="49" charset="-128"/>
-              </a:rPr>
-              <a:t>低温閾値</a:t>
-            </a:r>
-          </a:p>
-          <a:p>
-            <a:r>
-              <a:rPr lang="en-US" altLang="ja-JP" sz="1000">
-                <a:latin typeface="BIZ UDゴシック" panose="020B0400000000000000" pitchFamily="49" charset="-128"/>
-                <a:ea typeface="BIZ UDゴシック" panose="020B0400000000000000" pitchFamily="49" charset="-128"/>
-              </a:rPr>
-              <a:t>[Low Temp Control]</a:t>
-            </a:r>
-          </a:p>
-          <a:p>
-            <a:r>
-              <a:rPr lang="en-US" altLang="ja-JP" sz="1000">
-                <a:latin typeface="BIZ UDゴシック" panose="020B0400000000000000" pitchFamily="49" charset="-128"/>
-                <a:ea typeface="BIZ UDゴシック" panose="020B0400000000000000" pitchFamily="49" charset="-128"/>
-              </a:rPr>
-              <a:t>↓ </a:t>
-            </a:r>
-            <a:r>
-              <a:rPr lang="ja-JP" altLang="en-US" sz="1000">
-                <a:latin typeface="BIZ UDゴシック" panose="020B0400000000000000" pitchFamily="49" charset="-128"/>
-                <a:ea typeface="BIZ UDゴシック" panose="020B0400000000000000" pitchFamily="49" charset="-128"/>
-              </a:rPr>
-              <a:t>温度が範囲内</a:t>
-            </a:r>
-          </a:p>
-          <a:p>
-            <a:r>
-              <a:rPr lang="en-US" altLang="ja-JP" sz="1000">
-                <a:latin typeface="BIZ UDゴシック" panose="020B0400000000000000" pitchFamily="49" charset="-128"/>
-                <a:ea typeface="BIZ UDゴシック" panose="020B0400000000000000" pitchFamily="49" charset="-128"/>
-              </a:rPr>
-              <a:t>[Normal Monitoring]</a:t>
-            </a:r>
-          </a:p>
-          <a:p>
-            <a:endParaRPr lang="en-US" altLang="ja-JP" sz="1000">
-              <a:latin typeface="BIZ UDゴシック" panose="020B0400000000000000" pitchFamily="49" charset="-128"/>
-              <a:ea typeface="BIZ UDゴシック" panose="020B0400000000000000" pitchFamily="49" charset="-128"/>
-            </a:endParaRPr>
-          </a:p>
-          <a:p>
-            <a:r>
-              <a:rPr lang="en-US" altLang="ja-JP" sz="1000">
-                <a:latin typeface="BIZ UDゴシック" panose="020B0400000000000000" pitchFamily="49" charset="-128"/>
-                <a:ea typeface="BIZ UDゴシック" panose="020B0400000000000000" pitchFamily="49" charset="-128"/>
-              </a:rPr>
-              <a:t>[Normal Monitoring]</a:t>
-            </a:r>
-          </a:p>
-          <a:p>
-            <a:r>
-              <a:rPr lang="en-US" altLang="ja-JP" sz="1000">
-                <a:latin typeface="BIZ UDゴシック" panose="020B0400000000000000" pitchFamily="49" charset="-128"/>
-                <a:ea typeface="BIZ UDゴシック" panose="020B0400000000000000" pitchFamily="49" charset="-128"/>
-              </a:rPr>
-              <a:t>↓ </a:t>
-            </a:r>
-            <a:r>
-              <a:rPr lang="ja-JP" altLang="en-US" sz="1000">
-                <a:latin typeface="BIZ UDゴシック" panose="020B0400000000000000" pitchFamily="49" charset="-128"/>
-                <a:ea typeface="BIZ UDゴシック" panose="020B0400000000000000" pitchFamily="49" charset="-128"/>
-              </a:rPr>
-              <a:t>目標温度 ≠ 現在温度</a:t>
-            </a:r>
-          </a:p>
-          <a:p>
-            <a:r>
-              <a:rPr lang="en-US" altLang="ja-JP" sz="1000">
-                <a:latin typeface="BIZ UDゴシック" panose="020B0400000000000000" pitchFamily="49" charset="-128"/>
-                <a:ea typeface="BIZ UDゴシック" panose="020B0400000000000000" pitchFamily="49" charset="-128"/>
-              </a:rPr>
-              <a:t>[Optimal Charge Guidance]</a:t>
-            </a:r>
-          </a:p>
-          <a:p>
-            <a:r>
-              <a:rPr lang="en-US" altLang="ja-JP" sz="1000">
-                <a:latin typeface="BIZ UDゴシック" panose="020B0400000000000000" pitchFamily="49" charset="-128"/>
-                <a:ea typeface="BIZ UDゴシック" panose="020B0400000000000000" pitchFamily="49" charset="-128"/>
-              </a:rPr>
-              <a:t>↓ </a:t>
-            </a:r>
-            <a:r>
-              <a:rPr lang="ja-JP" altLang="en-US" sz="1000">
-                <a:latin typeface="BIZ UDゴシック" panose="020B0400000000000000" pitchFamily="49" charset="-128"/>
-                <a:ea typeface="BIZ UDゴシック" panose="020B0400000000000000" pitchFamily="49" charset="-128"/>
-              </a:rPr>
-              <a:t>現在温度 ≒ 目標温度</a:t>
-            </a:r>
-          </a:p>
-          <a:p>
-            <a:r>
-              <a:rPr lang="en-US" altLang="ja-JP" sz="1000">
-                <a:latin typeface="BIZ UDゴシック" panose="020B0400000000000000" pitchFamily="49" charset="-128"/>
-                <a:ea typeface="BIZ UDゴシック" panose="020B0400000000000000" pitchFamily="49" charset="-128"/>
-              </a:rPr>
-              <a:t>[Normal Monitoring]</a:t>
-            </a:r>
-          </a:p>
-          <a:p>
-            <a:endParaRPr lang="en-US" altLang="ja-JP" sz="1000">
-              <a:latin typeface="BIZ UDゴシック" panose="020B0400000000000000" pitchFamily="49" charset="-128"/>
-              <a:ea typeface="BIZ UDゴシック" panose="020B0400000000000000" pitchFamily="49" charset="-128"/>
-            </a:endParaRPr>
-          </a:p>
-          <a:p>
-            <a:r>
-              <a:rPr lang="en-US" altLang="ja-JP" sz="1000">
-                <a:latin typeface="BIZ UDゴシック" panose="020B0400000000000000" pitchFamily="49" charset="-128"/>
-                <a:ea typeface="BIZ UDゴシック" panose="020B0400000000000000" pitchFamily="49" charset="-128"/>
-              </a:rPr>
-              <a:t>[</a:t>
-            </a:r>
-            <a:r>
-              <a:rPr lang="ja-JP" altLang="en-US" sz="1000">
-                <a:latin typeface="BIZ UDゴシック" panose="020B0400000000000000" pitchFamily="49" charset="-128"/>
-                <a:ea typeface="BIZ UDゴシック" panose="020B0400000000000000" pitchFamily="49" charset="-128"/>
-              </a:rPr>
-              <a:t>任意の状態</a:t>
-            </a:r>
-            <a:r>
-              <a:rPr lang="en-US" altLang="ja-JP" sz="1000">
-                <a:latin typeface="BIZ UDゴシック" panose="020B0400000000000000" pitchFamily="49" charset="-128"/>
-                <a:ea typeface="BIZ UDゴシック" panose="020B0400000000000000" pitchFamily="49" charset="-128"/>
-              </a:rPr>
-              <a:t>]</a:t>
-            </a:r>
-          </a:p>
-          <a:p>
-            <a:r>
-              <a:rPr lang="en-US" altLang="ja-JP" sz="1000">
-                <a:latin typeface="BIZ UDゴシック" panose="020B0400000000000000" pitchFamily="49" charset="-128"/>
-                <a:ea typeface="BIZ UDゴシック" panose="020B0400000000000000" pitchFamily="49" charset="-128"/>
-              </a:rPr>
-              <a:t>↓ </a:t>
-            </a:r>
-            <a:r>
-              <a:rPr lang="ja-JP" altLang="en-US" sz="1000">
-                <a:latin typeface="BIZ UDゴシック" panose="020B0400000000000000" pitchFamily="49" charset="-128"/>
-                <a:ea typeface="BIZ UDゴシック" panose="020B0400000000000000" pitchFamily="49" charset="-128"/>
-              </a:rPr>
-              <a:t>セル異常 </a:t>
-            </a:r>
-            <a:r>
-              <a:rPr lang="en-US" altLang="ja-JP" sz="1000">
-                <a:latin typeface="BIZ UDゴシック" panose="020B0400000000000000" pitchFamily="49" charset="-128"/>
-                <a:ea typeface="BIZ UDゴシック" panose="020B0400000000000000" pitchFamily="49" charset="-128"/>
-              </a:rPr>
-              <a:t>or </a:t>
-            </a:r>
-            <a:r>
-              <a:rPr lang="ja-JP" altLang="en-US" sz="1000">
-                <a:latin typeface="BIZ UDゴシック" panose="020B0400000000000000" pitchFamily="49" charset="-128"/>
-                <a:ea typeface="BIZ UDゴシック" panose="020B0400000000000000" pitchFamily="49" charset="-128"/>
-              </a:rPr>
-              <a:t>センサ異常</a:t>
-            </a:r>
-          </a:p>
-          <a:p>
-            <a:r>
-              <a:rPr lang="en-US" altLang="ja-JP" sz="1000">
-                <a:latin typeface="BIZ UDゴシック" panose="020B0400000000000000" pitchFamily="49" charset="-128"/>
-                <a:ea typeface="BIZ UDゴシック" panose="020B0400000000000000" pitchFamily="49" charset="-128"/>
-              </a:rPr>
-              <a:t>[Safe Stop]</a:t>
-            </a:r>
-          </a:p>
-        </p:txBody>
-      </p:sp>
-      <p:sp>
-        <p:nvSpPr>
-          <p:cNvPr id="5" name="テキスト ボックス 4">
-            <a:extLst>
-              <a:ext uri="{FF2B5EF4-FFF2-40B4-BE49-F238E27FC236}">
-                <a16:creationId xmlns:a16="http://schemas.microsoft.com/office/drawing/2014/main" id="{9B7B16BE-E5E1-AA12-D825-2F8DAA6FCD5B}"/>
-              </a:ext>
-            </a:extLst>
-          </p:cNvPr>
-          <p:cNvSpPr txBox="1"/>
-          <p:nvPr/>
-        </p:nvSpPr>
-        <p:spPr>
-          <a:xfrm>
-            <a:off x="554124" y="1259693"/>
-            <a:ext cx="1589229" cy="276999"/>
-          </a:xfrm>
-          <a:prstGeom prst="rect">
-            <a:avLst/>
-          </a:prstGeom>
-          <a:noFill/>
-        </p:spPr>
-        <p:txBody>
-          <a:bodyPr wrap="square" rtlCol="0">
-            <a:spAutoFit/>
-          </a:bodyPr>
-          <a:lstStyle/>
-          <a:p>
-            <a:r>
-              <a:rPr kumimoji="1" lang="en-US" altLang="zh-TW" sz="1200" b="1">
-                <a:solidFill>
-                  <a:srgbClr val="0070C0"/>
-                </a:solidFill>
-                <a:latin typeface="BIZ UDゴシック" panose="020B0400000000000000" pitchFamily="49" charset="-128"/>
-                <a:ea typeface="BIZ UDゴシック" panose="020B0400000000000000" pitchFamily="49" charset="-128"/>
-              </a:rPr>
-              <a:t>【</a:t>
-            </a:r>
-            <a:r>
-              <a:rPr kumimoji="1" lang="zh-TW" altLang="en-US" sz="1200" b="1">
-                <a:solidFill>
-                  <a:srgbClr val="0070C0"/>
-                </a:solidFill>
-                <a:latin typeface="BIZ UDゴシック" panose="020B0400000000000000" pitchFamily="49" charset="-128"/>
-                <a:ea typeface="BIZ UDゴシック" panose="020B0400000000000000" pitchFamily="49" charset="-128"/>
-              </a:rPr>
-              <a:t>基本構成要素</a:t>
-            </a:r>
-            <a:r>
-              <a:rPr kumimoji="1" lang="en-US" altLang="zh-TW" sz="1200" b="1">
-                <a:solidFill>
-                  <a:srgbClr val="0070C0"/>
-                </a:solidFill>
-                <a:latin typeface="BIZ UDゴシック" panose="020B0400000000000000" pitchFamily="49" charset="-128"/>
-                <a:ea typeface="BIZ UDゴシック" panose="020B0400000000000000" pitchFamily="49" charset="-128"/>
-              </a:rPr>
-              <a:t>】</a:t>
-            </a:r>
-            <a:endParaRPr kumimoji="1" lang="ja-JP" altLang="en-US" sz="1200" b="1">
-              <a:solidFill>
-                <a:srgbClr val="0070C0"/>
-              </a:solidFill>
-              <a:latin typeface="BIZ UDゴシック" panose="020B0400000000000000" pitchFamily="49" charset="-128"/>
-              <a:ea typeface="BIZ UDゴシック" panose="020B0400000000000000" pitchFamily="49" charset="-128"/>
-            </a:endParaRPr>
-          </a:p>
-        </p:txBody>
-      </p:sp>
-      <p:sp>
-        <p:nvSpPr>
-          <p:cNvPr id="6" name="テキスト ボックス 5">
-            <a:extLst>
-              <a:ext uri="{FF2B5EF4-FFF2-40B4-BE49-F238E27FC236}">
-                <a16:creationId xmlns:a16="http://schemas.microsoft.com/office/drawing/2014/main" id="{4C995E3E-BD68-D19E-5140-02BA1D602CAB}"/>
-              </a:ext>
-            </a:extLst>
-          </p:cNvPr>
-          <p:cNvSpPr txBox="1"/>
-          <p:nvPr/>
-        </p:nvSpPr>
-        <p:spPr>
-          <a:xfrm>
-            <a:off x="3388462" y="1567286"/>
-            <a:ext cx="4522622" cy="276999"/>
-          </a:xfrm>
-          <a:prstGeom prst="rect">
-            <a:avLst/>
-          </a:prstGeom>
-          <a:solidFill>
-            <a:schemeClr val="accent6">
-              <a:lumMod val="20000"/>
-              <a:lumOff val="80000"/>
-            </a:schemeClr>
-          </a:solidFill>
-        </p:spPr>
-        <p:txBody>
-          <a:bodyPr wrap="square">
-            <a:spAutoFit/>
-          </a:bodyPr>
-          <a:lstStyle/>
-          <a:p>
-            <a:r>
-              <a:rPr lang="en-US" altLang="ja-JP" sz="1200">
-                <a:solidFill>
-                  <a:schemeClr val="accent6">
-                    <a:lumMod val="75000"/>
-                  </a:schemeClr>
-                </a:solidFill>
-                <a:latin typeface="BIZ UDゴシック" panose="020B0400000000000000" pitchFamily="49" charset="-128"/>
-                <a:ea typeface="BIZ UDゴシック" panose="020B0400000000000000" pitchFamily="49" charset="-128"/>
-              </a:rPr>
-              <a:t>【</a:t>
-            </a:r>
-            <a:r>
-              <a:rPr lang="ja-JP" altLang="en-US" sz="1200">
-                <a:solidFill>
-                  <a:schemeClr val="accent6">
-                    <a:lumMod val="75000"/>
-                  </a:schemeClr>
-                </a:solidFill>
-                <a:latin typeface="BIZ UDゴシック" panose="020B0400000000000000" pitchFamily="49" charset="-128"/>
-                <a:ea typeface="BIZ UDゴシック" panose="020B0400000000000000" pitchFamily="49" charset="-128"/>
-              </a:rPr>
-              <a:t>推奨</a:t>
-            </a:r>
-            <a:r>
-              <a:rPr lang="en-US" altLang="ja-JP" sz="1200">
-                <a:solidFill>
-                  <a:schemeClr val="accent6">
-                    <a:lumMod val="75000"/>
-                  </a:schemeClr>
-                </a:solidFill>
-                <a:latin typeface="BIZ UDゴシック" panose="020B0400000000000000" pitchFamily="49" charset="-128"/>
-                <a:ea typeface="BIZ UDゴシック" panose="020B0400000000000000" pitchFamily="49" charset="-128"/>
-              </a:rPr>
-              <a:t>Draw.io</a:t>
-            </a:r>
-            <a:r>
-              <a:rPr lang="ja-JP" altLang="en-US" sz="1200">
-                <a:solidFill>
-                  <a:schemeClr val="accent6">
-                    <a:lumMod val="75000"/>
-                  </a:schemeClr>
-                </a:solidFill>
-                <a:latin typeface="BIZ UDゴシック" panose="020B0400000000000000" pitchFamily="49" charset="-128"/>
-                <a:ea typeface="BIZ UDゴシック" panose="020B0400000000000000" pitchFamily="49" charset="-128"/>
-              </a:rPr>
-              <a:t>構成</a:t>
-            </a:r>
-            <a:r>
-              <a:rPr lang="en-US" altLang="ja-JP" sz="1200">
-                <a:solidFill>
-                  <a:schemeClr val="accent6">
-                    <a:lumMod val="75000"/>
-                  </a:schemeClr>
-                </a:solidFill>
-                <a:latin typeface="BIZ UDゴシック" panose="020B0400000000000000" pitchFamily="49" charset="-128"/>
-                <a:ea typeface="BIZ UDゴシック" panose="020B0400000000000000" pitchFamily="49" charset="-128"/>
-              </a:rPr>
-              <a:t>】</a:t>
-            </a:r>
-          </a:p>
-        </p:txBody>
-      </p:sp>
-      <p:graphicFrame>
-        <p:nvGraphicFramePr>
-          <p:cNvPr id="8" name="表 7">
-            <a:extLst>
-              <a:ext uri="{FF2B5EF4-FFF2-40B4-BE49-F238E27FC236}">
-                <a16:creationId xmlns:a16="http://schemas.microsoft.com/office/drawing/2014/main" id="{339A4601-D726-1A7D-ED34-E9FE921692C3}"/>
-              </a:ext>
-            </a:extLst>
-          </p:cNvPr>
-          <p:cNvGraphicFramePr>
-            <a:graphicFrameLocks noGrp="1"/>
-          </p:cNvGraphicFramePr>
-          <p:nvPr>
-            <p:extLst>
-              <p:ext uri="{D42A27DB-BD31-4B8C-83A1-F6EECF244321}">
-                <p14:modId xmlns:p14="http://schemas.microsoft.com/office/powerpoint/2010/main" val="2714127466"/>
-              </p:ext>
-            </p:extLst>
-          </p:nvPr>
-        </p:nvGraphicFramePr>
-        <p:xfrm>
-          <a:off x="3388462" y="1900630"/>
-          <a:ext cx="5635205" cy="1463040"/>
-        </p:xfrm>
-        <a:graphic>
-          <a:graphicData uri="http://schemas.openxmlformats.org/drawingml/2006/table">
-            <a:tbl>
-              <a:tblPr firstRow="1">
-                <a:tableStyleId>{912C8C85-51F0-491E-9774-3900AFEF0FD7}</a:tableStyleId>
-              </a:tblPr>
-              <a:tblGrid>
-                <a:gridCol w="919205">
-                  <a:extLst>
-                    <a:ext uri="{9D8B030D-6E8A-4147-A177-3AD203B41FA5}">
-                      <a16:colId xmlns:a16="http://schemas.microsoft.com/office/drawing/2014/main" val="6935548"/>
-                    </a:ext>
-                  </a:extLst>
-                </a:gridCol>
-                <a:gridCol w="1188000">
-                  <a:extLst>
-                    <a:ext uri="{9D8B030D-6E8A-4147-A177-3AD203B41FA5}">
-                      <a16:colId xmlns:a16="http://schemas.microsoft.com/office/drawing/2014/main" val="3837817976"/>
-                    </a:ext>
-                  </a:extLst>
-                </a:gridCol>
-                <a:gridCol w="1116000">
-                  <a:extLst>
-                    <a:ext uri="{9D8B030D-6E8A-4147-A177-3AD203B41FA5}">
-                      <a16:colId xmlns:a16="http://schemas.microsoft.com/office/drawing/2014/main" val="2184599737"/>
-                    </a:ext>
-                  </a:extLst>
-                </a:gridCol>
-                <a:gridCol w="2412000">
-                  <a:extLst>
-                    <a:ext uri="{9D8B030D-6E8A-4147-A177-3AD203B41FA5}">
-                      <a16:colId xmlns:a16="http://schemas.microsoft.com/office/drawing/2014/main" val="754341625"/>
-                    </a:ext>
-                  </a:extLst>
-                </a:gridCol>
-              </a:tblGrid>
-              <a:tr h="0">
-                <a:tc>
-                  <a:txBody>
-                    <a:bodyPr/>
-                    <a:lstStyle/>
-                    <a:p>
-                      <a:pPr>
-                        <a:buNone/>
-                      </a:pPr>
-                      <a:r>
-                        <a:rPr lang="ja-JP" altLang="en-US" sz="1000">
-                          <a:latin typeface="BIZ UDゴシック" panose="020B0400000000000000" pitchFamily="49" charset="-128"/>
-                          <a:ea typeface="BIZ UDゴシック" panose="020B0400000000000000" pitchFamily="49" charset="-128"/>
-                        </a:rPr>
-                        <a:t>要素</a:t>
-                      </a:r>
-                    </a:p>
-                  </a:txBody>
-                  <a:tcPr anchor="ctr">
-                    <a:lnL w="12700" cap="flat" cmpd="sng" algn="ctr">
-                      <a:solidFill>
-                        <a:schemeClr val="tx1"/>
-                      </a:solidFill>
-                      <a:prstDash val="solid"/>
-                      <a:round/>
-                      <a:headEnd type="none" w="med" len="med"/>
-                      <a:tailEnd type="none" w="med" len="med"/>
-                    </a:lnL>
-                    <a:lnR w="12700" cap="flat" cmpd="sng" algn="ctr">
-                      <a:solidFill>
-                        <a:schemeClr val="tx1"/>
-                      </a:solidFill>
-                      <a:prstDash val="solid"/>
-                      <a:round/>
-                      <a:headEnd type="none" w="med" len="med"/>
-                      <a:tailEnd type="none" w="med" len="med"/>
-                    </a:lnR>
-                    <a:lnT w="12700" cap="flat" cmpd="sng" algn="ctr">
-                      <a:solidFill>
-                        <a:schemeClr val="tx1"/>
-                      </a:solidFill>
-                      <a:prstDash val="solid"/>
-                      <a:round/>
-                      <a:headEnd type="none" w="med" len="med"/>
-                      <a:tailEnd type="none" w="med" len="med"/>
-                    </a:lnT>
-                    <a:lnB w="12700" cap="flat" cmpd="sng" algn="ctr">
-                      <a:solidFill>
-                        <a:schemeClr val="tx1"/>
-                      </a:solidFill>
-                      <a:prstDash val="solid"/>
-                      <a:round/>
-                      <a:headEnd type="none" w="med" len="med"/>
-                      <a:tailEnd type="none" w="med" len="med"/>
-                    </a:lnB>
-                  </a:tcPr>
-                </a:tc>
-                <a:tc>
-                  <a:txBody>
-                    <a:bodyPr/>
-                    <a:lstStyle/>
-                    <a:p>
-                      <a:pPr>
-                        <a:buNone/>
-                      </a:pPr>
-                      <a:r>
-                        <a:rPr lang="ja-JP" altLang="en-US" sz="1000">
-                          <a:latin typeface="BIZ UDゴシック" panose="020B0400000000000000" pitchFamily="49" charset="-128"/>
-                          <a:ea typeface="BIZ UDゴシック" panose="020B0400000000000000" pitchFamily="49" charset="-128"/>
-                        </a:rPr>
-                        <a:t>図形</a:t>
-                      </a:r>
-                    </a:p>
-                  </a:txBody>
-                  <a:tcPr anchor="ctr">
-                    <a:lnL w="12700" cap="flat" cmpd="sng" algn="ctr">
-                      <a:solidFill>
-                        <a:schemeClr val="tx1"/>
-                      </a:solidFill>
-                      <a:prstDash val="solid"/>
-                      <a:round/>
-                      <a:headEnd type="none" w="med" len="med"/>
-                      <a:tailEnd type="none" w="med" len="med"/>
-                    </a:lnL>
-                    <a:lnR w="12700" cap="flat" cmpd="sng" algn="ctr">
-                      <a:solidFill>
-                        <a:schemeClr val="tx1"/>
-                      </a:solidFill>
-                      <a:prstDash val="solid"/>
-                      <a:round/>
-                      <a:headEnd type="none" w="med" len="med"/>
-                      <a:tailEnd type="none" w="med" len="med"/>
-                    </a:lnR>
-                    <a:lnT w="12700" cap="flat" cmpd="sng" algn="ctr">
-                      <a:solidFill>
-                        <a:schemeClr val="tx1"/>
-                      </a:solidFill>
-                      <a:prstDash val="solid"/>
-                      <a:round/>
-                      <a:headEnd type="none" w="med" len="med"/>
-                      <a:tailEnd type="none" w="med" len="med"/>
-                    </a:lnT>
-                    <a:lnB w="12700" cap="flat" cmpd="sng" algn="ctr">
-                      <a:solidFill>
-                        <a:schemeClr val="tx1"/>
-                      </a:solidFill>
-                      <a:prstDash val="solid"/>
-                      <a:round/>
-                      <a:headEnd type="none" w="med" len="med"/>
-                      <a:tailEnd type="none" w="med" len="med"/>
-                    </a:lnB>
-                  </a:tcPr>
-                </a:tc>
-                <a:tc>
-                  <a:txBody>
-                    <a:bodyPr/>
-                    <a:lstStyle/>
-                    <a:p>
-                      <a:pPr>
-                        <a:buNone/>
-                      </a:pPr>
-                      <a:r>
-                        <a:rPr lang="ja-JP" altLang="en-US" sz="1000">
-                          <a:latin typeface="BIZ UDゴシック" panose="020B0400000000000000" pitchFamily="49" charset="-128"/>
-                          <a:ea typeface="BIZ UDゴシック" panose="020B0400000000000000" pitchFamily="49" charset="-128"/>
-                        </a:rPr>
-                        <a:t>色（推奨）</a:t>
-                      </a:r>
-                    </a:p>
-                  </a:txBody>
-                  <a:tcPr anchor="ctr">
-                    <a:lnL w="12700" cap="flat" cmpd="sng" algn="ctr">
-                      <a:solidFill>
-                        <a:schemeClr val="tx1"/>
-                      </a:solidFill>
-                      <a:prstDash val="solid"/>
-                      <a:round/>
-                      <a:headEnd type="none" w="med" len="med"/>
-                      <a:tailEnd type="none" w="med" len="med"/>
-                    </a:lnL>
-                    <a:lnR w="12700" cap="flat" cmpd="sng" algn="ctr">
-                      <a:solidFill>
-                        <a:schemeClr val="tx1"/>
-                      </a:solidFill>
-                      <a:prstDash val="solid"/>
-                      <a:round/>
-                      <a:headEnd type="none" w="med" len="med"/>
-                      <a:tailEnd type="none" w="med" len="med"/>
-                    </a:lnR>
-                    <a:lnT w="12700" cap="flat" cmpd="sng" algn="ctr">
-                      <a:solidFill>
-                        <a:schemeClr val="tx1"/>
-                      </a:solidFill>
-                      <a:prstDash val="solid"/>
-                      <a:round/>
-                      <a:headEnd type="none" w="med" len="med"/>
-                      <a:tailEnd type="none" w="med" len="med"/>
-                    </a:lnT>
-                    <a:lnB w="12700" cap="flat" cmpd="sng" algn="ctr">
-                      <a:solidFill>
-                        <a:schemeClr val="tx1"/>
-                      </a:solidFill>
-                      <a:prstDash val="solid"/>
-                      <a:round/>
-                      <a:headEnd type="none" w="med" len="med"/>
-                      <a:tailEnd type="none" w="med" len="med"/>
-                    </a:lnB>
-                  </a:tcPr>
-                </a:tc>
-                <a:tc>
-                  <a:txBody>
-                    <a:bodyPr/>
-                    <a:lstStyle/>
-                    <a:p>
-                      <a:pPr>
-                        <a:buNone/>
-                      </a:pPr>
-                      <a:r>
-                        <a:rPr lang="ja-JP" altLang="en-US" sz="1000">
-                          <a:latin typeface="BIZ UDゴシック" panose="020B0400000000000000" pitchFamily="49" charset="-128"/>
-                          <a:ea typeface="BIZ UDゴシック" panose="020B0400000000000000" pitchFamily="49" charset="-128"/>
-                        </a:rPr>
-                        <a:t>備考</a:t>
-                      </a:r>
-                    </a:p>
-                  </a:txBody>
-                  <a:tcPr anchor="ctr">
-                    <a:lnL w="12700" cap="flat" cmpd="sng" algn="ctr">
-                      <a:solidFill>
-                        <a:schemeClr val="tx1"/>
-                      </a:solidFill>
-                      <a:prstDash val="solid"/>
-                      <a:round/>
-                      <a:headEnd type="none" w="med" len="med"/>
-                      <a:tailEnd type="none" w="med" len="med"/>
-                    </a:lnL>
-                    <a:lnR w="12700" cap="flat" cmpd="sng" algn="ctr">
-                      <a:solidFill>
-                        <a:schemeClr val="tx1"/>
-                      </a:solidFill>
-                      <a:prstDash val="solid"/>
-                      <a:round/>
-                      <a:headEnd type="none" w="med" len="med"/>
-                      <a:tailEnd type="none" w="med" len="med"/>
-                    </a:lnR>
-                    <a:lnT w="12700" cap="flat" cmpd="sng" algn="ctr">
-                      <a:solidFill>
-                        <a:schemeClr val="tx1"/>
-                      </a:solidFill>
-                      <a:prstDash val="solid"/>
-                      <a:round/>
-                      <a:headEnd type="none" w="med" len="med"/>
-                      <a:tailEnd type="none" w="med" len="med"/>
-                    </a:lnT>
-                    <a:lnB w="12700" cap="flat" cmpd="sng" algn="ctr">
-                      <a:solidFill>
-                        <a:schemeClr val="tx1"/>
-                      </a:solidFill>
-                      <a:prstDash val="solid"/>
-                      <a:round/>
-                      <a:headEnd type="none" w="med" len="med"/>
-                      <a:tailEnd type="none" w="med" len="med"/>
-                    </a:lnB>
-                  </a:tcPr>
-                </a:tc>
-                <a:extLst>
-                  <a:ext uri="{0D108BD9-81ED-4DB2-BD59-A6C34878D82A}">
-                    <a16:rowId xmlns:a16="http://schemas.microsoft.com/office/drawing/2014/main" val="1513055026"/>
-                  </a:ext>
-                </a:extLst>
-              </a:tr>
-              <a:tr h="0">
-                <a:tc>
-                  <a:txBody>
-                    <a:bodyPr/>
-                    <a:lstStyle/>
-                    <a:p>
-                      <a:pPr>
-                        <a:buNone/>
-                      </a:pPr>
-                      <a:r>
-                        <a:rPr lang="ja-JP" altLang="en-US" sz="1000">
-                          <a:latin typeface="BIZ UDゴシック" panose="020B0400000000000000" pitchFamily="49" charset="-128"/>
-                          <a:ea typeface="BIZ UDゴシック" panose="020B0400000000000000" pitchFamily="49" charset="-128"/>
-                        </a:rPr>
-                        <a:t>状態</a:t>
-                      </a:r>
-                    </a:p>
-                  </a:txBody>
-                  <a:tcPr anchor="ctr">
-                    <a:lnL w="12700" cap="flat" cmpd="sng" algn="ctr">
-                      <a:solidFill>
-                        <a:schemeClr val="tx1"/>
-                      </a:solidFill>
-                      <a:prstDash val="solid"/>
-                      <a:round/>
-                      <a:headEnd type="none" w="med" len="med"/>
-                      <a:tailEnd type="none" w="med" len="med"/>
-                    </a:lnL>
-                    <a:lnR w="12700" cap="flat" cmpd="sng" algn="ctr">
-                      <a:solidFill>
-                        <a:schemeClr val="tx1"/>
-                      </a:solidFill>
-                      <a:prstDash val="solid"/>
-                      <a:round/>
-                      <a:headEnd type="none" w="med" len="med"/>
-                      <a:tailEnd type="none" w="med" len="med"/>
-                    </a:lnR>
-                    <a:lnT w="12700" cap="flat" cmpd="sng" algn="ctr">
-                      <a:solidFill>
-                        <a:schemeClr val="tx1"/>
-                      </a:solidFill>
-                      <a:prstDash val="solid"/>
-                      <a:round/>
-                      <a:headEnd type="none" w="med" len="med"/>
-                      <a:tailEnd type="none" w="med" len="med"/>
-                    </a:lnT>
-                    <a:lnB w="12700" cap="flat" cmpd="sng" algn="ctr">
-                      <a:solidFill>
-                        <a:schemeClr val="tx1"/>
-                      </a:solidFill>
-                      <a:prstDash val="solid"/>
-                      <a:round/>
-                      <a:headEnd type="none" w="med" len="med"/>
-                      <a:tailEnd type="none" w="med" len="med"/>
-                    </a:lnB>
-                  </a:tcPr>
-                </a:tc>
-                <a:tc>
-                  <a:txBody>
-                    <a:bodyPr/>
-                    <a:lstStyle/>
-                    <a:p>
-                      <a:pPr>
-                        <a:buNone/>
-                      </a:pPr>
-                      <a:r>
-                        <a:rPr lang="zh-TW" altLang="en-US" sz="1000">
-                          <a:latin typeface="BIZ UDゴシック" panose="020B0400000000000000" pitchFamily="49" charset="-128"/>
-                          <a:ea typeface="BIZ UDゴシック" panose="020B0400000000000000" pitchFamily="49" charset="-128"/>
-                        </a:rPr>
-                        <a:t>長方形（角丸）</a:t>
-                      </a:r>
-                    </a:p>
-                  </a:txBody>
-                  <a:tcPr anchor="ctr">
-                    <a:lnL w="12700" cap="flat" cmpd="sng" algn="ctr">
-                      <a:solidFill>
-                        <a:schemeClr val="tx1"/>
-                      </a:solidFill>
-                      <a:prstDash val="solid"/>
-                      <a:round/>
-                      <a:headEnd type="none" w="med" len="med"/>
-                      <a:tailEnd type="none" w="med" len="med"/>
-                    </a:lnL>
-                    <a:lnR w="12700" cap="flat" cmpd="sng" algn="ctr">
-                      <a:solidFill>
-                        <a:schemeClr val="tx1"/>
-                      </a:solidFill>
-                      <a:prstDash val="solid"/>
-                      <a:round/>
-                      <a:headEnd type="none" w="med" len="med"/>
-                      <a:tailEnd type="none" w="med" len="med"/>
-                    </a:lnR>
-                    <a:lnT w="12700" cap="flat" cmpd="sng" algn="ctr">
-                      <a:solidFill>
-                        <a:schemeClr val="tx1"/>
-                      </a:solidFill>
-                      <a:prstDash val="solid"/>
-                      <a:round/>
-                      <a:headEnd type="none" w="med" len="med"/>
-                      <a:tailEnd type="none" w="med" len="med"/>
-                    </a:lnT>
-                    <a:lnB w="12700" cap="flat" cmpd="sng" algn="ctr">
-                      <a:solidFill>
-                        <a:schemeClr val="tx1"/>
-                      </a:solidFill>
-                      <a:prstDash val="solid"/>
-                      <a:round/>
-                      <a:headEnd type="none" w="med" len="med"/>
-                      <a:tailEnd type="none" w="med" len="med"/>
-                    </a:lnB>
-                  </a:tcPr>
-                </a:tc>
-                <a:tc>
-                  <a:txBody>
-                    <a:bodyPr/>
-                    <a:lstStyle/>
-                    <a:p>
-                      <a:pPr>
-                        <a:buNone/>
-                      </a:pPr>
-                      <a:r>
-                        <a:rPr lang="ja-JP" altLang="en-US" sz="1000">
-                          <a:latin typeface="BIZ UDゴシック" panose="020B0400000000000000" pitchFamily="49" charset="-128"/>
-                          <a:ea typeface="BIZ UDゴシック" panose="020B0400000000000000" pitchFamily="49" charset="-128"/>
-                        </a:rPr>
-                        <a:t>淡い</a:t>
-                      </a:r>
-                      <a:r>
-                        <a:rPr lang="en-US" altLang="ja-JP" sz="1000">
-                          <a:latin typeface="BIZ UDゴシック" panose="020B0400000000000000" pitchFamily="49" charset="-128"/>
-                          <a:ea typeface="BIZ UDゴシック" panose="020B0400000000000000" pitchFamily="49" charset="-128"/>
-                        </a:rPr>
-                        <a:t>(#</a:t>
-                      </a:r>
-                      <a:r>
-                        <a:rPr lang="en-US" sz="1000">
-                          <a:latin typeface="BIZ UDゴシック" panose="020B0400000000000000" pitchFamily="49" charset="-128"/>
-                          <a:ea typeface="BIZ UDゴシック" panose="020B0400000000000000" pitchFamily="49" charset="-128"/>
-                        </a:rPr>
-                        <a:t>cce5ff)</a:t>
-                      </a:r>
-                    </a:p>
-                  </a:txBody>
-                  <a:tcPr anchor="ctr">
-                    <a:lnL w="12700" cap="flat" cmpd="sng" algn="ctr">
-                      <a:solidFill>
-                        <a:schemeClr val="tx1"/>
-                      </a:solidFill>
-                      <a:prstDash val="solid"/>
-                      <a:round/>
-                      <a:headEnd type="none" w="med" len="med"/>
-                      <a:tailEnd type="none" w="med" len="med"/>
-                    </a:lnL>
-                    <a:lnR w="12700" cap="flat" cmpd="sng" algn="ctr">
-                      <a:solidFill>
-                        <a:schemeClr val="tx1"/>
-                      </a:solidFill>
-                      <a:prstDash val="solid"/>
-                      <a:round/>
-                      <a:headEnd type="none" w="med" len="med"/>
-                      <a:tailEnd type="none" w="med" len="med"/>
-                    </a:lnR>
-                    <a:lnT w="12700" cap="flat" cmpd="sng" algn="ctr">
-                      <a:solidFill>
-                        <a:schemeClr val="tx1"/>
-                      </a:solidFill>
-                      <a:prstDash val="solid"/>
-                      <a:round/>
-                      <a:headEnd type="none" w="med" len="med"/>
-                      <a:tailEnd type="none" w="med" len="med"/>
-                    </a:lnT>
-                    <a:lnB w="12700" cap="flat" cmpd="sng" algn="ctr">
-                      <a:solidFill>
-                        <a:schemeClr val="tx1"/>
-                      </a:solidFill>
-                      <a:prstDash val="solid"/>
-                      <a:round/>
-                      <a:headEnd type="none" w="med" len="med"/>
-                      <a:tailEnd type="none" w="med" len="med"/>
-                    </a:lnB>
-                  </a:tcPr>
-                </a:tc>
-                <a:tc>
-                  <a:txBody>
-                    <a:bodyPr/>
-                    <a:lstStyle/>
-                    <a:p>
-                      <a:pPr>
-                        <a:buNone/>
-                      </a:pPr>
-                      <a:r>
-                        <a:rPr lang="ja-JP" altLang="en-US" sz="1000">
-                          <a:latin typeface="BIZ UDゴシック" panose="020B0400000000000000" pitchFamily="49" charset="-128"/>
-                          <a:ea typeface="BIZ UDゴシック" panose="020B0400000000000000" pitchFamily="49" charset="-128"/>
-                        </a:rPr>
-                        <a:t>各</a:t>
-                      </a:r>
-                      <a:r>
-                        <a:rPr lang="en-US" sz="1000">
-                          <a:latin typeface="BIZ UDゴシック" panose="020B0400000000000000" pitchFamily="49" charset="-128"/>
-                          <a:ea typeface="BIZ UDゴシック" panose="020B0400000000000000" pitchFamily="49" charset="-128"/>
-                        </a:rPr>
-                        <a:t>State</a:t>
-                      </a:r>
-                      <a:r>
-                        <a:rPr lang="ja-JP" altLang="en-US" sz="1000">
-                          <a:latin typeface="BIZ UDゴシック" panose="020B0400000000000000" pitchFamily="49" charset="-128"/>
-                          <a:ea typeface="BIZ UDゴシック" panose="020B0400000000000000" pitchFamily="49" charset="-128"/>
-                        </a:rPr>
-                        <a:t>ノード</a:t>
-                      </a:r>
-                    </a:p>
-                  </a:txBody>
-                  <a:tcPr anchor="ctr">
-                    <a:lnL w="12700" cap="flat" cmpd="sng" algn="ctr">
-                      <a:solidFill>
-                        <a:schemeClr val="tx1"/>
-                      </a:solidFill>
-                      <a:prstDash val="solid"/>
-                      <a:round/>
-                      <a:headEnd type="none" w="med" len="med"/>
-                      <a:tailEnd type="none" w="med" len="med"/>
-                    </a:lnL>
-                    <a:lnR w="12700" cap="flat" cmpd="sng" algn="ctr">
-                      <a:solidFill>
-                        <a:schemeClr val="tx1"/>
-                      </a:solidFill>
-                      <a:prstDash val="solid"/>
-                      <a:round/>
-                      <a:headEnd type="none" w="med" len="med"/>
-                      <a:tailEnd type="none" w="med" len="med"/>
-                    </a:lnR>
-                    <a:lnT w="12700" cap="flat" cmpd="sng" algn="ctr">
-                      <a:solidFill>
-                        <a:schemeClr val="tx1"/>
-                      </a:solidFill>
-                      <a:prstDash val="solid"/>
-                      <a:round/>
-                      <a:headEnd type="none" w="med" len="med"/>
-                      <a:tailEnd type="none" w="med" len="med"/>
-                    </a:lnT>
-                    <a:lnB w="12700" cap="flat" cmpd="sng" algn="ctr">
-                      <a:solidFill>
-                        <a:schemeClr val="tx1"/>
-                      </a:solidFill>
-                      <a:prstDash val="solid"/>
-                      <a:round/>
-                      <a:headEnd type="none" w="med" len="med"/>
-                      <a:tailEnd type="none" w="med" len="med"/>
-                    </a:lnB>
-                  </a:tcPr>
-                </a:tc>
-                <a:extLst>
-                  <a:ext uri="{0D108BD9-81ED-4DB2-BD59-A6C34878D82A}">
-                    <a16:rowId xmlns:a16="http://schemas.microsoft.com/office/drawing/2014/main" val="433765498"/>
-                  </a:ext>
-                </a:extLst>
-              </a:tr>
-              <a:tr h="0">
-                <a:tc>
-                  <a:txBody>
-                    <a:bodyPr/>
-                    <a:lstStyle/>
-                    <a:p>
-                      <a:pPr>
-                        <a:buNone/>
-                      </a:pPr>
-                      <a:r>
-                        <a:rPr lang="ja-JP" altLang="en-US" sz="1000">
-                          <a:latin typeface="BIZ UDゴシック" panose="020B0400000000000000" pitchFamily="49" charset="-128"/>
-                          <a:ea typeface="BIZ UDゴシック" panose="020B0400000000000000" pitchFamily="49" charset="-128"/>
-                        </a:rPr>
-                        <a:t>開始ノード</a:t>
-                      </a:r>
-                    </a:p>
-                  </a:txBody>
-                  <a:tcPr anchor="ctr">
-                    <a:lnL w="12700" cap="flat" cmpd="sng" algn="ctr">
-                      <a:solidFill>
-                        <a:schemeClr val="tx1"/>
-                      </a:solidFill>
-                      <a:prstDash val="solid"/>
-                      <a:round/>
-                      <a:headEnd type="none" w="med" len="med"/>
-                      <a:tailEnd type="none" w="med" len="med"/>
-                    </a:lnL>
-                    <a:lnR w="12700" cap="flat" cmpd="sng" algn="ctr">
-                      <a:solidFill>
-                        <a:schemeClr val="tx1"/>
-                      </a:solidFill>
-                      <a:prstDash val="solid"/>
-                      <a:round/>
-                      <a:headEnd type="none" w="med" len="med"/>
-                      <a:tailEnd type="none" w="med" len="med"/>
-                    </a:lnR>
-                    <a:lnT w="12700" cap="flat" cmpd="sng" algn="ctr">
-                      <a:solidFill>
-                        <a:schemeClr val="tx1"/>
-                      </a:solidFill>
-                      <a:prstDash val="solid"/>
-                      <a:round/>
-                      <a:headEnd type="none" w="med" len="med"/>
-                      <a:tailEnd type="none" w="med" len="med"/>
-                    </a:lnT>
-                    <a:lnB w="12700" cap="flat" cmpd="sng" algn="ctr">
-                      <a:solidFill>
-                        <a:schemeClr val="tx1"/>
-                      </a:solidFill>
-                      <a:prstDash val="solid"/>
-                      <a:round/>
-                      <a:headEnd type="none" w="med" len="med"/>
-                      <a:tailEnd type="none" w="med" len="med"/>
-                    </a:lnB>
-                  </a:tcPr>
-                </a:tc>
-                <a:tc>
-                  <a:txBody>
-                    <a:bodyPr/>
-                    <a:lstStyle/>
-                    <a:p>
-                      <a:pPr>
-                        <a:buNone/>
-                      </a:pPr>
-                      <a:r>
-                        <a:rPr lang="ja-JP" altLang="en-US" sz="1000">
-                          <a:latin typeface="BIZ UDゴシック" panose="020B0400000000000000" pitchFamily="49" charset="-128"/>
-                          <a:ea typeface="BIZ UDゴシック" panose="020B0400000000000000" pitchFamily="49" charset="-128"/>
-                        </a:rPr>
-                        <a:t>円</a:t>
-                      </a:r>
-                    </a:p>
-                  </a:txBody>
-                  <a:tcPr anchor="ctr">
-                    <a:lnL w="12700" cap="flat" cmpd="sng" algn="ctr">
-                      <a:solidFill>
-                        <a:schemeClr val="tx1"/>
-                      </a:solidFill>
-                      <a:prstDash val="solid"/>
-                      <a:round/>
-                      <a:headEnd type="none" w="med" len="med"/>
-                      <a:tailEnd type="none" w="med" len="med"/>
-                    </a:lnL>
-                    <a:lnR w="12700" cap="flat" cmpd="sng" algn="ctr">
-                      <a:solidFill>
-                        <a:schemeClr val="tx1"/>
-                      </a:solidFill>
-                      <a:prstDash val="solid"/>
-                      <a:round/>
-                      <a:headEnd type="none" w="med" len="med"/>
-                      <a:tailEnd type="none" w="med" len="med"/>
-                    </a:lnR>
-                    <a:lnT w="12700" cap="flat" cmpd="sng" algn="ctr">
-                      <a:solidFill>
-                        <a:schemeClr val="tx1"/>
-                      </a:solidFill>
-                      <a:prstDash val="solid"/>
-                      <a:round/>
-                      <a:headEnd type="none" w="med" len="med"/>
-                      <a:tailEnd type="none" w="med" len="med"/>
-                    </a:lnT>
-                    <a:lnB w="12700" cap="flat" cmpd="sng" algn="ctr">
-                      <a:solidFill>
-                        <a:schemeClr val="tx1"/>
-                      </a:solidFill>
-                      <a:prstDash val="solid"/>
-                      <a:round/>
-                      <a:headEnd type="none" w="med" len="med"/>
-                      <a:tailEnd type="none" w="med" len="med"/>
-                    </a:lnB>
-                  </a:tcPr>
-                </a:tc>
-                <a:tc>
-                  <a:txBody>
-                    <a:bodyPr/>
-                    <a:lstStyle/>
-                    <a:p>
-                      <a:pPr>
-                        <a:buNone/>
-                      </a:pPr>
-                      <a:r>
-                        <a:rPr lang="ja-JP" altLang="en-US" sz="1000">
-                          <a:latin typeface="BIZ UDゴシック" panose="020B0400000000000000" pitchFamily="49" charset="-128"/>
-                          <a:ea typeface="BIZ UDゴシック" panose="020B0400000000000000" pitchFamily="49" charset="-128"/>
-                        </a:rPr>
-                        <a:t>黒</a:t>
-                      </a:r>
-                    </a:p>
-                  </a:txBody>
-                  <a:tcPr anchor="ctr">
-                    <a:lnL w="12700" cap="flat" cmpd="sng" algn="ctr">
-                      <a:solidFill>
-                        <a:schemeClr val="tx1"/>
-                      </a:solidFill>
-                      <a:prstDash val="solid"/>
-                      <a:round/>
-                      <a:headEnd type="none" w="med" len="med"/>
-                      <a:tailEnd type="none" w="med" len="med"/>
-                    </a:lnL>
-                    <a:lnR w="12700" cap="flat" cmpd="sng" algn="ctr">
-                      <a:solidFill>
-                        <a:schemeClr val="tx1"/>
-                      </a:solidFill>
-                      <a:prstDash val="solid"/>
-                      <a:round/>
-                      <a:headEnd type="none" w="med" len="med"/>
-                      <a:tailEnd type="none" w="med" len="med"/>
-                    </a:lnR>
-                    <a:lnT w="12700" cap="flat" cmpd="sng" algn="ctr">
-                      <a:solidFill>
-                        <a:schemeClr val="tx1"/>
-                      </a:solidFill>
-                      <a:prstDash val="solid"/>
-                      <a:round/>
-                      <a:headEnd type="none" w="med" len="med"/>
-                      <a:tailEnd type="none" w="med" len="med"/>
-                    </a:lnT>
-                    <a:lnB w="12700" cap="flat" cmpd="sng" algn="ctr">
-                      <a:solidFill>
-                        <a:schemeClr val="tx1"/>
-                      </a:solidFill>
-                      <a:prstDash val="solid"/>
-                      <a:round/>
-                      <a:headEnd type="none" w="med" len="med"/>
-                      <a:tailEnd type="none" w="med" len="med"/>
-                    </a:lnB>
-                  </a:tcPr>
-                </a:tc>
-                <a:tc>
-                  <a:txBody>
-                    <a:bodyPr/>
-                    <a:lstStyle/>
-                    <a:p>
-                      <a:pPr>
-                        <a:buNone/>
-                      </a:pPr>
-                      <a:r>
-                        <a:rPr lang="en-US" sz="1000">
-                          <a:latin typeface="BIZ UDゴシック" panose="020B0400000000000000" pitchFamily="49" charset="-128"/>
-                          <a:ea typeface="BIZ UDゴシック" panose="020B0400000000000000" pitchFamily="49" charset="-128"/>
-                        </a:rPr>
-                        <a:t>Start</a:t>
-                      </a:r>
-                      <a:r>
-                        <a:rPr lang="ja-JP" altLang="en-US" sz="1000">
-                          <a:latin typeface="BIZ UDゴシック" panose="020B0400000000000000" pitchFamily="49" charset="-128"/>
-                          <a:ea typeface="BIZ UDゴシック" panose="020B0400000000000000" pitchFamily="49" charset="-128"/>
-                        </a:rPr>
-                        <a:t>点</a:t>
-                      </a:r>
-                    </a:p>
-                  </a:txBody>
-                  <a:tcPr anchor="ctr">
-                    <a:lnL w="12700" cap="flat" cmpd="sng" algn="ctr">
-                      <a:solidFill>
-                        <a:schemeClr val="tx1"/>
-                      </a:solidFill>
-                      <a:prstDash val="solid"/>
-                      <a:round/>
-                      <a:headEnd type="none" w="med" len="med"/>
-                      <a:tailEnd type="none" w="med" len="med"/>
-                    </a:lnL>
-                    <a:lnR w="12700" cap="flat" cmpd="sng" algn="ctr">
-                      <a:solidFill>
-                        <a:schemeClr val="tx1"/>
-                      </a:solidFill>
-                      <a:prstDash val="solid"/>
-                      <a:round/>
-                      <a:headEnd type="none" w="med" len="med"/>
-                      <a:tailEnd type="none" w="med" len="med"/>
-                    </a:lnR>
-                    <a:lnT w="12700" cap="flat" cmpd="sng" algn="ctr">
-                      <a:solidFill>
-                        <a:schemeClr val="tx1"/>
-                      </a:solidFill>
-                      <a:prstDash val="solid"/>
-                      <a:round/>
-                      <a:headEnd type="none" w="med" len="med"/>
-                      <a:tailEnd type="none" w="med" len="med"/>
-                    </a:lnT>
-                    <a:lnB w="12700" cap="flat" cmpd="sng" algn="ctr">
-                      <a:solidFill>
-                        <a:schemeClr val="tx1"/>
-                      </a:solidFill>
-                      <a:prstDash val="solid"/>
-                      <a:round/>
-                      <a:headEnd type="none" w="med" len="med"/>
-                      <a:tailEnd type="none" w="med" len="med"/>
-                    </a:lnB>
-                  </a:tcPr>
-                </a:tc>
-                <a:extLst>
-                  <a:ext uri="{0D108BD9-81ED-4DB2-BD59-A6C34878D82A}">
-                    <a16:rowId xmlns:a16="http://schemas.microsoft.com/office/drawing/2014/main" val="572808834"/>
-                  </a:ext>
-                </a:extLst>
-              </a:tr>
-              <a:tr h="0">
-                <a:tc>
-                  <a:txBody>
-                    <a:bodyPr/>
-                    <a:lstStyle/>
-                    <a:p>
-                      <a:pPr>
-                        <a:buNone/>
-                      </a:pPr>
-                      <a:r>
-                        <a:rPr lang="ja-JP" altLang="en-US" sz="1000">
-                          <a:latin typeface="BIZ UDゴシック" panose="020B0400000000000000" pitchFamily="49" charset="-128"/>
-                          <a:ea typeface="BIZ UDゴシック" panose="020B0400000000000000" pitchFamily="49" charset="-128"/>
-                        </a:rPr>
-                        <a:t>終了ノード</a:t>
-                      </a:r>
-                    </a:p>
-                  </a:txBody>
-                  <a:tcPr anchor="ctr">
-                    <a:lnL w="12700" cap="flat" cmpd="sng" algn="ctr">
-                      <a:solidFill>
-                        <a:schemeClr val="tx1"/>
-                      </a:solidFill>
-                      <a:prstDash val="solid"/>
-                      <a:round/>
-                      <a:headEnd type="none" w="med" len="med"/>
-                      <a:tailEnd type="none" w="med" len="med"/>
-                    </a:lnL>
-                    <a:lnR w="12700" cap="flat" cmpd="sng" algn="ctr">
-                      <a:solidFill>
-                        <a:schemeClr val="tx1"/>
-                      </a:solidFill>
-                      <a:prstDash val="solid"/>
-                      <a:round/>
-                      <a:headEnd type="none" w="med" len="med"/>
-                      <a:tailEnd type="none" w="med" len="med"/>
-                    </a:lnR>
-                    <a:lnT w="12700" cap="flat" cmpd="sng" algn="ctr">
-                      <a:solidFill>
-                        <a:schemeClr val="tx1"/>
-                      </a:solidFill>
-                      <a:prstDash val="solid"/>
-                      <a:round/>
-                      <a:headEnd type="none" w="med" len="med"/>
-                      <a:tailEnd type="none" w="med" len="med"/>
-                    </a:lnT>
-                    <a:lnB w="12700" cap="flat" cmpd="sng" algn="ctr">
-                      <a:solidFill>
-                        <a:schemeClr val="tx1"/>
-                      </a:solidFill>
-                      <a:prstDash val="solid"/>
-                      <a:round/>
-                      <a:headEnd type="none" w="med" len="med"/>
-                      <a:tailEnd type="none" w="med" len="med"/>
-                    </a:lnB>
-                  </a:tcPr>
-                </a:tc>
-                <a:tc>
-                  <a:txBody>
-                    <a:bodyPr/>
-                    <a:lstStyle/>
-                    <a:p>
-                      <a:pPr>
-                        <a:buNone/>
-                      </a:pPr>
-                      <a:r>
-                        <a:rPr lang="ja-JP" altLang="en-US" sz="1000">
-                          <a:latin typeface="BIZ UDゴシック" panose="020B0400000000000000" pitchFamily="49" charset="-128"/>
-                          <a:ea typeface="BIZ UDゴシック" panose="020B0400000000000000" pitchFamily="49" charset="-128"/>
-                        </a:rPr>
-                        <a:t>二重円</a:t>
-                      </a:r>
-                    </a:p>
-                  </a:txBody>
-                  <a:tcPr anchor="ctr">
-                    <a:lnL w="12700" cap="flat" cmpd="sng" algn="ctr">
-                      <a:solidFill>
-                        <a:schemeClr val="tx1"/>
-                      </a:solidFill>
-                      <a:prstDash val="solid"/>
-                      <a:round/>
-                      <a:headEnd type="none" w="med" len="med"/>
-                      <a:tailEnd type="none" w="med" len="med"/>
-                    </a:lnL>
-                    <a:lnR w="12700" cap="flat" cmpd="sng" algn="ctr">
-                      <a:solidFill>
-                        <a:schemeClr val="tx1"/>
-                      </a:solidFill>
-                      <a:prstDash val="solid"/>
-                      <a:round/>
-                      <a:headEnd type="none" w="med" len="med"/>
-                      <a:tailEnd type="none" w="med" len="med"/>
-                    </a:lnR>
-                    <a:lnT w="12700" cap="flat" cmpd="sng" algn="ctr">
-                      <a:solidFill>
-                        <a:schemeClr val="tx1"/>
-                      </a:solidFill>
-                      <a:prstDash val="solid"/>
-                      <a:round/>
-                      <a:headEnd type="none" w="med" len="med"/>
-                      <a:tailEnd type="none" w="med" len="med"/>
-                    </a:lnT>
-                    <a:lnB w="12700" cap="flat" cmpd="sng" algn="ctr">
-                      <a:solidFill>
-                        <a:schemeClr val="tx1"/>
-                      </a:solidFill>
-                      <a:prstDash val="solid"/>
-                      <a:round/>
-                      <a:headEnd type="none" w="med" len="med"/>
-                      <a:tailEnd type="none" w="med" len="med"/>
-                    </a:lnB>
-                  </a:tcPr>
-                </a:tc>
-                <a:tc>
-                  <a:txBody>
-                    <a:bodyPr/>
-                    <a:lstStyle/>
-                    <a:p>
-                      <a:pPr>
-                        <a:buNone/>
-                      </a:pPr>
-                      <a:r>
-                        <a:rPr lang="ja-JP" altLang="en-US" sz="1000">
-                          <a:latin typeface="BIZ UDゴシック" panose="020B0400000000000000" pitchFamily="49" charset="-128"/>
-                          <a:ea typeface="BIZ UDゴシック" panose="020B0400000000000000" pitchFamily="49" charset="-128"/>
-                        </a:rPr>
-                        <a:t>黒</a:t>
-                      </a:r>
-                    </a:p>
-                  </a:txBody>
-                  <a:tcPr anchor="ctr">
-                    <a:lnL w="12700" cap="flat" cmpd="sng" algn="ctr">
-                      <a:solidFill>
-                        <a:schemeClr val="tx1"/>
-                      </a:solidFill>
-                      <a:prstDash val="solid"/>
-                      <a:round/>
-                      <a:headEnd type="none" w="med" len="med"/>
-                      <a:tailEnd type="none" w="med" len="med"/>
-                    </a:lnL>
-                    <a:lnR w="12700" cap="flat" cmpd="sng" algn="ctr">
-                      <a:solidFill>
-                        <a:schemeClr val="tx1"/>
-                      </a:solidFill>
-                      <a:prstDash val="solid"/>
-                      <a:round/>
-                      <a:headEnd type="none" w="med" len="med"/>
-                      <a:tailEnd type="none" w="med" len="med"/>
-                    </a:lnR>
-                    <a:lnT w="12700" cap="flat" cmpd="sng" algn="ctr">
-                      <a:solidFill>
-                        <a:schemeClr val="tx1"/>
-                      </a:solidFill>
-                      <a:prstDash val="solid"/>
-                      <a:round/>
-                      <a:headEnd type="none" w="med" len="med"/>
-                      <a:tailEnd type="none" w="med" len="med"/>
-                    </a:lnT>
-                    <a:lnB w="12700" cap="flat" cmpd="sng" algn="ctr">
-                      <a:solidFill>
-                        <a:schemeClr val="tx1"/>
-                      </a:solidFill>
-                      <a:prstDash val="solid"/>
-                      <a:round/>
-                      <a:headEnd type="none" w="med" len="med"/>
-                      <a:tailEnd type="none" w="med" len="med"/>
-                    </a:lnB>
-                  </a:tcPr>
-                </a:tc>
-                <a:tc>
-                  <a:txBody>
-                    <a:bodyPr/>
-                    <a:lstStyle/>
-                    <a:p>
-                      <a:pPr>
-                        <a:buNone/>
-                      </a:pPr>
-                      <a:r>
-                        <a:rPr lang="en-US" sz="1000" err="1">
-                          <a:latin typeface="BIZ UDゴシック" panose="020B0400000000000000" pitchFamily="49" charset="-128"/>
-                          <a:ea typeface="BIZ UDゴシック" panose="020B0400000000000000" pitchFamily="49" charset="-128"/>
-                        </a:rPr>
-                        <a:t>Optional（Safe</a:t>
-                      </a:r>
-                      <a:r>
-                        <a:rPr lang="en-US" sz="1000">
-                          <a:latin typeface="BIZ UDゴシック" panose="020B0400000000000000" pitchFamily="49" charset="-128"/>
-                          <a:ea typeface="BIZ UDゴシック" panose="020B0400000000000000" pitchFamily="49" charset="-128"/>
-                        </a:rPr>
-                        <a:t> Stop</a:t>
-                      </a:r>
-                      <a:r>
-                        <a:rPr lang="ja-JP" altLang="en-US" sz="1000">
-                          <a:latin typeface="BIZ UDゴシック" panose="020B0400000000000000" pitchFamily="49" charset="-128"/>
-                          <a:ea typeface="BIZ UDゴシック" panose="020B0400000000000000" pitchFamily="49" charset="-128"/>
-                        </a:rPr>
-                        <a:t>へ遷移）</a:t>
-                      </a:r>
-                    </a:p>
-                  </a:txBody>
-                  <a:tcPr anchor="ctr">
-                    <a:lnL w="12700" cap="flat" cmpd="sng" algn="ctr">
-                      <a:solidFill>
-                        <a:schemeClr val="tx1"/>
-                      </a:solidFill>
-                      <a:prstDash val="solid"/>
-                      <a:round/>
-                      <a:headEnd type="none" w="med" len="med"/>
-                      <a:tailEnd type="none" w="med" len="med"/>
-                    </a:lnL>
-                    <a:lnR w="12700" cap="flat" cmpd="sng" algn="ctr">
-                      <a:solidFill>
-                        <a:schemeClr val="tx1"/>
-                      </a:solidFill>
-                      <a:prstDash val="solid"/>
-                      <a:round/>
-                      <a:headEnd type="none" w="med" len="med"/>
-                      <a:tailEnd type="none" w="med" len="med"/>
-                    </a:lnR>
-                    <a:lnT w="12700" cap="flat" cmpd="sng" algn="ctr">
-                      <a:solidFill>
-                        <a:schemeClr val="tx1"/>
-                      </a:solidFill>
-                      <a:prstDash val="solid"/>
-                      <a:round/>
-                      <a:headEnd type="none" w="med" len="med"/>
-                      <a:tailEnd type="none" w="med" len="med"/>
-                    </a:lnT>
-                    <a:lnB w="12700" cap="flat" cmpd="sng" algn="ctr">
-                      <a:solidFill>
-                        <a:schemeClr val="tx1"/>
-                      </a:solidFill>
-                      <a:prstDash val="solid"/>
-                      <a:round/>
-                      <a:headEnd type="none" w="med" len="med"/>
-                      <a:tailEnd type="none" w="med" len="med"/>
-                    </a:lnB>
-                  </a:tcPr>
-                </a:tc>
-                <a:extLst>
-                  <a:ext uri="{0D108BD9-81ED-4DB2-BD59-A6C34878D82A}">
-                    <a16:rowId xmlns:a16="http://schemas.microsoft.com/office/drawing/2014/main" val="1080130541"/>
-                  </a:ext>
-                </a:extLst>
-              </a:tr>
-              <a:tr h="0">
-                <a:tc>
-                  <a:txBody>
-                    <a:bodyPr/>
-                    <a:lstStyle/>
-                    <a:p>
-                      <a:pPr>
-                        <a:buNone/>
-                      </a:pPr>
-                      <a:r>
-                        <a:rPr lang="ja-JP" altLang="en-US" sz="1000">
-                          <a:latin typeface="BIZ UDゴシック" panose="020B0400000000000000" pitchFamily="49" charset="-128"/>
-                          <a:ea typeface="BIZ UDゴシック" panose="020B0400000000000000" pitchFamily="49" charset="-128"/>
-                        </a:rPr>
-                        <a:t>遷移</a:t>
-                      </a:r>
-                    </a:p>
-                  </a:txBody>
-                  <a:tcPr anchor="ctr">
-                    <a:lnL w="12700" cap="flat" cmpd="sng" algn="ctr">
-                      <a:solidFill>
-                        <a:schemeClr val="tx1"/>
-                      </a:solidFill>
-                      <a:prstDash val="solid"/>
-                      <a:round/>
-                      <a:headEnd type="none" w="med" len="med"/>
-                      <a:tailEnd type="none" w="med" len="med"/>
-                    </a:lnL>
-                    <a:lnR w="12700" cap="flat" cmpd="sng" algn="ctr">
-                      <a:solidFill>
-                        <a:schemeClr val="tx1"/>
-                      </a:solidFill>
-                      <a:prstDash val="solid"/>
-                      <a:round/>
-                      <a:headEnd type="none" w="med" len="med"/>
-                      <a:tailEnd type="none" w="med" len="med"/>
-                    </a:lnR>
-                    <a:lnT w="12700" cap="flat" cmpd="sng" algn="ctr">
-                      <a:solidFill>
-                        <a:schemeClr val="tx1"/>
-                      </a:solidFill>
-                      <a:prstDash val="solid"/>
-                      <a:round/>
-                      <a:headEnd type="none" w="med" len="med"/>
-                      <a:tailEnd type="none" w="med" len="med"/>
-                    </a:lnT>
-                    <a:lnB w="12700" cap="flat" cmpd="sng" algn="ctr">
-                      <a:solidFill>
-                        <a:schemeClr val="tx1"/>
-                      </a:solidFill>
-                      <a:prstDash val="solid"/>
-                      <a:round/>
-                      <a:headEnd type="none" w="med" len="med"/>
-                      <a:tailEnd type="none" w="med" len="med"/>
-                    </a:lnB>
-                  </a:tcPr>
-                </a:tc>
-                <a:tc>
-                  <a:txBody>
-                    <a:bodyPr/>
-                    <a:lstStyle/>
-                    <a:p>
-                      <a:pPr>
-                        <a:buNone/>
-                      </a:pPr>
-                      <a:r>
-                        <a:rPr lang="ja-JP" altLang="en-US" sz="1000">
-                          <a:latin typeface="BIZ UDゴシック" panose="020B0400000000000000" pitchFamily="49" charset="-128"/>
-                          <a:ea typeface="BIZ UDゴシック" panose="020B0400000000000000" pitchFamily="49" charset="-128"/>
-                        </a:rPr>
-                        <a:t>矢印</a:t>
-                      </a:r>
-                    </a:p>
-                  </a:txBody>
-                  <a:tcPr anchor="ctr">
-                    <a:lnL w="12700" cap="flat" cmpd="sng" algn="ctr">
-                      <a:solidFill>
-                        <a:schemeClr val="tx1"/>
-                      </a:solidFill>
-                      <a:prstDash val="solid"/>
-                      <a:round/>
-                      <a:headEnd type="none" w="med" len="med"/>
-                      <a:tailEnd type="none" w="med" len="med"/>
-                    </a:lnL>
-                    <a:lnR w="12700" cap="flat" cmpd="sng" algn="ctr">
-                      <a:solidFill>
-                        <a:schemeClr val="tx1"/>
-                      </a:solidFill>
-                      <a:prstDash val="solid"/>
-                      <a:round/>
-                      <a:headEnd type="none" w="med" len="med"/>
-                      <a:tailEnd type="none" w="med" len="med"/>
-                    </a:lnR>
-                    <a:lnT w="12700" cap="flat" cmpd="sng" algn="ctr">
-                      <a:solidFill>
-                        <a:schemeClr val="tx1"/>
-                      </a:solidFill>
-                      <a:prstDash val="solid"/>
-                      <a:round/>
-                      <a:headEnd type="none" w="med" len="med"/>
-                      <a:tailEnd type="none" w="med" len="med"/>
-                    </a:lnT>
-                    <a:lnB w="12700" cap="flat" cmpd="sng" algn="ctr">
-                      <a:solidFill>
-                        <a:schemeClr val="tx1"/>
-                      </a:solidFill>
-                      <a:prstDash val="solid"/>
-                      <a:round/>
-                      <a:headEnd type="none" w="med" len="med"/>
-                      <a:tailEnd type="none" w="med" len="med"/>
-                    </a:lnB>
-                  </a:tcPr>
-                </a:tc>
-                <a:tc>
-                  <a:txBody>
-                    <a:bodyPr/>
-                    <a:lstStyle/>
-                    <a:p>
-                      <a:pPr>
-                        <a:buNone/>
-                      </a:pPr>
-                      <a:r>
-                        <a:rPr lang="ja-JP" altLang="en-US" sz="1000">
-                          <a:latin typeface="BIZ UDゴシック" panose="020B0400000000000000" pitchFamily="49" charset="-128"/>
-                          <a:ea typeface="BIZ UDゴシック" panose="020B0400000000000000" pitchFamily="49" charset="-128"/>
-                        </a:rPr>
-                        <a:t>黒矢印</a:t>
-                      </a:r>
-                    </a:p>
-                  </a:txBody>
-                  <a:tcPr anchor="ctr">
-                    <a:lnL w="12700" cap="flat" cmpd="sng" algn="ctr">
-                      <a:solidFill>
-                        <a:schemeClr val="tx1"/>
-                      </a:solidFill>
-                      <a:prstDash val="solid"/>
-                      <a:round/>
-                      <a:headEnd type="none" w="med" len="med"/>
-                      <a:tailEnd type="none" w="med" len="med"/>
-                    </a:lnL>
-                    <a:lnR w="12700" cap="flat" cmpd="sng" algn="ctr">
-                      <a:solidFill>
-                        <a:schemeClr val="tx1"/>
-                      </a:solidFill>
-                      <a:prstDash val="solid"/>
-                      <a:round/>
-                      <a:headEnd type="none" w="med" len="med"/>
-                      <a:tailEnd type="none" w="med" len="med"/>
-                    </a:lnR>
-                    <a:lnT w="12700" cap="flat" cmpd="sng" algn="ctr">
-                      <a:solidFill>
-                        <a:schemeClr val="tx1"/>
-                      </a:solidFill>
-                      <a:prstDash val="solid"/>
-                      <a:round/>
-                      <a:headEnd type="none" w="med" len="med"/>
-                      <a:tailEnd type="none" w="med" len="med"/>
-                    </a:lnT>
-                    <a:lnB w="12700" cap="flat" cmpd="sng" algn="ctr">
-                      <a:solidFill>
-                        <a:schemeClr val="tx1"/>
-                      </a:solidFill>
-                      <a:prstDash val="solid"/>
-                      <a:round/>
-                      <a:headEnd type="none" w="med" len="med"/>
-                      <a:tailEnd type="none" w="med" len="med"/>
-                    </a:lnB>
-                  </a:tcPr>
-                </a:tc>
-                <a:tc>
-                  <a:txBody>
-                    <a:bodyPr/>
-                    <a:lstStyle/>
-                    <a:p>
-                      <a:pPr>
-                        <a:buNone/>
-                      </a:pPr>
-                      <a:r>
-                        <a:rPr lang="ja-JP" altLang="en-US" sz="1000">
-                          <a:latin typeface="BIZ UDゴシック" panose="020B0400000000000000" pitchFamily="49" charset="-128"/>
-                          <a:ea typeface="BIZ UDゴシック" panose="020B0400000000000000" pitchFamily="49" charset="-128"/>
-                        </a:rPr>
-                        <a:t>条件式ラベル付き</a:t>
-                      </a:r>
-                    </a:p>
-                  </a:txBody>
-                  <a:tcPr anchor="ctr">
-                    <a:lnL w="12700" cap="flat" cmpd="sng" algn="ctr">
-                      <a:solidFill>
-                        <a:schemeClr val="tx1"/>
-                      </a:solidFill>
-                      <a:prstDash val="solid"/>
-                      <a:round/>
-                      <a:headEnd type="none" w="med" len="med"/>
-                      <a:tailEnd type="none" w="med" len="med"/>
-                    </a:lnL>
-                    <a:lnR w="12700" cap="flat" cmpd="sng" algn="ctr">
-                      <a:solidFill>
-                        <a:schemeClr val="tx1"/>
-                      </a:solidFill>
-                      <a:prstDash val="solid"/>
-                      <a:round/>
-                      <a:headEnd type="none" w="med" len="med"/>
-                      <a:tailEnd type="none" w="med" len="med"/>
-                    </a:lnR>
-                    <a:lnT w="12700" cap="flat" cmpd="sng" algn="ctr">
-                      <a:solidFill>
-                        <a:schemeClr val="tx1"/>
-                      </a:solidFill>
-                      <a:prstDash val="solid"/>
-                      <a:round/>
-                      <a:headEnd type="none" w="med" len="med"/>
-                      <a:tailEnd type="none" w="med" len="med"/>
-                    </a:lnT>
-                    <a:lnB w="12700" cap="flat" cmpd="sng" algn="ctr">
-                      <a:solidFill>
-                        <a:schemeClr val="tx1"/>
-                      </a:solidFill>
-                      <a:prstDash val="solid"/>
-                      <a:round/>
-                      <a:headEnd type="none" w="med" len="med"/>
-                      <a:tailEnd type="none" w="med" len="med"/>
-                    </a:lnB>
-                  </a:tcPr>
-                </a:tc>
-                <a:extLst>
-                  <a:ext uri="{0D108BD9-81ED-4DB2-BD59-A6C34878D82A}">
-                    <a16:rowId xmlns:a16="http://schemas.microsoft.com/office/drawing/2014/main" val="350799095"/>
-                  </a:ext>
-                </a:extLst>
-              </a:tr>
-              <a:tr h="0">
-                <a:tc>
-                  <a:txBody>
-                    <a:bodyPr/>
-                    <a:lstStyle/>
-                    <a:p>
-                      <a:pPr>
-                        <a:buNone/>
-                      </a:pPr>
-                      <a:r>
-                        <a:rPr lang="ja-JP" altLang="en-US" sz="1000">
-                          <a:latin typeface="BIZ UDゴシック" panose="020B0400000000000000" pitchFamily="49" charset="-128"/>
-                          <a:ea typeface="BIZ UDゴシック" panose="020B0400000000000000" pitchFamily="49" charset="-128"/>
-                        </a:rPr>
-                        <a:t>条件ラベル</a:t>
-                      </a:r>
-                    </a:p>
-                  </a:txBody>
-                  <a:tcPr anchor="ctr">
-                    <a:lnL w="12700" cap="flat" cmpd="sng" algn="ctr">
-                      <a:solidFill>
-                        <a:schemeClr val="tx1"/>
-                      </a:solidFill>
-                      <a:prstDash val="solid"/>
-                      <a:round/>
-                      <a:headEnd type="none" w="med" len="med"/>
-                      <a:tailEnd type="none" w="med" len="med"/>
-                    </a:lnL>
-                    <a:lnR w="12700" cap="flat" cmpd="sng" algn="ctr">
-                      <a:solidFill>
-                        <a:schemeClr val="tx1"/>
-                      </a:solidFill>
-                      <a:prstDash val="solid"/>
-                      <a:round/>
-                      <a:headEnd type="none" w="med" len="med"/>
-                      <a:tailEnd type="none" w="med" len="med"/>
-                    </a:lnR>
-                    <a:lnT w="12700" cap="flat" cmpd="sng" algn="ctr">
-                      <a:solidFill>
-                        <a:schemeClr val="tx1"/>
-                      </a:solidFill>
-                      <a:prstDash val="solid"/>
-                      <a:round/>
-                      <a:headEnd type="none" w="med" len="med"/>
-                      <a:tailEnd type="none" w="med" len="med"/>
-                    </a:lnT>
-                    <a:lnB w="12700" cap="flat" cmpd="sng" algn="ctr">
-                      <a:solidFill>
-                        <a:schemeClr val="tx1"/>
-                      </a:solidFill>
-                      <a:prstDash val="solid"/>
-                      <a:round/>
-                      <a:headEnd type="none" w="med" len="med"/>
-                      <a:tailEnd type="none" w="med" len="med"/>
-                    </a:lnB>
-                  </a:tcPr>
-                </a:tc>
-                <a:tc>
-                  <a:txBody>
-                    <a:bodyPr/>
-                    <a:lstStyle/>
-                    <a:p>
-                      <a:pPr>
-                        <a:buNone/>
-                      </a:pPr>
-                      <a:r>
-                        <a:rPr lang="ja-JP" altLang="en-US" sz="1000">
-                          <a:latin typeface="BIZ UDゴシック" panose="020B0400000000000000" pitchFamily="49" charset="-128"/>
-                          <a:ea typeface="BIZ UDゴシック" panose="020B0400000000000000" pitchFamily="49" charset="-128"/>
-                        </a:rPr>
-                        <a:t>テキスト</a:t>
-                      </a:r>
-                    </a:p>
-                  </a:txBody>
-                  <a:tcPr anchor="ctr">
-                    <a:lnL w="12700" cap="flat" cmpd="sng" algn="ctr">
-                      <a:solidFill>
-                        <a:schemeClr val="tx1"/>
-                      </a:solidFill>
-                      <a:prstDash val="solid"/>
-                      <a:round/>
-                      <a:headEnd type="none" w="med" len="med"/>
-                      <a:tailEnd type="none" w="med" len="med"/>
-                    </a:lnL>
-                    <a:lnR w="12700" cap="flat" cmpd="sng" algn="ctr">
-                      <a:solidFill>
-                        <a:schemeClr val="tx1"/>
-                      </a:solidFill>
-                      <a:prstDash val="solid"/>
-                      <a:round/>
-                      <a:headEnd type="none" w="med" len="med"/>
-                      <a:tailEnd type="none" w="med" len="med"/>
-                    </a:lnR>
-                    <a:lnT w="12700" cap="flat" cmpd="sng" algn="ctr">
-                      <a:solidFill>
-                        <a:schemeClr val="tx1"/>
-                      </a:solidFill>
-                      <a:prstDash val="solid"/>
-                      <a:round/>
-                      <a:headEnd type="none" w="med" len="med"/>
-                      <a:tailEnd type="none" w="med" len="med"/>
-                    </a:lnT>
-                    <a:lnB w="12700" cap="flat" cmpd="sng" algn="ctr">
-                      <a:solidFill>
-                        <a:schemeClr val="tx1"/>
-                      </a:solidFill>
-                      <a:prstDash val="solid"/>
-                      <a:round/>
-                      <a:headEnd type="none" w="med" len="med"/>
-                      <a:tailEnd type="none" w="med" len="med"/>
-                    </a:lnB>
-                  </a:tcPr>
-                </a:tc>
-                <a:tc>
-                  <a:txBody>
-                    <a:bodyPr/>
-                    <a:lstStyle/>
-                    <a:p>
-                      <a:pPr>
-                        <a:buNone/>
-                      </a:pPr>
-                      <a:r>
-                        <a:rPr lang="ja-JP" altLang="en-US" sz="1000">
-                          <a:latin typeface="BIZ UDゴシック" panose="020B0400000000000000" pitchFamily="49" charset="-128"/>
-                          <a:ea typeface="BIZ UDゴシック" panose="020B0400000000000000" pitchFamily="49" charset="-128"/>
-                        </a:rPr>
-                        <a:t>灰色 </a:t>
-                      </a:r>
-                      <a:r>
-                        <a:rPr lang="en-US" altLang="ja-JP" sz="1000">
-                          <a:latin typeface="BIZ UDゴシック" panose="020B0400000000000000" pitchFamily="49" charset="-128"/>
-                          <a:ea typeface="BIZ UDゴシック" panose="020B0400000000000000" pitchFamily="49" charset="-128"/>
-                        </a:rPr>
-                        <a:t>(#666)</a:t>
-                      </a:r>
-                    </a:p>
-                  </a:txBody>
-                  <a:tcPr anchor="ctr">
-                    <a:lnL w="12700" cap="flat" cmpd="sng" algn="ctr">
-                      <a:solidFill>
-                        <a:schemeClr val="tx1"/>
-                      </a:solidFill>
-                      <a:prstDash val="solid"/>
-                      <a:round/>
-                      <a:headEnd type="none" w="med" len="med"/>
-                      <a:tailEnd type="none" w="med" len="med"/>
-                    </a:lnL>
-                    <a:lnR w="12700" cap="flat" cmpd="sng" algn="ctr">
-                      <a:solidFill>
-                        <a:schemeClr val="tx1"/>
-                      </a:solidFill>
-                      <a:prstDash val="solid"/>
-                      <a:round/>
-                      <a:headEnd type="none" w="med" len="med"/>
-                      <a:tailEnd type="none" w="med" len="med"/>
-                    </a:lnR>
-                    <a:lnT w="12700" cap="flat" cmpd="sng" algn="ctr">
-                      <a:solidFill>
-                        <a:schemeClr val="tx1"/>
-                      </a:solidFill>
-                      <a:prstDash val="solid"/>
-                      <a:round/>
-                      <a:headEnd type="none" w="med" len="med"/>
-                      <a:tailEnd type="none" w="med" len="med"/>
-                    </a:lnT>
-                    <a:lnB w="12700" cap="flat" cmpd="sng" algn="ctr">
-                      <a:solidFill>
-                        <a:schemeClr val="tx1"/>
-                      </a:solidFill>
-                      <a:prstDash val="solid"/>
-                      <a:round/>
-                      <a:headEnd type="none" w="med" len="med"/>
-                      <a:tailEnd type="none" w="med" len="med"/>
-                    </a:lnB>
-                  </a:tcPr>
-                </a:tc>
-                <a:tc>
-                  <a:txBody>
-                    <a:bodyPr/>
-                    <a:lstStyle/>
-                    <a:p>
-                      <a:pPr>
-                        <a:buNone/>
-                      </a:pPr>
-                      <a:r>
-                        <a:rPr lang="ja-JP" altLang="en-US" sz="1000">
-                          <a:latin typeface="BIZ UDゴシック" panose="020B0400000000000000" pitchFamily="49" charset="-128"/>
-                          <a:ea typeface="BIZ UDゴシック" panose="020B0400000000000000" pitchFamily="49" charset="-128"/>
-                        </a:rPr>
-                        <a:t>温度条件など記入</a:t>
-                      </a:r>
-                    </a:p>
-                  </a:txBody>
-                  <a:tcPr anchor="ctr">
-                    <a:lnL w="12700" cap="flat" cmpd="sng" algn="ctr">
-                      <a:solidFill>
-                        <a:schemeClr val="tx1"/>
-                      </a:solidFill>
-                      <a:prstDash val="solid"/>
-                      <a:round/>
-                      <a:headEnd type="none" w="med" len="med"/>
-                      <a:tailEnd type="none" w="med" len="med"/>
-                    </a:lnL>
-                    <a:lnR w="12700" cap="flat" cmpd="sng" algn="ctr">
-                      <a:solidFill>
-                        <a:schemeClr val="tx1"/>
-                      </a:solidFill>
-                      <a:prstDash val="solid"/>
-                      <a:round/>
-                      <a:headEnd type="none" w="med" len="med"/>
-                      <a:tailEnd type="none" w="med" len="med"/>
-                    </a:lnR>
-                    <a:lnT w="12700" cap="flat" cmpd="sng" algn="ctr">
-                      <a:solidFill>
-                        <a:schemeClr val="tx1"/>
-                      </a:solidFill>
-                      <a:prstDash val="solid"/>
-                      <a:round/>
-                      <a:headEnd type="none" w="med" len="med"/>
-                      <a:tailEnd type="none" w="med" len="med"/>
-                    </a:lnT>
-                    <a:lnB w="12700" cap="flat" cmpd="sng" algn="ctr">
-                      <a:solidFill>
-                        <a:schemeClr val="tx1"/>
-                      </a:solidFill>
-                      <a:prstDash val="solid"/>
-                      <a:round/>
-                      <a:headEnd type="none" w="med" len="med"/>
-                      <a:tailEnd type="none" w="med" len="med"/>
-                    </a:lnB>
-                  </a:tcPr>
-                </a:tc>
-                <a:extLst>
-                  <a:ext uri="{0D108BD9-81ED-4DB2-BD59-A6C34878D82A}">
-                    <a16:rowId xmlns:a16="http://schemas.microsoft.com/office/drawing/2014/main" val="245562205"/>
-                  </a:ext>
-                </a:extLst>
-              </a:tr>
-            </a:tbl>
-          </a:graphicData>
-        </a:graphic>
-      </p:graphicFrame>
-      <p:sp>
-        <p:nvSpPr>
-          <p:cNvPr id="9" name="テキスト ボックス 8">
-            <a:extLst>
-              <a:ext uri="{FF2B5EF4-FFF2-40B4-BE49-F238E27FC236}">
-                <a16:creationId xmlns:a16="http://schemas.microsoft.com/office/drawing/2014/main" id="{0D2C4051-C53C-8B9A-7707-54556BB12583}"/>
-              </a:ext>
-            </a:extLst>
-          </p:cNvPr>
-          <p:cNvSpPr txBox="1"/>
-          <p:nvPr/>
-        </p:nvSpPr>
-        <p:spPr>
-          <a:xfrm>
-            <a:off x="3388462" y="3444648"/>
-            <a:ext cx="4522622" cy="276999"/>
-          </a:xfrm>
-          <a:prstGeom prst="rect">
-            <a:avLst/>
-          </a:prstGeom>
-          <a:solidFill>
-            <a:schemeClr val="accent6">
-              <a:lumMod val="20000"/>
-              <a:lumOff val="80000"/>
-            </a:schemeClr>
-          </a:solidFill>
-        </p:spPr>
-        <p:txBody>
-          <a:bodyPr wrap="square">
-            <a:spAutoFit/>
-          </a:bodyPr>
-          <a:lstStyle/>
-          <a:p>
-            <a:r>
-              <a:rPr lang="en-US" altLang="ja-JP" sz="1200">
-                <a:solidFill>
-                  <a:schemeClr val="accent6">
-                    <a:lumMod val="75000"/>
-                  </a:schemeClr>
-                </a:solidFill>
-                <a:latin typeface="BIZ UDゴシック" panose="020B0400000000000000" pitchFamily="49" charset="-128"/>
-                <a:ea typeface="BIZ UDゴシック" panose="020B0400000000000000" pitchFamily="49" charset="-128"/>
-              </a:rPr>
-              <a:t>【</a:t>
-            </a:r>
-            <a:r>
-              <a:rPr lang="ja-JP" altLang="en-US" sz="1200">
-                <a:solidFill>
-                  <a:schemeClr val="accent6">
-                    <a:lumMod val="75000"/>
-                  </a:schemeClr>
-                </a:solidFill>
-                <a:latin typeface="BIZ UDゴシック" panose="020B0400000000000000" pitchFamily="49" charset="-128"/>
-                <a:ea typeface="BIZ UDゴシック" panose="020B0400000000000000" pitchFamily="49" charset="-128"/>
-              </a:rPr>
-              <a:t>推奨</a:t>
-            </a:r>
-            <a:r>
-              <a:rPr lang="en-US" altLang="ja-JP" sz="1200">
-                <a:solidFill>
-                  <a:schemeClr val="accent6">
-                    <a:lumMod val="75000"/>
-                  </a:schemeClr>
-                </a:solidFill>
-                <a:latin typeface="BIZ UDゴシック" panose="020B0400000000000000" pitchFamily="49" charset="-128"/>
-                <a:ea typeface="BIZ UDゴシック" panose="020B0400000000000000" pitchFamily="49" charset="-128"/>
-              </a:rPr>
-              <a:t>Draw.io</a:t>
-            </a:r>
-            <a:r>
-              <a:rPr lang="ja-JP" altLang="en-US" sz="1200">
-                <a:solidFill>
-                  <a:schemeClr val="accent6">
-                    <a:lumMod val="75000"/>
-                  </a:schemeClr>
-                </a:solidFill>
-                <a:latin typeface="BIZ UDゴシック" panose="020B0400000000000000" pitchFamily="49" charset="-128"/>
-                <a:ea typeface="BIZ UDゴシック" panose="020B0400000000000000" pitchFamily="49" charset="-128"/>
-              </a:rPr>
-              <a:t>構成</a:t>
-            </a:r>
-            <a:r>
-              <a:rPr lang="en-US" altLang="ja-JP" sz="1200">
-                <a:solidFill>
-                  <a:schemeClr val="accent6">
-                    <a:lumMod val="75000"/>
-                  </a:schemeClr>
-                </a:solidFill>
-                <a:latin typeface="BIZ UDゴシック" panose="020B0400000000000000" pitchFamily="49" charset="-128"/>
-                <a:ea typeface="BIZ UDゴシック" panose="020B0400000000000000" pitchFamily="49" charset="-128"/>
-              </a:rPr>
-              <a:t>】</a:t>
-            </a:r>
-          </a:p>
-        </p:txBody>
-      </p:sp>
-      <p:graphicFrame>
-        <p:nvGraphicFramePr>
-          <p:cNvPr id="18" name="表 17">
-            <a:extLst>
-              <a:ext uri="{FF2B5EF4-FFF2-40B4-BE49-F238E27FC236}">
-                <a16:creationId xmlns:a16="http://schemas.microsoft.com/office/drawing/2014/main" id="{84F88B18-876F-8DA2-51EA-2CC47230BB53}"/>
-              </a:ext>
-            </a:extLst>
-          </p:cNvPr>
-          <p:cNvGraphicFramePr>
-            <a:graphicFrameLocks noGrp="1"/>
-          </p:cNvGraphicFramePr>
-          <p:nvPr>
-            <p:extLst>
-              <p:ext uri="{D42A27DB-BD31-4B8C-83A1-F6EECF244321}">
-                <p14:modId xmlns:p14="http://schemas.microsoft.com/office/powerpoint/2010/main" val="1919823369"/>
-              </p:ext>
-            </p:extLst>
-          </p:nvPr>
-        </p:nvGraphicFramePr>
-        <p:xfrm>
-          <a:off x="3388462" y="3802625"/>
-          <a:ext cx="7992000" cy="2451305"/>
-        </p:xfrm>
-        <a:graphic>
-          <a:graphicData uri="http://schemas.openxmlformats.org/drawingml/2006/table">
-            <a:tbl>
-              <a:tblPr firstRow="1">
-                <a:tableStyleId>{912C8C85-51F0-491E-9774-3900AFEF0FD7}</a:tableStyleId>
-              </a:tblPr>
-              <a:tblGrid>
-                <a:gridCol w="1368000">
-                  <a:extLst>
-                    <a:ext uri="{9D8B030D-6E8A-4147-A177-3AD203B41FA5}">
-                      <a16:colId xmlns:a16="http://schemas.microsoft.com/office/drawing/2014/main" val="1858821427"/>
-                    </a:ext>
-                  </a:extLst>
-                </a:gridCol>
-                <a:gridCol w="3168000">
-                  <a:extLst>
-                    <a:ext uri="{9D8B030D-6E8A-4147-A177-3AD203B41FA5}">
-                      <a16:colId xmlns:a16="http://schemas.microsoft.com/office/drawing/2014/main" val="814325658"/>
-                    </a:ext>
-                  </a:extLst>
-                </a:gridCol>
-                <a:gridCol w="1332000">
-                  <a:extLst>
-                    <a:ext uri="{9D8B030D-6E8A-4147-A177-3AD203B41FA5}">
-                      <a16:colId xmlns:a16="http://schemas.microsoft.com/office/drawing/2014/main" val="4252582768"/>
-                    </a:ext>
-                  </a:extLst>
-                </a:gridCol>
-                <a:gridCol w="2124000">
-                  <a:extLst>
-                    <a:ext uri="{9D8B030D-6E8A-4147-A177-3AD203B41FA5}">
-                      <a16:colId xmlns:a16="http://schemas.microsoft.com/office/drawing/2014/main" val="3427322009"/>
-                    </a:ext>
-                  </a:extLst>
-                </a:gridCol>
-              </a:tblGrid>
-              <a:tr h="222846">
-                <a:tc>
-                  <a:txBody>
-                    <a:bodyPr/>
-                    <a:lstStyle/>
-                    <a:p>
-                      <a:pPr>
-                        <a:buNone/>
-                      </a:pPr>
-                      <a:r>
-                        <a:rPr lang="en-US" sz="1000">
-                          <a:latin typeface="BIZ UDゴシック" panose="020B0400000000000000" pitchFamily="49" charset="-128"/>
-                          <a:ea typeface="BIZ UDゴシック" panose="020B0400000000000000" pitchFamily="49" charset="-128"/>
-                        </a:rPr>
-                        <a:t>From</a:t>
-                      </a:r>
-                    </a:p>
-                  </a:txBody>
-                  <a:tcPr marL="73751" marR="73751" marT="36876" marB="36876" anchor="ctr">
-                    <a:lnL w="12700" cap="flat" cmpd="sng" algn="ctr">
-                      <a:solidFill>
-                        <a:schemeClr val="tx1"/>
-                      </a:solidFill>
-                      <a:prstDash val="solid"/>
-                      <a:round/>
-                      <a:headEnd type="none" w="med" len="med"/>
-                      <a:tailEnd type="none" w="med" len="med"/>
-                    </a:lnL>
-                    <a:lnR w="12700" cap="flat" cmpd="sng" algn="ctr">
-                      <a:solidFill>
-                        <a:schemeClr val="tx1"/>
-                      </a:solidFill>
-                      <a:prstDash val="solid"/>
-                      <a:round/>
-                      <a:headEnd type="none" w="med" len="med"/>
-                      <a:tailEnd type="none" w="med" len="med"/>
-                    </a:lnR>
-                    <a:lnT w="12700" cap="flat" cmpd="sng" algn="ctr">
-                      <a:solidFill>
-                        <a:schemeClr val="tx1"/>
-                      </a:solidFill>
-                      <a:prstDash val="solid"/>
-                      <a:round/>
-                      <a:headEnd type="none" w="med" len="med"/>
-                      <a:tailEnd type="none" w="med" len="med"/>
-                    </a:lnT>
-                    <a:lnB w="12700" cap="flat" cmpd="sng" algn="ctr">
-                      <a:solidFill>
-                        <a:schemeClr val="tx1"/>
-                      </a:solidFill>
-                      <a:prstDash val="solid"/>
-                      <a:round/>
-                      <a:headEnd type="none" w="med" len="med"/>
-                      <a:tailEnd type="none" w="med" len="med"/>
-                    </a:lnB>
-                  </a:tcPr>
-                </a:tc>
-                <a:tc>
-                  <a:txBody>
-                    <a:bodyPr/>
-                    <a:lstStyle/>
-                    <a:p>
-                      <a:pPr>
-                        <a:buNone/>
-                      </a:pPr>
-                      <a:r>
-                        <a:rPr lang="en-US" sz="1000">
-                          <a:latin typeface="BIZ UDゴシック" panose="020B0400000000000000" pitchFamily="49" charset="-128"/>
-                          <a:ea typeface="BIZ UDゴシック" panose="020B0400000000000000" pitchFamily="49" charset="-128"/>
-                        </a:rPr>
-                        <a:t>Condition</a:t>
-                      </a:r>
-                    </a:p>
-                  </a:txBody>
-                  <a:tcPr marL="73751" marR="73751" marT="36876" marB="36876" anchor="ctr">
-                    <a:lnL w="12700" cap="flat" cmpd="sng" algn="ctr">
-                      <a:solidFill>
-                        <a:schemeClr val="tx1"/>
-                      </a:solidFill>
-                      <a:prstDash val="solid"/>
-                      <a:round/>
-                      <a:headEnd type="none" w="med" len="med"/>
-                      <a:tailEnd type="none" w="med" len="med"/>
-                    </a:lnL>
-                    <a:lnR w="12700" cap="flat" cmpd="sng" algn="ctr">
-                      <a:solidFill>
-                        <a:schemeClr val="tx1"/>
-                      </a:solidFill>
-                      <a:prstDash val="solid"/>
-                      <a:round/>
-                      <a:headEnd type="none" w="med" len="med"/>
-                      <a:tailEnd type="none" w="med" len="med"/>
-                    </a:lnR>
-                    <a:lnT w="12700" cap="flat" cmpd="sng" algn="ctr">
-                      <a:solidFill>
-                        <a:schemeClr val="tx1"/>
-                      </a:solidFill>
-                      <a:prstDash val="solid"/>
-                      <a:round/>
-                      <a:headEnd type="none" w="med" len="med"/>
-                      <a:tailEnd type="none" w="med" len="med"/>
-                    </a:lnT>
-                    <a:lnB w="12700" cap="flat" cmpd="sng" algn="ctr">
-                      <a:solidFill>
-                        <a:schemeClr val="tx1"/>
-                      </a:solidFill>
-                      <a:prstDash val="solid"/>
-                      <a:round/>
-                      <a:headEnd type="none" w="med" len="med"/>
-                      <a:tailEnd type="none" w="med" len="med"/>
-                    </a:lnB>
-                  </a:tcPr>
-                </a:tc>
-                <a:tc>
-                  <a:txBody>
-                    <a:bodyPr/>
-                    <a:lstStyle/>
-                    <a:p>
-                      <a:pPr>
-                        <a:buNone/>
-                      </a:pPr>
-                      <a:r>
-                        <a:rPr lang="en-US" sz="1000">
-                          <a:latin typeface="BIZ UDゴシック" panose="020B0400000000000000" pitchFamily="49" charset="-128"/>
-                          <a:ea typeface="BIZ UDゴシック" panose="020B0400000000000000" pitchFamily="49" charset="-128"/>
-                        </a:rPr>
-                        <a:t>To</a:t>
-                      </a:r>
-                    </a:p>
-                  </a:txBody>
-                  <a:tcPr marL="73751" marR="73751" marT="36876" marB="36876" anchor="ctr">
-                    <a:lnL w="12700" cap="flat" cmpd="sng" algn="ctr">
-                      <a:solidFill>
-                        <a:schemeClr val="tx1"/>
-                      </a:solidFill>
-                      <a:prstDash val="solid"/>
-                      <a:round/>
-                      <a:headEnd type="none" w="med" len="med"/>
-                      <a:tailEnd type="none" w="med" len="med"/>
-                    </a:lnL>
-                    <a:lnR w="12700" cap="flat" cmpd="sng" algn="ctr">
-                      <a:solidFill>
-                        <a:schemeClr val="tx1"/>
-                      </a:solidFill>
-                      <a:prstDash val="solid"/>
-                      <a:round/>
-                      <a:headEnd type="none" w="med" len="med"/>
-                      <a:tailEnd type="none" w="med" len="med"/>
-                    </a:lnR>
-                    <a:lnT w="12700" cap="flat" cmpd="sng" algn="ctr">
-                      <a:solidFill>
-                        <a:schemeClr val="tx1"/>
-                      </a:solidFill>
-                      <a:prstDash val="solid"/>
-                      <a:round/>
-                      <a:headEnd type="none" w="med" len="med"/>
-                      <a:tailEnd type="none" w="med" len="med"/>
-                    </a:lnT>
-                    <a:lnB w="12700" cap="flat" cmpd="sng" algn="ctr">
-                      <a:solidFill>
-                        <a:schemeClr val="tx1"/>
-                      </a:solidFill>
-                      <a:prstDash val="solid"/>
-                      <a:round/>
-                      <a:headEnd type="none" w="med" len="med"/>
-                      <a:tailEnd type="none" w="med" len="med"/>
-                    </a:lnB>
-                  </a:tcPr>
-                </a:tc>
-                <a:tc>
-                  <a:txBody>
-                    <a:bodyPr/>
-                    <a:lstStyle/>
-                    <a:p>
-                      <a:pPr>
-                        <a:buNone/>
-                      </a:pPr>
-                      <a:r>
-                        <a:rPr lang="en-US" sz="1000">
-                          <a:latin typeface="BIZ UDゴシック" panose="020B0400000000000000" pitchFamily="49" charset="-128"/>
-                          <a:ea typeface="BIZ UDゴシック" panose="020B0400000000000000" pitchFamily="49" charset="-128"/>
-                        </a:rPr>
-                        <a:t>Action</a:t>
-                      </a:r>
-                    </a:p>
-                  </a:txBody>
-                  <a:tcPr marL="73751" marR="73751" marT="36876" marB="36876" anchor="ctr">
-                    <a:lnL w="12700" cap="flat" cmpd="sng" algn="ctr">
-                      <a:solidFill>
-                        <a:schemeClr val="tx1"/>
-                      </a:solidFill>
-                      <a:prstDash val="solid"/>
-                      <a:round/>
-                      <a:headEnd type="none" w="med" len="med"/>
-                      <a:tailEnd type="none" w="med" len="med"/>
-                    </a:lnL>
-                    <a:lnR w="12700" cap="flat" cmpd="sng" algn="ctr">
-                      <a:solidFill>
-                        <a:schemeClr val="tx1"/>
-                      </a:solidFill>
-                      <a:prstDash val="solid"/>
-                      <a:round/>
-                      <a:headEnd type="none" w="med" len="med"/>
-                      <a:tailEnd type="none" w="med" len="med"/>
-                    </a:lnR>
-                    <a:lnT w="12700" cap="flat" cmpd="sng" algn="ctr">
-                      <a:solidFill>
-                        <a:schemeClr val="tx1"/>
-                      </a:solidFill>
-                      <a:prstDash val="solid"/>
-                      <a:round/>
-                      <a:headEnd type="none" w="med" len="med"/>
-                      <a:tailEnd type="none" w="med" len="med"/>
-                    </a:lnT>
-                    <a:lnB w="12700" cap="flat" cmpd="sng" algn="ctr">
-                      <a:solidFill>
-                        <a:schemeClr val="tx1"/>
-                      </a:solidFill>
-                      <a:prstDash val="solid"/>
-                      <a:round/>
-                      <a:headEnd type="none" w="med" len="med"/>
-                      <a:tailEnd type="none" w="med" len="med"/>
-                    </a:lnB>
-                  </a:tcPr>
-                </a:tc>
-                <a:extLst>
-                  <a:ext uri="{0D108BD9-81ED-4DB2-BD59-A6C34878D82A}">
-                    <a16:rowId xmlns:a16="http://schemas.microsoft.com/office/drawing/2014/main" val="533718841"/>
-                  </a:ext>
-                </a:extLst>
-              </a:tr>
-              <a:tr h="317879">
-                <a:tc>
-                  <a:txBody>
-                    <a:bodyPr/>
-                    <a:lstStyle/>
-                    <a:p>
-                      <a:pPr>
-                        <a:buNone/>
-                      </a:pPr>
-                      <a:r>
-                        <a:rPr lang="en-US" sz="1000">
-                          <a:latin typeface="BIZ UDゴシック" panose="020B0400000000000000" pitchFamily="49" charset="-128"/>
-                          <a:ea typeface="BIZ UDゴシック" panose="020B0400000000000000" pitchFamily="49" charset="-128"/>
-                        </a:rPr>
-                        <a:t>Normal</a:t>
-                      </a:r>
-                    </a:p>
-                  </a:txBody>
-                  <a:tcPr marL="73751" marR="73751" marT="36876" marB="36876" anchor="ctr">
-                    <a:lnL w="12700" cap="flat" cmpd="sng" algn="ctr">
-                      <a:solidFill>
-                        <a:schemeClr val="tx1"/>
-                      </a:solidFill>
-                      <a:prstDash val="solid"/>
-                      <a:round/>
-                      <a:headEnd type="none" w="med" len="med"/>
-                      <a:tailEnd type="none" w="med" len="med"/>
-                    </a:lnL>
-                    <a:lnR w="12700" cap="flat" cmpd="sng" algn="ctr">
-                      <a:solidFill>
-                        <a:schemeClr val="tx1"/>
-                      </a:solidFill>
-                      <a:prstDash val="solid"/>
-                      <a:round/>
-                      <a:headEnd type="none" w="med" len="med"/>
-                      <a:tailEnd type="none" w="med" len="med"/>
-                    </a:lnR>
-                    <a:lnT w="12700" cap="flat" cmpd="sng" algn="ctr">
-                      <a:solidFill>
-                        <a:schemeClr val="tx1"/>
-                      </a:solidFill>
-                      <a:prstDash val="solid"/>
-                      <a:round/>
-                      <a:headEnd type="none" w="med" len="med"/>
-                      <a:tailEnd type="none" w="med" len="med"/>
-                    </a:lnT>
-                    <a:lnB w="12700" cap="flat" cmpd="sng" algn="ctr">
-                      <a:solidFill>
-                        <a:schemeClr val="tx1"/>
-                      </a:solidFill>
-                      <a:prstDash val="solid"/>
-                      <a:round/>
-                      <a:headEnd type="none" w="med" len="med"/>
-                      <a:tailEnd type="none" w="med" len="med"/>
-                    </a:lnB>
-                  </a:tcPr>
-                </a:tc>
-                <a:tc>
-                  <a:txBody>
-                    <a:bodyPr/>
-                    <a:lstStyle/>
-                    <a:p>
-                      <a:pPr>
-                        <a:buNone/>
-                      </a:pPr>
-                      <a:r>
-                        <a:rPr lang="en-US" sz="1000" err="1">
-                          <a:latin typeface="BIZ UDゴシック" panose="020B0400000000000000" pitchFamily="49" charset="-128"/>
-                          <a:ea typeface="BIZ UDゴシック" panose="020B0400000000000000" pitchFamily="49" charset="-128"/>
-                        </a:rPr>
-                        <a:t>current_temp</a:t>
-                      </a:r>
-                      <a:r>
-                        <a:rPr lang="en-US" sz="1000">
-                          <a:latin typeface="BIZ UDゴシック" panose="020B0400000000000000" pitchFamily="49" charset="-128"/>
-                          <a:ea typeface="BIZ UDゴシック" panose="020B0400000000000000" pitchFamily="49" charset="-128"/>
-                        </a:rPr>
-                        <a:t> &gt; </a:t>
-                      </a:r>
-                      <a:r>
-                        <a:rPr lang="en-US" sz="1000" err="1">
-                          <a:latin typeface="BIZ UDゴシック" panose="020B0400000000000000" pitchFamily="49" charset="-128"/>
-                          <a:ea typeface="BIZ UDゴシック" panose="020B0400000000000000" pitchFamily="49" charset="-128"/>
-                        </a:rPr>
-                        <a:t>high_temp_threshold</a:t>
-                      </a:r>
-                      <a:endParaRPr lang="en-US" sz="1000">
-                        <a:latin typeface="BIZ UDゴシック" panose="020B0400000000000000" pitchFamily="49" charset="-128"/>
-                        <a:ea typeface="BIZ UDゴシック" panose="020B0400000000000000" pitchFamily="49" charset="-128"/>
-                      </a:endParaRPr>
-                    </a:p>
-                  </a:txBody>
-                  <a:tcPr marL="73751" marR="73751" marT="36876" marB="36876" anchor="ctr">
-                    <a:lnL w="12700" cap="flat" cmpd="sng" algn="ctr">
-                      <a:solidFill>
-                        <a:schemeClr val="tx1"/>
-                      </a:solidFill>
-                      <a:prstDash val="solid"/>
-                      <a:round/>
-                      <a:headEnd type="none" w="med" len="med"/>
-                      <a:tailEnd type="none" w="med" len="med"/>
-                    </a:lnL>
-                    <a:lnR w="12700" cap="flat" cmpd="sng" algn="ctr">
-                      <a:solidFill>
-                        <a:schemeClr val="tx1"/>
-                      </a:solidFill>
-                      <a:prstDash val="solid"/>
-                      <a:round/>
-                      <a:headEnd type="none" w="med" len="med"/>
-                      <a:tailEnd type="none" w="med" len="med"/>
-                    </a:lnR>
-                    <a:lnT w="12700" cap="flat" cmpd="sng" algn="ctr">
-                      <a:solidFill>
-                        <a:schemeClr val="tx1"/>
-                      </a:solidFill>
-                      <a:prstDash val="solid"/>
-                      <a:round/>
-                      <a:headEnd type="none" w="med" len="med"/>
-                      <a:tailEnd type="none" w="med" len="med"/>
-                    </a:lnT>
-                    <a:lnB w="12700" cap="flat" cmpd="sng" algn="ctr">
-                      <a:solidFill>
-                        <a:schemeClr val="tx1"/>
-                      </a:solidFill>
-                      <a:prstDash val="solid"/>
-                      <a:round/>
-                      <a:headEnd type="none" w="med" len="med"/>
-                      <a:tailEnd type="none" w="med" len="med"/>
-                    </a:lnB>
-                  </a:tcPr>
-                </a:tc>
-                <a:tc>
-                  <a:txBody>
-                    <a:bodyPr/>
-                    <a:lstStyle/>
-                    <a:p>
-                      <a:pPr>
-                        <a:buNone/>
-                      </a:pPr>
-                      <a:r>
-                        <a:rPr lang="en-US" sz="1000" err="1">
-                          <a:latin typeface="BIZ UDゴシック" panose="020B0400000000000000" pitchFamily="49" charset="-128"/>
-                          <a:ea typeface="BIZ UDゴシック" panose="020B0400000000000000" pitchFamily="49" charset="-128"/>
-                        </a:rPr>
-                        <a:t>HighTempControl</a:t>
-                      </a:r>
-                      <a:endParaRPr lang="en-US" sz="1000">
-                        <a:latin typeface="BIZ UDゴシック" panose="020B0400000000000000" pitchFamily="49" charset="-128"/>
-                        <a:ea typeface="BIZ UDゴシック" panose="020B0400000000000000" pitchFamily="49" charset="-128"/>
-                      </a:endParaRPr>
-                    </a:p>
-                  </a:txBody>
-                  <a:tcPr marL="73751" marR="73751" marT="36876" marB="36876" anchor="ctr">
-                    <a:lnL w="12700" cap="flat" cmpd="sng" algn="ctr">
-                      <a:solidFill>
-                        <a:schemeClr val="tx1"/>
-                      </a:solidFill>
-                      <a:prstDash val="solid"/>
-                      <a:round/>
-                      <a:headEnd type="none" w="med" len="med"/>
-                      <a:tailEnd type="none" w="med" len="med"/>
-                    </a:lnL>
-                    <a:lnR w="12700" cap="flat" cmpd="sng" algn="ctr">
-                      <a:solidFill>
-                        <a:schemeClr val="tx1"/>
-                      </a:solidFill>
-                      <a:prstDash val="solid"/>
-                      <a:round/>
-                      <a:headEnd type="none" w="med" len="med"/>
-                      <a:tailEnd type="none" w="med" len="med"/>
-                    </a:lnR>
-                    <a:lnT w="12700" cap="flat" cmpd="sng" algn="ctr">
-                      <a:solidFill>
-                        <a:schemeClr val="tx1"/>
-                      </a:solidFill>
-                      <a:prstDash val="solid"/>
-                      <a:round/>
-                      <a:headEnd type="none" w="med" len="med"/>
-                      <a:tailEnd type="none" w="med" len="med"/>
-                    </a:lnT>
-                    <a:lnB w="12700" cap="flat" cmpd="sng" algn="ctr">
-                      <a:solidFill>
-                        <a:schemeClr val="tx1"/>
-                      </a:solidFill>
-                      <a:prstDash val="solid"/>
-                      <a:round/>
-                      <a:headEnd type="none" w="med" len="med"/>
-                      <a:tailEnd type="none" w="med" len="med"/>
-                    </a:lnB>
-                  </a:tcPr>
-                </a:tc>
-                <a:tc>
-                  <a:txBody>
-                    <a:bodyPr/>
-                    <a:lstStyle/>
-                    <a:p>
-                      <a:pPr>
-                        <a:buNone/>
-                      </a:pPr>
-                      <a:r>
-                        <a:rPr lang="en-US" sz="1000">
-                          <a:latin typeface="BIZ UDゴシック" panose="020B0400000000000000" pitchFamily="49" charset="-128"/>
-                          <a:ea typeface="BIZ UDゴシック" panose="020B0400000000000000" pitchFamily="49" charset="-128"/>
-                        </a:rPr>
-                        <a:t>Activate cooling</a:t>
-                      </a:r>
-                    </a:p>
-                  </a:txBody>
-                  <a:tcPr marL="73751" marR="73751" marT="36876" marB="36876" anchor="ctr">
-                    <a:lnL w="12700" cap="flat" cmpd="sng" algn="ctr">
-                      <a:solidFill>
-                        <a:schemeClr val="tx1"/>
-                      </a:solidFill>
-                      <a:prstDash val="solid"/>
-                      <a:round/>
-                      <a:headEnd type="none" w="med" len="med"/>
-                      <a:tailEnd type="none" w="med" len="med"/>
-                    </a:lnL>
-                    <a:lnR w="12700" cap="flat" cmpd="sng" algn="ctr">
-                      <a:solidFill>
-                        <a:schemeClr val="tx1"/>
-                      </a:solidFill>
-                      <a:prstDash val="solid"/>
-                      <a:round/>
-                      <a:headEnd type="none" w="med" len="med"/>
-                      <a:tailEnd type="none" w="med" len="med"/>
-                    </a:lnR>
-                    <a:lnT w="12700" cap="flat" cmpd="sng" algn="ctr">
-                      <a:solidFill>
-                        <a:schemeClr val="tx1"/>
-                      </a:solidFill>
-                      <a:prstDash val="solid"/>
-                      <a:round/>
-                      <a:headEnd type="none" w="med" len="med"/>
-                      <a:tailEnd type="none" w="med" len="med"/>
-                    </a:lnT>
-                    <a:lnB w="12700" cap="flat" cmpd="sng" algn="ctr">
-                      <a:solidFill>
-                        <a:schemeClr val="tx1"/>
-                      </a:solidFill>
-                      <a:prstDash val="solid"/>
-                      <a:round/>
-                      <a:headEnd type="none" w="med" len="med"/>
-                      <a:tailEnd type="none" w="med" len="med"/>
-                    </a:lnB>
-                  </a:tcPr>
-                </a:tc>
-                <a:extLst>
-                  <a:ext uri="{0D108BD9-81ED-4DB2-BD59-A6C34878D82A}">
-                    <a16:rowId xmlns:a16="http://schemas.microsoft.com/office/drawing/2014/main" val="3651341362"/>
-                  </a:ext>
-                </a:extLst>
-              </a:tr>
-              <a:tr h="317879">
-                <a:tc>
-                  <a:txBody>
-                    <a:bodyPr/>
-                    <a:lstStyle/>
-                    <a:p>
-                      <a:pPr>
-                        <a:buNone/>
-                      </a:pPr>
-                      <a:r>
-                        <a:rPr lang="en-US" sz="1000">
-                          <a:latin typeface="BIZ UDゴシック" panose="020B0400000000000000" pitchFamily="49" charset="-128"/>
-                          <a:ea typeface="BIZ UDゴシック" panose="020B0400000000000000" pitchFamily="49" charset="-128"/>
-                        </a:rPr>
-                        <a:t>Normal</a:t>
-                      </a:r>
-                    </a:p>
-                  </a:txBody>
-                  <a:tcPr marL="73751" marR="73751" marT="36876" marB="36876" anchor="ctr">
-                    <a:lnL w="12700" cap="flat" cmpd="sng" algn="ctr">
-                      <a:solidFill>
-                        <a:schemeClr val="tx1"/>
-                      </a:solidFill>
-                      <a:prstDash val="solid"/>
-                      <a:round/>
-                      <a:headEnd type="none" w="med" len="med"/>
-                      <a:tailEnd type="none" w="med" len="med"/>
-                    </a:lnL>
-                    <a:lnR w="12700" cap="flat" cmpd="sng" algn="ctr">
-                      <a:solidFill>
-                        <a:schemeClr val="tx1"/>
-                      </a:solidFill>
-                      <a:prstDash val="solid"/>
-                      <a:round/>
-                      <a:headEnd type="none" w="med" len="med"/>
-                      <a:tailEnd type="none" w="med" len="med"/>
-                    </a:lnR>
-                    <a:lnT w="12700" cap="flat" cmpd="sng" algn="ctr">
-                      <a:solidFill>
-                        <a:schemeClr val="tx1"/>
-                      </a:solidFill>
-                      <a:prstDash val="solid"/>
-                      <a:round/>
-                      <a:headEnd type="none" w="med" len="med"/>
-                      <a:tailEnd type="none" w="med" len="med"/>
-                    </a:lnT>
-                    <a:lnB w="12700" cap="flat" cmpd="sng" algn="ctr">
-                      <a:solidFill>
-                        <a:schemeClr val="tx1"/>
-                      </a:solidFill>
-                      <a:prstDash val="solid"/>
-                      <a:round/>
-                      <a:headEnd type="none" w="med" len="med"/>
-                      <a:tailEnd type="none" w="med" len="med"/>
-                    </a:lnB>
-                  </a:tcPr>
-                </a:tc>
-                <a:tc>
-                  <a:txBody>
-                    <a:bodyPr/>
-                    <a:lstStyle/>
-                    <a:p>
-                      <a:pPr>
-                        <a:buNone/>
-                      </a:pPr>
-                      <a:r>
-                        <a:rPr lang="en-US" sz="1000" err="1">
-                          <a:latin typeface="BIZ UDゴシック" panose="020B0400000000000000" pitchFamily="49" charset="-128"/>
-                          <a:ea typeface="BIZ UDゴシック" panose="020B0400000000000000" pitchFamily="49" charset="-128"/>
-                        </a:rPr>
-                        <a:t>current_temp</a:t>
-                      </a:r>
-                      <a:r>
-                        <a:rPr lang="en-US" sz="1000">
-                          <a:latin typeface="BIZ UDゴシック" panose="020B0400000000000000" pitchFamily="49" charset="-128"/>
-                          <a:ea typeface="BIZ UDゴシック" panose="020B0400000000000000" pitchFamily="49" charset="-128"/>
-                        </a:rPr>
-                        <a:t> &lt; </a:t>
-                      </a:r>
-                      <a:r>
-                        <a:rPr lang="en-US" sz="1000" err="1">
-                          <a:latin typeface="BIZ UDゴシック" panose="020B0400000000000000" pitchFamily="49" charset="-128"/>
-                          <a:ea typeface="BIZ UDゴシック" panose="020B0400000000000000" pitchFamily="49" charset="-128"/>
-                        </a:rPr>
-                        <a:t>low_temp_threshold</a:t>
-                      </a:r>
-                      <a:endParaRPr lang="en-US" sz="1000">
-                        <a:latin typeface="BIZ UDゴシック" panose="020B0400000000000000" pitchFamily="49" charset="-128"/>
-                        <a:ea typeface="BIZ UDゴシック" panose="020B0400000000000000" pitchFamily="49" charset="-128"/>
-                      </a:endParaRPr>
-                    </a:p>
-                  </a:txBody>
-                  <a:tcPr marL="73751" marR="73751" marT="36876" marB="36876" anchor="ctr">
-                    <a:lnL w="12700" cap="flat" cmpd="sng" algn="ctr">
-                      <a:solidFill>
-                        <a:schemeClr val="tx1"/>
-                      </a:solidFill>
-                      <a:prstDash val="solid"/>
-                      <a:round/>
-                      <a:headEnd type="none" w="med" len="med"/>
-                      <a:tailEnd type="none" w="med" len="med"/>
-                    </a:lnL>
-                    <a:lnR w="12700" cap="flat" cmpd="sng" algn="ctr">
-                      <a:solidFill>
-                        <a:schemeClr val="tx1"/>
-                      </a:solidFill>
-                      <a:prstDash val="solid"/>
-                      <a:round/>
-                      <a:headEnd type="none" w="med" len="med"/>
-                      <a:tailEnd type="none" w="med" len="med"/>
-                    </a:lnR>
-                    <a:lnT w="12700" cap="flat" cmpd="sng" algn="ctr">
-                      <a:solidFill>
-                        <a:schemeClr val="tx1"/>
-                      </a:solidFill>
-                      <a:prstDash val="solid"/>
-                      <a:round/>
-                      <a:headEnd type="none" w="med" len="med"/>
-                      <a:tailEnd type="none" w="med" len="med"/>
-                    </a:lnT>
-                    <a:lnB w="12700" cap="flat" cmpd="sng" algn="ctr">
-                      <a:solidFill>
-                        <a:schemeClr val="tx1"/>
-                      </a:solidFill>
-                      <a:prstDash val="solid"/>
-                      <a:round/>
-                      <a:headEnd type="none" w="med" len="med"/>
-                      <a:tailEnd type="none" w="med" len="med"/>
-                    </a:lnB>
-                  </a:tcPr>
-                </a:tc>
-                <a:tc>
-                  <a:txBody>
-                    <a:bodyPr/>
-                    <a:lstStyle/>
-                    <a:p>
-                      <a:pPr>
-                        <a:buNone/>
-                      </a:pPr>
-                      <a:r>
-                        <a:rPr lang="en-US" sz="1000" err="1">
-                          <a:latin typeface="BIZ UDゴシック" panose="020B0400000000000000" pitchFamily="49" charset="-128"/>
-                          <a:ea typeface="BIZ UDゴシック" panose="020B0400000000000000" pitchFamily="49" charset="-128"/>
-                        </a:rPr>
-                        <a:t>LowTempControl</a:t>
-                      </a:r>
-                      <a:endParaRPr lang="en-US" sz="1000">
-                        <a:latin typeface="BIZ UDゴシック" panose="020B0400000000000000" pitchFamily="49" charset="-128"/>
-                        <a:ea typeface="BIZ UDゴシック" panose="020B0400000000000000" pitchFamily="49" charset="-128"/>
-                      </a:endParaRPr>
-                    </a:p>
-                  </a:txBody>
-                  <a:tcPr marL="73751" marR="73751" marT="36876" marB="36876" anchor="ctr">
-                    <a:lnL w="12700" cap="flat" cmpd="sng" algn="ctr">
-                      <a:solidFill>
-                        <a:schemeClr val="tx1"/>
-                      </a:solidFill>
-                      <a:prstDash val="solid"/>
-                      <a:round/>
-                      <a:headEnd type="none" w="med" len="med"/>
-                      <a:tailEnd type="none" w="med" len="med"/>
-                    </a:lnL>
-                    <a:lnR w="12700" cap="flat" cmpd="sng" algn="ctr">
-                      <a:solidFill>
-                        <a:schemeClr val="tx1"/>
-                      </a:solidFill>
-                      <a:prstDash val="solid"/>
-                      <a:round/>
-                      <a:headEnd type="none" w="med" len="med"/>
-                      <a:tailEnd type="none" w="med" len="med"/>
-                    </a:lnR>
-                    <a:lnT w="12700" cap="flat" cmpd="sng" algn="ctr">
-                      <a:solidFill>
-                        <a:schemeClr val="tx1"/>
-                      </a:solidFill>
-                      <a:prstDash val="solid"/>
-                      <a:round/>
-                      <a:headEnd type="none" w="med" len="med"/>
-                      <a:tailEnd type="none" w="med" len="med"/>
-                    </a:lnT>
-                    <a:lnB w="12700" cap="flat" cmpd="sng" algn="ctr">
-                      <a:solidFill>
-                        <a:schemeClr val="tx1"/>
-                      </a:solidFill>
-                      <a:prstDash val="solid"/>
-                      <a:round/>
-                      <a:headEnd type="none" w="med" len="med"/>
-                      <a:tailEnd type="none" w="med" len="med"/>
-                    </a:lnB>
-                  </a:tcPr>
-                </a:tc>
-                <a:tc>
-                  <a:txBody>
-                    <a:bodyPr/>
-                    <a:lstStyle/>
-                    <a:p>
-                      <a:pPr>
-                        <a:buNone/>
-                      </a:pPr>
-                      <a:r>
-                        <a:rPr lang="en-US" sz="1000">
-                          <a:latin typeface="BIZ UDゴシック" panose="020B0400000000000000" pitchFamily="49" charset="-128"/>
-                          <a:ea typeface="BIZ UDゴシック" panose="020B0400000000000000" pitchFamily="49" charset="-128"/>
-                        </a:rPr>
-                        <a:t>Activate heating</a:t>
-                      </a:r>
-                    </a:p>
-                  </a:txBody>
-                  <a:tcPr marL="73751" marR="73751" marT="36876" marB="36876" anchor="ctr">
-                    <a:lnL w="12700" cap="flat" cmpd="sng" algn="ctr">
-                      <a:solidFill>
-                        <a:schemeClr val="tx1"/>
-                      </a:solidFill>
-                      <a:prstDash val="solid"/>
-                      <a:round/>
-                      <a:headEnd type="none" w="med" len="med"/>
-                      <a:tailEnd type="none" w="med" len="med"/>
-                    </a:lnL>
-                    <a:lnR w="12700" cap="flat" cmpd="sng" algn="ctr">
-                      <a:solidFill>
-                        <a:schemeClr val="tx1"/>
-                      </a:solidFill>
-                      <a:prstDash val="solid"/>
-                      <a:round/>
-                      <a:headEnd type="none" w="med" len="med"/>
-                      <a:tailEnd type="none" w="med" len="med"/>
-                    </a:lnR>
-                    <a:lnT w="12700" cap="flat" cmpd="sng" algn="ctr">
-                      <a:solidFill>
-                        <a:schemeClr val="tx1"/>
-                      </a:solidFill>
-                      <a:prstDash val="solid"/>
-                      <a:round/>
-                      <a:headEnd type="none" w="med" len="med"/>
-                      <a:tailEnd type="none" w="med" len="med"/>
-                    </a:lnT>
-                    <a:lnB w="12700" cap="flat" cmpd="sng" algn="ctr">
-                      <a:solidFill>
-                        <a:schemeClr val="tx1"/>
-                      </a:solidFill>
-                      <a:prstDash val="solid"/>
-                      <a:round/>
-                      <a:headEnd type="none" w="med" len="med"/>
-                      <a:tailEnd type="none" w="med" len="med"/>
-                    </a:lnB>
-                  </a:tcPr>
-                </a:tc>
-                <a:extLst>
-                  <a:ext uri="{0D108BD9-81ED-4DB2-BD59-A6C34878D82A}">
-                    <a16:rowId xmlns:a16="http://schemas.microsoft.com/office/drawing/2014/main" val="143410273"/>
-                  </a:ext>
-                </a:extLst>
-              </a:tr>
-              <a:tr h="317879">
-                <a:tc>
-                  <a:txBody>
-                    <a:bodyPr/>
-                    <a:lstStyle/>
-                    <a:p>
-                      <a:pPr>
-                        <a:buNone/>
-                      </a:pPr>
-                      <a:r>
-                        <a:rPr lang="en-US" sz="1000">
-                          <a:latin typeface="BIZ UDゴシック" panose="020B0400000000000000" pitchFamily="49" charset="-128"/>
-                          <a:ea typeface="BIZ UDゴシック" panose="020B0400000000000000" pitchFamily="49" charset="-128"/>
-                        </a:rPr>
-                        <a:t>Normal</a:t>
-                      </a:r>
-                    </a:p>
-                  </a:txBody>
-                  <a:tcPr marL="73751" marR="73751" marT="36876" marB="36876" anchor="ctr">
-                    <a:lnL w="12700" cap="flat" cmpd="sng" algn="ctr">
-                      <a:solidFill>
-                        <a:schemeClr val="tx1"/>
-                      </a:solidFill>
-                      <a:prstDash val="solid"/>
-                      <a:round/>
-                      <a:headEnd type="none" w="med" len="med"/>
-                      <a:tailEnd type="none" w="med" len="med"/>
-                    </a:lnL>
-                    <a:lnR w="12700" cap="flat" cmpd="sng" algn="ctr">
-                      <a:solidFill>
-                        <a:schemeClr val="tx1"/>
-                      </a:solidFill>
-                      <a:prstDash val="solid"/>
-                      <a:round/>
-                      <a:headEnd type="none" w="med" len="med"/>
-                      <a:tailEnd type="none" w="med" len="med"/>
-                    </a:lnR>
-                    <a:lnT w="12700" cap="flat" cmpd="sng" algn="ctr">
-                      <a:solidFill>
-                        <a:schemeClr val="tx1"/>
-                      </a:solidFill>
-                      <a:prstDash val="solid"/>
-                      <a:round/>
-                      <a:headEnd type="none" w="med" len="med"/>
-                      <a:tailEnd type="none" w="med" len="med"/>
-                    </a:lnT>
-                    <a:lnB w="12700" cap="flat" cmpd="sng" algn="ctr">
-                      <a:solidFill>
-                        <a:schemeClr val="tx1"/>
-                      </a:solidFill>
-                      <a:prstDash val="solid"/>
-                      <a:round/>
-                      <a:headEnd type="none" w="med" len="med"/>
-                      <a:tailEnd type="none" w="med" len="med"/>
-                    </a:lnB>
-                  </a:tcPr>
-                </a:tc>
-                <a:tc>
-                  <a:txBody>
-                    <a:bodyPr/>
-                    <a:lstStyle/>
-                    <a:p>
-                      <a:pPr>
-                        <a:buNone/>
-                      </a:pPr>
-                      <a:r>
-                        <a:rPr lang="en-US" sz="1000" err="1">
-                          <a:latin typeface="BIZ UDゴシック" panose="020B0400000000000000" pitchFamily="49" charset="-128"/>
-                          <a:ea typeface="BIZ UDゴシック" panose="020B0400000000000000" pitchFamily="49" charset="-128"/>
-                        </a:rPr>
-                        <a:t>current_temp</a:t>
-                      </a:r>
-                      <a:r>
-                        <a:rPr lang="en-US" sz="1000">
-                          <a:latin typeface="BIZ UDゴシック" panose="020B0400000000000000" pitchFamily="49" charset="-128"/>
-                          <a:ea typeface="BIZ UDゴシック" panose="020B0400000000000000" pitchFamily="49" charset="-128"/>
-                        </a:rPr>
-                        <a:t> ≠ </a:t>
-                      </a:r>
-                      <a:r>
-                        <a:rPr lang="en-US" sz="1000" err="1">
-                          <a:latin typeface="BIZ UDゴシック" panose="020B0400000000000000" pitchFamily="49" charset="-128"/>
-                          <a:ea typeface="BIZ UDゴシック" panose="020B0400000000000000" pitchFamily="49" charset="-128"/>
-                        </a:rPr>
-                        <a:t>target_temp</a:t>
-                      </a:r>
-                      <a:endParaRPr lang="en-US" sz="1000">
-                        <a:latin typeface="BIZ UDゴシック" panose="020B0400000000000000" pitchFamily="49" charset="-128"/>
-                        <a:ea typeface="BIZ UDゴシック" panose="020B0400000000000000" pitchFamily="49" charset="-128"/>
-                      </a:endParaRPr>
-                    </a:p>
-                  </a:txBody>
-                  <a:tcPr marL="73751" marR="73751" marT="36876" marB="36876" anchor="ctr">
-                    <a:lnL w="12700" cap="flat" cmpd="sng" algn="ctr">
-                      <a:solidFill>
-                        <a:schemeClr val="tx1"/>
-                      </a:solidFill>
-                      <a:prstDash val="solid"/>
-                      <a:round/>
-                      <a:headEnd type="none" w="med" len="med"/>
-                      <a:tailEnd type="none" w="med" len="med"/>
-                    </a:lnL>
-                    <a:lnR w="12700" cap="flat" cmpd="sng" algn="ctr">
-                      <a:solidFill>
-                        <a:schemeClr val="tx1"/>
-                      </a:solidFill>
-                      <a:prstDash val="solid"/>
-                      <a:round/>
-                      <a:headEnd type="none" w="med" len="med"/>
-                      <a:tailEnd type="none" w="med" len="med"/>
-                    </a:lnR>
-                    <a:lnT w="12700" cap="flat" cmpd="sng" algn="ctr">
-                      <a:solidFill>
-                        <a:schemeClr val="tx1"/>
-                      </a:solidFill>
-                      <a:prstDash val="solid"/>
-                      <a:round/>
-                      <a:headEnd type="none" w="med" len="med"/>
-                      <a:tailEnd type="none" w="med" len="med"/>
-                    </a:lnT>
-                    <a:lnB w="12700" cap="flat" cmpd="sng" algn="ctr">
-                      <a:solidFill>
-                        <a:schemeClr val="tx1"/>
-                      </a:solidFill>
-                      <a:prstDash val="solid"/>
-                      <a:round/>
-                      <a:headEnd type="none" w="med" len="med"/>
-                      <a:tailEnd type="none" w="med" len="med"/>
-                    </a:lnB>
-                  </a:tcPr>
-                </a:tc>
-                <a:tc>
-                  <a:txBody>
-                    <a:bodyPr/>
-                    <a:lstStyle/>
-                    <a:p>
-                      <a:pPr>
-                        <a:buNone/>
-                      </a:pPr>
-                      <a:r>
-                        <a:rPr lang="en-US" sz="1000" err="1">
-                          <a:latin typeface="BIZ UDゴシック" panose="020B0400000000000000" pitchFamily="49" charset="-128"/>
-                          <a:ea typeface="BIZ UDゴシック" panose="020B0400000000000000" pitchFamily="49" charset="-128"/>
-                        </a:rPr>
-                        <a:t>OptimalCharge</a:t>
-                      </a:r>
-                      <a:endParaRPr lang="en-US" sz="1000">
-                        <a:latin typeface="BIZ UDゴシック" panose="020B0400000000000000" pitchFamily="49" charset="-128"/>
-                        <a:ea typeface="BIZ UDゴシック" panose="020B0400000000000000" pitchFamily="49" charset="-128"/>
-                      </a:endParaRPr>
-                    </a:p>
-                  </a:txBody>
-                  <a:tcPr marL="73751" marR="73751" marT="36876" marB="36876" anchor="ctr">
-                    <a:lnL w="12700" cap="flat" cmpd="sng" algn="ctr">
-                      <a:solidFill>
-                        <a:schemeClr val="tx1"/>
-                      </a:solidFill>
-                      <a:prstDash val="solid"/>
-                      <a:round/>
-                      <a:headEnd type="none" w="med" len="med"/>
-                      <a:tailEnd type="none" w="med" len="med"/>
-                    </a:lnL>
-                    <a:lnR w="12700" cap="flat" cmpd="sng" algn="ctr">
-                      <a:solidFill>
-                        <a:schemeClr val="tx1"/>
-                      </a:solidFill>
-                      <a:prstDash val="solid"/>
-                      <a:round/>
-                      <a:headEnd type="none" w="med" len="med"/>
-                      <a:tailEnd type="none" w="med" len="med"/>
-                    </a:lnR>
-                    <a:lnT w="12700" cap="flat" cmpd="sng" algn="ctr">
-                      <a:solidFill>
-                        <a:schemeClr val="tx1"/>
-                      </a:solidFill>
-                      <a:prstDash val="solid"/>
-                      <a:round/>
-                      <a:headEnd type="none" w="med" len="med"/>
-                      <a:tailEnd type="none" w="med" len="med"/>
-                    </a:lnT>
-                    <a:lnB w="12700" cap="flat" cmpd="sng" algn="ctr">
-                      <a:solidFill>
-                        <a:schemeClr val="tx1"/>
-                      </a:solidFill>
-                      <a:prstDash val="solid"/>
-                      <a:round/>
-                      <a:headEnd type="none" w="med" len="med"/>
-                      <a:tailEnd type="none" w="med" len="med"/>
-                    </a:lnB>
-                  </a:tcPr>
-                </a:tc>
-                <a:tc>
-                  <a:txBody>
-                    <a:bodyPr/>
-                    <a:lstStyle/>
-                    <a:p>
-                      <a:pPr>
-                        <a:buNone/>
-                      </a:pPr>
-                      <a:r>
-                        <a:rPr lang="en-US" sz="1000">
-                          <a:latin typeface="BIZ UDゴシック" panose="020B0400000000000000" pitchFamily="49" charset="-128"/>
-                          <a:ea typeface="BIZ UDゴシック" panose="020B0400000000000000" pitchFamily="49" charset="-128"/>
-                        </a:rPr>
-                        <a:t>Adjust temp toward target</a:t>
-                      </a:r>
-                    </a:p>
-                  </a:txBody>
-                  <a:tcPr marL="73751" marR="73751" marT="36876" marB="36876" anchor="ctr">
-                    <a:lnL w="12700" cap="flat" cmpd="sng" algn="ctr">
-                      <a:solidFill>
-                        <a:schemeClr val="tx1"/>
-                      </a:solidFill>
-                      <a:prstDash val="solid"/>
-                      <a:round/>
-                      <a:headEnd type="none" w="med" len="med"/>
-                      <a:tailEnd type="none" w="med" len="med"/>
-                    </a:lnL>
-                    <a:lnR w="12700" cap="flat" cmpd="sng" algn="ctr">
-                      <a:solidFill>
-                        <a:schemeClr val="tx1"/>
-                      </a:solidFill>
-                      <a:prstDash val="solid"/>
-                      <a:round/>
-                      <a:headEnd type="none" w="med" len="med"/>
-                      <a:tailEnd type="none" w="med" len="med"/>
-                    </a:lnR>
-                    <a:lnT w="12700" cap="flat" cmpd="sng" algn="ctr">
-                      <a:solidFill>
-                        <a:schemeClr val="tx1"/>
-                      </a:solidFill>
-                      <a:prstDash val="solid"/>
-                      <a:round/>
-                      <a:headEnd type="none" w="med" len="med"/>
-                      <a:tailEnd type="none" w="med" len="med"/>
-                    </a:lnT>
-                    <a:lnB w="12700" cap="flat" cmpd="sng" algn="ctr">
-                      <a:solidFill>
-                        <a:schemeClr val="tx1"/>
-                      </a:solidFill>
-                      <a:prstDash val="solid"/>
-                      <a:round/>
-                      <a:headEnd type="none" w="med" len="med"/>
-                      <a:tailEnd type="none" w="med" len="med"/>
-                    </a:lnB>
-                  </a:tcPr>
-                </a:tc>
-                <a:extLst>
-                  <a:ext uri="{0D108BD9-81ED-4DB2-BD59-A6C34878D82A}">
-                    <a16:rowId xmlns:a16="http://schemas.microsoft.com/office/drawing/2014/main" val="3574969141"/>
-                  </a:ext>
-                </a:extLst>
-              </a:tr>
-              <a:tr h="317879">
-                <a:tc>
-                  <a:txBody>
-                    <a:bodyPr/>
-                    <a:lstStyle/>
-                    <a:p>
-                      <a:pPr>
-                        <a:buNone/>
-                      </a:pPr>
-                      <a:r>
-                        <a:rPr lang="en-US" sz="1000">
-                          <a:latin typeface="BIZ UDゴシック" panose="020B0400000000000000" pitchFamily="49" charset="-128"/>
-                          <a:ea typeface="BIZ UDゴシック" panose="020B0400000000000000" pitchFamily="49" charset="-128"/>
-                        </a:rPr>
-                        <a:t>Any</a:t>
-                      </a:r>
-                    </a:p>
-                  </a:txBody>
-                  <a:tcPr marL="73751" marR="73751" marT="36876" marB="36876" anchor="ctr">
-                    <a:lnL w="12700" cap="flat" cmpd="sng" algn="ctr">
-                      <a:solidFill>
-                        <a:schemeClr val="tx1"/>
-                      </a:solidFill>
-                      <a:prstDash val="solid"/>
-                      <a:round/>
-                      <a:headEnd type="none" w="med" len="med"/>
-                      <a:tailEnd type="none" w="med" len="med"/>
-                    </a:lnL>
-                    <a:lnR w="12700" cap="flat" cmpd="sng" algn="ctr">
-                      <a:solidFill>
-                        <a:schemeClr val="tx1"/>
-                      </a:solidFill>
-                      <a:prstDash val="solid"/>
-                      <a:round/>
-                      <a:headEnd type="none" w="med" len="med"/>
-                      <a:tailEnd type="none" w="med" len="med"/>
-                    </a:lnR>
-                    <a:lnT w="12700" cap="flat" cmpd="sng" algn="ctr">
-                      <a:solidFill>
-                        <a:schemeClr val="tx1"/>
-                      </a:solidFill>
-                      <a:prstDash val="solid"/>
-                      <a:round/>
-                      <a:headEnd type="none" w="med" len="med"/>
-                      <a:tailEnd type="none" w="med" len="med"/>
-                    </a:lnT>
-                    <a:lnB w="12700" cap="flat" cmpd="sng" algn="ctr">
-                      <a:solidFill>
-                        <a:schemeClr val="tx1"/>
-                      </a:solidFill>
-                      <a:prstDash val="solid"/>
-                      <a:round/>
-                      <a:headEnd type="none" w="med" len="med"/>
-                      <a:tailEnd type="none" w="med" len="med"/>
-                    </a:lnB>
-                  </a:tcPr>
-                </a:tc>
-                <a:tc>
-                  <a:txBody>
-                    <a:bodyPr/>
-                    <a:lstStyle/>
-                    <a:p>
-                      <a:pPr>
-                        <a:buNone/>
-                      </a:pPr>
-                      <a:r>
-                        <a:rPr lang="en-US" sz="1000" err="1">
-                          <a:latin typeface="BIZ UDゴシック" panose="020B0400000000000000" pitchFamily="49" charset="-128"/>
-                          <a:ea typeface="BIZ UDゴシック" panose="020B0400000000000000" pitchFamily="49" charset="-128"/>
-                        </a:rPr>
-                        <a:t>fault_detected</a:t>
-                      </a:r>
-                      <a:r>
-                        <a:rPr lang="en-US" sz="1000">
-                          <a:latin typeface="BIZ UDゴシック" panose="020B0400000000000000" pitchFamily="49" charset="-128"/>
-                          <a:ea typeface="BIZ UDゴシック" panose="020B0400000000000000" pitchFamily="49" charset="-128"/>
-                        </a:rPr>
-                        <a:t> == true</a:t>
-                      </a:r>
-                    </a:p>
-                  </a:txBody>
-                  <a:tcPr marL="73751" marR="73751" marT="36876" marB="36876" anchor="ctr">
-                    <a:lnL w="12700" cap="flat" cmpd="sng" algn="ctr">
-                      <a:solidFill>
-                        <a:schemeClr val="tx1"/>
-                      </a:solidFill>
-                      <a:prstDash val="solid"/>
-                      <a:round/>
-                      <a:headEnd type="none" w="med" len="med"/>
-                      <a:tailEnd type="none" w="med" len="med"/>
-                    </a:lnL>
-                    <a:lnR w="12700" cap="flat" cmpd="sng" algn="ctr">
-                      <a:solidFill>
-                        <a:schemeClr val="tx1"/>
-                      </a:solidFill>
-                      <a:prstDash val="solid"/>
-                      <a:round/>
-                      <a:headEnd type="none" w="med" len="med"/>
-                      <a:tailEnd type="none" w="med" len="med"/>
-                    </a:lnR>
-                    <a:lnT w="12700" cap="flat" cmpd="sng" algn="ctr">
-                      <a:solidFill>
-                        <a:schemeClr val="tx1"/>
-                      </a:solidFill>
-                      <a:prstDash val="solid"/>
-                      <a:round/>
-                      <a:headEnd type="none" w="med" len="med"/>
-                      <a:tailEnd type="none" w="med" len="med"/>
-                    </a:lnT>
-                    <a:lnB w="12700" cap="flat" cmpd="sng" algn="ctr">
-                      <a:solidFill>
-                        <a:schemeClr val="tx1"/>
-                      </a:solidFill>
-                      <a:prstDash val="solid"/>
-                      <a:round/>
-                      <a:headEnd type="none" w="med" len="med"/>
-                      <a:tailEnd type="none" w="med" len="med"/>
-                    </a:lnB>
-                  </a:tcPr>
-                </a:tc>
-                <a:tc>
-                  <a:txBody>
-                    <a:bodyPr/>
-                    <a:lstStyle/>
-                    <a:p>
-                      <a:pPr>
-                        <a:buNone/>
-                      </a:pPr>
-                      <a:r>
-                        <a:rPr lang="en-US" sz="1000" err="1">
-                          <a:latin typeface="BIZ UDゴシック" panose="020B0400000000000000" pitchFamily="49" charset="-128"/>
-                          <a:ea typeface="BIZ UDゴシック" panose="020B0400000000000000" pitchFamily="49" charset="-128"/>
-                        </a:rPr>
-                        <a:t>SafeStop</a:t>
-                      </a:r>
-                      <a:endParaRPr lang="en-US" sz="1000">
-                        <a:latin typeface="BIZ UDゴシック" panose="020B0400000000000000" pitchFamily="49" charset="-128"/>
-                        <a:ea typeface="BIZ UDゴシック" panose="020B0400000000000000" pitchFamily="49" charset="-128"/>
-                      </a:endParaRPr>
-                    </a:p>
-                  </a:txBody>
-                  <a:tcPr marL="73751" marR="73751" marT="36876" marB="36876" anchor="ctr">
-                    <a:lnL w="12700" cap="flat" cmpd="sng" algn="ctr">
-                      <a:solidFill>
-                        <a:schemeClr val="tx1"/>
-                      </a:solidFill>
-                      <a:prstDash val="solid"/>
-                      <a:round/>
-                      <a:headEnd type="none" w="med" len="med"/>
-                      <a:tailEnd type="none" w="med" len="med"/>
-                    </a:lnL>
-                    <a:lnR w="12700" cap="flat" cmpd="sng" algn="ctr">
-                      <a:solidFill>
-                        <a:schemeClr val="tx1"/>
-                      </a:solidFill>
-                      <a:prstDash val="solid"/>
-                      <a:round/>
-                      <a:headEnd type="none" w="med" len="med"/>
-                      <a:tailEnd type="none" w="med" len="med"/>
-                    </a:lnR>
-                    <a:lnT w="12700" cap="flat" cmpd="sng" algn="ctr">
-                      <a:solidFill>
-                        <a:schemeClr val="tx1"/>
-                      </a:solidFill>
-                      <a:prstDash val="solid"/>
-                      <a:round/>
-                      <a:headEnd type="none" w="med" len="med"/>
-                      <a:tailEnd type="none" w="med" len="med"/>
-                    </a:lnT>
-                    <a:lnB w="12700" cap="flat" cmpd="sng" algn="ctr">
-                      <a:solidFill>
-                        <a:schemeClr val="tx1"/>
-                      </a:solidFill>
-                      <a:prstDash val="solid"/>
-                      <a:round/>
-                      <a:headEnd type="none" w="med" len="med"/>
-                      <a:tailEnd type="none" w="med" len="med"/>
-                    </a:lnB>
-                  </a:tcPr>
-                </a:tc>
-                <a:tc>
-                  <a:txBody>
-                    <a:bodyPr/>
-                    <a:lstStyle/>
-                    <a:p>
-                      <a:pPr>
-                        <a:buNone/>
-                      </a:pPr>
-                      <a:r>
-                        <a:rPr lang="en-US" sz="1000">
-                          <a:latin typeface="BIZ UDゴシック" panose="020B0400000000000000" pitchFamily="49" charset="-128"/>
-                          <a:ea typeface="BIZ UDゴシック" panose="020B0400000000000000" pitchFamily="49" charset="-128"/>
-                        </a:rPr>
-                        <a:t>Stop charging, issue warning</a:t>
-                      </a:r>
-                    </a:p>
-                  </a:txBody>
-                  <a:tcPr marL="73751" marR="73751" marT="36876" marB="36876" anchor="ctr">
-                    <a:lnL w="12700" cap="flat" cmpd="sng" algn="ctr">
-                      <a:solidFill>
-                        <a:schemeClr val="tx1"/>
-                      </a:solidFill>
-                      <a:prstDash val="solid"/>
-                      <a:round/>
-                      <a:headEnd type="none" w="med" len="med"/>
-                      <a:tailEnd type="none" w="med" len="med"/>
-                    </a:lnL>
-                    <a:lnR w="12700" cap="flat" cmpd="sng" algn="ctr">
-                      <a:solidFill>
-                        <a:schemeClr val="tx1"/>
-                      </a:solidFill>
-                      <a:prstDash val="solid"/>
-                      <a:round/>
-                      <a:headEnd type="none" w="med" len="med"/>
-                      <a:tailEnd type="none" w="med" len="med"/>
-                    </a:lnR>
-                    <a:lnT w="12700" cap="flat" cmpd="sng" algn="ctr">
-                      <a:solidFill>
-                        <a:schemeClr val="tx1"/>
-                      </a:solidFill>
-                      <a:prstDash val="solid"/>
-                      <a:round/>
-                      <a:headEnd type="none" w="med" len="med"/>
-                      <a:tailEnd type="none" w="med" len="med"/>
-                    </a:lnT>
-                    <a:lnB w="12700" cap="flat" cmpd="sng" algn="ctr">
-                      <a:solidFill>
-                        <a:schemeClr val="tx1"/>
-                      </a:solidFill>
-                      <a:prstDash val="solid"/>
-                      <a:round/>
-                      <a:headEnd type="none" w="med" len="med"/>
-                      <a:tailEnd type="none" w="med" len="med"/>
-                    </a:lnB>
-                  </a:tcPr>
-                </a:tc>
-                <a:extLst>
-                  <a:ext uri="{0D108BD9-81ED-4DB2-BD59-A6C34878D82A}">
-                    <a16:rowId xmlns:a16="http://schemas.microsoft.com/office/drawing/2014/main" val="4198200501"/>
-                  </a:ext>
-                </a:extLst>
-              </a:tr>
-              <a:tr h="317879">
-                <a:tc>
-                  <a:txBody>
-                    <a:bodyPr/>
-                    <a:lstStyle/>
-                    <a:p>
-                      <a:pPr>
-                        <a:buNone/>
-                      </a:pPr>
-                      <a:r>
-                        <a:rPr lang="en-US" sz="1000">
-                          <a:latin typeface="BIZ UDゴシック" panose="020B0400000000000000" pitchFamily="49" charset="-128"/>
-                          <a:ea typeface="BIZ UDゴシック" panose="020B0400000000000000" pitchFamily="49" charset="-128"/>
-                        </a:rPr>
-                        <a:t>HighTempControl</a:t>
-                      </a:r>
-                    </a:p>
-                  </a:txBody>
-                  <a:tcPr marL="73751" marR="73751" marT="36876" marB="36876" anchor="ctr">
-                    <a:lnL w="12700" cap="flat" cmpd="sng" algn="ctr">
-                      <a:solidFill>
-                        <a:schemeClr val="tx1"/>
-                      </a:solidFill>
-                      <a:prstDash val="solid"/>
-                      <a:round/>
-                      <a:headEnd type="none" w="med" len="med"/>
-                      <a:tailEnd type="none" w="med" len="med"/>
-                    </a:lnL>
-                    <a:lnR w="12700" cap="flat" cmpd="sng" algn="ctr">
-                      <a:solidFill>
-                        <a:schemeClr val="tx1"/>
-                      </a:solidFill>
-                      <a:prstDash val="solid"/>
-                      <a:round/>
-                      <a:headEnd type="none" w="med" len="med"/>
-                      <a:tailEnd type="none" w="med" len="med"/>
-                    </a:lnR>
-                    <a:lnT w="12700" cap="flat" cmpd="sng" algn="ctr">
-                      <a:solidFill>
-                        <a:schemeClr val="tx1"/>
-                      </a:solidFill>
-                      <a:prstDash val="solid"/>
-                      <a:round/>
-                      <a:headEnd type="none" w="med" len="med"/>
-                      <a:tailEnd type="none" w="med" len="med"/>
-                    </a:lnT>
-                    <a:lnB w="12700" cap="flat" cmpd="sng" algn="ctr">
-                      <a:solidFill>
-                        <a:schemeClr val="tx1"/>
-                      </a:solidFill>
-                      <a:prstDash val="solid"/>
-                      <a:round/>
-                      <a:headEnd type="none" w="med" len="med"/>
-                      <a:tailEnd type="none" w="med" len="med"/>
-                    </a:lnB>
-                  </a:tcPr>
-                </a:tc>
-                <a:tc>
-                  <a:txBody>
-                    <a:bodyPr/>
-                    <a:lstStyle/>
-                    <a:p>
-                      <a:pPr>
-                        <a:buNone/>
-                      </a:pPr>
-                      <a:r>
-                        <a:rPr lang="en-US" sz="1000">
-                          <a:latin typeface="BIZ UDゴシック" panose="020B0400000000000000" pitchFamily="49" charset="-128"/>
-                          <a:ea typeface="BIZ UDゴシック" panose="020B0400000000000000" pitchFamily="49" charset="-128"/>
-                        </a:rPr>
-                        <a:t>current_temp ≤ high_temp_threshold - hysteresis</a:t>
-                      </a:r>
-                    </a:p>
-                  </a:txBody>
-                  <a:tcPr marL="73751" marR="73751" marT="36876" marB="36876" anchor="ctr">
-                    <a:lnL w="12700" cap="flat" cmpd="sng" algn="ctr">
-                      <a:solidFill>
-                        <a:schemeClr val="tx1"/>
-                      </a:solidFill>
-                      <a:prstDash val="solid"/>
-                      <a:round/>
-                      <a:headEnd type="none" w="med" len="med"/>
-                      <a:tailEnd type="none" w="med" len="med"/>
-                    </a:lnL>
-                    <a:lnR w="12700" cap="flat" cmpd="sng" algn="ctr">
-                      <a:solidFill>
-                        <a:schemeClr val="tx1"/>
-                      </a:solidFill>
-                      <a:prstDash val="solid"/>
-                      <a:round/>
-                      <a:headEnd type="none" w="med" len="med"/>
-                      <a:tailEnd type="none" w="med" len="med"/>
-                    </a:lnR>
-                    <a:lnT w="12700" cap="flat" cmpd="sng" algn="ctr">
-                      <a:solidFill>
-                        <a:schemeClr val="tx1"/>
-                      </a:solidFill>
-                      <a:prstDash val="solid"/>
-                      <a:round/>
-                      <a:headEnd type="none" w="med" len="med"/>
-                      <a:tailEnd type="none" w="med" len="med"/>
-                    </a:lnT>
-                    <a:lnB w="12700" cap="flat" cmpd="sng" algn="ctr">
-                      <a:solidFill>
-                        <a:schemeClr val="tx1"/>
-                      </a:solidFill>
-                      <a:prstDash val="solid"/>
-                      <a:round/>
-                      <a:headEnd type="none" w="med" len="med"/>
-                      <a:tailEnd type="none" w="med" len="med"/>
-                    </a:lnB>
-                  </a:tcPr>
-                </a:tc>
-                <a:tc>
-                  <a:txBody>
-                    <a:bodyPr/>
-                    <a:lstStyle/>
-                    <a:p>
-                      <a:pPr>
-                        <a:buNone/>
-                      </a:pPr>
-                      <a:r>
-                        <a:rPr lang="en-US" sz="1000">
-                          <a:latin typeface="BIZ UDゴシック" panose="020B0400000000000000" pitchFamily="49" charset="-128"/>
-                          <a:ea typeface="BIZ UDゴシック" panose="020B0400000000000000" pitchFamily="49" charset="-128"/>
-                        </a:rPr>
-                        <a:t>Normal</a:t>
-                      </a:r>
-                    </a:p>
-                  </a:txBody>
-                  <a:tcPr marL="73751" marR="73751" marT="36876" marB="36876" anchor="ctr">
-                    <a:lnL w="12700" cap="flat" cmpd="sng" algn="ctr">
-                      <a:solidFill>
-                        <a:schemeClr val="tx1"/>
-                      </a:solidFill>
-                      <a:prstDash val="solid"/>
-                      <a:round/>
-                      <a:headEnd type="none" w="med" len="med"/>
-                      <a:tailEnd type="none" w="med" len="med"/>
-                    </a:lnL>
-                    <a:lnR w="12700" cap="flat" cmpd="sng" algn="ctr">
-                      <a:solidFill>
-                        <a:schemeClr val="tx1"/>
-                      </a:solidFill>
-                      <a:prstDash val="solid"/>
-                      <a:round/>
-                      <a:headEnd type="none" w="med" len="med"/>
-                      <a:tailEnd type="none" w="med" len="med"/>
-                    </a:lnR>
-                    <a:lnT w="12700" cap="flat" cmpd="sng" algn="ctr">
-                      <a:solidFill>
-                        <a:schemeClr val="tx1"/>
-                      </a:solidFill>
-                      <a:prstDash val="solid"/>
-                      <a:round/>
-                      <a:headEnd type="none" w="med" len="med"/>
-                      <a:tailEnd type="none" w="med" len="med"/>
-                    </a:lnT>
-                    <a:lnB w="12700" cap="flat" cmpd="sng" algn="ctr">
-                      <a:solidFill>
-                        <a:schemeClr val="tx1"/>
-                      </a:solidFill>
-                      <a:prstDash val="solid"/>
-                      <a:round/>
-                      <a:headEnd type="none" w="med" len="med"/>
-                      <a:tailEnd type="none" w="med" len="med"/>
-                    </a:lnB>
-                  </a:tcPr>
-                </a:tc>
-                <a:tc>
-                  <a:txBody>
-                    <a:bodyPr/>
-                    <a:lstStyle/>
-                    <a:p>
-                      <a:pPr>
-                        <a:buNone/>
-                      </a:pPr>
-                      <a:r>
-                        <a:rPr lang="en-US" sz="1000">
-                          <a:latin typeface="BIZ UDゴシック" panose="020B0400000000000000" pitchFamily="49" charset="-128"/>
-                          <a:ea typeface="BIZ UDゴシック" panose="020B0400000000000000" pitchFamily="49" charset="-128"/>
-                        </a:rPr>
-                        <a:t>Stop cooling</a:t>
-                      </a:r>
-                    </a:p>
-                  </a:txBody>
-                  <a:tcPr marL="73751" marR="73751" marT="36876" marB="36876" anchor="ctr">
-                    <a:lnL w="12700" cap="flat" cmpd="sng" algn="ctr">
-                      <a:solidFill>
-                        <a:schemeClr val="tx1"/>
-                      </a:solidFill>
-                      <a:prstDash val="solid"/>
-                      <a:round/>
-                      <a:headEnd type="none" w="med" len="med"/>
-                      <a:tailEnd type="none" w="med" len="med"/>
-                    </a:lnL>
-                    <a:lnR w="12700" cap="flat" cmpd="sng" algn="ctr">
-                      <a:solidFill>
-                        <a:schemeClr val="tx1"/>
-                      </a:solidFill>
-                      <a:prstDash val="solid"/>
-                      <a:round/>
-                      <a:headEnd type="none" w="med" len="med"/>
-                      <a:tailEnd type="none" w="med" len="med"/>
-                    </a:lnR>
-                    <a:lnT w="12700" cap="flat" cmpd="sng" algn="ctr">
-                      <a:solidFill>
-                        <a:schemeClr val="tx1"/>
-                      </a:solidFill>
-                      <a:prstDash val="solid"/>
-                      <a:round/>
-                      <a:headEnd type="none" w="med" len="med"/>
-                      <a:tailEnd type="none" w="med" len="med"/>
-                    </a:lnT>
-                    <a:lnB w="12700" cap="flat" cmpd="sng" algn="ctr">
-                      <a:solidFill>
-                        <a:schemeClr val="tx1"/>
-                      </a:solidFill>
-                      <a:prstDash val="solid"/>
-                      <a:round/>
-                      <a:headEnd type="none" w="med" len="med"/>
-                      <a:tailEnd type="none" w="med" len="med"/>
-                    </a:lnB>
-                  </a:tcPr>
-                </a:tc>
-                <a:extLst>
-                  <a:ext uri="{0D108BD9-81ED-4DB2-BD59-A6C34878D82A}">
-                    <a16:rowId xmlns:a16="http://schemas.microsoft.com/office/drawing/2014/main" val="3064353853"/>
-                  </a:ext>
-                </a:extLst>
-              </a:tr>
-              <a:tr h="317879">
-                <a:tc>
-                  <a:txBody>
-                    <a:bodyPr/>
-                    <a:lstStyle/>
-                    <a:p>
-                      <a:pPr>
-                        <a:buNone/>
-                      </a:pPr>
-                      <a:r>
-                        <a:rPr lang="en-US" sz="1000">
-                          <a:latin typeface="BIZ UDゴシック" panose="020B0400000000000000" pitchFamily="49" charset="-128"/>
-                          <a:ea typeface="BIZ UDゴシック" panose="020B0400000000000000" pitchFamily="49" charset="-128"/>
-                        </a:rPr>
-                        <a:t>LowTempControl</a:t>
-                      </a:r>
-                    </a:p>
-                  </a:txBody>
-                  <a:tcPr marL="73751" marR="73751" marT="36876" marB="36876" anchor="ctr">
-                    <a:lnL w="12700" cap="flat" cmpd="sng" algn="ctr">
-                      <a:solidFill>
-                        <a:schemeClr val="tx1"/>
-                      </a:solidFill>
-                      <a:prstDash val="solid"/>
-                      <a:round/>
-                      <a:headEnd type="none" w="med" len="med"/>
-                      <a:tailEnd type="none" w="med" len="med"/>
-                    </a:lnL>
-                    <a:lnR w="12700" cap="flat" cmpd="sng" algn="ctr">
-                      <a:solidFill>
-                        <a:schemeClr val="tx1"/>
-                      </a:solidFill>
-                      <a:prstDash val="solid"/>
-                      <a:round/>
-                      <a:headEnd type="none" w="med" len="med"/>
-                      <a:tailEnd type="none" w="med" len="med"/>
-                    </a:lnR>
-                    <a:lnT w="12700" cap="flat" cmpd="sng" algn="ctr">
-                      <a:solidFill>
-                        <a:schemeClr val="tx1"/>
-                      </a:solidFill>
-                      <a:prstDash val="solid"/>
-                      <a:round/>
-                      <a:headEnd type="none" w="med" len="med"/>
-                      <a:tailEnd type="none" w="med" len="med"/>
-                    </a:lnT>
-                    <a:lnB w="12700" cap="flat" cmpd="sng" algn="ctr">
-                      <a:solidFill>
-                        <a:schemeClr val="tx1"/>
-                      </a:solidFill>
-                      <a:prstDash val="solid"/>
-                      <a:round/>
-                      <a:headEnd type="none" w="med" len="med"/>
-                      <a:tailEnd type="none" w="med" len="med"/>
-                    </a:lnB>
-                  </a:tcPr>
-                </a:tc>
-                <a:tc>
-                  <a:txBody>
-                    <a:bodyPr/>
-                    <a:lstStyle/>
-                    <a:p>
-                      <a:pPr>
-                        <a:buNone/>
-                      </a:pPr>
-                      <a:r>
-                        <a:rPr lang="en-US" sz="1000">
-                          <a:latin typeface="BIZ UDゴシック" panose="020B0400000000000000" pitchFamily="49" charset="-128"/>
-                          <a:ea typeface="BIZ UDゴシック" panose="020B0400000000000000" pitchFamily="49" charset="-128"/>
-                        </a:rPr>
-                        <a:t>current_temp ≥ low_temp_threshold + hysteresis</a:t>
-                      </a:r>
-                    </a:p>
-                  </a:txBody>
-                  <a:tcPr marL="73751" marR="73751" marT="36876" marB="36876" anchor="ctr">
-                    <a:lnL w="12700" cap="flat" cmpd="sng" algn="ctr">
-                      <a:solidFill>
-                        <a:schemeClr val="tx1"/>
-                      </a:solidFill>
-                      <a:prstDash val="solid"/>
-                      <a:round/>
-                      <a:headEnd type="none" w="med" len="med"/>
-                      <a:tailEnd type="none" w="med" len="med"/>
-                    </a:lnL>
-                    <a:lnR w="12700" cap="flat" cmpd="sng" algn="ctr">
-                      <a:solidFill>
-                        <a:schemeClr val="tx1"/>
-                      </a:solidFill>
-                      <a:prstDash val="solid"/>
-                      <a:round/>
-                      <a:headEnd type="none" w="med" len="med"/>
-                      <a:tailEnd type="none" w="med" len="med"/>
-                    </a:lnR>
-                    <a:lnT w="12700" cap="flat" cmpd="sng" algn="ctr">
-                      <a:solidFill>
-                        <a:schemeClr val="tx1"/>
-                      </a:solidFill>
-                      <a:prstDash val="solid"/>
-                      <a:round/>
-                      <a:headEnd type="none" w="med" len="med"/>
-                      <a:tailEnd type="none" w="med" len="med"/>
-                    </a:lnT>
-                    <a:lnB w="12700" cap="flat" cmpd="sng" algn="ctr">
-                      <a:solidFill>
-                        <a:schemeClr val="tx1"/>
-                      </a:solidFill>
-                      <a:prstDash val="solid"/>
-                      <a:round/>
-                      <a:headEnd type="none" w="med" len="med"/>
-                      <a:tailEnd type="none" w="med" len="med"/>
-                    </a:lnB>
-                  </a:tcPr>
-                </a:tc>
-                <a:tc>
-                  <a:txBody>
-                    <a:bodyPr/>
-                    <a:lstStyle/>
-                    <a:p>
-                      <a:pPr>
-                        <a:buNone/>
-                      </a:pPr>
-                      <a:r>
-                        <a:rPr lang="en-US" sz="1000">
-                          <a:latin typeface="BIZ UDゴシック" panose="020B0400000000000000" pitchFamily="49" charset="-128"/>
-                          <a:ea typeface="BIZ UDゴシック" panose="020B0400000000000000" pitchFamily="49" charset="-128"/>
-                        </a:rPr>
-                        <a:t>Normal</a:t>
-                      </a:r>
-                    </a:p>
-                  </a:txBody>
-                  <a:tcPr marL="73751" marR="73751" marT="36876" marB="36876" anchor="ctr">
-                    <a:lnL w="12700" cap="flat" cmpd="sng" algn="ctr">
-                      <a:solidFill>
-                        <a:schemeClr val="tx1"/>
-                      </a:solidFill>
-                      <a:prstDash val="solid"/>
-                      <a:round/>
-                      <a:headEnd type="none" w="med" len="med"/>
-                      <a:tailEnd type="none" w="med" len="med"/>
-                    </a:lnL>
-                    <a:lnR w="12700" cap="flat" cmpd="sng" algn="ctr">
-                      <a:solidFill>
-                        <a:schemeClr val="tx1"/>
-                      </a:solidFill>
-                      <a:prstDash val="solid"/>
-                      <a:round/>
-                      <a:headEnd type="none" w="med" len="med"/>
-                      <a:tailEnd type="none" w="med" len="med"/>
-                    </a:lnR>
-                    <a:lnT w="12700" cap="flat" cmpd="sng" algn="ctr">
-                      <a:solidFill>
-                        <a:schemeClr val="tx1"/>
-                      </a:solidFill>
-                      <a:prstDash val="solid"/>
-                      <a:round/>
-                      <a:headEnd type="none" w="med" len="med"/>
-                      <a:tailEnd type="none" w="med" len="med"/>
-                    </a:lnT>
-                    <a:lnB w="12700" cap="flat" cmpd="sng" algn="ctr">
-                      <a:solidFill>
-                        <a:schemeClr val="tx1"/>
-                      </a:solidFill>
-                      <a:prstDash val="solid"/>
-                      <a:round/>
-                      <a:headEnd type="none" w="med" len="med"/>
-                      <a:tailEnd type="none" w="med" len="med"/>
-                    </a:lnB>
-                  </a:tcPr>
-                </a:tc>
-                <a:tc>
-                  <a:txBody>
-                    <a:bodyPr/>
-                    <a:lstStyle/>
-                    <a:p>
-                      <a:pPr>
-                        <a:buNone/>
-                      </a:pPr>
-                      <a:r>
-                        <a:rPr lang="en-US" sz="1000">
-                          <a:latin typeface="BIZ UDゴシック" panose="020B0400000000000000" pitchFamily="49" charset="-128"/>
-                          <a:ea typeface="BIZ UDゴシック" panose="020B0400000000000000" pitchFamily="49" charset="-128"/>
-                        </a:rPr>
-                        <a:t>Stop heating</a:t>
-                      </a:r>
-                    </a:p>
-                  </a:txBody>
-                  <a:tcPr marL="73751" marR="73751" marT="36876" marB="36876" anchor="ctr">
-                    <a:lnL w="12700" cap="flat" cmpd="sng" algn="ctr">
-                      <a:solidFill>
-                        <a:schemeClr val="tx1"/>
-                      </a:solidFill>
-                      <a:prstDash val="solid"/>
-                      <a:round/>
-                      <a:headEnd type="none" w="med" len="med"/>
-                      <a:tailEnd type="none" w="med" len="med"/>
-                    </a:lnL>
-                    <a:lnR w="12700" cap="flat" cmpd="sng" algn="ctr">
-                      <a:solidFill>
-                        <a:schemeClr val="tx1"/>
-                      </a:solidFill>
-                      <a:prstDash val="solid"/>
-                      <a:round/>
-                      <a:headEnd type="none" w="med" len="med"/>
-                      <a:tailEnd type="none" w="med" len="med"/>
-                    </a:lnR>
-                    <a:lnT w="12700" cap="flat" cmpd="sng" algn="ctr">
-                      <a:solidFill>
-                        <a:schemeClr val="tx1"/>
-                      </a:solidFill>
-                      <a:prstDash val="solid"/>
-                      <a:round/>
-                      <a:headEnd type="none" w="med" len="med"/>
-                      <a:tailEnd type="none" w="med" len="med"/>
-                    </a:lnT>
-                    <a:lnB w="12700" cap="flat" cmpd="sng" algn="ctr">
-                      <a:solidFill>
-                        <a:schemeClr val="tx1"/>
-                      </a:solidFill>
-                      <a:prstDash val="solid"/>
-                      <a:round/>
-                      <a:headEnd type="none" w="med" len="med"/>
-                      <a:tailEnd type="none" w="med" len="med"/>
-                    </a:lnB>
-                  </a:tcPr>
-                </a:tc>
-                <a:extLst>
-                  <a:ext uri="{0D108BD9-81ED-4DB2-BD59-A6C34878D82A}">
-                    <a16:rowId xmlns:a16="http://schemas.microsoft.com/office/drawing/2014/main" val="2274259914"/>
-                  </a:ext>
-                </a:extLst>
-              </a:tr>
-              <a:tr h="317879">
-                <a:tc>
-                  <a:txBody>
-                    <a:bodyPr/>
-                    <a:lstStyle/>
-                    <a:p>
-                      <a:pPr>
-                        <a:buNone/>
-                      </a:pPr>
-                      <a:r>
-                        <a:rPr lang="en-US" sz="1000">
-                          <a:latin typeface="BIZ UDゴシック" panose="020B0400000000000000" pitchFamily="49" charset="-128"/>
-                          <a:ea typeface="BIZ UDゴシック" panose="020B0400000000000000" pitchFamily="49" charset="-128"/>
-                        </a:rPr>
-                        <a:t>OptimalCharge</a:t>
-                      </a:r>
-                    </a:p>
-                  </a:txBody>
-                  <a:tcPr marL="73751" marR="73751" marT="36876" marB="36876" anchor="ctr">
-                    <a:lnL w="12700" cap="flat" cmpd="sng" algn="ctr">
-                      <a:solidFill>
-                        <a:schemeClr val="tx1"/>
-                      </a:solidFill>
-                      <a:prstDash val="solid"/>
-                      <a:round/>
-                      <a:headEnd type="none" w="med" len="med"/>
-                      <a:tailEnd type="none" w="med" len="med"/>
-                    </a:lnL>
-                    <a:lnR w="12700" cap="flat" cmpd="sng" algn="ctr">
-                      <a:solidFill>
-                        <a:schemeClr val="tx1"/>
-                      </a:solidFill>
-                      <a:prstDash val="solid"/>
-                      <a:round/>
-                      <a:headEnd type="none" w="med" len="med"/>
-                      <a:tailEnd type="none" w="med" len="med"/>
-                    </a:lnR>
-                    <a:lnT w="12700" cap="flat" cmpd="sng" algn="ctr">
-                      <a:solidFill>
-                        <a:schemeClr val="tx1"/>
-                      </a:solidFill>
-                      <a:prstDash val="solid"/>
-                      <a:round/>
-                      <a:headEnd type="none" w="med" len="med"/>
-                      <a:tailEnd type="none" w="med" len="med"/>
-                    </a:lnT>
-                    <a:lnB w="12700" cap="flat" cmpd="sng" algn="ctr">
-                      <a:solidFill>
-                        <a:schemeClr val="tx1"/>
-                      </a:solidFill>
-                      <a:prstDash val="solid"/>
-                      <a:round/>
-                      <a:headEnd type="none" w="med" len="med"/>
-                      <a:tailEnd type="none" w="med" len="med"/>
-                    </a:lnB>
-                  </a:tcPr>
-                </a:tc>
-                <a:tc>
-                  <a:txBody>
-                    <a:bodyPr/>
-                    <a:lstStyle/>
-                    <a:p>
-                      <a:pPr>
-                        <a:buNone/>
-                      </a:pPr>
-                      <a:r>
-                        <a:rPr lang="en-US" sz="1000">
-                          <a:latin typeface="BIZ UDゴシック" panose="020B0400000000000000" pitchFamily="49" charset="-128"/>
-                          <a:ea typeface="BIZ UDゴシック" panose="020B0400000000000000" pitchFamily="49" charset="-128"/>
-                        </a:rPr>
-                        <a:t>fabs(current_temp - target_temp) &lt; tolerance</a:t>
-                      </a:r>
-                    </a:p>
-                  </a:txBody>
-                  <a:tcPr marL="73751" marR="73751" marT="36876" marB="36876" anchor="ctr">
-                    <a:lnL w="12700" cap="flat" cmpd="sng" algn="ctr">
-                      <a:solidFill>
-                        <a:schemeClr val="tx1"/>
-                      </a:solidFill>
-                      <a:prstDash val="solid"/>
-                      <a:round/>
-                      <a:headEnd type="none" w="med" len="med"/>
-                      <a:tailEnd type="none" w="med" len="med"/>
-                    </a:lnL>
-                    <a:lnR w="12700" cap="flat" cmpd="sng" algn="ctr">
-                      <a:solidFill>
-                        <a:schemeClr val="tx1"/>
-                      </a:solidFill>
-                      <a:prstDash val="solid"/>
-                      <a:round/>
-                      <a:headEnd type="none" w="med" len="med"/>
-                      <a:tailEnd type="none" w="med" len="med"/>
-                    </a:lnR>
-                    <a:lnT w="12700" cap="flat" cmpd="sng" algn="ctr">
-                      <a:solidFill>
-                        <a:schemeClr val="tx1"/>
-                      </a:solidFill>
-                      <a:prstDash val="solid"/>
-                      <a:round/>
-                      <a:headEnd type="none" w="med" len="med"/>
-                      <a:tailEnd type="none" w="med" len="med"/>
-                    </a:lnT>
-                    <a:lnB w="12700" cap="flat" cmpd="sng" algn="ctr">
-                      <a:solidFill>
-                        <a:schemeClr val="tx1"/>
-                      </a:solidFill>
-                      <a:prstDash val="solid"/>
-                      <a:round/>
-                      <a:headEnd type="none" w="med" len="med"/>
-                      <a:tailEnd type="none" w="med" len="med"/>
-                    </a:lnB>
-                  </a:tcPr>
-                </a:tc>
-                <a:tc>
-                  <a:txBody>
-                    <a:bodyPr/>
-                    <a:lstStyle/>
-                    <a:p>
-                      <a:pPr>
-                        <a:buNone/>
-                      </a:pPr>
-                      <a:r>
-                        <a:rPr lang="en-US" sz="1000">
-                          <a:latin typeface="BIZ UDゴシック" panose="020B0400000000000000" pitchFamily="49" charset="-128"/>
-                          <a:ea typeface="BIZ UDゴシック" panose="020B0400000000000000" pitchFamily="49" charset="-128"/>
-                        </a:rPr>
-                        <a:t>Normal</a:t>
-                      </a:r>
-                    </a:p>
-                  </a:txBody>
-                  <a:tcPr marL="73751" marR="73751" marT="36876" marB="36876" anchor="ctr">
-                    <a:lnL w="12700" cap="flat" cmpd="sng" algn="ctr">
-                      <a:solidFill>
-                        <a:schemeClr val="tx1"/>
-                      </a:solidFill>
-                      <a:prstDash val="solid"/>
-                      <a:round/>
-                      <a:headEnd type="none" w="med" len="med"/>
-                      <a:tailEnd type="none" w="med" len="med"/>
-                    </a:lnL>
-                    <a:lnR w="12700" cap="flat" cmpd="sng" algn="ctr">
-                      <a:solidFill>
-                        <a:schemeClr val="tx1"/>
-                      </a:solidFill>
-                      <a:prstDash val="solid"/>
-                      <a:round/>
-                      <a:headEnd type="none" w="med" len="med"/>
-                      <a:tailEnd type="none" w="med" len="med"/>
-                    </a:lnR>
-                    <a:lnT w="12700" cap="flat" cmpd="sng" algn="ctr">
-                      <a:solidFill>
-                        <a:schemeClr val="tx1"/>
-                      </a:solidFill>
-                      <a:prstDash val="solid"/>
-                      <a:round/>
-                      <a:headEnd type="none" w="med" len="med"/>
-                      <a:tailEnd type="none" w="med" len="med"/>
-                    </a:lnT>
-                    <a:lnB w="12700" cap="flat" cmpd="sng" algn="ctr">
-                      <a:solidFill>
-                        <a:schemeClr val="tx1"/>
-                      </a:solidFill>
-                      <a:prstDash val="solid"/>
-                      <a:round/>
-                      <a:headEnd type="none" w="med" len="med"/>
-                      <a:tailEnd type="none" w="med" len="med"/>
-                    </a:lnB>
-                  </a:tcPr>
-                </a:tc>
-                <a:tc>
-                  <a:txBody>
-                    <a:bodyPr/>
-                    <a:lstStyle/>
-                    <a:p>
-                      <a:pPr>
-                        <a:buNone/>
-                      </a:pPr>
-                      <a:r>
-                        <a:rPr lang="en-US" sz="1000">
-                          <a:latin typeface="BIZ UDゴシック" panose="020B0400000000000000" pitchFamily="49" charset="-128"/>
-                          <a:ea typeface="BIZ UDゴシック" panose="020B0400000000000000" pitchFamily="49" charset="-128"/>
-                        </a:rPr>
-                        <a:t>Stop adjustment</a:t>
-                      </a:r>
-                    </a:p>
-                  </a:txBody>
-                  <a:tcPr marL="73751" marR="73751" marT="36876" marB="36876" anchor="ctr">
-                    <a:lnL w="12700" cap="flat" cmpd="sng" algn="ctr">
-                      <a:solidFill>
-                        <a:schemeClr val="tx1"/>
-                      </a:solidFill>
-                      <a:prstDash val="solid"/>
-                      <a:round/>
-                      <a:headEnd type="none" w="med" len="med"/>
-                      <a:tailEnd type="none" w="med" len="med"/>
-                    </a:lnL>
-                    <a:lnR w="12700" cap="flat" cmpd="sng" algn="ctr">
-                      <a:solidFill>
-                        <a:schemeClr val="tx1"/>
-                      </a:solidFill>
-                      <a:prstDash val="solid"/>
-                      <a:round/>
-                      <a:headEnd type="none" w="med" len="med"/>
-                      <a:tailEnd type="none" w="med" len="med"/>
-                    </a:lnR>
-                    <a:lnT w="12700" cap="flat" cmpd="sng" algn="ctr">
-                      <a:solidFill>
-                        <a:schemeClr val="tx1"/>
-                      </a:solidFill>
-                      <a:prstDash val="solid"/>
-                      <a:round/>
-                      <a:headEnd type="none" w="med" len="med"/>
-                      <a:tailEnd type="none" w="med" len="med"/>
-                    </a:lnT>
-                    <a:lnB w="12700" cap="flat" cmpd="sng" algn="ctr">
-                      <a:solidFill>
-                        <a:schemeClr val="tx1"/>
-                      </a:solidFill>
-                      <a:prstDash val="solid"/>
-                      <a:round/>
-                      <a:headEnd type="none" w="med" len="med"/>
-                      <a:tailEnd type="none" w="med" len="med"/>
-                    </a:lnB>
-                  </a:tcPr>
-                </a:tc>
-                <a:extLst>
-                  <a:ext uri="{0D108BD9-81ED-4DB2-BD59-A6C34878D82A}">
-                    <a16:rowId xmlns:a16="http://schemas.microsoft.com/office/drawing/2014/main" val="3169128571"/>
-                  </a:ext>
-                </a:extLst>
-              </a:tr>
-            </a:tbl>
-          </a:graphicData>
-        </a:graphic>
-      </p:graphicFrame>
-      <p:sp>
-        <p:nvSpPr>
-          <p:cNvPr id="19" name="テキスト ボックス 18">
-            <a:extLst>
-              <a:ext uri="{FF2B5EF4-FFF2-40B4-BE49-F238E27FC236}">
-                <a16:creationId xmlns:a16="http://schemas.microsoft.com/office/drawing/2014/main" id="{79365543-A009-5C17-DEC0-9FE31E266969}"/>
-              </a:ext>
-            </a:extLst>
-          </p:cNvPr>
-          <p:cNvSpPr txBox="1"/>
-          <p:nvPr/>
-        </p:nvSpPr>
-        <p:spPr>
-          <a:xfrm>
-            <a:off x="554123" y="982694"/>
-            <a:ext cx="1589229" cy="276999"/>
-          </a:xfrm>
-          <a:prstGeom prst="rect">
-            <a:avLst/>
-          </a:prstGeom>
-          <a:noFill/>
-        </p:spPr>
-        <p:txBody>
-          <a:bodyPr wrap="square" rtlCol="0">
-            <a:spAutoFit/>
-          </a:bodyPr>
-          <a:lstStyle/>
-          <a:p>
-            <a:r>
-              <a:rPr kumimoji="1" lang="en-US" altLang="ja-JP" sz="1200" b="1">
-                <a:solidFill>
-                  <a:srgbClr val="0070C0"/>
-                </a:solidFill>
-                <a:latin typeface="BIZ UDゴシック" panose="020B0400000000000000" pitchFamily="49" charset="-128"/>
-                <a:ea typeface="BIZ UDゴシック" panose="020B0400000000000000" pitchFamily="49" charset="-128"/>
-              </a:rPr>
-              <a:t>【</a:t>
-            </a:r>
-            <a:r>
-              <a:rPr kumimoji="1" lang="ja-JP" altLang="en-US" sz="1200" b="1">
-                <a:solidFill>
-                  <a:srgbClr val="0070C0"/>
-                </a:solidFill>
-                <a:latin typeface="BIZ UDゴシック" panose="020B0400000000000000" pitchFamily="49" charset="-128"/>
-                <a:ea typeface="BIZ UDゴシック" panose="020B0400000000000000" pitchFamily="49" charset="-128"/>
-              </a:rPr>
-              <a:t>図のタイトル</a:t>
-            </a:r>
-            <a:r>
-              <a:rPr kumimoji="1" lang="en-US" altLang="ja-JP" sz="1200" b="1">
-                <a:solidFill>
-                  <a:srgbClr val="0070C0"/>
-                </a:solidFill>
-                <a:latin typeface="BIZ UDゴシック" panose="020B0400000000000000" pitchFamily="49" charset="-128"/>
-                <a:ea typeface="BIZ UDゴシック" panose="020B0400000000000000" pitchFamily="49" charset="-128"/>
-              </a:rPr>
-              <a:t>】</a:t>
-            </a:r>
-            <a:endParaRPr kumimoji="1" lang="ja-JP" altLang="en-US" sz="1200" b="1">
-              <a:solidFill>
-                <a:srgbClr val="0070C0"/>
-              </a:solidFill>
-              <a:latin typeface="BIZ UDゴシック" panose="020B0400000000000000" pitchFamily="49" charset="-128"/>
-              <a:ea typeface="BIZ UDゴシック" panose="020B0400000000000000" pitchFamily="49" charset="-128"/>
-            </a:endParaRPr>
-          </a:p>
-        </p:txBody>
-      </p:sp>
-      <p:sp>
-        <p:nvSpPr>
-          <p:cNvPr id="20" name="テキスト ボックス 19">
-            <a:extLst>
-              <a:ext uri="{FF2B5EF4-FFF2-40B4-BE49-F238E27FC236}">
-                <a16:creationId xmlns:a16="http://schemas.microsoft.com/office/drawing/2014/main" id="{0045FF04-4EF8-36E0-25F8-F7CF2C4136E5}"/>
-              </a:ext>
-            </a:extLst>
-          </p:cNvPr>
-          <p:cNvSpPr txBox="1"/>
-          <p:nvPr/>
-        </p:nvSpPr>
-        <p:spPr>
-          <a:xfrm>
-            <a:off x="1934217" y="1005777"/>
-            <a:ext cx="4108137" cy="261610"/>
-          </a:xfrm>
-          <a:prstGeom prst="rect">
-            <a:avLst/>
-          </a:prstGeom>
-          <a:noFill/>
-        </p:spPr>
-        <p:txBody>
-          <a:bodyPr wrap="square" rtlCol="0">
-            <a:spAutoFit/>
-          </a:bodyPr>
-          <a:lstStyle/>
-          <a:p>
-            <a:r>
-              <a:rPr kumimoji="1" lang="en-US" altLang="ja-JP" sz="1100">
-                <a:latin typeface="BIZ UDゴシック" panose="020B0400000000000000" pitchFamily="49" charset="-128"/>
-                <a:ea typeface="BIZ UDゴシック" panose="020B0400000000000000" pitchFamily="49" charset="-128"/>
-              </a:rPr>
-              <a:t>Battery Temperature Control – State Transition Diagram</a:t>
-            </a:r>
-            <a:endParaRPr kumimoji="1" lang="ja-JP" altLang="en-US" sz="1100">
-              <a:latin typeface="BIZ UDゴシック" panose="020B0400000000000000" pitchFamily="49" charset="-128"/>
-              <a:ea typeface="BIZ UDゴシック" panose="020B0400000000000000" pitchFamily="49" charset="-128"/>
-            </a:endParaRPr>
-          </a:p>
-        </p:txBody>
-      </p:sp>
-      <p:sp>
-        <p:nvSpPr>
-          <p:cNvPr id="7" name="スライド番号プレースホルダー 6">
-            <a:extLst>
-              <a:ext uri="{FF2B5EF4-FFF2-40B4-BE49-F238E27FC236}">
-                <a16:creationId xmlns:a16="http://schemas.microsoft.com/office/drawing/2014/main" id="{64E4F206-10FD-6D38-AFC2-8E3EF23FCA36}"/>
-              </a:ext>
-            </a:extLst>
-          </p:cNvPr>
-          <p:cNvSpPr>
-            <a:spLocks noGrp="1"/>
-          </p:cNvSpPr>
-          <p:nvPr>
-            <p:ph type="sldNum" sz="quarter" idx="12"/>
-          </p:nvPr>
-        </p:nvSpPr>
-        <p:spPr/>
-        <p:txBody>
-          <a:bodyPr/>
-          <a:lstStyle/>
-          <a:p>
-            <a:fld id="{A99D720A-4AD5-4DCF-885F-DE5297996123}" type="slidenum">
-              <a:rPr kumimoji="1" lang="ja-JP" altLang="en-US" smtClean="0"/>
-              <a:t>3</a:t>
-            </a:fld>
-            <a:endParaRPr kumimoji="1" lang="ja-JP" altLang="en-US"/>
-          </a:p>
-        </p:txBody>
-      </p:sp>
-    </p:spTree>
-    <p:extLst>
-      <p:ext uri="{BB962C8B-B14F-4D97-AF65-F5344CB8AC3E}">
-        <p14:creationId xmlns:p14="http://schemas.microsoft.com/office/powerpoint/2010/main" val="109885627"/>
-      </p:ext>
-    </p:extLst>
-  </p:cSld>
-  <p:clrMapOvr>
-    <a:masterClrMapping/>
-  </p:clrMapOvr>
-</p:sld>
-</file>
-
-<file path=ppt/slides/slide4.xml><?xml version="1.0" encoding="utf-8"?>
-<p:sld xmlns:a="http://schemas.openxmlformats.org/drawingml/2006/main" xmlns:r="http://schemas.openxmlformats.org/officeDocument/2006/relationships" xmlns:p="http://schemas.openxmlformats.org/presentationml/2006/main">
-  <p:cSld>
-    <p:spTree>
-      <p:nvGrpSpPr>
-        <p:cNvPr id="1" name=""/>
-        <p:cNvGrpSpPr/>
-        <p:nvPr/>
-      </p:nvGrpSpPr>
-      <p:grpSpPr>
-        <a:xfrm>
-          <a:off x="0" y="0"/>
-          <a:ext cx="0" cy="0"/>
-          <a:chOff x="0" y="0"/>
-          <a:chExt cx="0" cy="0"/>
-        </a:xfrm>
-      </p:grpSpPr>
-      <p:sp>
-        <p:nvSpPr>
-          <p:cNvPr id="2" name="タイトル 1">
-            <a:extLst>
-              <a:ext uri="{FF2B5EF4-FFF2-40B4-BE49-F238E27FC236}">
                 <a16:creationId xmlns:a16="http://schemas.microsoft.com/office/drawing/2014/main" id="{852F7B4B-5016-6084-64EB-4ABC15493975}"/>
               </a:ext>
             </a:extLst>
@@ -14468,7 +10148,7 @@
           <a:p>
             <a:fld id="{A99D720A-4AD5-4DCF-885F-DE5297996123}" type="slidenum">
               <a:rPr kumimoji="1" lang="ja-JP" altLang="en-US" smtClean="0"/>
-              <a:t>4</a:t>
+              <a:t>3</a:t>
             </a:fld>
             <a:endParaRPr kumimoji="1" lang="ja-JP" altLang="en-US"/>
           </a:p>
@@ -14487,3635 +10167,7 @@
 </p:sld>
 </file>
 
-<file path=ppt/slides/slide5.xml><?xml version="1.0" encoding="utf-8"?>
-<p:sld xmlns:a="http://schemas.openxmlformats.org/drawingml/2006/main" xmlns:r="http://schemas.openxmlformats.org/officeDocument/2006/relationships" xmlns:p="http://schemas.openxmlformats.org/presentationml/2006/main">
-  <p:cSld>
-    <p:spTree>
-      <p:nvGrpSpPr>
-        <p:cNvPr id="1" name=""/>
-        <p:cNvGrpSpPr/>
-        <p:nvPr/>
-      </p:nvGrpSpPr>
-      <p:grpSpPr>
-        <a:xfrm>
-          <a:off x="0" y="0"/>
-          <a:ext cx="0" cy="0"/>
-          <a:chOff x="0" y="0"/>
-          <a:chExt cx="0" cy="0"/>
-        </a:xfrm>
-      </p:grpSpPr>
-      <p:sp>
-        <p:nvSpPr>
-          <p:cNvPr id="2" name="タイトル 1">
-            <a:extLst>
-              <a:ext uri="{FF2B5EF4-FFF2-40B4-BE49-F238E27FC236}">
-                <a16:creationId xmlns:a16="http://schemas.microsoft.com/office/drawing/2014/main" id="{F363A469-0810-4489-A0F8-87813908ACA0}"/>
-              </a:ext>
-            </a:extLst>
-          </p:cNvPr>
-          <p:cNvSpPr>
-            <a:spLocks noGrp="1"/>
-          </p:cNvSpPr>
-          <p:nvPr>
-            <p:ph type="title"/>
-          </p:nvPr>
-        </p:nvSpPr>
-        <p:spPr/>
-        <p:txBody>
-          <a:bodyPr>
-            <a:normAutofit fontScale="90000"/>
-          </a:bodyPr>
-          <a:lstStyle/>
-          <a:p>
-            <a:r>
-              <a:rPr lang="ja-JP" altLang="en-US"/>
-              <a:t>参考：</a:t>
-            </a:r>
-            <a:r>
-              <a:rPr lang="en-US" altLang="ja-JP"/>
-              <a:t>DFD</a:t>
-            </a:r>
-            <a:r>
-              <a:rPr lang="ja-JP" altLang="en-US"/>
-              <a:t>（データフローダイアグラム）テンプレート</a:t>
-            </a:r>
-            <a:endParaRPr kumimoji="1" lang="ja-JP" altLang="en-US"/>
-          </a:p>
-        </p:txBody>
-      </p:sp>
-      <p:sp>
-        <p:nvSpPr>
-          <p:cNvPr id="6" name="テキスト ボックス 5">
-            <a:extLst>
-              <a:ext uri="{FF2B5EF4-FFF2-40B4-BE49-F238E27FC236}">
-                <a16:creationId xmlns:a16="http://schemas.microsoft.com/office/drawing/2014/main" id="{BC11E8D0-6B99-D3E4-1724-490868FACB2D}"/>
-              </a:ext>
-            </a:extLst>
-          </p:cNvPr>
-          <p:cNvSpPr txBox="1"/>
-          <p:nvPr/>
-        </p:nvSpPr>
-        <p:spPr>
-          <a:xfrm>
-            <a:off x="554123" y="982694"/>
-            <a:ext cx="1589229" cy="276999"/>
-          </a:xfrm>
-          <a:prstGeom prst="rect">
-            <a:avLst/>
-          </a:prstGeom>
-          <a:noFill/>
-        </p:spPr>
-        <p:txBody>
-          <a:bodyPr wrap="square" rtlCol="0">
-            <a:spAutoFit/>
-          </a:bodyPr>
-          <a:lstStyle/>
-          <a:p>
-            <a:r>
-              <a:rPr kumimoji="1" lang="en-US" altLang="ja-JP" sz="1200" b="1">
-                <a:solidFill>
-                  <a:srgbClr val="0070C0"/>
-                </a:solidFill>
-                <a:latin typeface="BIZ UDゴシック" panose="020B0400000000000000" pitchFamily="49" charset="-128"/>
-                <a:ea typeface="BIZ UDゴシック" panose="020B0400000000000000" pitchFamily="49" charset="-128"/>
-              </a:rPr>
-              <a:t>【</a:t>
-            </a:r>
-            <a:r>
-              <a:rPr kumimoji="1" lang="ja-JP" altLang="en-US" sz="1200" b="1">
-                <a:solidFill>
-                  <a:srgbClr val="0070C0"/>
-                </a:solidFill>
-                <a:latin typeface="BIZ UDゴシック" panose="020B0400000000000000" pitchFamily="49" charset="-128"/>
-                <a:ea typeface="BIZ UDゴシック" panose="020B0400000000000000" pitchFamily="49" charset="-128"/>
-              </a:rPr>
-              <a:t>図のタイトル</a:t>
-            </a:r>
-            <a:r>
-              <a:rPr kumimoji="1" lang="en-US" altLang="ja-JP" sz="1200" b="1">
-                <a:solidFill>
-                  <a:srgbClr val="0070C0"/>
-                </a:solidFill>
-                <a:latin typeface="BIZ UDゴシック" panose="020B0400000000000000" pitchFamily="49" charset="-128"/>
-                <a:ea typeface="BIZ UDゴシック" panose="020B0400000000000000" pitchFamily="49" charset="-128"/>
-              </a:rPr>
-              <a:t>】</a:t>
-            </a:r>
-            <a:endParaRPr kumimoji="1" lang="ja-JP" altLang="en-US" sz="1200" b="1">
-              <a:solidFill>
-                <a:srgbClr val="0070C0"/>
-              </a:solidFill>
-              <a:latin typeface="BIZ UDゴシック" panose="020B0400000000000000" pitchFamily="49" charset="-128"/>
-              <a:ea typeface="BIZ UDゴシック" panose="020B0400000000000000" pitchFamily="49" charset="-128"/>
-            </a:endParaRPr>
-          </a:p>
-        </p:txBody>
-      </p:sp>
-      <p:sp>
-        <p:nvSpPr>
-          <p:cNvPr id="7" name="テキスト ボックス 6">
-            <a:extLst>
-              <a:ext uri="{FF2B5EF4-FFF2-40B4-BE49-F238E27FC236}">
-                <a16:creationId xmlns:a16="http://schemas.microsoft.com/office/drawing/2014/main" id="{B29B5973-70F0-B715-AA1F-F6BF2A374E59}"/>
-              </a:ext>
-            </a:extLst>
-          </p:cNvPr>
-          <p:cNvSpPr txBox="1"/>
-          <p:nvPr/>
-        </p:nvSpPr>
-        <p:spPr>
-          <a:xfrm>
-            <a:off x="1934218" y="1005777"/>
-            <a:ext cx="3252260" cy="261610"/>
-          </a:xfrm>
-          <a:prstGeom prst="rect">
-            <a:avLst/>
-          </a:prstGeom>
-          <a:noFill/>
-        </p:spPr>
-        <p:txBody>
-          <a:bodyPr wrap="square" rtlCol="0">
-            <a:spAutoFit/>
-          </a:bodyPr>
-          <a:lstStyle/>
-          <a:p>
-            <a:r>
-              <a:rPr kumimoji="1" lang="en-US" altLang="ja-JP" sz="1100">
-                <a:latin typeface="BIZ UDゴシック" panose="020B0400000000000000" pitchFamily="49" charset="-128"/>
-                <a:ea typeface="BIZ UDゴシック" panose="020B0400000000000000" pitchFamily="49" charset="-128"/>
-              </a:rPr>
-              <a:t>Battery Temperature Control – Level 0 DFD</a:t>
-            </a:r>
-            <a:endParaRPr kumimoji="1" lang="ja-JP" altLang="en-US" sz="1100">
-              <a:latin typeface="BIZ UDゴシック" panose="020B0400000000000000" pitchFamily="49" charset="-128"/>
-              <a:ea typeface="BIZ UDゴシック" panose="020B0400000000000000" pitchFamily="49" charset="-128"/>
-            </a:endParaRPr>
-          </a:p>
-        </p:txBody>
-      </p:sp>
-      <p:sp>
-        <p:nvSpPr>
-          <p:cNvPr id="8" name="テキスト ボックス 7">
-            <a:extLst>
-              <a:ext uri="{FF2B5EF4-FFF2-40B4-BE49-F238E27FC236}">
-                <a16:creationId xmlns:a16="http://schemas.microsoft.com/office/drawing/2014/main" id="{B7865B8C-A1B0-EA77-3A45-A08033D8C900}"/>
-              </a:ext>
-            </a:extLst>
-          </p:cNvPr>
-          <p:cNvSpPr txBox="1"/>
-          <p:nvPr/>
-        </p:nvSpPr>
-        <p:spPr>
-          <a:xfrm>
-            <a:off x="554124" y="1259693"/>
-            <a:ext cx="1589229" cy="276999"/>
-          </a:xfrm>
-          <a:prstGeom prst="rect">
-            <a:avLst/>
-          </a:prstGeom>
-          <a:noFill/>
-        </p:spPr>
-        <p:txBody>
-          <a:bodyPr wrap="square" rtlCol="0">
-            <a:spAutoFit/>
-          </a:bodyPr>
-          <a:lstStyle/>
-          <a:p>
-            <a:r>
-              <a:rPr kumimoji="1" lang="en-US" altLang="zh-TW" sz="1200" b="1">
-                <a:solidFill>
-                  <a:srgbClr val="0070C0"/>
-                </a:solidFill>
-                <a:latin typeface="BIZ UDゴシック" panose="020B0400000000000000" pitchFamily="49" charset="-128"/>
-                <a:ea typeface="BIZ UDゴシック" panose="020B0400000000000000" pitchFamily="49" charset="-128"/>
-              </a:rPr>
-              <a:t>【</a:t>
-            </a:r>
-            <a:r>
-              <a:rPr kumimoji="1" lang="ja-JP" altLang="en-US" sz="1200" b="1">
-                <a:solidFill>
-                  <a:srgbClr val="0070C0"/>
-                </a:solidFill>
-                <a:latin typeface="BIZ UDゴシック" panose="020B0400000000000000" pitchFamily="49" charset="-128"/>
-                <a:ea typeface="BIZ UDゴシック" panose="020B0400000000000000" pitchFamily="49" charset="-128"/>
-              </a:rPr>
-              <a:t>主な構成要素</a:t>
-            </a:r>
-            <a:r>
-              <a:rPr kumimoji="1" lang="en-US" altLang="zh-TW" sz="1200" b="1">
-                <a:solidFill>
-                  <a:srgbClr val="0070C0"/>
-                </a:solidFill>
-                <a:latin typeface="BIZ UDゴシック" panose="020B0400000000000000" pitchFamily="49" charset="-128"/>
-                <a:ea typeface="BIZ UDゴシック" panose="020B0400000000000000" pitchFamily="49" charset="-128"/>
-              </a:rPr>
-              <a:t>】</a:t>
-            </a:r>
-            <a:endParaRPr kumimoji="1" lang="ja-JP" altLang="en-US" sz="1200" b="1">
-              <a:solidFill>
-                <a:srgbClr val="0070C0"/>
-              </a:solidFill>
-              <a:latin typeface="BIZ UDゴシック" panose="020B0400000000000000" pitchFamily="49" charset="-128"/>
-              <a:ea typeface="BIZ UDゴシック" panose="020B0400000000000000" pitchFamily="49" charset="-128"/>
-            </a:endParaRPr>
-          </a:p>
-        </p:txBody>
-      </p:sp>
-      <p:graphicFrame>
-        <p:nvGraphicFramePr>
-          <p:cNvPr id="10" name="表 9">
-            <a:extLst>
-              <a:ext uri="{FF2B5EF4-FFF2-40B4-BE49-F238E27FC236}">
-                <a16:creationId xmlns:a16="http://schemas.microsoft.com/office/drawing/2014/main" id="{5176F63A-5836-F134-54A0-FF439B70EA6E}"/>
-              </a:ext>
-            </a:extLst>
-          </p:cNvPr>
-          <p:cNvGraphicFramePr>
-            <a:graphicFrameLocks noGrp="1"/>
-          </p:cNvGraphicFramePr>
-          <p:nvPr>
-            <p:extLst>
-              <p:ext uri="{D42A27DB-BD31-4B8C-83A1-F6EECF244321}">
-                <p14:modId xmlns:p14="http://schemas.microsoft.com/office/powerpoint/2010/main" val="484087518"/>
-              </p:ext>
-            </p:extLst>
-          </p:nvPr>
-        </p:nvGraphicFramePr>
-        <p:xfrm>
-          <a:off x="750418" y="1544386"/>
-          <a:ext cx="7611120" cy="1219200"/>
-        </p:xfrm>
-        <a:graphic>
-          <a:graphicData uri="http://schemas.openxmlformats.org/drawingml/2006/table">
-            <a:tbl>
-              <a:tblPr firstRow="1">
-                <a:tableStyleId>{912C8C85-51F0-491E-9774-3900AFEF0FD7}</a:tableStyleId>
-              </a:tblPr>
-              <a:tblGrid>
-                <a:gridCol w="1332000">
-                  <a:extLst>
-                    <a:ext uri="{9D8B030D-6E8A-4147-A177-3AD203B41FA5}">
-                      <a16:colId xmlns:a16="http://schemas.microsoft.com/office/drawing/2014/main" val="2244100051"/>
-                    </a:ext>
-                  </a:extLst>
-                </a:gridCol>
-                <a:gridCol w="1764000">
-                  <a:extLst>
-                    <a:ext uri="{9D8B030D-6E8A-4147-A177-3AD203B41FA5}">
-                      <a16:colId xmlns:a16="http://schemas.microsoft.com/office/drawing/2014/main" val="2320485346"/>
-                    </a:ext>
-                  </a:extLst>
-                </a:gridCol>
-                <a:gridCol w="2412000">
-                  <a:extLst>
-                    <a:ext uri="{9D8B030D-6E8A-4147-A177-3AD203B41FA5}">
-                      <a16:colId xmlns:a16="http://schemas.microsoft.com/office/drawing/2014/main" val="2231263248"/>
-                    </a:ext>
-                  </a:extLst>
-                </a:gridCol>
-                <a:gridCol w="2103120">
-                  <a:extLst>
-                    <a:ext uri="{9D8B030D-6E8A-4147-A177-3AD203B41FA5}">
-                      <a16:colId xmlns:a16="http://schemas.microsoft.com/office/drawing/2014/main" val="3671520019"/>
-                    </a:ext>
-                  </a:extLst>
-                </a:gridCol>
-              </a:tblGrid>
-              <a:tr h="0">
-                <a:tc>
-                  <a:txBody>
-                    <a:bodyPr/>
-                    <a:lstStyle/>
-                    <a:p>
-                      <a:pPr>
-                        <a:buNone/>
-                      </a:pPr>
-                      <a:r>
-                        <a:rPr lang="ja-JP" altLang="en-US" sz="1000">
-                          <a:latin typeface="BIZ UDゴシック" panose="020B0400000000000000" pitchFamily="49" charset="-128"/>
-                          <a:ea typeface="BIZ UDゴシック" panose="020B0400000000000000" pitchFamily="49" charset="-128"/>
-                        </a:rPr>
-                        <a:t>要素</a:t>
-                      </a:r>
-                    </a:p>
-                  </a:txBody>
-                  <a:tcPr anchor="ctr">
-                    <a:lnL w="12700" cap="flat" cmpd="sng" algn="ctr">
-                      <a:solidFill>
-                        <a:schemeClr val="tx1"/>
-                      </a:solidFill>
-                      <a:prstDash val="solid"/>
-                      <a:round/>
-                      <a:headEnd type="none" w="med" len="med"/>
-                      <a:tailEnd type="none" w="med" len="med"/>
-                    </a:lnL>
-                    <a:lnR w="12700" cap="flat" cmpd="sng" algn="ctr">
-                      <a:solidFill>
-                        <a:schemeClr val="tx1"/>
-                      </a:solidFill>
-                      <a:prstDash val="solid"/>
-                      <a:round/>
-                      <a:headEnd type="none" w="med" len="med"/>
-                      <a:tailEnd type="none" w="med" len="med"/>
-                    </a:lnR>
-                    <a:lnT w="12700" cap="flat" cmpd="sng" algn="ctr">
-                      <a:solidFill>
-                        <a:schemeClr val="tx1"/>
-                      </a:solidFill>
-                      <a:prstDash val="solid"/>
-                      <a:round/>
-                      <a:headEnd type="none" w="med" len="med"/>
-                      <a:tailEnd type="none" w="med" len="med"/>
-                    </a:lnT>
-                    <a:lnB w="12700" cap="flat" cmpd="sng" algn="ctr">
-                      <a:solidFill>
-                        <a:schemeClr val="tx1"/>
-                      </a:solidFill>
-                      <a:prstDash val="solid"/>
-                      <a:round/>
-                      <a:headEnd type="none" w="med" len="med"/>
-                      <a:tailEnd type="none" w="med" len="med"/>
-                    </a:lnB>
-                  </a:tcPr>
-                </a:tc>
-                <a:tc>
-                  <a:txBody>
-                    <a:bodyPr/>
-                    <a:lstStyle/>
-                    <a:p>
-                      <a:pPr>
-                        <a:buNone/>
-                      </a:pPr>
-                      <a:r>
-                        <a:rPr lang="ja-JP" altLang="en-US" sz="1000">
-                          <a:latin typeface="BIZ UDゴシック" panose="020B0400000000000000" pitchFamily="49" charset="-128"/>
-                          <a:ea typeface="BIZ UDゴシック" panose="020B0400000000000000" pitchFamily="49" charset="-128"/>
-                        </a:rPr>
-                        <a:t>種類</a:t>
-                      </a:r>
-                    </a:p>
-                  </a:txBody>
-                  <a:tcPr anchor="ctr">
-                    <a:lnL w="12700" cap="flat" cmpd="sng" algn="ctr">
-                      <a:solidFill>
-                        <a:schemeClr val="tx1"/>
-                      </a:solidFill>
-                      <a:prstDash val="solid"/>
-                      <a:round/>
-                      <a:headEnd type="none" w="med" len="med"/>
-                      <a:tailEnd type="none" w="med" len="med"/>
-                    </a:lnL>
-                    <a:lnR w="12700" cap="flat" cmpd="sng" algn="ctr">
-                      <a:solidFill>
-                        <a:schemeClr val="tx1"/>
-                      </a:solidFill>
-                      <a:prstDash val="solid"/>
-                      <a:round/>
-                      <a:headEnd type="none" w="med" len="med"/>
-                      <a:tailEnd type="none" w="med" len="med"/>
-                    </a:lnR>
-                    <a:lnT w="12700" cap="flat" cmpd="sng" algn="ctr">
-                      <a:solidFill>
-                        <a:schemeClr val="tx1"/>
-                      </a:solidFill>
-                      <a:prstDash val="solid"/>
-                      <a:round/>
-                      <a:headEnd type="none" w="med" len="med"/>
-                      <a:tailEnd type="none" w="med" len="med"/>
-                    </a:lnT>
-                    <a:lnB w="12700" cap="flat" cmpd="sng" algn="ctr">
-                      <a:solidFill>
-                        <a:schemeClr val="tx1"/>
-                      </a:solidFill>
-                      <a:prstDash val="solid"/>
-                      <a:round/>
-                      <a:headEnd type="none" w="med" len="med"/>
-                      <a:tailEnd type="none" w="med" len="med"/>
-                    </a:lnB>
-                  </a:tcPr>
-                </a:tc>
-                <a:tc>
-                  <a:txBody>
-                    <a:bodyPr/>
-                    <a:lstStyle/>
-                    <a:p>
-                      <a:pPr>
-                        <a:buNone/>
-                      </a:pPr>
-                      <a:r>
-                        <a:rPr lang="ja-JP" altLang="en-US" sz="1000">
-                          <a:latin typeface="BIZ UDゴシック" panose="020B0400000000000000" pitchFamily="49" charset="-128"/>
-                          <a:ea typeface="BIZ UDゴシック" panose="020B0400000000000000" pitchFamily="49" charset="-128"/>
-                        </a:rPr>
-                        <a:t>図形（</a:t>
-                      </a:r>
-                      <a:r>
-                        <a:rPr lang="en-US" sz="1000">
-                          <a:latin typeface="BIZ UDゴシック" panose="020B0400000000000000" pitchFamily="49" charset="-128"/>
-                          <a:ea typeface="BIZ UDゴシック" panose="020B0400000000000000" pitchFamily="49" charset="-128"/>
-                        </a:rPr>
-                        <a:t>Draw.io）</a:t>
-                      </a:r>
-                    </a:p>
-                  </a:txBody>
-                  <a:tcPr anchor="ctr">
-                    <a:lnL w="12700" cap="flat" cmpd="sng" algn="ctr">
-                      <a:solidFill>
-                        <a:schemeClr val="tx1"/>
-                      </a:solidFill>
-                      <a:prstDash val="solid"/>
-                      <a:round/>
-                      <a:headEnd type="none" w="med" len="med"/>
-                      <a:tailEnd type="none" w="med" len="med"/>
-                    </a:lnL>
-                    <a:lnR w="12700" cap="flat" cmpd="sng" algn="ctr">
-                      <a:solidFill>
-                        <a:schemeClr val="tx1"/>
-                      </a:solidFill>
-                      <a:prstDash val="solid"/>
-                      <a:round/>
-                      <a:headEnd type="none" w="med" len="med"/>
-                      <a:tailEnd type="none" w="med" len="med"/>
-                    </a:lnR>
-                    <a:lnT w="12700" cap="flat" cmpd="sng" algn="ctr">
-                      <a:solidFill>
-                        <a:schemeClr val="tx1"/>
-                      </a:solidFill>
-                      <a:prstDash val="solid"/>
-                      <a:round/>
-                      <a:headEnd type="none" w="med" len="med"/>
-                      <a:tailEnd type="none" w="med" len="med"/>
-                    </a:lnT>
-                    <a:lnB w="12700" cap="flat" cmpd="sng" algn="ctr">
-                      <a:solidFill>
-                        <a:schemeClr val="tx1"/>
-                      </a:solidFill>
-                      <a:prstDash val="solid"/>
-                      <a:round/>
-                      <a:headEnd type="none" w="med" len="med"/>
-                      <a:tailEnd type="none" w="med" len="med"/>
-                    </a:lnB>
-                  </a:tcPr>
-                </a:tc>
-                <a:tc>
-                  <a:txBody>
-                    <a:bodyPr/>
-                    <a:lstStyle/>
-                    <a:p>
-                      <a:pPr>
-                        <a:buNone/>
-                      </a:pPr>
-                      <a:r>
-                        <a:rPr lang="ja-JP" altLang="en-US" sz="1000">
-                          <a:latin typeface="BIZ UDゴシック" panose="020B0400000000000000" pitchFamily="49" charset="-128"/>
-                          <a:ea typeface="BIZ UDゴシック" panose="020B0400000000000000" pitchFamily="49" charset="-128"/>
-                        </a:rPr>
-                        <a:t>名称例</a:t>
-                      </a:r>
-                    </a:p>
-                  </a:txBody>
-                  <a:tcPr anchor="ctr">
-                    <a:lnL w="12700" cap="flat" cmpd="sng" algn="ctr">
-                      <a:solidFill>
-                        <a:schemeClr val="tx1"/>
-                      </a:solidFill>
-                      <a:prstDash val="solid"/>
-                      <a:round/>
-                      <a:headEnd type="none" w="med" len="med"/>
-                      <a:tailEnd type="none" w="med" len="med"/>
-                    </a:lnL>
-                    <a:lnR w="12700" cap="flat" cmpd="sng" algn="ctr">
-                      <a:solidFill>
-                        <a:schemeClr val="tx1"/>
-                      </a:solidFill>
-                      <a:prstDash val="solid"/>
-                      <a:round/>
-                      <a:headEnd type="none" w="med" len="med"/>
-                      <a:tailEnd type="none" w="med" len="med"/>
-                    </a:lnR>
-                    <a:lnT w="12700" cap="flat" cmpd="sng" algn="ctr">
-                      <a:solidFill>
-                        <a:schemeClr val="tx1"/>
-                      </a:solidFill>
-                      <a:prstDash val="solid"/>
-                      <a:round/>
-                      <a:headEnd type="none" w="med" len="med"/>
-                      <a:tailEnd type="none" w="med" len="med"/>
-                    </a:lnT>
-                    <a:lnB w="12700" cap="flat" cmpd="sng" algn="ctr">
-                      <a:solidFill>
-                        <a:schemeClr val="tx1"/>
-                      </a:solidFill>
-                      <a:prstDash val="solid"/>
-                      <a:round/>
-                      <a:headEnd type="none" w="med" len="med"/>
-                      <a:tailEnd type="none" w="med" len="med"/>
-                    </a:lnB>
-                  </a:tcPr>
-                </a:tc>
-                <a:extLst>
-                  <a:ext uri="{0D108BD9-81ED-4DB2-BD59-A6C34878D82A}">
-                    <a16:rowId xmlns:a16="http://schemas.microsoft.com/office/drawing/2014/main" val="1828950910"/>
-                  </a:ext>
-                </a:extLst>
-              </a:tr>
-              <a:tr h="0">
-                <a:tc>
-                  <a:txBody>
-                    <a:bodyPr/>
-                    <a:lstStyle/>
-                    <a:p>
-                      <a:pPr>
-                        <a:buNone/>
-                      </a:pPr>
-                      <a:r>
-                        <a:rPr lang="ja-JP" altLang="en-US" sz="1000">
-                          <a:latin typeface="BIZ UDゴシック" panose="020B0400000000000000" pitchFamily="49" charset="-128"/>
-                          <a:ea typeface="BIZ UDゴシック" panose="020B0400000000000000" pitchFamily="49" charset="-128"/>
-                        </a:rPr>
-                        <a:t>外部エンティティ</a:t>
-                      </a:r>
-                    </a:p>
-                  </a:txBody>
-                  <a:tcPr anchor="ctr">
-                    <a:lnL w="12700" cap="flat" cmpd="sng" algn="ctr">
-                      <a:solidFill>
-                        <a:schemeClr val="tx1"/>
-                      </a:solidFill>
-                      <a:prstDash val="solid"/>
-                      <a:round/>
-                      <a:headEnd type="none" w="med" len="med"/>
-                      <a:tailEnd type="none" w="med" len="med"/>
-                    </a:lnL>
-                    <a:lnR w="12700" cap="flat" cmpd="sng" algn="ctr">
-                      <a:solidFill>
-                        <a:schemeClr val="tx1"/>
-                      </a:solidFill>
-                      <a:prstDash val="solid"/>
-                      <a:round/>
-                      <a:headEnd type="none" w="med" len="med"/>
-                      <a:tailEnd type="none" w="med" len="med"/>
-                    </a:lnR>
-                    <a:lnT w="12700" cap="flat" cmpd="sng" algn="ctr">
-                      <a:solidFill>
-                        <a:schemeClr val="tx1"/>
-                      </a:solidFill>
-                      <a:prstDash val="solid"/>
-                      <a:round/>
-                      <a:headEnd type="none" w="med" len="med"/>
-                      <a:tailEnd type="none" w="med" len="med"/>
-                    </a:lnT>
-                    <a:lnB w="12700" cap="flat" cmpd="sng" algn="ctr">
-                      <a:solidFill>
-                        <a:schemeClr val="tx1"/>
-                      </a:solidFill>
-                      <a:prstDash val="solid"/>
-                      <a:round/>
-                      <a:headEnd type="none" w="med" len="med"/>
-                      <a:tailEnd type="none" w="med" len="med"/>
-                    </a:lnB>
-                  </a:tcPr>
-                </a:tc>
-                <a:tc>
-                  <a:txBody>
-                    <a:bodyPr/>
-                    <a:lstStyle/>
-                    <a:p>
-                      <a:pPr>
-                        <a:buNone/>
-                      </a:pPr>
-                      <a:r>
-                        <a:rPr lang="ja-JP" altLang="en-US" sz="1000">
-                          <a:latin typeface="BIZ UDゴシック" panose="020B0400000000000000" pitchFamily="49" charset="-128"/>
-                          <a:ea typeface="BIZ UDゴシック" panose="020B0400000000000000" pitchFamily="49" charset="-128"/>
-                        </a:rPr>
-                        <a:t>四角形</a:t>
-                      </a:r>
-                    </a:p>
-                  </a:txBody>
-                  <a:tcPr anchor="ctr">
-                    <a:lnL w="12700" cap="flat" cmpd="sng" algn="ctr">
-                      <a:solidFill>
-                        <a:schemeClr val="tx1"/>
-                      </a:solidFill>
-                      <a:prstDash val="solid"/>
-                      <a:round/>
-                      <a:headEnd type="none" w="med" len="med"/>
-                      <a:tailEnd type="none" w="med" len="med"/>
-                    </a:lnL>
-                    <a:lnR w="12700" cap="flat" cmpd="sng" algn="ctr">
-                      <a:solidFill>
-                        <a:schemeClr val="tx1"/>
-                      </a:solidFill>
-                      <a:prstDash val="solid"/>
-                      <a:round/>
-                      <a:headEnd type="none" w="med" len="med"/>
-                      <a:tailEnd type="none" w="med" len="med"/>
-                    </a:lnR>
-                    <a:lnT w="12700" cap="flat" cmpd="sng" algn="ctr">
-                      <a:solidFill>
-                        <a:schemeClr val="tx1"/>
-                      </a:solidFill>
-                      <a:prstDash val="solid"/>
-                      <a:round/>
-                      <a:headEnd type="none" w="med" len="med"/>
-                      <a:tailEnd type="none" w="med" len="med"/>
-                    </a:lnT>
-                    <a:lnB w="12700" cap="flat" cmpd="sng" algn="ctr">
-                      <a:solidFill>
-                        <a:schemeClr val="tx1"/>
-                      </a:solidFill>
-                      <a:prstDash val="solid"/>
-                      <a:round/>
-                      <a:headEnd type="none" w="med" len="med"/>
-                      <a:tailEnd type="none" w="med" len="med"/>
-                    </a:lnB>
-                  </a:tcPr>
-                </a:tc>
-                <a:tc>
-                  <a:txBody>
-                    <a:bodyPr/>
-                    <a:lstStyle/>
-                    <a:p>
-                      <a:pPr>
-                        <a:buNone/>
-                      </a:pPr>
-                      <a:r>
-                        <a:rPr lang="en-US" sz="1000">
-                          <a:latin typeface="BIZ UDゴシック" panose="020B0400000000000000" pitchFamily="49" charset="-128"/>
-                          <a:ea typeface="BIZ UDゴシック" panose="020B0400000000000000" pitchFamily="49" charset="-128"/>
-                        </a:rPr>
-                        <a:t>CAN Bus, User Interface</a:t>
-                      </a:r>
-                    </a:p>
-                  </a:txBody>
-                  <a:tcPr anchor="ctr">
-                    <a:lnL w="12700" cap="flat" cmpd="sng" algn="ctr">
-                      <a:solidFill>
-                        <a:schemeClr val="tx1"/>
-                      </a:solidFill>
-                      <a:prstDash val="solid"/>
-                      <a:round/>
-                      <a:headEnd type="none" w="med" len="med"/>
-                      <a:tailEnd type="none" w="med" len="med"/>
-                    </a:lnL>
-                    <a:lnR w="12700" cap="flat" cmpd="sng" algn="ctr">
-                      <a:solidFill>
-                        <a:schemeClr val="tx1"/>
-                      </a:solidFill>
-                      <a:prstDash val="solid"/>
-                      <a:round/>
-                      <a:headEnd type="none" w="med" len="med"/>
-                      <a:tailEnd type="none" w="med" len="med"/>
-                    </a:lnR>
-                    <a:lnT w="12700" cap="flat" cmpd="sng" algn="ctr">
-                      <a:solidFill>
-                        <a:schemeClr val="tx1"/>
-                      </a:solidFill>
-                      <a:prstDash val="solid"/>
-                      <a:round/>
-                      <a:headEnd type="none" w="med" len="med"/>
-                      <a:tailEnd type="none" w="med" len="med"/>
-                    </a:lnT>
-                    <a:lnB w="12700" cap="flat" cmpd="sng" algn="ctr">
-                      <a:solidFill>
-                        <a:schemeClr val="tx1"/>
-                      </a:solidFill>
-                      <a:prstDash val="solid"/>
-                      <a:round/>
-                      <a:headEnd type="none" w="med" len="med"/>
-                      <a:tailEnd type="none" w="med" len="med"/>
-                    </a:lnB>
-                  </a:tcPr>
-                </a:tc>
-                <a:tc>
-                  <a:txBody>
-                    <a:bodyPr/>
-                    <a:lstStyle/>
-                    <a:p>
-                      <a:pPr>
-                        <a:buNone/>
-                      </a:pPr>
-                      <a:r>
-                        <a:rPr lang="ja-JP" altLang="en-US" sz="1000">
-                          <a:latin typeface="BIZ UDゴシック" panose="020B0400000000000000" pitchFamily="49" charset="-128"/>
-                          <a:ea typeface="BIZ UDゴシック" panose="020B0400000000000000" pitchFamily="49" charset="-128"/>
-                        </a:rPr>
-                        <a:t>温度データ送信元、設定入力など</a:t>
-                      </a:r>
-                    </a:p>
-                  </a:txBody>
-                  <a:tcPr anchor="ctr">
-                    <a:lnL w="12700" cap="flat" cmpd="sng" algn="ctr">
-                      <a:solidFill>
-                        <a:schemeClr val="tx1"/>
-                      </a:solidFill>
-                      <a:prstDash val="solid"/>
-                      <a:round/>
-                      <a:headEnd type="none" w="med" len="med"/>
-                      <a:tailEnd type="none" w="med" len="med"/>
-                    </a:lnL>
-                    <a:lnR w="12700" cap="flat" cmpd="sng" algn="ctr">
-                      <a:solidFill>
-                        <a:schemeClr val="tx1"/>
-                      </a:solidFill>
-                      <a:prstDash val="solid"/>
-                      <a:round/>
-                      <a:headEnd type="none" w="med" len="med"/>
-                      <a:tailEnd type="none" w="med" len="med"/>
-                    </a:lnR>
-                    <a:lnT w="12700" cap="flat" cmpd="sng" algn="ctr">
-                      <a:solidFill>
-                        <a:schemeClr val="tx1"/>
-                      </a:solidFill>
-                      <a:prstDash val="solid"/>
-                      <a:round/>
-                      <a:headEnd type="none" w="med" len="med"/>
-                      <a:tailEnd type="none" w="med" len="med"/>
-                    </a:lnT>
-                    <a:lnB w="12700" cap="flat" cmpd="sng" algn="ctr">
-                      <a:solidFill>
-                        <a:schemeClr val="tx1"/>
-                      </a:solidFill>
-                      <a:prstDash val="solid"/>
-                      <a:round/>
-                      <a:headEnd type="none" w="med" len="med"/>
-                      <a:tailEnd type="none" w="med" len="med"/>
-                    </a:lnB>
-                  </a:tcPr>
-                </a:tc>
-                <a:extLst>
-                  <a:ext uri="{0D108BD9-81ED-4DB2-BD59-A6C34878D82A}">
-                    <a16:rowId xmlns:a16="http://schemas.microsoft.com/office/drawing/2014/main" val="1250197369"/>
-                  </a:ext>
-                </a:extLst>
-              </a:tr>
-              <a:tr h="0">
-                <a:tc>
-                  <a:txBody>
-                    <a:bodyPr/>
-                    <a:lstStyle/>
-                    <a:p>
-                      <a:pPr>
-                        <a:buNone/>
-                      </a:pPr>
-                      <a:r>
-                        <a:rPr lang="ja-JP" altLang="en-US" sz="1000">
-                          <a:latin typeface="BIZ UDゴシック" panose="020B0400000000000000" pitchFamily="49" charset="-128"/>
-                          <a:ea typeface="BIZ UDゴシック" panose="020B0400000000000000" pitchFamily="49" charset="-128"/>
-                        </a:rPr>
-                        <a:t>プロセス</a:t>
-                      </a:r>
-                    </a:p>
-                  </a:txBody>
-                  <a:tcPr anchor="ctr">
-                    <a:lnL w="12700" cap="flat" cmpd="sng" algn="ctr">
-                      <a:solidFill>
-                        <a:schemeClr val="tx1"/>
-                      </a:solidFill>
-                      <a:prstDash val="solid"/>
-                      <a:round/>
-                      <a:headEnd type="none" w="med" len="med"/>
-                      <a:tailEnd type="none" w="med" len="med"/>
-                    </a:lnL>
-                    <a:lnR w="12700" cap="flat" cmpd="sng" algn="ctr">
-                      <a:solidFill>
-                        <a:schemeClr val="tx1"/>
-                      </a:solidFill>
-                      <a:prstDash val="solid"/>
-                      <a:round/>
-                      <a:headEnd type="none" w="med" len="med"/>
-                      <a:tailEnd type="none" w="med" len="med"/>
-                    </a:lnR>
-                    <a:lnT w="12700" cap="flat" cmpd="sng" algn="ctr">
-                      <a:solidFill>
-                        <a:schemeClr val="tx1"/>
-                      </a:solidFill>
-                      <a:prstDash val="solid"/>
-                      <a:round/>
-                      <a:headEnd type="none" w="med" len="med"/>
-                      <a:tailEnd type="none" w="med" len="med"/>
-                    </a:lnT>
-                    <a:lnB w="12700" cap="flat" cmpd="sng" algn="ctr">
-                      <a:solidFill>
-                        <a:schemeClr val="tx1"/>
-                      </a:solidFill>
-                      <a:prstDash val="solid"/>
-                      <a:round/>
-                      <a:headEnd type="none" w="med" len="med"/>
-                      <a:tailEnd type="none" w="med" len="med"/>
-                    </a:lnB>
-                  </a:tcPr>
-                </a:tc>
-                <a:tc>
-                  <a:txBody>
-                    <a:bodyPr/>
-                    <a:lstStyle/>
-                    <a:p>
-                      <a:pPr>
-                        <a:buNone/>
-                      </a:pPr>
-                      <a:r>
-                        <a:rPr lang="ja-JP" altLang="en-US" sz="1000">
-                          <a:latin typeface="BIZ UDゴシック" panose="020B0400000000000000" pitchFamily="49" charset="-128"/>
-                          <a:ea typeface="BIZ UDゴシック" panose="020B0400000000000000" pitchFamily="49" charset="-128"/>
-                        </a:rPr>
-                        <a:t>楕円または角丸長方形</a:t>
-                      </a:r>
-                    </a:p>
-                  </a:txBody>
-                  <a:tcPr anchor="ctr">
-                    <a:lnL w="12700" cap="flat" cmpd="sng" algn="ctr">
-                      <a:solidFill>
-                        <a:schemeClr val="tx1"/>
-                      </a:solidFill>
-                      <a:prstDash val="solid"/>
-                      <a:round/>
-                      <a:headEnd type="none" w="med" len="med"/>
-                      <a:tailEnd type="none" w="med" len="med"/>
-                    </a:lnL>
-                    <a:lnR w="12700" cap="flat" cmpd="sng" algn="ctr">
-                      <a:solidFill>
-                        <a:schemeClr val="tx1"/>
-                      </a:solidFill>
-                      <a:prstDash val="solid"/>
-                      <a:round/>
-                      <a:headEnd type="none" w="med" len="med"/>
-                      <a:tailEnd type="none" w="med" len="med"/>
-                    </a:lnR>
-                    <a:lnT w="12700" cap="flat" cmpd="sng" algn="ctr">
-                      <a:solidFill>
-                        <a:schemeClr val="tx1"/>
-                      </a:solidFill>
-                      <a:prstDash val="solid"/>
-                      <a:round/>
-                      <a:headEnd type="none" w="med" len="med"/>
-                      <a:tailEnd type="none" w="med" len="med"/>
-                    </a:lnT>
-                    <a:lnB w="12700" cap="flat" cmpd="sng" algn="ctr">
-                      <a:solidFill>
-                        <a:schemeClr val="tx1"/>
-                      </a:solidFill>
-                      <a:prstDash val="solid"/>
-                      <a:round/>
-                      <a:headEnd type="none" w="med" len="med"/>
-                      <a:tailEnd type="none" w="med" len="med"/>
-                    </a:lnB>
-                  </a:tcPr>
-                </a:tc>
-                <a:tc>
-                  <a:txBody>
-                    <a:bodyPr/>
-                    <a:lstStyle/>
-                    <a:p>
-                      <a:pPr>
-                        <a:buNone/>
-                      </a:pPr>
-                      <a:r>
-                        <a:rPr lang="en-US" sz="1000">
-                          <a:latin typeface="BIZ UDゴシック" panose="020B0400000000000000" pitchFamily="49" charset="-128"/>
-                          <a:ea typeface="BIZ UDゴシック" panose="020B0400000000000000" pitchFamily="49" charset="-128"/>
-                        </a:rPr>
-                        <a:t>Battery Temp Control Logic</a:t>
-                      </a:r>
-                    </a:p>
-                  </a:txBody>
-                  <a:tcPr anchor="ctr">
-                    <a:lnL w="12700" cap="flat" cmpd="sng" algn="ctr">
-                      <a:solidFill>
-                        <a:schemeClr val="tx1"/>
-                      </a:solidFill>
-                      <a:prstDash val="solid"/>
-                      <a:round/>
-                      <a:headEnd type="none" w="med" len="med"/>
-                      <a:tailEnd type="none" w="med" len="med"/>
-                    </a:lnL>
-                    <a:lnR w="12700" cap="flat" cmpd="sng" algn="ctr">
-                      <a:solidFill>
-                        <a:schemeClr val="tx1"/>
-                      </a:solidFill>
-                      <a:prstDash val="solid"/>
-                      <a:round/>
-                      <a:headEnd type="none" w="med" len="med"/>
-                      <a:tailEnd type="none" w="med" len="med"/>
-                    </a:lnR>
-                    <a:lnT w="12700" cap="flat" cmpd="sng" algn="ctr">
-                      <a:solidFill>
-                        <a:schemeClr val="tx1"/>
-                      </a:solidFill>
-                      <a:prstDash val="solid"/>
-                      <a:round/>
-                      <a:headEnd type="none" w="med" len="med"/>
-                      <a:tailEnd type="none" w="med" len="med"/>
-                    </a:lnT>
-                    <a:lnB w="12700" cap="flat" cmpd="sng" algn="ctr">
-                      <a:solidFill>
-                        <a:schemeClr val="tx1"/>
-                      </a:solidFill>
-                      <a:prstDash val="solid"/>
-                      <a:round/>
-                      <a:headEnd type="none" w="med" len="med"/>
-                      <a:tailEnd type="none" w="med" len="med"/>
-                    </a:lnB>
-                  </a:tcPr>
-                </a:tc>
-                <a:tc>
-                  <a:txBody>
-                    <a:bodyPr/>
-                    <a:lstStyle/>
-                    <a:p>
-                      <a:pPr>
-                        <a:buNone/>
-                      </a:pPr>
-                      <a:r>
-                        <a:rPr lang="ja-JP" altLang="en-US" sz="1000">
-                          <a:latin typeface="BIZ UDゴシック" panose="020B0400000000000000" pitchFamily="49" charset="-128"/>
-                          <a:ea typeface="BIZ UDゴシック" panose="020B0400000000000000" pitchFamily="49" charset="-128"/>
-                        </a:rPr>
-                        <a:t>主制御ループ</a:t>
-                      </a:r>
-                    </a:p>
-                  </a:txBody>
-                  <a:tcPr anchor="ctr">
-                    <a:lnL w="12700" cap="flat" cmpd="sng" algn="ctr">
-                      <a:solidFill>
-                        <a:schemeClr val="tx1"/>
-                      </a:solidFill>
-                      <a:prstDash val="solid"/>
-                      <a:round/>
-                      <a:headEnd type="none" w="med" len="med"/>
-                      <a:tailEnd type="none" w="med" len="med"/>
-                    </a:lnL>
-                    <a:lnR w="12700" cap="flat" cmpd="sng" algn="ctr">
-                      <a:solidFill>
-                        <a:schemeClr val="tx1"/>
-                      </a:solidFill>
-                      <a:prstDash val="solid"/>
-                      <a:round/>
-                      <a:headEnd type="none" w="med" len="med"/>
-                      <a:tailEnd type="none" w="med" len="med"/>
-                    </a:lnR>
-                    <a:lnT w="12700" cap="flat" cmpd="sng" algn="ctr">
-                      <a:solidFill>
-                        <a:schemeClr val="tx1"/>
-                      </a:solidFill>
-                      <a:prstDash val="solid"/>
-                      <a:round/>
-                      <a:headEnd type="none" w="med" len="med"/>
-                      <a:tailEnd type="none" w="med" len="med"/>
-                    </a:lnT>
-                    <a:lnB w="12700" cap="flat" cmpd="sng" algn="ctr">
-                      <a:solidFill>
-                        <a:schemeClr val="tx1"/>
-                      </a:solidFill>
-                      <a:prstDash val="solid"/>
-                      <a:round/>
-                      <a:headEnd type="none" w="med" len="med"/>
-                      <a:tailEnd type="none" w="med" len="med"/>
-                    </a:lnB>
-                  </a:tcPr>
-                </a:tc>
-                <a:extLst>
-                  <a:ext uri="{0D108BD9-81ED-4DB2-BD59-A6C34878D82A}">
-                    <a16:rowId xmlns:a16="http://schemas.microsoft.com/office/drawing/2014/main" val="2887687834"/>
-                  </a:ext>
-                </a:extLst>
-              </a:tr>
-              <a:tr h="0">
-                <a:tc>
-                  <a:txBody>
-                    <a:bodyPr/>
-                    <a:lstStyle/>
-                    <a:p>
-                      <a:pPr>
-                        <a:buNone/>
-                      </a:pPr>
-                      <a:r>
-                        <a:rPr lang="ja-JP" altLang="en-US" sz="1000">
-                          <a:latin typeface="BIZ UDゴシック" panose="020B0400000000000000" pitchFamily="49" charset="-128"/>
-                          <a:ea typeface="BIZ UDゴシック" panose="020B0400000000000000" pitchFamily="49" charset="-128"/>
-                        </a:rPr>
-                        <a:t>データストア</a:t>
-                      </a:r>
-                    </a:p>
-                  </a:txBody>
-                  <a:tcPr anchor="ctr">
-                    <a:lnL w="12700" cap="flat" cmpd="sng" algn="ctr">
-                      <a:solidFill>
-                        <a:schemeClr val="tx1"/>
-                      </a:solidFill>
-                      <a:prstDash val="solid"/>
-                      <a:round/>
-                      <a:headEnd type="none" w="med" len="med"/>
-                      <a:tailEnd type="none" w="med" len="med"/>
-                    </a:lnL>
-                    <a:lnR w="12700" cap="flat" cmpd="sng" algn="ctr">
-                      <a:solidFill>
-                        <a:schemeClr val="tx1"/>
-                      </a:solidFill>
-                      <a:prstDash val="solid"/>
-                      <a:round/>
-                      <a:headEnd type="none" w="med" len="med"/>
-                      <a:tailEnd type="none" w="med" len="med"/>
-                    </a:lnR>
-                    <a:lnT w="12700" cap="flat" cmpd="sng" algn="ctr">
-                      <a:solidFill>
-                        <a:schemeClr val="tx1"/>
-                      </a:solidFill>
-                      <a:prstDash val="solid"/>
-                      <a:round/>
-                      <a:headEnd type="none" w="med" len="med"/>
-                      <a:tailEnd type="none" w="med" len="med"/>
-                    </a:lnT>
-                    <a:lnB w="12700" cap="flat" cmpd="sng" algn="ctr">
-                      <a:solidFill>
-                        <a:schemeClr val="tx1"/>
-                      </a:solidFill>
-                      <a:prstDash val="solid"/>
-                      <a:round/>
-                      <a:headEnd type="none" w="med" len="med"/>
-                      <a:tailEnd type="none" w="med" len="med"/>
-                    </a:lnB>
-                  </a:tcPr>
-                </a:tc>
-                <a:tc>
-                  <a:txBody>
-                    <a:bodyPr/>
-                    <a:lstStyle/>
-                    <a:p>
-                      <a:pPr>
-                        <a:buNone/>
-                      </a:pPr>
-                      <a:r>
-                        <a:rPr lang="ja-JP" altLang="en-US" sz="1000">
-                          <a:latin typeface="BIZ UDゴシック" panose="020B0400000000000000" pitchFamily="49" charset="-128"/>
-                          <a:ea typeface="BIZ UDゴシック" panose="020B0400000000000000" pitchFamily="49" charset="-128"/>
-                        </a:rPr>
-                        <a:t>平行線</a:t>
-                      </a:r>
-                    </a:p>
-                  </a:txBody>
-                  <a:tcPr anchor="ctr">
-                    <a:lnL w="12700" cap="flat" cmpd="sng" algn="ctr">
-                      <a:solidFill>
-                        <a:schemeClr val="tx1"/>
-                      </a:solidFill>
-                      <a:prstDash val="solid"/>
-                      <a:round/>
-                      <a:headEnd type="none" w="med" len="med"/>
-                      <a:tailEnd type="none" w="med" len="med"/>
-                    </a:lnL>
-                    <a:lnR w="12700" cap="flat" cmpd="sng" algn="ctr">
-                      <a:solidFill>
-                        <a:schemeClr val="tx1"/>
-                      </a:solidFill>
-                      <a:prstDash val="solid"/>
-                      <a:round/>
-                      <a:headEnd type="none" w="med" len="med"/>
-                      <a:tailEnd type="none" w="med" len="med"/>
-                    </a:lnR>
-                    <a:lnT w="12700" cap="flat" cmpd="sng" algn="ctr">
-                      <a:solidFill>
-                        <a:schemeClr val="tx1"/>
-                      </a:solidFill>
-                      <a:prstDash val="solid"/>
-                      <a:round/>
-                      <a:headEnd type="none" w="med" len="med"/>
-                      <a:tailEnd type="none" w="med" len="med"/>
-                    </a:lnT>
-                    <a:lnB w="12700" cap="flat" cmpd="sng" algn="ctr">
-                      <a:solidFill>
-                        <a:schemeClr val="tx1"/>
-                      </a:solidFill>
-                      <a:prstDash val="solid"/>
-                      <a:round/>
-                      <a:headEnd type="none" w="med" len="med"/>
-                      <a:tailEnd type="none" w="med" len="med"/>
-                    </a:lnB>
-                  </a:tcPr>
-                </a:tc>
-                <a:tc>
-                  <a:txBody>
-                    <a:bodyPr/>
-                    <a:lstStyle/>
-                    <a:p>
-                      <a:pPr>
-                        <a:buNone/>
-                      </a:pPr>
-                      <a:r>
-                        <a:rPr lang="en-US" sz="1000">
-                          <a:latin typeface="BIZ UDゴシック" panose="020B0400000000000000" pitchFamily="49" charset="-128"/>
-                          <a:ea typeface="BIZ UDゴシック" panose="020B0400000000000000" pitchFamily="49" charset="-128"/>
-                        </a:rPr>
-                        <a:t>Threshold Config, State Variables</a:t>
-                      </a:r>
-                    </a:p>
-                  </a:txBody>
-                  <a:tcPr anchor="ctr">
-                    <a:lnL w="12700" cap="flat" cmpd="sng" algn="ctr">
-                      <a:solidFill>
-                        <a:schemeClr val="tx1"/>
-                      </a:solidFill>
-                      <a:prstDash val="solid"/>
-                      <a:round/>
-                      <a:headEnd type="none" w="med" len="med"/>
-                      <a:tailEnd type="none" w="med" len="med"/>
-                    </a:lnL>
-                    <a:lnR w="12700" cap="flat" cmpd="sng" algn="ctr">
-                      <a:solidFill>
-                        <a:schemeClr val="tx1"/>
-                      </a:solidFill>
-                      <a:prstDash val="solid"/>
-                      <a:round/>
-                      <a:headEnd type="none" w="med" len="med"/>
-                      <a:tailEnd type="none" w="med" len="med"/>
-                    </a:lnR>
-                    <a:lnT w="12700" cap="flat" cmpd="sng" algn="ctr">
-                      <a:solidFill>
-                        <a:schemeClr val="tx1"/>
-                      </a:solidFill>
-                      <a:prstDash val="solid"/>
-                      <a:round/>
-                      <a:headEnd type="none" w="med" len="med"/>
-                      <a:tailEnd type="none" w="med" len="med"/>
-                    </a:lnT>
-                    <a:lnB w="12700" cap="flat" cmpd="sng" algn="ctr">
-                      <a:solidFill>
-                        <a:schemeClr val="tx1"/>
-                      </a:solidFill>
-                      <a:prstDash val="solid"/>
-                      <a:round/>
-                      <a:headEnd type="none" w="med" len="med"/>
-                      <a:tailEnd type="none" w="med" len="med"/>
-                    </a:lnB>
-                  </a:tcPr>
-                </a:tc>
-                <a:tc>
-                  <a:txBody>
-                    <a:bodyPr/>
-                    <a:lstStyle/>
-                    <a:p>
-                      <a:pPr>
-                        <a:buNone/>
-                      </a:pPr>
-                      <a:r>
-                        <a:rPr lang="ja-JP" altLang="en-US" sz="1000">
-                          <a:latin typeface="BIZ UDゴシック" panose="020B0400000000000000" pitchFamily="49" charset="-128"/>
-                          <a:ea typeface="BIZ UDゴシック" panose="020B0400000000000000" pitchFamily="49" charset="-128"/>
-                        </a:rPr>
-                        <a:t>閾値や状態記録</a:t>
-                      </a:r>
-                    </a:p>
-                  </a:txBody>
-                  <a:tcPr anchor="ctr">
-                    <a:lnL w="12700" cap="flat" cmpd="sng" algn="ctr">
-                      <a:solidFill>
-                        <a:schemeClr val="tx1"/>
-                      </a:solidFill>
-                      <a:prstDash val="solid"/>
-                      <a:round/>
-                      <a:headEnd type="none" w="med" len="med"/>
-                      <a:tailEnd type="none" w="med" len="med"/>
-                    </a:lnL>
-                    <a:lnR w="12700" cap="flat" cmpd="sng" algn="ctr">
-                      <a:solidFill>
-                        <a:schemeClr val="tx1"/>
-                      </a:solidFill>
-                      <a:prstDash val="solid"/>
-                      <a:round/>
-                      <a:headEnd type="none" w="med" len="med"/>
-                      <a:tailEnd type="none" w="med" len="med"/>
-                    </a:lnR>
-                    <a:lnT w="12700" cap="flat" cmpd="sng" algn="ctr">
-                      <a:solidFill>
-                        <a:schemeClr val="tx1"/>
-                      </a:solidFill>
-                      <a:prstDash val="solid"/>
-                      <a:round/>
-                      <a:headEnd type="none" w="med" len="med"/>
-                      <a:tailEnd type="none" w="med" len="med"/>
-                    </a:lnT>
-                    <a:lnB w="12700" cap="flat" cmpd="sng" algn="ctr">
-                      <a:solidFill>
-                        <a:schemeClr val="tx1"/>
-                      </a:solidFill>
-                      <a:prstDash val="solid"/>
-                      <a:round/>
-                      <a:headEnd type="none" w="med" len="med"/>
-                      <a:tailEnd type="none" w="med" len="med"/>
-                    </a:lnB>
-                  </a:tcPr>
-                </a:tc>
-                <a:extLst>
-                  <a:ext uri="{0D108BD9-81ED-4DB2-BD59-A6C34878D82A}">
-                    <a16:rowId xmlns:a16="http://schemas.microsoft.com/office/drawing/2014/main" val="3042133960"/>
-                  </a:ext>
-                </a:extLst>
-              </a:tr>
-              <a:tr h="0">
-                <a:tc>
-                  <a:txBody>
-                    <a:bodyPr/>
-                    <a:lstStyle/>
-                    <a:p>
-                      <a:pPr>
-                        <a:buNone/>
-                      </a:pPr>
-                      <a:r>
-                        <a:rPr lang="ja-JP" altLang="en-US" sz="1000">
-                          <a:latin typeface="BIZ UDゴシック" panose="020B0400000000000000" pitchFamily="49" charset="-128"/>
-                          <a:ea typeface="BIZ UDゴシック" panose="020B0400000000000000" pitchFamily="49" charset="-128"/>
-                        </a:rPr>
-                        <a:t>データフロー</a:t>
-                      </a:r>
-                    </a:p>
-                  </a:txBody>
-                  <a:tcPr anchor="ctr">
-                    <a:lnL w="12700" cap="flat" cmpd="sng" algn="ctr">
-                      <a:solidFill>
-                        <a:schemeClr val="tx1"/>
-                      </a:solidFill>
-                      <a:prstDash val="solid"/>
-                      <a:round/>
-                      <a:headEnd type="none" w="med" len="med"/>
-                      <a:tailEnd type="none" w="med" len="med"/>
-                    </a:lnL>
-                    <a:lnR w="12700" cap="flat" cmpd="sng" algn="ctr">
-                      <a:solidFill>
-                        <a:schemeClr val="tx1"/>
-                      </a:solidFill>
-                      <a:prstDash val="solid"/>
-                      <a:round/>
-                      <a:headEnd type="none" w="med" len="med"/>
-                      <a:tailEnd type="none" w="med" len="med"/>
-                    </a:lnR>
-                    <a:lnT w="12700" cap="flat" cmpd="sng" algn="ctr">
-                      <a:solidFill>
-                        <a:schemeClr val="tx1"/>
-                      </a:solidFill>
-                      <a:prstDash val="solid"/>
-                      <a:round/>
-                      <a:headEnd type="none" w="med" len="med"/>
-                      <a:tailEnd type="none" w="med" len="med"/>
-                    </a:lnT>
-                    <a:lnB w="12700" cap="flat" cmpd="sng" algn="ctr">
-                      <a:solidFill>
-                        <a:schemeClr val="tx1"/>
-                      </a:solidFill>
-                      <a:prstDash val="solid"/>
-                      <a:round/>
-                      <a:headEnd type="none" w="med" len="med"/>
-                      <a:tailEnd type="none" w="med" len="med"/>
-                    </a:lnB>
-                  </a:tcPr>
-                </a:tc>
-                <a:tc>
-                  <a:txBody>
-                    <a:bodyPr/>
-                    <a:lstStyle/>
-                    <a:p>
-                      <a:pPr>
-                        <a:buNone/>
-                      </a:pPr>
-                      <a:r>
-                        <a:rPr lang="ja-JP" altLang="en-US" sz="1000">
-                          <a:latin typeface="BIZ UDゴシック" panose="020B0400000000000000" pitchFamily="49" charset="-128"/>
-                          <a:ea typeface="BIZ UDゴシック" panose="020B0400000000000000" pitchFamily="49" charset="-128"/>
-                        </a:rPr>
-                        <a:t>矢印</a:t>
-                      </a:r>
-                    </a:p>
-                  </a:txBody>
-                  <a:tcPr anchor="ctr">
-                    <a:lnL w="12700" cap="flat" cmpd="sng" algn="ctr">
-                      <a:solidFill>
-                        <a:schemeClr val="tx1"/>
-                      </a:solidFill>
-                      <a:prstDash val="solid"/>
-                      <a:round/>
-                      <a:headEnd type="none" w="med" len="med"/>
-                      <a:tailEnd type="none" w="med" len="med"/>
-                    </a:lnL>
-                    <a:lnR w="12700" cap="flat" cmpd="sng" algn="ctr">
-                      <a:solidFill>
-                        <a:schemeClr val="tx1"/>
-                      </a:solidFill>
-                      <a:prstDash val="solid"/>
-                      <a:round/>
-                      <a:headEnd type="none" w="med" len="med"/>
-                      <a:tailEnd type="none" w="med" len="med"/>
-                    </a:lnR>
-                    <a:lnT w="12700" cap="flat" cmpd="sng" algn="ctr">
-                      <a:solidFill>
-                        <a:schemeClr val="tx1"/>
-                      </a:solidFill>
-                      <a:prstDash val="solid"/>
-                      <a:round/>
-                      <a:headEnd type="none" w="med" len="med"/>
-                      <a:tailEnd type="none" w="med" len="med"/>
-                    </a:lnT>
-                    <a:lnB w="12700" cap="flat" cmpd="sng" algn="ctr">
-                      <a:solidFill>
-                        <a:schemeClr val="tx1"/>
-                      </a:solidFill>
-                      <a:prstDash val="solid"/>
-                      <a:round/>
-                      <a:headEnd type="none" w="med" len="med"/>
-                      <a:tailEnd type="none" w="med" len="med"/>
-                    </a:lnB>
-                  </a:tcPr>
-                </a:tc>
-                <a:tc>
-                  <a:txBody>
-                    <a:bodyPr/>
-                    <a:lstStyle/>
-                    <a:p>
-                      <a:pPr>
-                        <a:buNone/>
-                      </a:pPr>
-                      <a:r>
-                        <a:rPr lang="ja-JP" altLang="en-US" sz="1000">
-                          <a:latin typeface="BIZ UDゴシック" panose="020B0400000000000000" pitchFamily="49" charset="-128"/>
-                          <a:ea typeface="BIZ UDゴシック" panose="020B0400000000000000" pitchFamily="49" charset="-128"/>
-                        </a:rPr>
-                        <a:t>双方向</a:t>
-                      </a:r>
-                    </a:p>
-                  </a:txBody>
-                  <a:tcPr anchor="ctr">
-                    <a:lnL w="12700" cap="flat" cmpd="sng" algn="ctr">
-                      <a:solidFill>
-                        <a:schemeClr val="tx1"/>
-                      </a:solidFill>
-                      <a:prstDash val="solid"/>
-                      <a:round/>
-                      <a:headEnd type="none" w="med" len="med"/>
-                      <a:tailEnd type="none" w="med" len="med"/>
-                    </a:lnL>
-                    <a:lnR w="12700" cap="flat" cmpd="sng" algn="ctr">
-                      <a:solidFill>
-                        <a:schemeClr val="tx1"/>
-                      </a:solidFill>
-                      <a:prstDash val="solid"/>
-                      <a:round/>
-                      <a:headEnd type="none" w="med" len="med"/>
-                      <a:tailEnd type="none" w="med" len="med"/>
-                    </a:lnR>
-                    <a:lnT w="12700" cap="flat" cmpd="sng" algn="ctr">
-                      <a:solidFill>
-                        <a:schemeClr val="tx1"/>
-                      </a:solidFill>
-                      <a:prstDash val="solid"/>
-                      <a:round/>
-                      <a:headEnd type="none" w="med" len="med"/>
-                      <a:tailEnd type="none" w="med" len="med"/>
-                    </a:lnT>
-                    <a:lnB w="12700" cap="flat" cmpd="sng" algn="ctr">
-                      <a:solidFill>
-                        <a:schemeClr val="tx1"/>
-                      </a:solidFill>
-                      <a:prstDash val="solid"/>
-                      <a:round/>
-                      <a:headEnd type="none" w="med" len="med"/>
-                      <a:tailEnd type="none" w="med" len="med"/>
-                    </a:lnB>
-                  </a:tcPr>
-                </a:tc>
-                <a:tc>
-                  <a:txBody>
-                    <a:bodyPr/>
-                    <a:lstStyle/>
-                    <a:p>
-                      <a:pPr>
-                        <a:buNone/>
-                      </a:pPr>
-                      <a:r>
-                        <a:rPr lang="ja-JP" altLang="en-US" sz="1000">
-                          <a:latin typeface="BIZ UDゴシック" panose="020B0400000000000000" pitchFamily="49" charset="-128"/>
-                          <a:ea typeface="BIZ UDゴシック" panose="020B0400000000000000" pitchFamily="49" charset="-128"/>
-                        </a:rPr>
-                        <a:t>データ入出力線</a:t>
-                      </a:r>
-                    </a:p>
-                  </a:txBody>
-                  <a:tcPr anchor="ctr">
-                    <a:lnL w="12700" cap="flat" cmpd="sng" algn="ctr">
-                      <a:solidFill>
-                        <a:schemeClr val="tx1"/>
-                      </a:solidFill>
-                      <a:prstDash val="solid"/>
-                      <a:round/>
-                      <a:headEnd type="none" w="med" len="med"/>
-                      <a:tailEnd type="none" w="med" len="med"/>
-                    </a:lnL>
-                    <a:lnR w="12700" cap="flat" cmpd="sng" algn="ctr">
-                      <a:solidFill>
-                        <a:schemeClr val="tx1"/>
-                      </a:solidFill>
-                      <a:prstDash val="solid"/>
-                      <a:round/>
-                      <a:headEnd type="none" w="med" len="med"/>
-                      <a:tailEnd type="none" w="med" len="med"/>
-                    </a:lnR>
-                    <a:lnT w="12700" cap="flat" cmpd="sng" algn="ctr">
-                      <a:solidFill>
-                        <a:schemeClr val="tx1"/>
-                      </a:solidFill>
-                      <a:prstDash val="solid"/>
-                      <a:round/>
-                      <a:headEnd type="none" w="med" len="med"/>
-                      <a:tailEnd type="none" w="med" len="med"/>
-                    </a:lnT>
-                    <a:lnB w="12700" cap="flat" cmpd="sng" algn="ctr">
-                      <a:solidFill>
-                        <a:schemeClr val="tx1"/>
-                      </a:solidFill>
-                      <a:prstDash val="solid"/>
-                      <a:round/>
-                      <a:headEnd type="none" w="med" len="med"/>
-                      <a:tailEnd type="none" w="med" len="med"/>
-                    </a:lnB>
-                  </a:tcPr>
-                </a:tc>
-                <a:extLst>
-                  <a:ext uri="{0D108BD9-81ED-4DB2-BD59-A6C34878D82A}">
-                    <a16:rowId xmlns:a16="http://schemas.microsoft.com/office/drawing/2014/main" val="2611079997"/>
-                  </a:ext>
-                </a:extLst>
-              </a:tr>
-            </a:tbl>
-          </a:graphicData>
-        </a:graphic>
-      </p:graphicFrame>
-      <p:sp>
-        <p:nvSpPr>
-          <p:cNvPr id="12" name="テキスト ボックス 11">
-            <a:extLst>
-              <a:ext uri="{FF2B5EF4-FFF2-40B4-BE49-F238E27FC236}">
-                <a16:creationId xmlns:a16="http://schemas.microsoft.com/office/drawing/2014/main" id="{19D4E34A-D51B-F05C-DEDA-954757B8C258}"/>
-              </a:ext>
-            </a:extLst>
-          </p:cNvPr>
-          <p:cNvSpPr txBox="1"/>
-          <p:nvPr/>
-        </p:nvSpPr>
-        <p:spPr>
-          <a:xfrm>
-            <a:off x="663855" y="2934571"/>
-            <a:ext cx="3973982" cy="3477875"/>
-          </a:xfrm>
-          <a:prstGeom prst="rect">
-            <a:avLst/>
-          </a:prstGeom>
-          <a:solidFill>
-            <a:schemeClr val="accent4">
-              <a:lumMod val="20000"/>
-              <a:lumOff val="80000"/>
-            </a:schemeClr>
-          </a:solidFill>
-        </p:spPr>
-        <p:txBody>
-          <a:bodyPr wrap="square">
-            <a:spAutoFit/>
-          </a:bodyPr>
-          <a:lstStyle/>
-          <a:p>
-            <a:r>
-              <a:rPr lang="ja-JP" altLang="en-US" sz="1000">
-                <a:latin typeface="BIZ UDゴシック" panose="020B0400000000000000" pitchFamily="49" charset="-128"/>
-                <a:ea typeface="BIZ UDゴシック" panose="020B0400000000000000" pitchFamily="49" charset="-128"/>
-              </a:rPr>
-              <a:t>┌──────────────┐</a:t>
-            </a:r>
-          </a:p>
-          <a:p>
-            <a:r>
-              <a:rPr lang="ja-JP" altLang="en-US" sz="1000">
-                <a:latin typeface="BIZ UDゴシック" panose="020B0400000000000000" pitchFamily="49" charset="-128"/>
-                <a:ea typeface="BIZ UDゴシック" panose="020B0400000000000000" pitchFamily="49" charset="-128"/>
-              </a:rPr>
-              <a:t>│   CAN Bus (外部エンティティ) │</a:t>
-            </a:r>
-          </a:p>
-          <a:p>
-            <a:r>
-              <a:rPr lang="ja-JP" altLang="en-US" sz="1000">
-                <a:latin typeface="BIZ UDゴシック" panose="020B0400000000000000" pitchFamily="49" charset="-128"/>
-                <a:ea typeface="BIZ UDゴシック" panose="020B0400000000000000" pitchFamily="49" charset="-128"/>
-              </a:rPr>
-              <a:t>└──────────────┘</a:t>
-            </a:r>
-          </a:p>
-          <a:p>
-            <a:r>
-              <a:rPr lang="ja-JP" altLang="en-US" sz="1000">
-                <a:latin typeface="BIZ UDゴシック" panose="020B0400000000000000" pitchFamily="49" charset="-128"/>
-                <a:ea typeface="BIZ UDゴシック" panose="020B0400000000000000" pitchFamily="49" charset="-128"/>
-              </a:rPr>
-              <a:t>          │</a:t>
-            </a:r>
-          </a:p>
-          <a:p>
-            <a:r>
-              <a:rPr lang="ja-JP" altLang="en-US" sz="1000">
-                <a:latin typeface="BIZ UDゴシック" panose="020B0400000000000000" pitchFamily="49" charset="-128"/>
-                <a:ea typeface="BIZ UDゴシック" panose="020B0400000000000000" pitchFamily="49" charset="-128"/>
-              </a:rPr>
-              <a:t>          │ ① 温度データ (Battery Temp)</a:t>
-            </a:r>
-          </a:p>
-          <a:p>
-            <a:r>
-              <a:rPr lang="ja-JP" altLang="en-US" sz="1000">
-                <a:latin typeface="BIZ UDゴシック" panose="020B0400000000000000" pitchFamily="49" charset="-128"/>
-                <a:ea typeface="BIZ UDゴシック" panose="020B0400000000000000" pitchFamily="49" charset="-128"/>
-              </a:rPr>
-              <a:t>          ▼</a:t>
-            </a:r>
-          </a:p>
-          <a:p>
-            <a:r>
-              <a:rPr lang="ja-JP" altLang="en-US" sz="1000">
-                <a:latin typeface="BIZ UDゴシック" panose="020B0400000000000000" pitchFamily="49" charset="-128"/>
-                <a:ea typeface="BIZ UDゴシック" panose="020B0400000000000000" pitchFamily="49" charset="-128"/>
-              </a:rPr>
-              <a:t>┌────────────────────────┐</a:t>
-            </a:r>
-          </a:p>
-          <a:p>
-            <a:r>
-              <a:rPr lang="ja-JP" altLang="en-US" sz="1000">
-                <a:latin typeface="BIZ UDゴシック" panose="020B0400000000000000" pitchFamily="49" charset="-128"/>
-                <a:ea typeface="BIZ UDゴシック" panose="020B0400000000000000" pitchFamily="49" charset="-128"/>
-              </a:rPr>
-              <a:t>│  P1: Battery Temp Control Logic       │</a:t>
-            </a:r>
-          </a:p>
-          <a:p>
-            <a:r>
-              <a:rPr lang="ja-JP" altLang="en-US" sz="1000">
-                <a:latin typeface="BIZ UDゴシック" panose="020B0400000000000000" pitchFamily="49" charset="-128"/>
-                <a:ea typeface="BIZ UDゴシック" panose="020B0400000000000000" pitchFamily="49" charset="-128"/>
-              </a:rPr>
-              <a:t>│  - Monitor temperature                │</a:t>
-            </a:r>
-          </a:p>
-          <a:p>
-            <a:r>
-              <a:rPr lang="ja-JP" altLang="en-US" sz="1000">
-                <a:latin typeface="BIZ UDゴシック" panose="020B0400000000000000" pitchFamily="49" charset="-128"/>
-                <a:ea typeface="BIZ UDゴシック" panose="020B0400000000000000" pitchFamily="49" charset="-128"/>
-              </a:rPr>
-              <a:t>│  - Evaluate thresholds                │</a:t>
-            </a:r>
-          </a:p>
-          <a:p>
-            <a:r>
-              <a:rPr lang="ja-JP" altLang="en-US" sz="1000">
-                <a:latin typeface="BIZ UDゴシック" panose="020B0400000000000000" pitchFamily="49" charset="-128"/>
-                <a:ea typeface="BIZ UDゴシック" panose="020B0400000000000000" pitchFamily="49" charset="-128"/>
-              </a:rPr>
-              <a:t>│  - Control heater/cooler outputs      │</a:t>
-            </a:r>
-          </a:p>
-          <a:p>
-            <a:r>
-              <a:rPr lang="ja-JP" altLang="en-US" sz="1000">
-                <a:latin typeface="BIZ UDゴシック" panose="020B0400000000000000" pitchFamily="49" charset="-128"/>
-                <a:ea typeface="BIZ UDゴシック" panose="020B0400000000000000" pitchFamily="49" charset="-128"/>
-              </a:rPr>
-              <a:t>│  - Update state                       │</a:t>
-            </a:r>
-          </a:p>
-          <a:p>
-            <a:r>
-              <a:rPr lang="ja-JP" altLang="en-US" sz="1000">
-                <a:latin typeface="BIZ UDゴシック" panose="020B0400000000000000" pitchFamily="49" charset="-128"/>
-                <a:ea typeface="BIZ UDゴシック" panose="020B0400000000000000" pitchFamily="49" charset="-128"/>
-              </a:rPr>
-              <a:t>└────────────────────────┘</a:t>
-            </a:r>
-          </a:p>
-          <a:p>
-            <a:r>
-              <a:rPr lang="ja-JP" altLang="en-US" sz="1000">
-                <a:latin typeface="BIZ UDゴシック" panose="020B0400000000000000" pitchFamily="49" charset="-128"/>
-                <a:ea typeface="BIZ UDゴシック" panose="020B0400000000000000" pitchFamily="49" charset="-128"/>
-              </a:rPr>
-              <a:t>          │</a:t>
-            </a:r>
-          </a:p>
-          <a:p>
-            <a:r>
-              <a:rPr lang="ja-JP" altLang="en-US" sz="1000">
-                <a:latin typeface="BIZ UDゴシック" panose="020B0400000000000000" pitchFamily="49" charset="-128"/>
-                <a:ea typeface="BIZ UDゴシック" panose="020B0400000000000000" pitchFamily="49" charset="-128"/>
-              </a:rPr>
-              <a:t>          │ ② Control Output (Heater/Cooler)</a:t>
-            </a:r>
-          </a:p>
-          <a:p>
-            <a:r>
-              <a:rPr lang="ja-JP" altLang="en-US" sz="1000">
-                <a:latin typeface="BIZ UDゴシック" panose="020B0400000000000000" pitchFamily="49" charset="-128"/>
-                <a:ea typeface="BIZ UDゴシック" panose="020B0400000000000000" pitchFamily="49" charset="-128"/>
-              </a:rPr>
-              <a:t>          ▼</a:t>
-            </a:r>
-          </a:p>
-          <a:p>
-            <a:r>
-              <a:rPr lang="ja-JP" altLang="en-US" sz="1000">
-                <a:latin typeface="BIZ UDゴシック" panose="020B0400000000000000" pitchFamily="49" charset="-128"/>
-                <a:ea typeface="BIZ UDゴシック" panose="020B0400000000000000" pitchFamily="49" charset="-128"/>
-              </a:rPr>
-              <a:t>┌──────────────┐</a:t>
-            </a:r>
-          </a:p>
-          <a:p>
-            <a:r>
-              <a:rPr lang="ja-JP" altLang="en-US" sz="1000">
-                <a:latin typeface="BIZ UDゴシック" panose="020B0400000000000000" pitchFamily="49" charset="-128"/>
-                <a:ea typeface="BIZ UDゴシック" panose="020B0400000000000000" pitchFamily="49" charset="-128"/>
-              </a:rPr>
-              <a:t>│ Actuator (外部) │</a:t>
-            </a:r>
-          </a:p>
-          <a:p>
-            <a:r>
-              <a:rPr lang="ja-JP" altLang="en-US" sz="1000">
-                <a:latin typeface="BIZ UDゴシック" panose="020B0400000000000000" pitchFamily="49" charset="-128"/>
-                <a:ea typeface="BIZ UDゴシック" panose="020B0400000000000000" pitchFamily="49" charset="-128"/>
-              </a:rPr>
-              <a:t>└──────────────┘</a:t>
-            </a:r>
-          </a:p>
-          <a:p>
-            <a:endParaRPr lang="ja-JP" altLang="en-US" sz="1000">
-              <a:latin typeface="BIZ UDゴシック" panose="020B0400000000000000" pitchFamily="49" charset="-128"/>
-              <a:ea typeface="BIZ UDゴシック" panose="020B0400000000000000" pitchFamily="49" charset="-128"/>
-            </a:endParaRPr>
-          </a:p>
-          <a:p>
-            <a:r>
-              <a:rPr lang="ja-JP" altLang="en-US" sz="1000">
-                <a:latin typeface="BIZ UDゴシック" panose="020B0400000000000000" pitchFamily="49" charset="-128"/>
-                <a:ea typeface="BIZ UDゴシック" panose="020B0400000000000000" pitchFamily="49" charset="-128"/>
-              </a:rPr>
-              <a:t>P1 ⇄ Threshold Config (閾値設定)</a:t>
-            </a:r>
-          </a:p>
-          <a:p>
-            <a:r>
-              <a:rPr lang="ja-JP" altLang="en-US" sz="1000">
-                <a:latin typeface="BIZ UDゴシック" panose="020B0400000000000000" pitchFamily="49" charset="-128"/>
-                <a:ea typeface="BIZ UDゴシック" panose="020B0400000000000000" pitchFamily="49" charset="-128"/>
-              </a:rPr>
-              <a:t>P1 ⇄ State Variables (状態記録)</a:t>
-            </a:r>
-          </a:p>
-        </p:txBody>
-      </p:sp>
-      <p:sp>
-        <p:nvSpPr>
-          <p:cNvPr id="14" name="テキスト ボックス 13">
-            <a:extLst>
-              <a:ext uri="{FF2B5EF4-FFF2-40B4-BE49-F238E27FC236}">
-                <a16:creationId xmlns:a16="http://schemas.microsoft.com/office/drawing/2014/main" id="{F955074C-0CBF-3195-7B90-8C6EBA88DA16}"/>
-              </a:ext>
-            </a:extLst>
-          </p:cNvPr>
-          <p:cNvSpPr txBox="1"/>
-          <p:nvPr/>
-        </p:nvSpPr>
-        <p:spPr>
-          <a:xfrm>
-            <a:off x="8673127" y="982694"/>
-            <a:ext cx="3169310" cy="892552"/>
-          </a:xfrm>
-          <a:prstGeom prst="rect">
-            <a:avLst/>
-          </a:prstGeom>
-          <a:noFill/>
-        </p:spPr>
-        <p:txBody>
-          <a:bodyPr wrap="square">
-            <a:spAutoFit/>
-          </a:bodyPr>
-          <a:lstStyle/>
-          <a:p>
-            <a:pPr>
-              <a:buNone/>
-            </a:pPr>
-            <a:r>
-              <a:rPr lang="en-US" altLang="ja-JP" sz="1200" b="1">
-                <a:latin typeface="BIZ UDゴシック" panose="020B0400000000000000" pitchFamily="49" charset="-128"/>
-                <a:ea typeface="BIZ UDゴシック" panose="020B0400000000000000" pitchFamily="49" charset="-128"/>
-              </a:rPr>
-              <a:t>【Level 1 </a:t>
-            </a:r>
-            <a:r>
-              <a:rPr lang="ja-JP" altLang="en-US" sz="1200" b="1">
-                <a:latin typeface="BIZ UDゴシック" panose="020B0400000000000000" pitchFamily="49" charset="-128"/>
-                <a:ea typeface="BIZ UDゴシック" panose="020B0400000000000000" pitchFamily="49" charset="-128"/>
-              </a:rPr>
-              <a:t>例（詳細分解）</a:t>
-            </a:r>
-            <a:r>
-              <a:rPr lang="en-US" altLang="ja-JP" sz="1200" b="1">
-                <a:latin typeface="BIZ UDゴシック" panose="020B0400000000000000" pitchFamily="49" charset="-128"/>
-                <a:ea typeface="BIZ UDゴシック" panose="020B0400000000000000" pitchFamily="49" charset="-128"/>
-              </a:rPr>
-              <a:t>】</a:t>
-            </a:r>
-          </a:p>
-          <a:p>
-            <a:pPr>
-              <a:buFont typeface="Arial" panose="020B0604020202020204" pitchFamily="34" charset="0"/>
-              <a:buChar char="•"/>
-            </a:pPr>
-            <a:r>
-              <a:rPr lang="en-US" altLang="ja-JP" sz="1000" b="1">
-                <a:latin typeface="BIZ UDゴシック" panose="020B0400000000000000" pitchFamily="49" charset="-128"/>
-                <a:ea typeface="BIZ UDゴシック" panose="020B0400000000000000" pitchFamily="49" charset="-128"/>
-              </a:rPr>
-              <a:t>P1.1:</a:t>
-            </a:r>
-            <a:r>
-              <a:rPr lang="en-US" altLang="ja-JP" sz="1000">
-                <a:latin typeface="BIZ UDゴシック" panose="020B0400000000000000" pitchFamily="49" charset="-128"/>
-                <a:ea typeface="BIZ UDゴシック" panose="020B0400000000000000" pitchFamily="49" charset="-128"/>
-              </a:rPr>
-              <a:t> Temperature Acquisition</a:t>
-            </a:r>
-            <a:r>
-              <a:rPr lang="ja-JP" altLang="en-US" sz="1000">
-                <a:latin typeface="BIZ UDゴシック" panose="020B0400000000000000" pitchFamily="49" charset="-128"/>
-                <a:ea typeface="BIZ UDゴシック" panose="020B0400000000000000" pitchFamily="49" charset="-128"/>
-              </a:rPr>
-              <a:t>（温度取得）</a:t>
-            </a:r>
-          </a:p>
-          <a:p>
-            <a:pPr>
-              <a:buFont typeface="Arial" panose="020B0604020202020204" pitchFamily="34" charset="0"/>
-              <a:buChar char="•"/>
-            </a:pPr>
-            <a:r>
-              <a:rPr lang="en-US" altLang="ja-JP" sz="1000" b="1">
-                <a:latin typeface="BIZ UDゴシック" panose="020B0400000000000000" pitchFamily="49" charset="-128"/>
-                <a:ea typeface="BIZ UDゴシック" panose="020B0400000000000000" pitchFamily="49" charset="-128"/>
-              </a:rPr>
-              <a:t>P1.2:</a:t>
-            </a:r>
-            <a:r>
-              <a:rPr lang="en-US" altLang="ja-JP" sz="1000">
-                <a:latin typeface="BIZ UDゴシック" panose="020B0400000000000000" pitchFamily="49" charset="-128"/>
-                <a:ea typeface="BIZ UDゴシック" panose="020B0400000000000000" pitchFamily="49" charset="-128"/>
-              </a:rPr>
-              <a:t> State Evaluation</a:t>
-            </a:r>
-            <a:r>
-              <a:rPr lang="ja-JP" altLang="en-US" sz="1000">
-                <a:latin typeface="BIZ UDゴシック" panose="020B0400000000000000" pitchFamily="49" charset="-128"/>
-                <a:ea typeface="BIZ UDゴシック" panose="020B0400000000000000" pitchFamily="49" charset="-128"/>
-              </a:rPr>
-              <a:t>（状態判定）</a:t>
-            </a:r>
-          </a:p>
-          <a:p>
-            <a:pPr>
-              <a:buFont typeface="Arial" panose="020B0604020202020204" pitchFamily="34" charset="0"/>
-              <a:buChar char="•"/>
-            </a:pPr>
-            <a:r>
-              <a:rPr lang="en-US" altLang="ja-JP" sz="1000" b="1">
-                <a:latin typeface="BIZ UDゴシック" panose="020B0400000000000000" pitchFamily="49" charset="-128"/>
-                <a:ea typeface="BIZ UDゴシック" panose="020B0400000000000000" pitchFamily="49" charset="-128"/>
-              </a:rPr>
-              <a:t>P1.3:</a:t>
-            </a:r>
-            <a:r>
-              <a:rPr lang="en-US" altLang="ja-JP" sz="1000">
-                <a:latin typeface="BIZ UDゴシック" panose="020B0400000000000000" pitchFamily="49" charset="-128"/>
-                <a:ea typeface="BIZ UDゴシック" panose="020B0400000000000000" pitchFamily="49" charset="-128"/>
-              </a:rPr>
-              <a:t> Control Output Calculation</a:t>
-            </a:r>
-            <a:r>
-              <a:rPr lang="ja-JP" altLang="en-US" sz="1000">
-                <a:latin typeface="BIZ UDゴシック" panose="020B0400000000000000" pitchFamily="49" charset="-128"/>
-                <a:ea typeface="BIZ UDゴシック" panose="020B0400000000000000" pitchFamily="49" charset="-128"/>
-              </a:rPr>
-              <a:t>（制御量計算）</a:t>
-            </a:r>
-          </a:p>
-          <a:p>
-            <a:pPr>
-              <a:buFont typeface="Arial" panose="020B0604020202020204" pitchFamily="34" charset="0"/>
-              <a:buChar char="•"/>
-            </a:pPr>
-            <a:r>
-              <a:rPr lang="en-US" altLang="ja-JP" sz="1000" b="1">
-                <a:latin typeface="BIZ UDゴシック" panose="020B0400000000000000" pitchFamily="49" charset="-128"/>
-                <a:ea typeface="BIZ UDゴシック" panose="020B0400000000000000" pitchFamily="49" charset="-128"/>
-              </a:rPr>
-              <a:t>P1.4:</a:t>
-            </a:r>
-            <a:r>
-              <a:rPr lang="en-US" altLang="ja-JP" sz="1000">
-                <a:latin typeface="BIZ UDゴシック" panose="020B0400000000000000" pitchFamily="49" charset="-128"/>
-                <a:ea typeface="BIZ UDゴシック" panose="020B0400000000000000" pitchFamily="49" charset="-128"/>
-              </a:rPr>
-              <a:t> Safety Monitoring</a:t>
-            </a:r>
-            <a:r>
-              <a:rPr lang="ja-JP" altLang="en-US" sz="1000">
-                <a:latin typeface="BIZ UDゴシック" panose="020B0400000000000000" pitchFamily="49" charset="-128"/>
-                <a:ea typeface="BIZ UDゴシック" panose="020B0400000000000000" pitchFamily="49" charset="-128"/>
-              </a:rPr>
-              <a:t>（安全監視）</a:t>
-            </a:r>
-          </a:p>
-        </p:txBody>
-      </p:sp>
-      <p:sp>
-        <p:nvSpPr>
-          <p:cNvPr id="15" name="テキスト ボックス 14">
-            <a:extLst>
-              <a:ext uri="{FF2B5EF4-FFF2-40B4-BE49-F238E27FC236}">
-                <a16:creationId xmlns:a16="http://schemas.microsoft.com/office/drawing/2014/main" id="{8B4AC9A9-FBA1-0B7E-913F-6D293C7A0405}"/>
-              </a:ext>
-            </a:extLst>
-          </p:cNvPr>
-          <p:cNvSpPr txBox="1"/>
-          <p:nvPr/>
-        </p:nvSpPr>
-        <p:spPr>
-          <a:xfrm>
-            <a:off x="4861256" y="2934571"/>
-            <a:ext cx="4522622" cy="276999"/>
-          </a:xfrm>
-          <a:prstGeom prst="rect">
-            <a:avLst/>
-          </a:prstGeom>
-          <a:solidFill>
-            <a:schemeClr val="accent6">
-              <a:lumMod val="20000"/>
-              <a:lumOff val="80000"/>
-            </a:schemeClr>
-          </a:solidFill>
-        </p:spPr>
-        <p:txBody>
-          <a:bodyPr wrap="square">
-            <a:spAutoFit/>
-          </a:bodyPr>
-          <a:lstStyle/>
-          <a:p>
-            <a:r>
-              <a:rPr lang="en-US" altLang="ja-JP" sz="1200">
-                <a:solidFill>
-                  <a:schemeClr val="accent6">
-                    <a:lumMod val="75000"/>
-                  </a:schemeClr>
-                </a:solidFill>
-                <a:latin typeface="BIZ UDゴシック" panose="020B0400000000000000" pitchFamily="49" charset="-128"/>
-                <a:ea typeface="BIZ UDゴシック" panose="020B0400000000000000" pitchFamily="49" charset="-128"/>
-              </a:rPr>
-              <a:t>【</a:t>
-            </a:r>
-            <a:r>
-              <a:rPr lang="ja-JP" altLang="en-US" sz="1200">
-                <a:solidFill>
-                  <a:schemeClr val="accent6">
-                    <a:lumMod val="75000"/>
-                  </a:schemeClr>
-                </a:solidFill>
-                <a:latin typeface="BIZ UDゴシック" panose="020B0400000000000000" pitchFamily="49" charset="-128"/>
-                <a:ea typeface="BIZ UDゴシック" panose="020B0400000000000000" pitchFamily="49" charset="-128"/>
-              </a:rPr>
-              <a:t>推奨</a:t>
-            </a:r>
-            <a:r>
-              <a:rPr lang="en-US" altLang="ja-JP" sz="1200">
-                <a:solidFill>
-                  <a:schemeClr val="accent6">
-                    <a:lumMod val="75000"/>
-                  </a:schemeClr>
-                </a:solidFill>
-                <a:latin typeface="BIZ UDゴシック" panose="020B0400000000000000" pitchFamily="49" charset="-128"/>
-                <a:ea typeface="BIZ UDゴシック" panose="020B0400000000000000" pitchFamily="49" charset="-128"/>
-              </a:rPr>
-              <a:t>Draw.io</a:t>
-            </a:r>
-            <a:r>
-              <a:rPr lang="ja-JP" altLang="en-US" sz="1200">
-                <a:solidFill>
-                  <a:schemeClr val="accent6">
-                    <a:lumMod val="75000"/>
-                  </a:schemeClr>
-                </a:solidFill>
-                <a:latin typeface="BIZ UDゴシック" panose="020B0400000000000000" pitchFamily="49" charset="-128"/>
-                <a:ea typeface="BIZ UDゴシック" panose="020B0400000000000000" pitchFamily="49" charset="-128"/>
-              </a:rPr>
-              <a:t>構成</a:t>
-            </a:r>
-            <a:r>
-              <a:rPr lang="en-US" altLang="ja-JP" sz="1200">
-                <a:solidFill>
-                  <a:schemeClr val="accent6">
-                    <a:lumMod val="75000"/>
-                  </a:schemeClr>
-                </a:solidFill>
-                <a:latin typeface="BIZ UDゴシック" panose="020B0400000000000000" pitchFamily="49" charset="-128"/>
-                <a:ea typeface="BIZ UDゴシック" panose="020B0400000000000000" pitchFamily="49" charset="-128"/>
-              </a:rPr>
-              <a:t>】</a:t>
-            </a:r>
-          </a:p>
-        </p:txBody>
-      </p:sp>
-      <p:graphicFrame>
-        <p:nvGraphicFramePr>
-          <p:cNvPr id="16" name="表 15">
-            <a:extLst>
-              <a:ext uri="{FF2B5EF4-FFF2-40B4-BE49-F238E27FC236}">
-                <a16:creationId xmlns:a16="http://schemas.microsoft.com/office/drawing/2014/main" id="{D71461C8-0575-98EF-14ED-72962411AB22}"/>
-              </a:ext>
-            </a:extLst>
-          </p:cNvPr>
-          <p:cNvGraphicFramePr>
-            <a:graphicFrameLocks noGrp="1"/>
-          </p:cNvGraphicFramePr>
-          <p:nvPr>
-            <p:extLst>
-              <p:ext uri="{D42A27DB-BD31-4B8C-83A1-F6EECF244321}">
-                <p14:modId xmlns:p14="http://schemas.microsoft.com/office/powerpoint/2010/main" val="3591631257"/>
-              </p:ext>
-            </p:extLst>
-          </p:nvPr>
-        </p:nvGraphicFramePr>
-        <p:xfrm>
-          <a:off x="4861256" y="3317494"/>
-          <a:ext cx="6516000" cy="1463040"/>
-        </p:xfrm>
-        <a:graphic>
-          <a:graphicData uri="http://schemas.openxmlformats.org/drawingml/2006/table">
-            <a:tbl>
-              <a:tblPr firstRow="1">
-                <a:tableStyleId>{912C8C85-51F0-491E-9774-3900AFEF0FD7}</a:tableStyleId>
-              </a:tblPr>
-              <a:tblGrid>
-                <a:gridCol w="1944000">
-                  <a:extLst>
-                    <a:ext uri="{9D8B030D-6E8A-4147-A177-3AD203B41FA5}">
-                      <a16:colId xmlns:a16="http://schemas.microsoft.com/office/drawing/2014/main" val="4016087726"/>
-                    </a:ext>
-                  </a:extLst>
-                </a:gridCol>
-                <a:gridCol w="1368000">
-                  <a:extLst>
-                    <a:ext uri="{9D8B030D-6E8A-4147-A177-3AD203B41FA5}">
-                      <a16:colId xmlns:a16="http://schemas.microsoft.com/office/drawing/2014/main" val="3819235343"/>
-                    </a:ext>
-                  </a:extLst>
-                </a:gridCol>
-                <a:gridCol w="1260000">
-                  <a:extLst>
-                    <a:ext uri="{9D8B030D-6E8A-4147-A177-3AD203B41FA5}">
-                      <a16:colId xmlns:a16="http://schemas.microsoft.com/office/drawing/2014/main" val="566123612"/>
-                    </a:ext>
-                  </a:extLst>
-                </a:gridCol>
-                <a:gridCol w="1944000">
-                  <a:extLst>
-                    <a:ext uri="{9D8B030D-6E8A-4147-A177-3AD203B41FA5}">
-                      <a16:colId xmlns:a16="http://schemas.microsoft.com/office/drawing/2014/main" val="1434705359"/>
-                    </a:ext>
-                  </a:extLst>
-                </a:gridCol>
-              </a:tblGrid>
-              <a:tr h="0">
-                <a:tc>
-                  <a:txBody>
-                    <a:bodyPr/>
-                    <a:lstStyle/>
-                    <a:p>
-                      <a:pPr>
-                        <a:buNone/>
-                      </a:pPr>
-                      <a:r>
-                        <a:rPr lang="ja-JP" altLang="en-US" sz="1000">
-                          <a:latin typeface="BIZ UDゴシック" panose="020B0400000000000000" pitchFamily="49" charset="-128"/>
-                          <a:ea typeface="BIZ UDゴシック" panose="020B0400000000000000" pitchFamily="49" charset="-128"/>
-                        </a:rPr>
-                        <a:t>要素</a:t>
-                      </a:r>
-                    </a:p>
-                  </a:txBody>
-                  <a:tcPr anchor="ctr">
-                    <a:lnL w="12700" cap="flat" cmpd="sng" algn="ctr">
-                      <a:solidFill>
-                        <a:schemeClr val="tx1"/>
-                      </a:solidFill>
-                      <a:prstDash val="solid"/>
-                      <a:round/>
-                      <a:headEnd type="none" w="med" len="med"/>
-                      <a:tailEnd type="none" w="med" len="med"/>
-                    </a:lnL>
-                    <a:lnR w="12700" cap="flat" cmpd="sng" algn="ctr">
-                      <a:solidFill>
-                        <a:schemeClr val="tx1"/>
-                      </a:solidFill>
-                      <a:prstDash val="solid"/>
-                      <a:round/>
-                      <a:headEnd type="none" w="med" len="med"/>
-                      <a:tailEnd type="none" w="med" len="med"/>
-                    </a:lnR>
-                    <a:lnT w="12700" cap="flat" cmpd="sng" algn="ctr">
-                      <a:solidFill>
-                        <a:schemeClr val="tx1"/>
-                      </a:solidFill>
-                      <a:prstDash val="solid"/>
-                      <a:round/>
-                      <a:headEnd type="none" w="med" len="med"/>
-                      <a:tailEnd type="none" w="med" len="med"/>
-                    </a:lnT>
-                    <a:lnB w="12700" cap="flat" cmpd="sng" algn="ctr">
-                      <a:solidFill>
-                        <a:schemeClr val="tx1"/>
-                      </a:solidFill>
-                      <a:prstDash val="solid"/>
-                      <a:round/>
-                      <a:headEnd type="none" w="med" len="med"/>
-                      <a:tailEnd type="none" w="med" len="med"/>
-                    </a:lnB>
-                  </a:tcPr>
-                </a:tc>
-                <a:tc>
-                  <a:txBody>
-                    <a:bodyPr/>
-                    <a:lstStyle/>
-                    <a:p>
-                      <a:pPr>
-                        <a:buNone/>
-                      </a:pPr>
-                      <a:r>
-                        <a:rPr lang="ja-JP" altLang="en-US" sz="1000">
-                          <a:latin typeface="BIZ UDゴシック" panose="020B0400000000000000" pitchFamily="49" charset="-128"/>
-                          <a:ea typeface="BIZ UDゴシック" panose="020B0400000000000000" pitchFamily="49" charset="-128"/>
-                        </a:rPr>
-                        <a:t>図形</a:t>
-                      </a:r>
-                    </a:p>
-                  </a:txBody>
-                  <a:tcPr anchor="ctr">
-                    <a:lnL w="12700" cap="flat" cmpd="sng" algn="ctr">
-                      <a:solidFill>
-                        <a:schemeClr val="tx1"/>
-                      </a:solidFill>
-                      <a:prstDash val="solid"/>
-                      <a:round/>
-                      <a:headEnd type="none" w="med" len="med"/>
-                      <a:tailEnd type="none" w="med" len="med"/>
-                    </a:lnL>
-                    <a:lnR w="12700" cap="flat" cmpd="sng" algn="ctr">
-                      <a:solidFill>
-                        <a:schemeClr val="tx1"/>
-                      </a:solidFill>
-                      <a:prstDash val="solid"/>
-                      <a:round/>
-                      <a:headEnd type="none" w="med" len="med"/>
-                      <a:tailEnd type="none" w="med" len="med"/>
-                    </a:lnR>
-                    <a:lnT w="12700" cap="flat" cmpd="sng" algn="ctr">
-                      <a:solidFill>
-                        <a:schemeClr val="tx1"/>
-                      </a:solidFill>
-                      <a:prstDash val="solid"/>
-                      <a:round/>
-                      <a:headEnd type="none" w="med" len="med"/>
-                      <a:tailEnd type="none" w="med" len="med"/>
-                    </a:lnT>
-                    <a:lnB w="12700" cap="flat" cmpd="sng" algn="ctr">
-                      <a:solidFill>
-                        <a:schemeClr val="tx1"/>
-                      </a:solidFill>
-                      <a:prstDash val="solid"/>
-                      <a:round/>
-                      <a:headEnd type="none" w="med" len="med"/>
-                      <a:tailEnd type="none" w="med" len="med"/>
-                    </a:lnB>
-                  </a:tcPr>
-                </a:tc>
-                <a:tc>
-                  <a:txBody>
-                    <a:bodyPr/>
-                    <a:lstStyle/>
-                    <a:p>
-                      <a:pPr>
-                        <a:buNone/>
-                      </a:pPr>
-                      <a:r>
-                        <a:rPr lang="ja-JP" altLang="en-US" sz="1000">
-                          <a:latin typeface="BIZ UDゴシック" panose="020B0400000000000000" pitchFamily="49" charset="-128"/>
-                          <a:ea typeface="BIZ UDゴシック" panose="020B0400000000000000" pitchFamily="49" charset="-128"/>
-                        </a:rPr>
-                        <a:t>推奨色</a:t>
-                      </a:r>
-                    </a:p>
-                  </a:txBody>
-                  <a:tcPr anchor="ctr">
-                    <a:lnL w="12700" cap="flat" cmpd="sng" algn="ctr">
-                      <a:solidFill>
-                        <a:schemeClr val="tx1"/>
-                      </a:solidFill>
-                      <a:prstDash val="solid"/>
-                      <a:round/>
-                      <a:headEnd type="none" w="med" len="med"/>
-                      <a:tailEnd type="none" w="med" len="med"/>
-                    </a:lnL>
-                    <a:lnR w="12700" cap="flat" cmpd="sng" algn="ctr">
-                      <a:solidFill>
-                        <a:schemeClr val="tx1"/>
-                      </a:solidFill>
-                      <a:prstDash val="solid"/>
-                      <a:round/>
-                      <a:headEnd type="none" w="med" len="med"/>
-                      <a:tailEnd type="none" w="med" len="med"/>
-                    </a:lnR>
-                    <a:lnT w="12700" cap="flat" cmpd="sng" algn="ctr">
-                      <a:solidFill>
-                        <a:schemeClr val="tx1"/>
-                      </a:solidFill>
-                      <a:prstDash val="solid"/>
-                      <a:round/>
-                      <a:headEnd type="none" w="med" len="med"/>
-                      <a:tailEnd type="none" w="med" len="med"/>
-                    </a:lnT>
-                    <a:lnB w="12700" cap="flat" cmpd="sng" algn="ctr">
-                      <a:solidFill>
-                        <a:schemeClr val="tx1"/>
-                      </a:solidFill>
-                      <a:prstDash val="solid"/>
-                      <a:round/>
-                      <a:headEnd type="none" w="med" len="med"/>
-                      <a:tailEnd type="none" w="med" len="med"/>
-                    </a:lnB>
-                  </a:tcPr>
-                </a:tc>
-                <a:tc>
-                  <a:txBody>
-                    <a:bodyPr/>
-                    <a:lstStyle/>
-                    <a:p>
-                      <a:pPr>
-                        <a:buNone/>
-                      </a:pPr>
-                      <a:r>
-                        <a:rPr lang="ja-JP" altLang="en-US" sz="1000">
-                          <a:latin typeface="BIZ UDゴシック" panose="020B0400000000000000" pitchFamily="49" charset="-128"/>
-                          <a:ea typeface="BIZ UDゴシック" panose="020B0400000000000000" pitchFamily="49" charset="-128"/>
-                        </a:rPr>
-                        <a:t>備考</a:t>
-                      </a:r>
-                    </a:p>
-                  </a:txBody>
-                  <a:tcPr anchor="ctr">
-                    <a:lnL w="12700" cap="flat" cmpd="sng" algn="ctr">
-                      <a:solidFill>
-                        <a:schemeClr val="tx1"/>
-                      </a:solidFill>
-                      <a:prstDash val="solid"/>
-                      <a:round/>
-                      <a:headEnd type="none" w="med" len="med"/>
-                      <a:tailEnd type="none" w="med" len="med"/>
-                    </a:lnL>
-                    <a:lnR w="12700" cap="flat" cmpd="sng" algn="ctr">
-                      <a:solidFill>
-                        <a:schemeClr val="tx1"/>
-                      </a:solidFill>
-                      <a:prstDash val="solid"/>
-                      <a:round/>
-                      <a:headEnd type="none" w="med" len="med"/>
-                      <a:tailEnd type="none" w="med" len="med"/>
-                    </a:lnR>
-                    <a:lnT w="12700" cap="flat" cmpd="sng" algn="ctr">
-                      <a:solidFill>
-                        <a:schemeClr val="tx1"/>
-                      </a:solidFill>
-                      <a:prstDash val="solid"/>
-                      <a:round/>
-                      <a:headEnd type="none" w="med" len="med"/>
-                      <a:tailEnd type="none" w="med" len="med"/>
-                    </a:lnT>
-                    <a:lnB w="12700" cap="flat" cmpd="sng" algn="ctr">
-                      <a:solidFill>
-                        <a:schemeClr val="tx1"/>
-                      </a:solidFill>
-                      <a:prstDash val="solid"/>
-                      <a:round/>
-                      <a:headEnd type="none" w="med" len="med"/>
-                      <a:tailEnd type="none" w="med" len="med"/>
-                    </a:lnB>
-                  </a:tcPr>
-                </a:tc>
-                <a:extLst>
-                  <a:ext uri="{0D108BD9-81ED-4DB2-BD59-A6C34878D82A}">
-                    <a16:rowId xmlns:a16="http://schemas.microsoft.com/office/drawing/2014/main" val="427260351"/>
-                  </a:ext>
-                </a:extLst>
-              </a:tr>
-              <a:tr h="0">
-                <a:tc>
-                  <a:txBody>
-                    <a:bodyPr/>
-                    <a:lstStyle/>
-                    <a:p>
-                      <a:pPr>
-                        <a:buNone/>
-                      </a:pPr>
-                      <a:r>
-                        <a:rPr lang="ja-JP" altLang="en-US" sz="1000">
-                          <a:latin typeface="BIZ UDゴシック" panose="020B0400000000000000" pitchFamily="49" charset="-128"/>
-                          <a:ea typeface="BIZ UDゴシック" panose="020B0400000000000000" pitchFamily="49" charset="-128"/>
-                        </a:rPr>
-                        <a:t>プロセス</a:t>
-                      </a:r>
-                    </a:p>
-                  </a:txBody>
-                  <a:tcPr anchor="ctr">
-                    <a:lnL w="12700" cap="flat" cmpd="sng" algn="ctr">
-                      <a:solidFill>
-                        <a:schemeClr val="tx1"/>
-                      </a:solidFill>
-                      <a:prstDash val="solid"/>
-                      <a:round/>
-                      <a:headEnd type="none" w="med" len="med"/>
-                      <a:tailEnd type="none" w="med" len="med"/>
-                    </a:lnL>
-                    <a:lnR w="12700" cap="flat" cmpd="sng" algn="ctr">
-                      <a:solidFill>
-                        <a:schemeClr val="tx1"/>
-                      </a:solidFill>
-                      <a:prstDash val="solid"/>
-                      <a:round/>
-                      <a:headEnd type="none" w="med" len="med"/>
-                      <a:tailEnd type="none" w="med" len="med"/>
-                    </a:lnR>
-                    <a:lnT w="12700" cap="flat" cmpd="sng" algn="ctr">
-                      <a:solidFill>
-                        <a:schemeClr val="tx1"/>
-                      </a:solidFill>
-                      <a:prstDash val="solid"/>
-                      <a:round/>
-                      <a:headEnd type="none" w="med" len="med"/>
-                      <a:tailEnd type="none" w="med" len="med"/>
-                    </a:lnT>
-                    <a:lnB w="12700" cap="flat" cmpd="sng" algn="ctr">
-                      <a:solidFill>
-                        <a:schemeClr val="tx1"/>
-                      </a:solidFill>
-                      <a:prstDash val="solid"/>
-                      <a:round/>
-                      <a:headEnd type="none" w="med" len="med"/>
-                      <a:tailEnd type="none" w="med" len="med"/>
-                    </a:lnB>
-                  </a:tcPr>
-                </a:tc>
-                <a:tc>
-                  <a:txBody>
-                    <a:bodyPr/>
-                    <a:lstStyle/>
-                    <a:p>
-                      <a:pPr>
-                        <a:buNone/>
-                      </a:pPr>
-                      <a:r>
-                        <a:rPr lang="ja-JP" altLang="en-US" sz="1000">
-                          <a:latin typeface="BIZ UDゴシック" panose="020B0400000000000000" pitchFamily="49" charset="-128"/>
-                          <a:ea typeface="BIZ UDゴシック" panose="020B0400000000000000" pitchFamily="49" charset="-128"/>
-                        </a:rPr>
-                        <a:t>角丸長方形</a:t>
-                      </a:r>
-                    </a:p>
-                  </a:txBody>
-                  <a:tcPr anchor="ctr">
-                    <a:lnL w="12700" cap="flat" cmpd="sng" algn="ctr">
-                      <a:solidFill>
-                        <a:schemeClr val="tx1"/>
-                      </a:solidFill>
-                      <a:prstDash val="solid"/>
-                      <a:round/>
-                      <a:headEnd type="none" w="med" len="med"/>
-                      <a:tailEnd type="none" w="med" len="med"/>
-                    </a:lnL>
-                    <a:lnR w="12700" cap="flat" cmpd="sng" algn="ctr">
-                      <a:solidFill>
-                        <a:schemeClr val="tx1"/>
-                      </a:solidFill>
-                      <a:prstDash val="solid"/>
-                      <a:round/>
-                      <a:headEnd type="none" w="med" len="med"/>
-                      <a:tailEnd type="none" w="med" len="med"/>
-                    </a:lnR>
-                    <a:lnT w="12700" cap="flat" cmpd="sng" algn="ctr">
-                      <a:solidFill>
-                        <a:schemeClr val="tx1"/>
-                      </a:solidFill>
-                      <a:prstDash val="solid"/>
-                      <a:round/>
-                      <a:headEnd type="none" w="med" len="med"/>
-                      <a:tailEnd type="none" w="med" len="med"/>
-                    </a:lnT>
-                    <a:lnB w="12700" cap="flat" cmpd="sng" algn="ctr">
-                      <a:solidFill>
-                        <a:schemeClr val="tx1"/>
-                      </a:solidFill>
-                      <a:prstDash val="solid"/>
-                      <a:round/>
-                      <a:headEnd type="none" w="med" len="med"/>
-                      <a:tailEnd type="none" w="med" len="med"/>
-                    </a:lnB>
-                  </a:tcPr>
-                </a:tc>
-                <a:tc>
-                  <a:txBody>
-                    <a:bodyPr/>
-                    <a:lstStyle/>
-                    <a:p>
-                      <a:pPr>
-                        <a:buNone/>
-                      </a:pPr>
-                      <a:r>
-                        <a:rPr lang="en-US" sz="1000">
-                          <a:latin typeface="BIZ UDゴシック" panose="020B0400000000000000" pitchFamily="49" charset="-128"/>
-                          <a:ea typeface="BIZ UDゴシック" panose="020B0400000000000000" pitchFamily="49" charset="-128"/>
-                        </a:rPr>
-                        <a:t>#d1f0d1（</a:t>
-                      </a:r>
-                      <a:r>
-                        <a:rPr lang="ja-JP" altLang="en-US" sz="1000">
-                          <a:latin typeface="BIZ UDゴシック" panose="020B0400000000000000" pitchFamily="49" charset="-128"/>
-                          <a:ea typeface="BIZ UDゴシック" panose="020B0400000000000000" pitchFamily="49" charset="-128"/>
-                        </a:rPr>
-                        <a:t>薄緑）</a:t>
-                      </a:r>
-                    </a:p>
-                  </a:txBody>
-                  <a:tcPr anchor="ctr">
-                    <a:lnL w="12700" cap="flat" cmpd="sng" algn="ctr">
-                      <a:solidFill>
-                        <a:schemeClr val="tx1"/>
-                      </a:solidFill>
-                      <a:prstDash val="solid"/>
-                      <a:round/>
-                      <a:headEnd type="none" w="med" len="med"/>
-                      <a:tailEnd type="none" w="med" len="med"/>
-                    </a:lnL>
-                    <a:lnR w="12700" cap="flat" cmpd="sng" algn="ctr">
-                      <a:solidFill>
-                        <a:schemeClr val="tx1"/>
-                      </a:solidFill>
-                      <a:prstDash val="solid"/>
-                      <a:round/>
-                      <a:headEnd type="none" w="med" len="med"/>
-                      <a:tailEnd type="none" w="med" len="med"/>
-                    </a:lnR>
-                    <a:lnT w="12700" cap="flat" cmpd="sng" algn="ctr">
-                      <a:solidFill>
-                        <a:schemeClr val="tx1"/>
-                      </a:solidFill>
-                      <a:prstDash val="solid"/>
-                      <a:round/>
-                      <a:headEnd type="none" w="med" len="med"/>
-                      <a:tailEnd type="none" w="med" len="med"/>
-                    </a:lnT>
-                    <a:lnB w="12700" cap="flat" cmpd="sng" algn="ctr">
-                      <a:solidFill>
-                        <a:schemeClr val="tx1"/>
-                      </a:solidFill>
-                      <a:prstDash val="solid"/>
-                      <a:round/>
-                      <a:headEnd type="none" w="med" len="med"/>
-                      <a:tailEnd type="none" w="med" len="med"/>
-                    </a:lnB>
-                  </a:tcPr>
-                </a:tc>
-                <a:tc>
-                  <a:txBody>
-                    <a:bodyPr/>
-                    <a:lstStyle/>
-                    <a:p>
-                      <a:pPr>
-                        <a:buNone/>
-                      </a:pPr>
-                      <a:r>
-                        <a:rPr lang="ja-JP" altLang="en-US" sz="1000">
-                          <a:latin typeface="BIZ UDゴシック" panose="020B0400000000000000" pitchFamily="49" charset="-128"/>
-                          <a:ea typeface="BIZ UDゴシック" panose="020B0400000000000000" pitchFamily="49" charset="-128"/>
-                        </a:rPr>
-                        <a:t>各処理ブロック</a:t>
-                      </a:r>
-                    </a:p>
-                  </a:txBody>
-                  <a:tcPr anchor="ctr">
-                    <a:lnL w="12700" cap="flat" cmpd="sng" algn="ctr">
-                      <a:solidFill>
-                        <a:schemeClr val="tx1"/>
-                      </a:solidFill>
-                      <a:prstDash val="solid"/>
-                      <a:round/>
-                      <a:headEnd type="none" w="med" len="med"/>
-                      <a:tailEnd type="none" w="med" len="med"/>
-                    </a:lnL>
-                    <a:lnR w="12700" cap="flat" cmpd="sng" algn="ctr">
-                      <a:solidFill>
-                        <a:schemeClr val="tx1"/>
-                      </a:solidFill>
-                      <a:prstDash val="solid"/>
-                      <a:round/>
-                      <a:headEnd type="none" w="med" len="med"/>
-                      <a:tailEnd type="none" w="med" len="med"/>
-                    </a:lnR>
-                    <a:lnT w="12700" cap="flat" cmpd="sng" algn="ctr">
-                      <a:solidFill>
-                        <a:schemeClr val="tx1"/>
-                      </a:solidFill>
-                      <a:prstDash val="solid"/>
-                      <a:round/>
-                      <a:headEnd type="none" w="med" len="med"/>
-                      <a:tailEnd type="none" w="med" len="med"/>
-                    </a:lnT>
-                    <a:lnB w="12700" cap="flat" cmpd="sng" algn="ctr">
-                      <a:solidFill>
-                        <a:schemeClr val="tx1"/>
-                      </a:solidFill>
-                      <a:prstDash val="solid"/>
-                      <a:round/>
-                      <a:headEnd type="none" w="med" len="med"/>
-                      <a:tailEnd type="none" w="med" len="med"/>
-                    </a:lnB>
-                  </a:tcPr>
-                </a:tc>
-                <a:extLst>
-                  <a:ext uri="{0D108BD9-81ED-4DB2-BD59-A6C34878D82A}">
-                    <a16:rowId xmlns:a16="http://schemas.microsoft.com/office/drawing/2014/main" val="1505597246"/>
-                  </a:ext>
-                </a:extLst>
-              </a:tr>
-              <a:tr h="0">
-                <a:tc>
-                  <a:txBody>
-                    <a:bodyPr/>
-                    <a:lstStyle/>
-                    <a:p>
-                      <a:pPr>
-                        <a:buNone/>
-                      </a:pPr>
-                      <a:r>
-                        <a:rPr lang="ja-JP" altLang="en-US" sz="1000">
-                          <a:latin typeface="BIZ UDゴシック" panose="020B0400000000000000" pitchFamily="49" charset="-128"/>
-                          <a:ea typeface="BIZ UDゴシック" panose="020B0400000000000000" pitchFamily="49" charset="-128"/>
-                        </a:rPr>
-                        <a:t>外部エンティティ</a:t>
-                      </a:r>
-                    </a:p>
-                  </a:txBody>
-                  <a:tcPr anchor="ctr">
-                    <a:lnL w="12700" cap="flat" cmpd="sng" algn="ctr">
-                      <a:solidFill>
-                        <a:schemeClr val="tx1"/>
-                      </a:solidFill>
-                      <a:prstDash val="solid"/>
-                      <a:round/>
-                      <a:headEnd type="none" w="med" len="med"/>
-                      <a:tailEnd type="none" w="med" len="med"/>
-                    </a:lnL>
-                    <a:lnR w="12700" cap="flat" cmpd="sng" algn="ctr">
-                      <a:solidFill>
-                        <a:schemeClr val="tx1"/>
-                      </a:solidFill>
-                      <a:prstDash val="solid"/>
-                      <a:round/>
-                      <a:headEnd type="none" w="med" len="med"/>
-                      <a:tailEnd type="none" w="med" len="med"/>
-                    </a:lnR>
-                    <a:lnT w="12700" cap="flat" cmpd="sng" algn="ctr">
-                      <a:solidFill>
-                        <a:schemeClr val="tx1"/>
-                      </a:solidFill>
-                      <a:prstDash val="solid"/>
-                      <a:round/>
-                      <a:headEnd type="none" w="med" len="med"/>
-                      <a:tailEnd type="none" w="med" len="med"/>
-                    </a:lnT>
-                    <a:lnB w="12700" cap="flat" cmpd="sng" algn="ctr">
-                      <a:solidFill>
-                        <a:schemeClr val="tx1"/>
-                      </a:solidFill>
-                      <a:prstDash val="solid"/>
-                      <a:round/>
-                      <a:headEnd type="none" w="med" len="med"/>
-                      <a:tailEnd type="none" w="med" len="med"/>
-                    </a:lnB>
-                  </a:tcPr>
-                </a:tc>
-                <a:tc>
-                  <a:txBody>
-                    <a:bodyPr/>
-                    <a:lstStyle/>
-                    <a:p>
-                      <a:pPr>
-                        <a:buNone/>
-                      </a:pPr>
-                      <a:r>
-                        <a:rPr lang="ja-JP" altLang="en-US" sz="1000">
-                          <a:latin typeface="BIZ UDゴシック" panose="020B0400000000000000" pitchFamily="49" charset="-128"/>
-                          <a:ea typeface="BIZ UDゴシック" panose="020B0400000000000000" pitchFamily="49" charset="-128"/>
-                        </a:rPr>
-                        <a:t>長方形</a:t>
-                      </a:r>
-                    </a:p>
-                  </a:txBody>
-                  <a:tcPr anchor="ctr">
-                    <a:lnL w="12700" cap="flat" cmpd="sng" algn="ctr">
-                      <a:solidFill>
-                        <a:schemeClr val="tx1"/>
-                      </a:solidFill>
-                      <a:prstDash val="solid"/>
-                      <a:round/>
-                      <a:headEnd type="none" w="med" len="med"/>
-                      <a:tailEnd type="none" w="med" len="med"/>
-                    </a:lnL>
-                    <a:lnR w="12700" cap="flat" cmpd="sng" algn="ctr">
-                      <a:solidFill>
-                        <a:schemeClr val="tx1"/>
-                      </a:solidFill>
-                      <a:prstDash val="solid"/>
-                      <a:round/>
-                      <a:headEnd type="none" w="med" len="med"/>
-                      <a:tailEnd type="none" w="med" len="med"/>
-                    </a:lnR>
-                    <a:lnT w="12700" cap="flat" cmpd="sng" algn="ctr">
-                      <a:solidFill>
-                        <a:schemeClr val="tx1"/>
-                      </a:solidFill>
-                      <a:prstDash val="solid"/>
-                      <a:round/>
-                      <a:headEnd type="none" w="med" len="med"/>
-                      <a:tailEnd type="none" w="med" len="med"/>
-                    </a:lnT>
-                    <a:lnB w="12700" cap="flat" cmpd="sng" algn="ctr">
-                      <a:solidFill>
-                        <a:schemeClr val="tx1"/>
-                      </a:solidFill>
-                      <a:prstDash val="solid"/>
-                      <a:round/>
-                      <a:headEnd type="none" w="med" len="med"/>
-                      <a:tailEnd type="none" w="med" len="med"/>
-                    </a:lnB>
-                  </a:tcPr>
-                </a:tc>
-                <a:tc>
-                  <a:txBody>
-                    <a:bodyPr/>
-                    <a:lstStyle/>
-                    <a:p>
-                      <a:pPr>
-                        <a:buNone/>
-                      </a:pPr>
-                      <a:r>
-                        <a:rPr lang="en-US" sz="1000">
-                          <a:latin typeface="BIZ UDゴシック" panose="020B0400000000000000" pitchFamily="49" charset="-128"/>
-                          <a:ea typeface="BIZ UDゴシック" panose="020B0400000000000000" pitchFamily="49" charset="-128"/>
-                        </a:rPr>
-                        <a:t>#fce5cd（</a:t>
-                      </a:r>
-                      <a:r>
-                        <a:rPr lang="ja-JP" altLang="en-US" sz="1000">
-                          <a:latin typeface="BIZ UDゴシック" panose="020B0400000000000000" pitchFamily="49" charset="-128"/>
-                          <a:ea typeface="BIZ UDゴシック" panose="020B0400000000000000" pitchFamily="49" charset="-128"/>
-                        </a:rPr>
-                        <a:t>薄橙）</a:t>
-                      </a:r>
-                    </a:p>
-                  </a:txBody>
-                  <a:tcPr anchor="ctr">
-                    <a:lnL w="12700" cap="flat" cmpd="sng" algn="ctr">
-                      <a:solidFill>
-                        <a:schemeClr val="tx1"/>
-                      </a:solidFill>
-                      <a:prstDash val="solid"/>
-                      <a:round/>
-                      <a:headEnd type="none" w="med" len="med"/>
-                      <a:tailEnd type="none" w="med" len="med"/>
-                    </a:lnL>
-                    <a:lnR w="12700" cap="flat" cmpd="sng" algn="ctr">
-                      <a:solidFill>
-                        <a:schemeClr val="tx1"/>
-                      </a:solidFill>
-                      <a:prstDash val="solid"/>
-                      <a:round/>
-                      <a:headEnd type="none" w="med" len="med"/>
-                      <a:tailEnd type="none" w="med" len="med"/>
-                    </a:lnR>
-                    <a:lnT w="12700" cap="flat" cmpd="sng" algn="ctr">
-                      <a:solidFill>
-                        <a:schemeClr val="tx1"/>
-                      </a:solidFill>
-                      <a:prstDash val="solid"/>
-                      <a:round/>
-                      <a:headEnd type="none" w="med" len="med"/>
-                      <a:tailEnd type="none" w="med" len="med"/>
-                    </a:lnT>
-                    <a:lnB w="12700" cap="flat" cmpd="sng" algn="ctr">
-                      <a:solidFill>
-                        <a:schemeClr val="tx1"/>
-                      </a:solidFill>
-                      <a:prstDash val="solid"/>
-                      <a:round/>
-                      <a:headEnd type="none" w="med" len="med"/>
-                      <a:tailEnd type="none" w="med" len="med"/>
-                    </a:lnB>
-                  </a:tcPr>
-                </a:tc>
-                <a:tc>
-                  <a:txBody>
-                    <a:bodyPr/>
-                    <a:lstStyle/>
-                    <a:p>
-                      <a:pPr>
-                        <a:buNone/>
-                      </a:pPr>
-                      <a:r>
-                        <a:rPr lang="en-US" sz="1000">
-                          <a:latin typeface="BIZ UDゴシック" panose="020B0400000000000000" pitchFamily="49" charset="-128"/>
-                          <a:ea typeface="BIZ UDゴシック" panose="020B0400000000000000" pitchFamily="49" charset="-128"/>
-                        </a:rPr>
-                        <a:t>CAN・UI</a:t>
-                      </a:r>
-                      <a:r>
-                        <a:rPr lang="ja-JP" altLang="en-US" sz="1000">
-                          <a:latin typeface="BIZ UDゴシック" panose="020B0400000000000000" pitchFamily="49" charset="-128"/>
-                          <a:ea typeface="BIZ UDゴシック" panose="020B0400000000000000" pitchFamily="49" charset="-128"/>
-                        </a:rPr>
-                        <a:t>など</a:t>
-                      </a:r>
-                    </a:p>
-                  </a:txBody>
-                  <a:tcPr anchor="ctr">
-                    <a:lnL w="12700" cap="flat" cmpd="sng" algn="ctr">
-                      <a:solidFill>
-                        <a:schemeClr val="tx1"/>
-                      </a:solidFill>
-                      <a:prstDash val="solid"/>
-                      <a:round/>
-                      <a:headEnd type="none" w="med" len="med"/>
-                      <a:tailEnd type="none" w="med" len="med"/>
-                    </a:lnL>
-                    <a:lnR w="12700" cap="flat" cmpd="sng" algn="ctr">
-                      <a:solidFill>
-                        <a:schemeClr val="tx1"/>
-                      </a:solidFill>
-                      <a:prstDash val="solid"/>
-                      <a:round/>
-                      <a:headEnd type="none" w="med" len="med"/>
-                      <a:tailEnd type="none" w="med" len="med"/>
-                    </a:lnR>
-                    <a:lnT w="12700" cap="flat" cmpd="sng" algn="ctr">
-                      <a:solidFill>
-                        <a:schemeClr val="tx1"/>
-                      </a:solidFill>
-                      <a:prstDash val="solid"/>
-                      <a:round/>
-                      <a:headEnd type="none" w="med" len="med"/>
-                      <a:tailEnd type="none" w="med" len="med"/>
-                    </a:lnT>
-                    <a:lnB w="12700" cap="flat" cmpd="sng" algn="ctr">
-                      <a:solidFill>
-                        <a:schemeClr val="tx1"/>
-                      </a:solidFill>
-                      <a:prstDash val="solid"/>
-                      <a:round/>
-                      <a:headEnd type="none" w="med" len="med"/>
-                      <a:tailEnd type="none" w="med" len="med"/>
-                    </a:lnB>
-                  </a:tcPr>
-                </a:tc>
-                <a:extLst>
-                  <a:ext uri="{0D108BD9-81ED-4DB2-BD59-A6C34878D82A}">
-                    <a16:rowId xmlns:a16="http://schemas.microsoft.com/office/drawing/2014/main" val="280315404"/>
-                  </a:ext>
-                </a:extLst>
-              </a:tr>
-              <a:tr h="0">
-                <a:tc>
-                  <a:txBody>
-                    <a:bodyPr/>
-                    <a:lstStyle/>
-                    <a:p>
-                      <a:pPr>
-                        <a:buNone/>
-                      </a:pPr>
-                      <a:r>
-                        <a:rPr lang="ja-JP" altLang="en-US" sz="1000">
-                          <a:latin typeface="BIZ UDゴシック" panose="020B0400000000000000" pitchFamily="49" charset="-128"/>
-                          <a:ea typeface="BIZ UDゴシック" panose="020B0400000000000000" pitchFamily="49" charset="-128"/>
-                        </a:rPr>
-                        <a:t>データストア</a:t>
-                      </a:r>
-                    </a:p>
-                  </a:txBody>
-                  <a:tcPr anchor="ctr">
-                    <a:lnL w="12700" cap="flat" cmpd="sng" algn="ctr">
-                      <a:solidFill>
-                        <a:schemeClr val="tx1"/>
-                      </a:solidFill>
-                      <a:prstDash val="solid"/>
-                      <a:round/>
-                      <a:headEnd type="none" w="med" len="med"/>
-                      <a:tailEnd type="none" w="med" len="med"/>
-                    </a:lnL>
-                    <a:lnR w="12700" cap="flat" cmpd="sng" algn="ctr">
-                      <a:solidFill>
-                        <a:schemeClr val="tx1"/>
-                      </a:solidFill>
-                      <a:prstDash val="solid"/>
-                      <a:round/>
-                      <a:headEnd type="none" w="med" len="med"/>
-                      <a:tailEnd type="none" w="med" len="med"/>
-                    </a:lnR>
-                    <a:lnT w="12700" cap="flat" cmpd="sng" algn="ctr">
-                      <a:solidFill>
-                        <a:schemeClr val="tx1"/>
-                      </a:solidFill>
-                      <a:prstDash val="solid"/>
-                      <a:round/>
-                      <a:headEnd type="none" w="med" len="med"/>
-                      <a:tailEnd type="none" w="med" len="med"/>
-                    </a:lnT>
-                    <a:lnB w="12700" cap="flat" cmpd="sng" algn="ctr">
-                      <a:solidFill>
-                        <a:schemeClr val="tx1"/>
-                      </a:solidFill>
-                      <a:prstDash val="solid"/>
-                      <a:round/>
-                      <a:headEnd type="none" w="med" len="med"/>
-                      <a:tailEnd type="none" w="med" len="med"/>
-                    </a:lnB>
-                  </a:tcPr>
-                </a:tc>
-                <a:tc>
-                  <a:txBody>
-                    <a:bodyPr/>
-                    <a:lstStyle/>
-                    <a:p>
-                      <a:pPr>
-                        <a:buNone/>
-                      </a:pPr>
-                      <a:r>
-                        <a:rPr lang="ja-JP" altLang="en-US" sz="1000">
-                          <a:latin typeface="BIZ UDゴシック" panose="020B0400000000000000" pitchFamily="49" charset="-128"/>
-                          <a:ea typeface="BIZ UDゴシック" panose="020B0400000000000000" pitchFamily="49" charset="-128"/>
-                        </a:rPr>
-                        <a:t>平行線</a:t>
-                      </a:r>
-                    </a:p>
-                  </a:txBody>
-                  <a:tcPr anchor="ctr">
-                    <a:lnL w="12700" cap="flat" cmpd="sng" algn="ctr">
-                      <a:solidFill>
-                        <a:schemeClr val="tx1"/>
-                      </a:solidFill>
-                      <a:prstDash val="solid"/>
-                      <a:round/>
-                      <a:headEnd type="none" w="med" len="med"/>
-                      <a:tailEnd type="none" w="med" len="med"/>
-                    </a:lnL>
-                    <a:lnR w="12700" cap="flat" cmpd="sng" algn="ctr">
-                      <a:solidFill>
-                        <a:schemeClr val="tx1"/>
-                      </a:solidFill>
-                      <a:prstDash val="solid"/>
-                      <a:round/>
-                      <a:headEnd type="none" w="med" len="med"/>
-                      <a:tailEnd type="none" w="med" len="med"/>
-                    </a:lnR>
-                    <a:lnT w="12700" cap="flat" cmpd="sng" algn="ctr">
-                      <a:solidFill>
-                        <a:schemeClr val="tx1"/>
-                      </a:solidFill>
-                      <a:prstDash val="solid"/>
-                      <a:round/>
-                      <a:headEnd type="none" w="med" len="med"/>
-                      <a:tailEnd type="none" w="med" len="med"/>
-                    </a:lnT>
-                    <a:lnB w="12700" cap="flat" cmpd="sng" algn="ctr">
-                      <a:solidFill>
-                        <a:schemeClr val="tx1"/>
-                      </a:solidFill>
-                      <a:prstDash val="solid"/>
-                      <a:round/>
-                      <a:headEnd type="none" w="med" len="med"/>
-                      <a:tailEnd type="none" w="med" len="med"/>
-                    </a:lnB>
-                  </a:tcPr>
-                </a:tc>
-                <a:tc>
-                  <a:txBody>
-                    <a:bodyPr/>
-                    <a:lstStyle/>
-                    <a:p>
-                      <a:pPr>
-                        <a:buNone/>
-                      </a:pPr>
-                      <a:r>
-                        <a:rPr lang="en-US" sz="1000">
-                          <a:latin typeface="BIZ UDゴシック" panose="020B0400000000000000" pitchFamily="49" charset="-128"/>
-                          <a:ea typeface="BIZ UDゴシック" panose="020B0400000000000000" pitchFamily="49" charset="-128"/>
-                        </a:rPr>
-                        <a:t>#f0f0f0（</a:t>
-                      </a:r>
-                      <a:r>
-                        <a:rPr lang="ja-JP" altLang="en-US" sz="1000">
-                          <a:latin typeface="BIZ UDゴシック" panose="020B0400000000000000" pitchFamily="49" charset="-128"/>
-                          <a:ea typeface="BIZ UDゴシック" panose="020B0400000000000000" pitchFamily="49" charset="-128"/>
-                        </a:rPr>
-                        <a:t>灰）</a:t>
-                      </a:r>
-                    </a:p>
-                  </a:txBody>
-                  <a:tcPr anchor="ctr">
-                    <a:lnL w="12700" cap="flat" cmpd="sng" algn="ctr">
-                      <a:solidFill>
-                        <a:schemeClr val="tx1"/>
-                      </a:solidFill>
-                      <a:prstDash val="solid"/>
-                      <a:round/>
-                      <a:headEnd type="none" w="med" len="med"/>
-                      <a:tailEnd type="none" w="med" len="med"/>
-                    </a:lnL>
-                    <a:lnR w="12700" cap="flat" cmpd="sng" algn="ctr">
-                      <a:solidFill>
-                        <a:schemeClr val="tx1"/>
-                      </a:solidFill>
-                      <a:prstDash val="solid"/>
-                      <a:round/>
-                      <a:headEnd type="none" w="med" len="med"/>
-                      <a:tailEnd type="none" w="med" len="med"/>
-                    </a:lnR>
-                    <a:lnT w="12700" cap="flat" cmpd="sng" algn="ctr">
-                      <a:solidFill>
-                        <a:schemeClr val="tx1"/>
-                      </a:solidFill>
-                      <a:prstDash val="solid"/>
-                      <a:round/>
-                      <a:headEnd type="none" w="med" len="med"/>
-                      <a:tailEnd type="none" w="med" len="med"/>
-                    </a:lnT>
-                    <a:lnB w="12700" cap="flat" cmpd="sng" algn="ctr">
-                      <a:solidFill>
-                        <a:schemeClr val="tx1"/>
-                      </a:solidFill>
-                      <a:prstDash val="solid"/>
-                      <a:round/>
-                      <a:headEnd type="none" w="med" len="med"/>
-                      <a:tailEnd type="none" w="med" len="med"/>
-                    </a:lnB>
-                  </a:tcPr>
-                </a:tc>
-                <a:tc>
-                  <a:txBody>
-                    <a:bodyPr/>
-                    <a:lstStyle/>
-                    <a:p>
-                      <a:pPr>
-                        <a:buNone/>
-                      </a:pPr>
-                      <a:r>
-                        <a:rPr lang="ja-JP" altLang="en-US" sz="1000">
-                          <a:latin typeface="BIZ UDゴシック" panose="020B0400000000000000" pitchFamily="49" charset="-128"/>
-                          <a:ea typeface="BIZ UDゴシック" panose="020B0400000000000000" pitchFamily="49" charset="-128"/>
-                        </a:rPr>
-                        <a:t>状態や設定値</a:t>
-                      </a:r>
-                    </a:p>
-                  </a:txBody>
-                  <a:tcPr anchor="ctr">
-                    <a:lnL w="12700" cap="flat" cmpd="sng" algn="ctr">
-                      <a:solidFill>
-                        <a:schemeClr val="tx1"/>
-                      </a:solidFill>
-                      <a:prstDash val="solid"/>
-                      <a:round/>
-                      <a:headEnd type="none" w="med" len="med"/>
-                      <a:tailEnd type="none" w="med" len="med"/>
-                    </a:lnL>
-                    <a:lnR w="12700" cap="flat" cmpd="sng" algn="ctr">
-                      <a:solidFill>
-                        <a:schemeClr val="tx1"/>
-                      </a:solidFill>
-                      <a:prstDash val="solid"/>
-                      <a:round/>
-                      <a:headEnd type="none" w="med" len="med"/>
-                      <a:tailEnd type="none" w="med" len="med"/>
-                    </a:lnR>
-                    <a:lnT w="12700" cap="flat" cmpd="sng" algn="ctr">
-                      <a:solidFill>
-                        <a:schemeClr val="tx1"/>
-                      </a:solidFill>
-                      <a:prstDash val="solid"/>
-                      <a:round/>
-                      <a:headEnd type="none" w="med" len="med"/>
-                      <a:tailEnd type="none" w="med" len="med"/>
-                    </a:lnT>
-                    <a:lnB w="12700" cap="flat" cmpd="sng" algn="ctr">
-                      <a:solidFill>
-                        <a:schemeClr val="tx1"/>
-                      </a:solidFill>
-                      <a:prstDash val="solid"/>
-                      <a:round/>
-                      <a:headEnd type="none" w="med" len="med"/>
-                      <a:tailEnd type="none" w="med" len="med"/>
-                    </a:lnB>
-                  </a:tcPr>
-                </a:tc>
-                <a:extLst>
-                  <a:ext uri="{0D108BD9-81ED-4DB2-BD59-A6C34878D82A}">
-                    <a16:rowId xmlns:a16="http://schemas.microsoft.com/office/drawing/2014/main" val="1404950358"/>
-                  </a:ext>
-                </a:extLst>
-              </a:tr>
-              <a:tr h="0">
-                <a:tc>
-                  <a:txBody>
-                    <a:bodyPr/>
-                    <a:lstStyle/>
-                    <a:p>
-                      <a:pPr>
-                        <a:buNone/>
-                      </a:pPr>
-                      <a:r>
-                        <a:rPr lang="ja-JP" altLang="en-US" sz="1000">
-                          <a:latin typeface="BIZ UDゴシック" panose="020B0400000000000000" pitchFamily="49" charset="-128"/>
-                          <a:ea typeface="BIZ UDゴシック" panose="020B0400000000000000" pitchFamily="49" charset="-128"/>
-                        </a:rPr>
-                        <a:t>データフロー</a:t>
-                      </a:r>
-                    </a:p>
-                  </a:txBody>
-                  <a:tcPr anchor="ctr">
-                    <a:lnL w="12700" cap="flat" cmpd="sng" algn="ctr">
-                      <a:solidFill>
-                        <a:schemeClr val="tx1"/>
-                      </a:solidFill>
-                      <a:prstDash val="solid"/>
-                      <a:round/>
-                      <a:headEnd type="none" w="med" len="med"/>
-                      <a:tailEnd type="none" w="med" len="med"/>
-                    </a:lnL>
-                    <a:lnR w="12700" cap="flat" cmpd="sng" algn="ctr">
-                      <a:solidFill>
-                        <a:schemeClr val="tx1"/>
-                      </a:solidFill>
-                      <a:prstDash val="solid"/>
-                      <a:round/>
-                      <a:headEnd type="none" w="med" len="med"/>
-                      <a:tailEnd type="none" w="med" len="med"/>
-                    </a:lnR>
-                    <a:lnT w="12700" cap="flat" cmpd="sng" algn="ctr">
-                      <a:solidFill>
-                        <a:schemeClr val="tx1"/>
-                      </a:solidFill>
-                      <a:prstDash val="solid"/>
-                      <a:round/>
-                      <a:headEnd type="none" w="med" len="med"/>
-                      <a:tailEnd type="none" w="med" len="med"/>
-                    </a:lnT>
-                    <a:lnB w="12700" cap="flat" cmpd="sng" algn="ctr">
-                      <a:solidFill>
-                        <a:schemeClr val="tx1"/>
-                      </a:solidFill>
-                      <a:prstDash val="solid"/>
-                      <a:round/>
-                      <a:headEnd type="none" w="med" len="med"/>
-                      <a:tailEnd type="none" w="med" len="med"/>
-                    </a:lnB>
-                  </a:tcPr>
-                </a:tc>
-                <a:tc>
-                  <a:txBody>
-                    <a:bodyPr/>
-                    <a:lstStyle/>
-                    <a:p>
-                      <a:pPr>
-                        <a:buNone/>
-                      </a:pPr>
-                      <a:r>
-                        <a:rPr lang="ja-JP" altLang="en-US" sz="1000">
-                          <a:latin typeface="BIZ UDゴシック" panose="020B0400000000000000" pitchFamily="49" charset="-128"/>
-                          <a:ea typeface="BIZ UDゴシック" panose="020B0400000000000000" pitchFamily="49" charset="-128"/>
-                        </a:rPr>
-                        <a:t>矢印</a:t>
-                      </a:r>
-                    </a:p>
-                  </a:txBody>
-                  <a:tcPr anchor="ctr">
-                    <a:lnL w="12700" cap="flat" cmpd="sng" algn="ctr">
-                      <a:solidFill>
-                        <a:schemeClr val="tx1"/>
-                      </a:solidFill>
-                      <a:prstDash val="solid"/>
-                      <a:round/>
-                      <a:headEnd type="none" w="med" len="med"/>
-                      <a:tailEnd type="none" w="med" len="med"/>
-                    </a:lnL>
-                    <a:lnR w="12700" cap="flat" cmpd="sng" algn="ctr">
-                      <a:solidFill>
-                        <a:schemeClr val="tx1"/>
-                      </a:solidFill>
-                      <a:prstDash val="solid"/>
-                      <a:round/>
-                      <a:headEnd type="none" w="med" len="med"/>
-                      <a:tailEnd type="none" w="med" len="med"/>
-                    </a:lnR>
-                    <a:lnT w="12700" cap="flat" cmpd="sng" algn="ctr">
-                      <a:solidFill>
-                        <a:schemeClr val="tx1"/>
-                      </a:solidFill>
-                      <a:prstDash val="solid"/>
-                      <a:round/>
-                      <a:headEnd type="none" w="med" len="med"/>
-                      <a:tailEnd type="none" w="med" len="med"/>
-                    </a:lnT>
-                    <a:lnB w="12700" cap="flat" cmpd="sng" algn="ctr">
-                      <a:solidFill>
-                        <a:schemeClr val="tx1"/>
-                      </a:solidFill>
-                      <a:prstDash val="solid"/>
-                      <a:round/>
-                      <a:headEnd type="none" w="med" len="med"/>
-                      <a:tailEnd type="none" w="med" len="med"/>
-                    </a:lnB>
-                  </a:tcPr>
-                </a:tc>
-                <a:tc>
-                  <a:txBody>
-                    <a:bodyPr/>
-                    <a:lstStyle/>
-                    <a:p>
-                      <a:pPr>
-                        <a:buNone/>
-                      </a:pPr>
-                      <a:r>
-                        <a:rPr lang="ja-JP" altLang="en-US" sz="1000">
-                          <a:latin typeface="BIZ UDゴシック" panose="020B0400000000000000" pitchFamily="49" charset="-128"/>
-                          <a:ea typeface="BIZ UDゴシック" panose="020B0400000000000000" pitchFamily="49" charset="-128"/>
-                        </a:rPr>
-                        <a:t>黒 </a:t>
-                      </a:r>
-                      <a:r>
-                        <a:rPr lang="en-US" sz="1000">
-                          <a:latin typeface="BIZ UDゴシック" panose="020B0400000000000000" pitchFamily="49" charset="-128"/>
-                          <a:ea typeface="BIZ UDゴシック" panose="020B0400000000000000" pitchFamily="49" charset="-128"/>
-                        </a:rPr>
-                        <a:t>or </a:t>
-                      </a:r>
-                      <a:r>
-                        <a:rPr lang="ja-JP" altLang="en-US" sz="1000">
-                          <a:latin typeface="BIZ UDゴシック" panose="020B0400000000000000" pitchFamily="49" charset="-128"/>
-                          <a:ea typeface="BIZ UDゴシック" panose="020B0400000000000000" pitchFamily="49" charset="-128"/>
-                        </a:rPr>
-                        <a:t>濃青</a:t>
-                      </a:r>
-                    </a:p>
-                  </a:txBody>
-                  <a:tcPr anchor="ctr">
-                    <a:lnL w="12700" cap="flat" cmpd="sng" algn="ctr">
-                      <a:solidFill>
-                        <a:schemeClr val="tx1"/>
-                      </a:solidFill>
-                      <a:prstDash val="solid"/>
-                      <a:round/>
-                      <a:headEnd type="none" w="med" len="med"/>
-                      <a:tailEnd type="none" w="med" len="med"/>
-                    </a:lnL>
-                    <a:lnR w="12700" cap="flat" cmpd="sng" algn="ctr">
-                      <a:solidFill>
-                        <a:schemeClr val="tx1"/>
-                      </a:solidFill>
-                      <a:prstDash val="solid"/>
-                      <a:round/>
-                      <a:headEnd type="none" w="med" len="med"/>
-                      <a:tailEnd type="none" w="med" len="med"/>
-                    </a:lnR>
-                    <a:lnT w="12700" cap="flat" cmpd="sng" algn="ctr">
-                      <a:solidFill>
-                        <a:schemeClr val="tx1"/>
-                      </a:solidFill>
-                      <a:prstDash val="solid"/>
-                      <a:round/>
-                      <a:headEnd type="none" w="med" len="med"/>
-                      <a:tailEnd type="none" w="med" len="med"/>
-                    </a:lnT>
-                    <a:lnB w="12700" cap="flat" cmpd="sng" algn="ctr">
-                      <a:solidFill>
-                        <a:schemeClr val="tx1"/>
-                      </a:solidFill>
-                      <a:prstDash val="solid"/>
-                      <a:round/>
-                      <a:headEnd type="none" w="med" len="med"/>
-                      <a:tailEnd type="none" w="med" len="med"/>
-                    </a:lnB>
-                  </a:tcPr>
-                </a:tc>
-                <a:tc>
-                  <a:txBody>
-                    <a:bodyPr/>
-                    <a:lstStyle/>
-                    <a:p>
-                      <a:pPr>
-                        <a:buNone/>
-                      </a:pPr>
-                      <a:r>
-                        <a:rPr lang="ja-JP" altLang="en-US" sz="1000">
-                          <a:latin typeface="BIZ UDゴシック" panose="020B0400000000000000" pitchFamily="49" charset="-128"/>
-                          <a:ea typeface="BIZ UDゴシック" panose="020B0400000000000000" pitchFamily="49" charset="-128"/>
-                        </a:rPr>
-                        <a:t>データ流向を明確に</a:t>
-                      </a:r>
-                    </a:p>
-                  </a:txBody>
-                  <a:tcPr anchor="ctr">
-                    <a:lnL w="12700" cap="flat" cmpd="sng" algn="ctr">
-                      <a:solidFill>
-                        <a:schemeClr val="tx1"/>
-                      </a:solidFill>
-                      <a:prstDash val="solid"/>
-                      <a:round/>
-                      <a:headEnd type="none" w="med" len="med"/>
-                      <a:tailEnd type="none" w="med" len="med"/>
-                    </a:lnL>
-                    <a:lnR w="12700" cap="flat" cmpd="sng" algn="ctr">
-                      <a:solidFill>
-                        <a:schemeClr val="tx1"/>
-                      </a:solidFill>
-                      <a:prstDash val="solid"/>
-                      <a:round/>
-                      <a:headEnd type="none" w="med" len="med"/>
-                      <a:tailEnd type="none" w="med" len="med"/>
-                    </a:lnR>
-                    <a:lnT w="12700" cap="flat" cmpd="sng" algn="ctr">
-                      <a:solidFill>
-                        <a:schemeClr val="tx1"/>
-                      </a:solidFill>
-                      <a:prstDash val="solid"/>
-                      <a:round/>
-                      <a:headEnd type="none" w="med" len="med"/>
-                      <a:tailEnd type="none" w="med" len="med"/>
-                    </a:lnT>
-                    <a:lnB w="12700" cap="flat" cmpd="sng" algn="ctr">
-                      <a:solidFill>
-                        <a:schemeClr val="tx1"/>
-                      </a:solidFill>
-                      <a:prstDash val="solid"/>
-                      <a:round/>
-                      <a:headEnd type="none" w="med" len="med"/>
-                      <a:tailEnd type="none" w="med" len="med"/>
-                    </a:lnB>
-                  </a:tcPr>
-                </a:tc>
-                <a:extLst>
-                  <a:ext uri="{0D108BD9-81ED-4DB2-BD59-A6C34878D82A}">
-                    <a16:rowId xmlns:a16="http://schemas.microsoft.com/office/drawing/2014/main" val="600235835"/>
-                  </a:ext>
-                </a:extLst>
-              </a:tr>
-              <a:tr h="0">
-                <a:tc>
-                  <a:txBody>
-                    <a:bodyPr/>
-                    <a:lstStyle/>
-                    <a:p>
-                      <a:pPr>
-                        <a:buNone/>
-                      </a:pPr>
-                      <a:r>
-                        <a:rPr lang="ja-JP" altLang="en-US" sz="1000">
-                          <a:latin typeface="BIZ UDゴシック" panose="020B0400000000000000" pitchFamily="49" charset="-128"/>
-                          <a:ea typeface="BIZ UDゴシック" panose="020B0400000000000000" pitchFamily="49" charset="-128"/>
-                        </a:rPr>
-                        <a:t>テキストラベル</a:t>
-                      </a:r>
-                    </a:p>
-                  </a:txBody>
-                  <a:tcPr anchor="ctr">
-                    <a:lnL w="12700" cap="flat" cmpd="sng" algn="ctr">
-                      <a:solidFill>
-                        <a:schemeClr val="tx1"/>
-                      </a:solidFill>
-                      <a:prstDash val="solid"/>
-                      <a:round/>
-                      <a:headEnd type="none" w="med" len="med"/>
-                      <a:tailEnd type="none" w="med" len="med"/>
-                    </a:lnL>
-                    <a:lnR w="12700" cap="flat" cmpd="sng" algn="ctr">
-                      <a:solidFill>
-                        <a:schemeClr val="tx1"/>
-                      </a:solidFill>
-                      <a:prstDash val="solid"/>
-                      <a:round/>
-                      <a:headEnd type="none" w="med" len="med"/>
-                      <a:tailEnd type="none" w="med" len="med"/>
-                    </a:lnR>
-                    <a:lnT w="12700" cap="flat" cmpd="sng" algn="ctr">
-                      <a:solidFill>
-                        <a:schemeClr val="tx1"/>
-                      </a:solidFill>
-                      <a:prstDash val="solid"/>
-                      <a:round/>
-                      <a:headEnd type="none" w="med" len="med"/>
-                      <a:tailEnd type="none" w="med" len="med"/>
-                    </a:lnT>
-                    <a:lnB w="12700" cap="flat" cmpd="sng" algn="ctr">
-                      <a:solidFill>
-                        <a:schemeClr val="tx1"/>
-                      </a:solidFill>
-                      <a:prstDash val="solid"/>
-                      <a:round/>
-                      <a:headEnd type="none" w="med" len="med"/>
-                      <a:tailEnd type="none" w="med" len="med"/>
-                    </a:lnB>
-                  </a:tcPr>
-                </a:tc>
-                <a:tc>
-                  <a:txBody>
-                    <a:bodyPr/>
-                    <a:lstStyle/>
-                    <a:p>
-                      <a:pPr>
-                        <a:buNone/>
-                      </a:pPr>
-                      <a:r>
-                        <a:rPr lang="ja-JP" altLang="en-US" sz="1000">
-                          <a:latin typeface="BIZ UDゴシック" panose="020B0400000000000000" pitchFamily="49" charset="-128"/>
-                          <a:ea typeface="BIZ UDゴシック" panose="020B0400000000000000" pitchFamily="49" charset="-128"/>
-                        </a:rPr>
-                        <a:t>通常テキスト</a:t>
-                      </a:r>
-                    </a:p>
-                  </a:txBody>
-                  <a:tcPr anchor="ctr">
-                    <a:lnL w="12700" cap="flat" cmpd="sng" algn="ctr">
-                      <a:solidFill>
-                        <a:schemeClr val="tx1"/>
-                      </a:solidFill>
-                      <a:prstDash val="solid"/>
-                      <a:round/>
-                      <a:headEnd type="none" w="med" len="med"/>
-                      <a:tailEnd type="none" w="med" len="med"/>
-                    </a:lnL>
-                    <a:lnR w="12700" cap="flat" cmpd="sng" algn="ctr">
-                      <a:solidFill>
-                        <a:schemeClr val="tx1"/>
-                      </a:solidFill>
-                      <a:prstDash val="solid"/>
-                      <a:round/>
-                      <a:headEnd type="none" w="med" len="med"/>
-                      <a:tailEnd type="none" w="med" len="med"/>
-                    </a:lnR>
-                    <a:lnT w="12700" cap="flat" cmpd="sng" algn="ctr">
-                      <a:solidFill>
-                        <a:schemeClr val="tx1"/>
-                      </a:solidFill>
-                      <a:prstDash val="solid"/>
-                      <a:round/>
-                      <a:headEnd type="none" w="med" len="med"/>
-                      <a:tailEnd type="none" w="med" len="med"/>
-                    </a:lnT>
-                    <a:lnB w="12700" cap="flat" cmpd="sng" algn="ctr">
-                      <a:solidFill>
-                        <a:schemeClr val="tx1"/>
-                      </a:solidFill>
-                      <a:prstDash val="solid"/>
-                      <a:round/>
-                      <a:headEnd type="none" w="med" len="med"/>
-                      <a:tailEnd type="none" w="med" len="med"/>
-                    </a:lnB>
-                  </a:tcPr>
-                </a:tc>
-                <a:tc>
-                  <a:txBody>
-                    <a:bodyPr/>
-                    <a:lstStyle/>
-                    <a:p>
-                      <a:pPr>
-                        <a:buNone/>
-                      </a:pPr>
-                      <a:r>
-                        <a:rPr lang="en-US" altLang="ja-JP" sz="1000">
-                          <a:latin typeface="BIZ UDゴシック" panose="020B0400000000000000" pitchFamily="49" charset="-128"/>
-                          <a:ea typeface="BIZ UDゴシック" panose="020B0400000000000000" pitchFamily="49" charset="-128"/>
-                        </a:rPr>
-                        <a:t>#333</a:t>
-                      </a:r>
-                    </a:p>
-                  </a:txBody>
-                  <a:tcPr anchor="ctr">
-                    <a:lnL w="12700" cap="flat" cmpd="sng" algn="ctr">
-                      <a:solidFill>
-                        <a:schemeClr val="tx1"/>
-                      </a:solidFill>
-                      <a:prstDash val="solid"/>
-                      <a:round/>
-                      <a:headEnd type="none" w="med" len="med"/>
-                      <a:tailEnd type="none" w="med" len="med"/>
-                    </a:lnL>
-                    <a:lnR w="12700" cap="flat" cmpd="sng" algn="ctr">
-                      <a:solidFill>
-                        <a:schemeClr val="tx1"/>
-                      </a:solidFill>
-                      <a:prstDash val="solid"/>
-                      <a:round/>
-                      <a:headEnd type="none" w="med" len="med"/>
-                      <a:tailEnd type="none" w="med" len="med"/>
-                    </a:lnR>
-                    <a:lnT w="12700" cap="flat" cmpd="sng" algn="ctr">
-                      <a:solidFill>
-                        <a:schemeClr val="tx1"/>
-                      </a:solidFill>
-                      <a:prstDash val="solid"/>
-                      <a:round/>
-                      <a:headEnd type="none" w="med" len="med"/>
-                      <a:tailEnd type="none" w="med" len="med"/>
-                    </a:lnT>
-                    <a:lnB w="12700" cap="flat" cmpd="sng" algn="ctr">
-                      <a:solidFill>
-                        <a:schemeClr val="tx1"/>
-                      </a:solidFill>
-                      <a:prstDash val="solid"/>
-                      <a:round/>
-                      <a:headEnd type="none" w="med" len="med"/>
-                      <a:tailEnd type="none" w="med" len="med"/>
-                    </a:lnB>
-                  </a:tcPr>
-                </a:tc>
-                <a:tc>
-                  <a:txBody>
-                    <a:bodyPr/>
-                    <a:lstStyle/>
-                    <a:p>
-                      <a:pPr>
-                        <a:buNone/>
-                      </a:pPr>
-                      <a:r>
-                        <a:rPr lang="ja-JP" altLang="en-US" sz="1000">
-                          <a:latin typeface="BIZ UDゴシック" panose="020B0400000000000000" pitchFamily="49" charset="-128"/>
-                          <a:ea typeface="BIZ UDゴシック" panose="020B0400000000000000" pitchFamily="49" charset="-128"/>
-                        </a:rPr>
-                        <a:t>矢印ラベルを小さく記載</a:t>
-                      </a:r>
-                    </a:p>
-                  </a:txBody>
-                  <a:tcPr anchor="ctr">
-                    <a:lnL w="12700" cap="flat" cmpd="sng" algn="ctr">
-                      <a:solidFill>
-                        <a:schemeClr val="tx1"/>
-                      </a:solidFill>
-                      <a:prstDash val="solid"/>
-                      <a:round/>
-                      <a:headEnd type="none" w="med" len="med"/>
-                      <a:tailEnd type="none" w="med" len="med"/>
-                    </a:lnL>
-                    <a:lnR w="12700" cap="flat" cmpd="sng" algn="ctr">
-                      <a:solidFill>
-                        <a:schemeClr val="tx1"/>
-                      </a:solidFill>
-                      <a:prstDash val="solid"/>
-                      <a:round/>
-                      <a:headEnd type="none" w="med" len="med"/>
-                      <a:tailEnd type="none" w="med" len="med"/>
-                    </a:lnR>
-                    <a:lnT w="12700" cap="flat" cmpd="sng" algn="ctr">
-                      <a:solidFill>
-                        <a:schemeClr val="tx1"/>
-                      </a:solidFill>
-                      <a:prstDash val="solid"/>
-                      <a:round/>
-                      <a:headEnd type="none" w="med" len="med"/>
-                      <a:tailEnd type="none" w="med" len="med"/>
-                    </a:lnT>
-                    <a:lnB w="12700" cap="flat" cmpd="sng" algn="ctr">
-                      <a:solidFill>
-                        <a:schemeClr val="tx1"/>
-                      </a:solidFill>
-                      <a:prstDash val="solid"/>
-                      <a:round/>
-                      <a:headEnd type="none" w="med" len="med"/>
-                      <a:tailEnd type="none" w="med" len="med"/>
-                    </a:lnB>
-                  </a:tcPr>
-                </a:tc>
-                <a:extLst>
-                  <a:ext uri="{0D108BD9-81ED-4DB2-BD59-A6C34878D82A}">
-                    <a16:rowId xmlns:a16="http://schemas.microsoft.com/office/drawing/2014/main" val="854777006"/>
-                  </a:ext>
-                </a:extLst>
-              </a:tr>
-            </a:tbl>
-          </a:graphicData>
-        </a:graphic>
-      </p:graphicFrame>
-      <p:sp>
-        <p:nvSpPr>
-          <p:cNvPr id="18" name="テキスト ボックス 17">
-            <a:extLst>
-              <a:ext uri="{FF2B5EF4-FFF2-40B4-BE49-F238E27FC236}">
-                <a16:creationId xmlns:a16="http://schemas.microsoft.com/office/drawing/2014/main" id="{51372607-C7CB-9D86-3876-3BB0C63D1BB8}"/>
-              </a:ext>
-            </a:extLst>
-          </p:cNvPr>
-          <p:cNvSpPr txBox="1"/>
-          <p:nvPr/>
-        </p:nvSpPr>
-        <p:spPr>
-          <a:xfrm>
-            <a:off x="4861256" y="4899581"/>
-            <a:ext cx="4522622" cy="276999"/>
-          </a:xfrm>
-          <a:prstGeom prst="rect">
-            <a:avLst/>
-          </a:prstGeom>
-          <a:solidFill>
-            <a:schemeClr val="accent6">
-              <a:lumMod val="20000"/>
-              <a:lumOff val="80000"/>
-            </a:schemeClr>
-          </a:solidFill>
-        </p:spPr>
-        <p:txBody>
-          <a:bodyPr wrap="square">
-            <a:spAutoFit/>
-          </a:bodyPr>
-          <a:lstStyle/>
-          <a:p>
-            <a:r>
-              <a:rPr lang="ja-JP" altLang="en-US" sz="1200">
-                <a:solidFill>
-                  <a:schemeClr val="accent6">
-                    <a:lumMod val="75000"/>
-                  </a:schemeClr>
-                </a:solidFill>
-                <a:latin typeface="BIZ UDゴシック" panose="020B0400000000000000" pitchFamily="49" charset="-128"/>
-                <a:ea typeface="BIZ UDゴシック" panose="020B0400000000000000" pitchFamily="49" charset="-128"/>
-              </a:rPr>
-              <a:t>参考ファイル構造（</a:t>
-            </a:r>
-            <a:r>
-              <a:rPr lang="en-US" altLang="ja-JP" sz="1200">
-                <a:solidFill>
-                  <a:schemeClr val="accent6">
-                    <a:lumMod val="75000"/>
-                  </a:schemeClr>
-                </a:solidFill>
-                <a:latin typeface="BIZ UDゴシック" panose="020B0400000000000000" pitchFamily="49" charset="-128"/>
-                <a:ea typeface="BIZ UDゴシック" panose="020B0400000000000000" pitchFamily="49" charset="-128"/>
-              </a:rPr>
-              <a:t>Draw.io</a:t>
-            </a:r>
-            <a:r>
-              <a:rPr lang="ja-JP" altLang="en-US" sz="1200">
-                <a:solidFill>
-                  <a:schemeClr val="accent6">
-                    <a:lumMod val="75000"/>
-                  </a:schemeClr>
-                </a:solidFill>
-                <a:latin typeface="BIZ UDゴシック" panose="020B0400000000000000" pitchFamily="49" charset="-128"/>
-                <a:ea typeface="BIZ UDゴシック" panose="020B0400000000000000" pitchFamily="49" charset="-128"/>
-              </a:rPr>
-              <a:t>保存用の命名）</a:t>
-            </a:r>
-            <a:endParaRPr lang="en-US" altLang="ja-JP" sz="1200">
-              <a:solidFill>
-                <a:schemeClr val="accent6">
-                  <a:lumMod val="75000"/>
-                </a:schemeClr>
-              </a:solidFill>
-              <a:latin typeface="BIZ UDゴシック" panose="020B0400000000000000" pitchFamily="49" charset="-128"/>
-              <a:ea typeface="BIZ UDゴシック" panose="020B0400000000000000" pitchFamily="49" charset="-128"/>
-            </a:endParaRPr>
-          </a:p>
-        </p:txBody>
-      </p:sp>
-      <p:sp>
-        <p:nvSpPr>
-          <p:cNvPr id="21" name="テキスト ボックス 20">
-            <a:extLst>
-              <a:ext uri="{FF2B5EF4-FFF2-40B4-BE49-F238E27FC236}">
-                <a16:creationId xmlns:a16="http://schemas.microsoft.com/office/drawing/2014/main" id="{4A2E0BCE-A2C7-1272-85F1-D239A8805AD3}"/>
-              </a:ext>
-            </a:extLst>
-          </p:cNvPr>
-          <p:cNvSpPr txBox="1"/>
-          <p:nvPr/>
-        </p:nvSpPr>
-        <p:spPr>
-          <a:xfrm>
-            <a:off x="4789627" y="5275141"/>
-            <a:ext cx="4594251" cy="769441"/>
-          </a:xfrm>
-          <a:prstGeom prst="rect">
-            <a:avLst/>
-          </a:prstGeom>
-          <a:noFill/>
-        </p:spPr>
-        <p:txBody>
-          <a:bodyPr wrap="square">
-            <a:spAutoFit/>
-          </a:bodyPr>
-          <a:lstStyle/>
-          <a:p>
-            <a:r>
-              <a:rPr lang="ja-JP" altLang="en-US" sz="1100">
-                <a:latin typeface="BIZ UDゴシック" panose="020B0400000000000000" pitchFamily="49" charset="-128"/>
-                <a:ea typeface="BIZ UDゴシック" panose="020B0400000000000000" pitchFamily="49" charset="-128"/>
-              </a:rPr>
-              <a:t>battery_temp_control/</a:t>
-            </a:r>
-          </a:p>
-          <a:p>
-            <a:r>
-              <a:rPr lang="ja-JP" altLang="en-US" sz="1100">
-                <a:latin typeface="BIZ UDゴシック" panose="020B0400000000000000" pitchFamily="49" charset="-128"/>
-                <a:ea typeface="BIZ UDゴシック" panose="020B0400000000000000" pitchFamily="49" charset="-128"/>
-              </a:rPr>
-              <a:t> ├── uml_state_transition.drawio</a:t>
-            </a:r>
-          </a:p>
-          <a:p>
-            <a:r>
-              <a:rPr lang="ja-JP" altLang="en-US" sz="1100">
-                <a:latin typeface="BIZ UDゴシック" panose="020B0400000000000000" pitchFamily="49" charset="-128"/>
-                <a:ea typeface="BIZ UDゴシック" panose="020B0400000000000000" pitchFamily="49" charset="-128"/>
-              </a:rPr>
-              <a:t> ├── dfd_level0.drawio</a:t>
-            </a:r>
-          </a:p>
-          <a:p>
-            <a:r>
-              <a:rPr lang="ja-JP" altLang="en-US" sz="1100">
-                <a:latin typeface="BIZ UDゴシック" panose="020B0400000000000000" pitchFamily="49" charset="-128"/>
-                <a:ea typeface="BIZ UDゴシック" panose="020B0400000000000000" pitchFamily="49" charset="-128"/>
-              </a:rPr>
-              <a:t> └── dfd_level1_detail.drawio</a:t>
-            </a:r>
-          </a:p>
-        </p:txBody>
-      </p:sp>
-      <p:sp>
-        <p:nvSpPr>
-          <p:cNvPr id="4" name="スライド番号プレースホルダー 3">
-            <a:extLst>
-              <a:ext uri="{FF2B5EF4-FFF2-40B4-BE49-F238E27FC236}">
-                <a16:creationId xmlns:a16="http://schemas.microsoft.com/office/drawing/2014/main" id="{B196FD99-E727-8593-EA6C-D45AA8363890}"/>
-              </a:ext>
-            </a:extLst>
-          </p:cNvPr>
-          <p:cNvSpPr>
-            <a:spLocks noGrp="1"/>
-          </p:cNvSpPr>
-          <p:nvPr>
-            <p:ph type="sldNum" sz="quarter" idx="12"/>
-          </p:nvPr>
-        </p:nvSpPr>
-        <p:spPr/>
-        <p:txBody>
-          <a:bodyPr/>
-          <a:lstStyle/>
-          <a:p>
-            <a:fld id="{A99D720A-4AD5-4DCF-885F-DE5297996123}" type="slidenum">
-              <a:rPr kumimoji="1" lang="ja-JP" altLang="en-US" smtClean="0"/>
-              <a:t>5</a:t>
-            </a:fld>
-            <a:endParaRPr kumimoji="1" lang="ja-JP" altLang="en-US"/>
-          </a:p>
-        </p:txBody>
-      </p:sp>
-    </p:spTree>
-    <p:extLst>
-      <p:ext uri="{BB962C8B-B14F-4D97-AF65-F5344CB8AC3E}">
-        <p14:creationId xmlns:p14="http://schemas.microsoft.com/office/powerpoint/2010/main" val="116261769"/>
-      </p:ext>
-    </p:extLst>
-  </p:cSld>
-  <p:clrMapOvr>
-    <a:masterClrMapping/>
-  </p:clrMapOvr>
-</p:sld>
-</file>
-
-<file path=ppt/slides/slide6.xml><?xml version="1.0" encoding="utf-8"?>
+<file path=ppt/slides/slide4.xml><?xml version="1.0" encoding="utf-8"?>
 <p:sld xmlns:a="http://schemas.openxmlformats.org/drawingml/2006/main" xmlns:r="http://schemas.openxmlformats.org/officeDocument/2006/relationships" xmlns:p="http://schemas.openxmlformats.org/presentationml/2006/main">
   <p:cSld>
     <p:spTree>
@@ -18186,7 +10238,7 @@
           <a:p>
             <a:fld id="{A99D720A-4AD5-4DCF-885F-DE5297996123}" type="slidenum">
               <a:rPr kumimoji="1" lang="ja-JP" altLang="en-US" smtClean="0"/>
-              <a:t>6</a:t>
+              <a:t>4</a:t>
             </a:fld>
             <a:endParaRPr kumimoji="1" lang="ja-JP" altLang="en-US"/>
           </a:p>
@@ -19672,14 +11724,14 @@
           <p:nvPr>
             <p:extLst>
               <p:ext uri="{D42A27DB-BD31-4B8C-83A1-F6EECF244321}">
-                <p14:modId xmlns:p14="http://schemas.microsoft.com/office/powerpoint/2010/main" val="440778988"/>
+                <p14:modId xmlns:p14="http://schemas.microsoft.com/office/powerpoint/2010/main" val="2618716619"/>
               </p:ext>
             </p:extLst>
           </p:nvPr>
         </p:nvGraphicFramePr>
         <p:xfrm>
           <a:off x="673768" y="3429000"/>
-          <a:ext cx="10070940" cy="1828800"/>
+          <a:ext cx="10187926" cy="1828800"/>
         </p:xfrm>
         <a:graphic>
           <a:graphicData uri="http://schemas.openxmlformats.org/drawingml/2006/table">
@@ -19688,34 +11740,41 @@
                 <a:tableStyleId>{912C8C85-51F0-491E-9774-3900AFEF0FD7}</a:tableStyleId>
               </a:tblPr>
               <a:tblGrid>
-                <a:gridCol w="2944075">
+                <a:gridCol w="2844000">
                   <a:extLst>
                     <a:ext uri="{9D8B030D-6E8A-4147-A177-3AD203B41FA5}">
                       <a16:colId xmlns:a16="http://schemas.microsoft.com/office/drawing/2014/main" val="6935548"/>
                     </a:ext>
                   </a:extLst>
                 </a:gridCol>
-                <a:gridCol w="1769166">
+                <a:gridCol w="1656000">
                   <a:extLst>
                     <a:ext uri="{9D8B030D-6E8A-4147-A177-3AD203B41FA5}">
                       <a16:colId xmlns:a16="http://schemas.microsoft.com/office/drawing/2014/main" val="2184599737"/>
                     </a:ext>
                   </a:extLst>
                 </a:gridCol>
-                <a:gridCol w="1548079">
+                <a:gridCol w="1087884">
                   <a:extLst>
                     <a:ext uri="{9D8B030D-6E8A-4147-A177-3AD203B41FA5}">
                       <a16:colId xmlns:a16="http://schemas.microsoft.com/office/drawing/2014/main" val="2311469129"/>
                     </a:ext>
                   </a:extLst>
                 </a:gridCol>
-                <a:gridCol w="3809620">
+                <a:gridCol w="1836000">
                   <a:extLst>
                     <a:ext uri="{9D8B030D-6E8A-4147-A177-3AD203B41FA5}">
                       <a16:colId xmlns:a16="http://schemas.microsoft.com/office/drawing/2014/main" val="754341625"/>
                     </a:ext>
                   </a:extLst>
                 </a:gridCol>
+                <a:gridCol w="2764042">
+                  <a:extLst>
+                    <a:ext uri="{9D8B030D-6E8A-4147-A177-3AD203B41FA5}">
+                      <a16:colId xmlns:a16="http://schemas.microsoft.com/office/drawing/2014/main" val="2787858532"/>
+                    </a:ext>
+                  </a:extLst>
+                </a:gridCol>
               </a:tblGrid>
               <a:tr h="0">
                 <a:tc>
@@ -19899,7 +11958,63 @@
                           <a:latin typeface="BIZ UDゴシック" panose="020B0400000000000000" pitchFamily="49" charset="-128"/>
                           <a:ea typeface="BIZ UDゴシック" panose="020B0400000000000000" pitchFamily="49" charset="-128"/>
                         </a:rPr>
-                        <a:t>備考</a:t>
+                        <a:t>戻り値</a:t>
+                      </a:r>
+                    </a:p>
+                  </a:txBody>
+                  <a:tcPr anchor="ctr">
+                    <a:lnL w="12700" cap="flat" cmpd="sng" algn="ctr">
+                      <a:solidFill>
+                        <a:schemeClr val="tx1"/>
+                      </a:solidFill>
+                      <a:prstDash val="solid"/>
+                      <a:round/>
+                      <a:headEnd type="none" w="med" len="med"/>
+                      <a:tailEnd type="none" w="med" len="med"/>
+                    </a:lnL>
+                    <a:lnR w="12700" cap="flat" cmpd="sng" algn="ctr">
+                      <a:solidFill>
+                        <a:schemeClr val="tx1"/>
+                      </a:solidFill>
+                      <a:prstDash val="solid"/>
+                      <a:round/>
+                      <a:headEnd type="none" w="med" len="med"/>
+                      <a:tailEnd type="none" w="med" len="med"/>
+                    </a:lnR>
+                    <a:lnT w="12700" cap="flat" cmpd="sng" algn="ctr">
+                      <a:solidFill>
+                        <a:schemeClr val="tx1"/>
+                      </a:solidFill>
+                      <a:prstDash val="solid"/>
+                      <a:round/>
+                      <a:headEnd type="none" w="med" len="med"/>
+                      <a:tailEnd type="none" w="med" len="med"/>
+                    </a:lnT>
+                    <a:lnB w="12700" cap="flat" cmpd="sng" algn="ctr">
+                      <a:solidFill>
+                        <a:schemeClr val="tx1"/>
+                      </a:solidFill>
+                      <a:prstDash val="solid"/>
+                      <a:round/>
+                      <a:headEnd type="none" w="med" len="med"/>
+                      <a:tailEnd type="none" w="med" len="med"/>
+                    </a:lnB>
+                  </a:tcPr>
+                </a:tc>
+                <a:tc>
+                  <a:txBody>
+                    <a:bodyPr/>
+                    <a:lstStyle/>
+                    <a:p>
+                      <a:pPr>
+                        <a:buNone/>
+                      </a:pPr>
+                      <a:r>
+                        <a:rPr lang="ja-JP" altLang="en-US" sz="1400">
+                          <a:latin typeface="BIZ UDゴシック" panose="020B0400000000000000" pitchFamily="49" charset="-128"/>
+                          <a:ea typeface="BIZ UDゴシック" panose="020B0400000000000000" pitchFamily="49" charset="-128"/>
+                        </a:rPr>
+                        <a:t>引数</a:t>
                       </a:r>
                     </a:p>
                   </a:txBody>
@@ -20137,13 +12252,84 @@
                       <a:pPr>
                         <a:buNone/>
                       </a:pPr>
-                      <a:r>
-                        <a:rPr lang="ja-JP" altLang="en-US" sz="1400">
-                          <a:latin typeface="BIZ UDゴシック" panose="020B0400000000000000" pitchFamily="49" charset="-128"/>
-                          <a:ea typeface="BIZ UDゴシック" panose="020B0400000000000000" pitchFamily="49" charset="-128"/>
-                        </a:rPr>
-                        <a:t>状態遷移</a:t>
-                      </a:r>
+                      <a:endParaRPr lang="ja-JP" altLang="en-US" sz="1400">
+                        <a:latin typeface="BIZ UDゴシック" panose="020B0400000000000000" pitchFamily="49" charset="-128"/>
+                        <a:ea typeface="BIZ UDゴシック" panose="020B0400000000000000" pitchFamily="49" charset="-128"/>
+                      </a:endParaRPr>
+                    </a:p>
+                  </a:txBody>
+                  <a:tcPr anchor="ctr">
+                    <a:lnL w="12700" cap="flat" cmpd="sng" algn="ctr">
+                      <a:solidFill>
+                        <a:schemeClr val="tx1"/>
+                      </a:solidFill>
+                      <a:prstDash val="solid"/>
+                      <a:round/>
+                      <a:headEnd type="none" w="med" len="med"/>
+                      <a:tailEnd type="none" w="med" len="med"/>
+                    </a:lnL>
+                    <a:lnR w="12700" cap="flat" cmpd="sng" algn="ctr">
+                      <a:solidFill>
+                        <a:schemeClr val="tx1"/>
+                      </a:solidFill>
+                      <a:prstDash val="solid"/>
+                      <a:round/>
+                      <a:headEnd type="none" w="med" len="med"/>
+                      <a:tailEnd type="none" w="med" len="med"/>
+                    </a:lnR>
+                    <a:lnT w="12700" cap="flat" cmpd="sng" algn="ctr">
+                      <a:solidFill>
+                        <a:schemeClr val="tx1"/>
+                      </a:solidFill>
+                      <a:prstDash val="solid"/>
+                      <a:round/>
+                      <a:headEnd type="none" w="med" len="med"/>
+                      <a:tailEnd type="none" w="med" len="med"/>
+                    </a:lnT>
+                    <a:lnB w="12700" cap="flat" cmpd="sng" algn="ctr">
+                      <a:solidFill>
+                        <a:schemeClr val="tx1"/>
+                      </a:solidFill>
+                      <a:prstDash val="solid"/>
+                      <a:round/>
+                      <a:headEnd type="none" w="med" len="med"/>
+                      <a:tailEnd type="none" w="med" len="med"/>
+                    </a:lnB>
+                  </a:tcPr>
+                </a:tc>
+                <a:tc>
+                  <a:txBody>
+                    <a:bodyPr/>
+                    <a:lstStyle/>
+                    <a:p>
+                      <a:pPr marL="0" marR="0" lvl="0" indent="0" algn="l" defTabSz="914400" rtl="0" eaLnBrk="1" fontAlgn="auto" latinLnBrk="0" hangingPunct="1">
+                        <a:lnSpc>
+                          <a:spcPct val="100000"/>
+                        </a:lnSpc>
+                        <a:spcBef>
+                          <a:spcPts val="0"/>
+                        </a:spcBef>
+                        <a:spcAft>
+                          <a:spcPts val="0"/>
+                        </a:spcAft>
+                        <a:buClrTx/>
+                        <a:buSzTx/>
+                        <a:buFontTx/>
+                        <a:buNone/>
+                        <a:tabLst/>
+                        <a:defRPr/>
+                      </a:pPr>
+                      <a:r>
+                        <a:rPr lang="en-US" altLang="ja-JP" sz="1400">
+                          <a:latin typeface="BIZ UDゴシック" panose="020B0400000000000000" pitchFamily="49" charset="-128"/>
+                          <a:ea typeface="BIZ UDゴシック" panose="020B0400000000000000" pitchFamily="49" charset="-128"/>
+                        </a:rPr>
+                        <a:t>param:temperature_params.py</a:t>
+                      </a:r>
+                      <a:endParaRPr lang="ja-JP" altLang="en-US" sz="1400">
+                        <a:latin typeface="BIZ UDゴシック" panose="020B0400000000000000" pitchFamily="49" charset="-128"/>
+                        <a:ea typeface="BIZ UDゴシック" panose="020B0400000000000000" pitchFamily="49" charset="-128"/>
+                      </a:endParaRPr>
                     </a:p>
                   </a:txBody>
                   <a:tcPr anchor="ctr">
@@ -20200,6 +12386,13 @@
                       <a:pPr>
                         <a:buNone/>
                       </a:pPr>
+                      <a:r>
+                        <a:rPr lang="en-US" altLang="ja-JP" sz="1400">
+                          <a:latin typeface="BIZ UDゴシック" panose="020B0400000000000000" pitchFamily="49" charset="-128"/>
+                          <a:ea typeface="BIZ UDゴシック" panose="020B0400000000000000" pitchFamily="49" charset="-128"/>
+                        </a:rPr>
+                        <a:t>main.py</a:t>
+                      </a:r>
                       <a:endParaRPr lang="ja-JP" altLang="en-US" sz="1400">
                         <a:latin typeface="BIZ UDゴシック" panose="020B0400000000000000" pitchFamily="49" charset="-128"/>
                         <a:ea typeface="BIZ UDゴシック" panose="020B0400000000000000" pitchFamily="49" charset="-128"/>
@@ -20253,6 +12446,69 @@
                       <a:pPr>
                         <a:buNone/>
                       </a:pPr>
+                      <a:r>
+                        <a:rPr lang="ja-JP" altLang="en-US" sz="1400">
+                          <a:latin typeface="BIZ UDゴシック" panose="020B0400000000000000" pitchFamily="49" charset="-128"/>
+                          <a:ea typeface="BIZ UDゴシック" panose="020B0400000000000000" pitchFamily="49" charset="-128"/>
+                        </a:rPr>
+                        <a:t>メイン制御</a:t>
+                      </a:r>
+                    </a:p>
+                  </a:txBody>
+                  <a:tcPr anchor="ctr">
+                    <a:lnL w="12700" cap="flat" cmpd="sng" algn="ctr">
+                      <a:solidFill>
+                        <a:schemeClr val="tx1"/>
+                      </a:solidFill>
+                      <a:prstDash val="solid"/>
+                      <a:round/>
+                      <a:headEnd type="none" w="med" len="med"/>
+                      <a:tailEnd type="none" w="med" len="med"/>
+                    </a:lnL>
+                    <a:lnR w="12700" cap="flat" cmpd="sng" algn="ctr">
+                      <a:solidFill>
+                        <a:schemeClr val="tx1"/>
+                      </a:solidFill>
+                      <a:prstDash val="solid"/>
+                      <a:round/>
+                      <a:headEnd type="none" w="med" len="med"/>
+                      <a:tailEnd type="none" w="med" len="med"/>
+                    </a:lnR>
+                    <a:lnT w="12700" cap="flat" cmpd="sng" algn="ctr">
+                      <a:solidFill>
+                        <a:schemeClr val="tx1"/>
+                      </a:solidFill>
+                      <a:prstDash val="solid"/>
+                      <a:round/>
+                      <a:headEnd type="none" w="med" len="med"/>
+                      <a:tailEnd type="none" w="med" len="med"/>
+                    </a:lnT>
+                    <a:lnB w="12700" cap="flat" cmpd="sng" algn="ctr">
+                      <a:solidFill>
+                        <a:schemeClr val="tx1"/>
+                      </a:solidFill>
+                      <a:prstDash val="solid"/>
+                      <a:round/>
+                      <a:headEnd type="none" w="med" len="med"/>
+                      <a:tailEnd type="none" w="med" len="med"/>
+                    </a:lnB>
+                  </a:tcPr>
+                </a:tc>
+                <a:tc>
+                  <a:txBody>
+                    <a:bodyPr/>
+                    <a:lstStyle/>
+                    <a:p>
+                      <a:pPr>
+                        <a:buNone/>
+                      </a:pPr>
+                      <a:r>
+                        <a:rPr lang="en-US" altLang="ja-JP" sz="1400">
+                          <a:latin typeface="BIZ UDゴシック" panose="020B0400000000000000" pitchFamily="49" charset="-128"/>
+                          <a:ea typeface="BIZ UDゴシック" panose="020B0400000000000000" pitchFamily="49" charset="-128"/>
+                        </a:rPr>
+                        <a:t>Python</a:t>
+                      </a:r>
                       <a:endParaRPr lang="ja-JP" altLang="en-US" sz="1400">
                         <a:latin typeface="BIZ UDゴシック" panose="020B0400000000000000" pitchFamily="49" charset="-128"/>
                         <a:ea typeface="BIZ UDゴシック" panose="020B0400000000000000" pitchFamily="49" charset="-128"/>
@@ -20359,10 +12615,13 @@
                       <a:pPr>
                         <a:buNone/>
                       </a:pPr>
-                      <a:endParaRPr lang="ja-JP" altLang="en-US" sz="1400">
-                        <a:latin typeface="BIZ UDゴシック" panose="020B0400000000000000" pitchFamily="49" charset="-128"/>
-                        <a:ea typeface="BIZ UDゴシック" panose="020B0400000000000000" pitchFamily="49" charset="-128"/>
-                      </a:endParaRPr>
+                      <a:r>
+                        <a:rPr lang="ja-JP" altLang="en-US" sz="1400">
+                          <a:latin typeface="BIZ UDゴシック" panose="020B0400000000000000" pitchFamily="49" charset="-128"/>
+                          <a:ea typeface="BIZ UDゴシック" panose="020B0400000000000000" pitchFamily="49" charset="-128"/>
+                        </a:rPr>
+                        <a:t>なし</a:t>
+                      </a:r>
                     </a:p>
                   </a:txBody>
                   <a:tcPr anchor="ctr">
@@ -20623,6 +12882,59 @@
                     </a:lnB>
                   </a:tcPr>
                 </a:tc>
+                <a:tc>
+                  <a:txBody>
+                    <a:bodyPr/>
+                    <a:lstStyle/>
+                    <a:p>
+                      <a:pPr>
+                        <a:buNone/>
+                      </a:pPr>
+                      <a:endParaRPr lang="ja-JP" altLang="en-US" sz="1400">
+                        <a:latin typeface="BIZ UDゴシック" panose="020B0400000000000000" pitchFamily="49" charset="-128"/>
+                        <a:ea typeface="BIZ UDゴシック" panose="020B0400000000000000" pitchFamily="49" charset="-128"/>
+                      </a:endParaRPr>
+                    </a:p>
+                  </a:txBody>
+                  <a:tcPr anchor="ctr">
+                    <a:lnL w="12700" cap="flat" cmpd="sng" algn="ctr">
+                      <a:solidFill>
+                        <a:schemeClr val="tx1"/>
+                      </a:solidFill>
+                      <a:prstDash val="solid"/>
+                      <a:round/>
+                      <a:headEnd type="none" w="med" len="med"/>
+                      <a:tailEnd type="none" w="med" len="med"/>
+                    </a:lnL>
+                    <a:lnR w="12700" cap="flat" cmpd="sng" algn="ctr">
+                      <a:solidFill>
+                        <a:schemeClr val="tx1"/>
+                      </a:solidFill>
+                      <a:prstDash val="solid"/>
+                      <a:round/>
+                      <a:headEnd type="none" w="med" len="med"/>
+                      <a:tailEnd type="none" w="med" len="med"/>
+                    </a:lnR>
+                    <a:lnT w="12700" cap="flat" cmpd="sng" algn="ctr">
+                      <a:solidFill>
+                        <a:schemeClr val="tx1"/>
+                      </a:solidFill>
+                      <a:prstDash val="solid"/>
+                      <a:round/>
+                      <a:headEnd type="none" w="med" len="med"/>
+                      <a:tailEnd type="none" w="med" len="med"/>
+                    </a:lnT>
+                    <a:lnB w="12700" cap="flat" cmpd="sng" algn="ctr">
+                      <a:solidFill>
+                        <a:schemeClr val="tx1"/>
+                      </a:solidFill>
+                      <a:prstDash val="solid"/>
+                      <a:round/>
+                      <a:headEnd type="none" w="med" len="med"/>
+                      <a:tailEnd type="none" w="med" len="med"/>
+                    </a:lnB>
+                  </a:tcPr>
+                </a:tc>
                 <a:extLst>
                   <a:ext uri="{0D108BD9-81ED-4DB2-BD59-A6C34878D82A}">
                     <a16:rowId xmlns:a16="http://schemas.microsoft.com/office/drawing/2014/main" val="1080130541"/>
@@ -20842,6 +13154,59 @@
                     </a:lnB>
                   </a:tcPr>
                 </a:tc>
+                <a:tc>
+                  <a:txBody>
+                    <a:bodyPr/>
+                    <a:lstStyle/>
+                    <a:p>
+                      <a:pPr>
+                        <a:buNone/>
+                      </a:pPr>
+                      <a:endParaRPr lang="ja-JP" altLang="en-US" sz="1400">
+                        <a:latin typeface="BIZ UDゴシック" panose="020B0400000000000000" pitchFamily="49" charset="-128"/>
+                        <a:ea typeface="BIZ UDゴシック" panose="020B0400000000000000" pitchFamily="49" charset="-128"/>
+                      </a:endParaRPr>
+                    </a:p>
+                  </a:txBody>
+                  <a:tcPr anchor="ctr">
+                    <a:lnL w="12700" cap="flat" cmpd="sng" algn="ctr">
+                      <a:solidFill>
+                        <a:schemeClr val="tx1"/>
+                      </a:solidFill>
+                      <a:prstDash val="solid"/>
+                      <a:round/>
+                      <a:headEnd type="none" w="med" len="med"/>
+                      <a:tailEnd type="none" w="med" len="med"/>
+                    </a:lnL>
+                    <a:lnR w="12700" cap="flat" cmpd="sng" algn="ctr">
+                      <a:solidFill>
+                        <a:schemeClr val="tx1"/>
+                      </a:solidFill>
+                      <a:prstDash val="solid"/>
+                      <a:round/>
+                      <a:headEnd type="none" w="med" len="med"/>
+                      <a:tailEnd type="none" w="med" len="med"/>
+                    </a:lnR>
+                    <a:lnT w="12700" cap="flat" cmpd="sng" algn="ctr">
+                      <a:solidFill>
+                        <a:schemeClr val="tx1"/>
+                      </a:solidFill>
+                      <a:prstDash val="solid"/>
+                      <a:round/>
+                      <a:headEnd type="none" w="med" len="med"/>
+                      <a:tailEnd type="none" w="med" len="med"/>
+                    </a:lnT>
+                    <a:lnB w="12700" cap="flat" cmpd="sng" algn="ctr">
+                      <a:solidFill>
+                        <a:schemeClr val="tx1"/>
+                      </a:solidFill>
+                      <a:prstDash val="solid"/>
+                      <a:round/>
+                      <a:headEnd type="none" w="med" len="med"/>
+                      <a:tailEnd type="none" w="med" len="med"/>
+                    </a:lnB>
+                  </a:tcPr>
+                </a:tc>
                 <a:extLst>
                   <a:ext uri="{0D108BD9-81ED-4DB2-BD59-A6C34878D82A}">
                     <a16:rowId xmlns:a16="http://schemas.microsoft.com/office/drawing/2014/main" val="350799095"/>
@@ -20964,6 +13329,59 @@
                         <a:buNone/>
                       </a:pPr>
                       <a:endParaRPr lang="en-US" altLang="ja-JP" sz="1400">
+                        <a:latin typeface="BIZ UDゴシック" panose="020B0400000000000000" pitchFamily="49" charset="-128"/>
+                        <a:ea typeface="BIZ UDゴシック" panose="020B0400000000000000" pitchFamily="49" charset="-128"/>
+                      </a:endParaRPr>
+                    </a:p>
+                  </a:txBody>
+                  <a:tcPr anchor="ctr">
+                    <a:lnL w="12700" cap="flat" cmpd="sng" algn="ctr">
+                      <a:solidFill>
+                        <a:schemeClr val="tx1"/>
+                      </a:solidFill>
+                      <a:prstDash val="solid"/>
+                      <a:round/>
+                      <a:headEnd type="none" w="med" len="med"/>
+                      <a:tailEnd type="none" w="med" len="med"/>
+                    </a:lnL>
+                    <a:lnR w="12700" cap="flat" cmpd="sng" algn="ctr">
+                      <a:solidFill>
+                        <a:schemeClr val="tx1"/>
+                      </a:solidFill>
+                      <a:prstDash val="solid"/>
+                      <a:round/>
+                      <a:headEnd type="none" w="med" len="med"/>
+                      <a:tailEnd type="none" w="med" len="med"/>
+                    </a:lnR>
+                    <a:lnT w="12700" cap="flat" cmpd="sng" algn="ctr">
+                      <a:solidFill>
+                        <a:schemeClr val="tx1"/>
+                      </a:solidFill>
+                      <a:prstDash val="solid"/>
+                      <a:round/>
+                      <a:headEnd type="none" w="med" len="med"/>
+                      <a:tailEnd type="none" w="med" len="med"/>
+                    </a:lnT>
+                    <a:lnB w="12700" cap="flat" cmpd="sng" algn="ctr">
+                      <a:solidFill>
+                        <a:schemeClr val="tx1"/>
+                      </a:solidFill>
+                      <a:prstDash val="solid"/>
+                      <a:round/>
+                      <a:headEnd type="none" w="med" len="med"/>
+                      <a:tailEnd type="none" w="med" len="med"/>
+                    </a:lnB>
+                  </a:tcPr>
+                </a:tc>
+                <a:tc>
+                  <a:txBody>
+                    <a:bodyPr/>
+                    <a:lstStyle/>
+                    <a:p>
+                      <a:pPr>
+                        <a:buNone/>
+                      </a:pPr>
+                      <a:endParaRPr lang="ja-JP" altLang="en-US" sz="1400">
                         <a:latin typeface="BIZ UDゴシック" panose="020B0400000000000000" pitchFamily="49" charset="-128"/>
                         <a:ea typeface="BIZ UDゴシック" panose="020B0400000000000000" pitchFamily="49" charset="-128"/>
                       </a:endParaRPr>
@@ -21122,7 +13540,7 @@
 </p:sld>
 </file>
 
-<file path=ppt/slides/slide7.xml><?xml version="1.0" encoding="utf-8"?>
+<file path=ppt/slides/slide5.xml><?xml version="1.0" encoding="utf-8"?>
 <p:sld xmlns:a="http://schemas.openxmlformats.org/drawingml/2006/main" xmlns:r="http://schemas.openxmlformats.org/officeDocument/2006/relationships" xmlns:p="http://schemas.openxmlformats.org/presentationml/2006/main">
   <p:cSld>
     <p:spTree>
@@ -21193,7 +13611,7 @@
           <a:p>
             <a:fld id="{A99D720A-4AD5-4DCF-885F-DE5297996123}" type="slidenum">
               <a:rPr kumimoji="1" lang="ja-JP" altLang="en-US" smtClean="0"/>
-              <a:t>7</a:t>
+              <a:t>5</a:t>
             </a:fld>
             <a:endParaRPr kumimoji="1" lang="ja-JP" altLang="en-US"/>
           </a:p>
@@ -21214,14 +13632,14 @@
           <p:nvPr>
             <p:extLst>
               <p:ext uri="{D42A27DB-BD31-4B8C-83A1-F6EECF244321}">
-                <p14:modId xmlns:p14="http://schemas.microsoft.com/office/powerpoint/2010/main" val="2197362660"/>
+                <p14:modId xmlns:p14="http://schemas.microsoft.com/office/powerpoint/2010/main" val="1524041875"/>
               </p:ext>
             </p:extLst>
           </p:nvPr>
         </p:nvGraphicFramePr>
         <p:xfrm>
-          <a:off x="673768" y="1101733"/>
-          <a:ext cx="11044430" cy="1828800"/>
+          <a:off x="616226" y="1101733"/>
+          <a:ext cx="10796335" cy="1828800"/>
         </p:xfrm>
         <a:graphic>
           <a:graphicData uri="http://schemas.openxmlformats.org/drawingml/2006/table">
@@ -21230,7 +13648,7 @@
                 <a:tableStyleId>{912C8C85-51F0-491E-9774-3900AFEF0FD7}</a:tableStyleId>
               </a:tblPr>
               <a:tblGrid>
-                <a:gridCol w="2052000">
+                <a:gridCol w="2628000">
                   <a:extLst>
                     <a:ext uri="{9D8B030D-6E8A-4147-A177-3AD203B41FA5}">
                       <a16:colId xmlns:a16="http://schemas.microsoft.com/office/drawing/2014/main" val="6935548"/>
@@ -21258,7 +13676,7 @@
                     </a:ext>
                   </a:extLst>
                 </a:gridCol>
-                <a:gridCol w="4172095">
+                <a:gridCol w="3348000">
                   <a:extLst>
                     <a:ext uri="{9D8B030D-6E8A-4147-A177-3AD203B41FA5}">
                       <a16:colId xmlns:a16="http://schemas.microsoft.com/office/drawing/2014/main" val="1960738261"/>
@@ -21567,7 +13985,7 @@
                           <a:latin typeface="BIZ UDゴシック" panose="020B0400000000000000" pitchFamily="49" charset="-128"/>
                           <a:ea typeface="BIZ UDゴシック" panose="020B0400000000000000" pitchFamily="49" charset="-128"/>
                         </a:rPr>
-                        <a:t>is_temp_high()</a:t>
+                        <a:t>handle_high_temp_state()</a:t>
                       </a:r>
                       <a:endParaRPr lang="ja-JP" altLang="en-US" sz="1400">
                         <a:latin typeface="BIZ UDゴシック" panose="020B0400000000000000" pitchFamily="49" charset="-128"/>
@@ -21902,7 +14320,7 @@
                           <a:latin typeface="BIZ UDゴシック" panose="020B0400000000000000" pitchFamily="49" charset="-128"/>
                           <a:ea typeface="BIZ UDゴシック" panose="020B0400000000000000" pitchFamily="49" charset="-128"/>
                         </a:rPr>
-                        <a:t>is_temp_low()</a:t>
+                        <a:t>handle_low_temp_state()</a:t>
                       </a:r>
                       <a:endParaRPr lang="ja-JP" altLang="en-US" sz="1400">
                         <a:latin typeface="BIZ UDゴシック" panose="020B0400000000000000" pitchFamily="49" charset="-128"/>
@@ -22324,9 +14742,15 @@
                       <a:r>
                         <a:rPr lang="en-US" altLang="ja-JP" sz="1400">
                           <a:latin typeface="BIZ UDゴシック" panose="020B0400000000000000" pitchFamily="49" charset="-128"/>
-                          <a:ea typeface="BIZ UDゴシック" panose="020B0400000000000000" pitchFamily="49" charset="-128"/>
-                        </a:rPr>
-                        <a:t>is_temp_normal()</a:t>
+                        </a:rPr>
+                        <a:t>handle_charge_guide_state</a:t>
+                      </a:r>
+                      <a:r>
+                        <a:rPr lang="en-US" altLang="ja-JP" sz="1400">
+                          <a:latin typeface="BIZ UDゴシック" panose="020B0400000000000000" pitchFamily="49" charset="-128"/>
+                          <a:ea typeface="BIZ UDゴシック" panose="020B0400000000000000" pitchFamily="49" charset="-128"/>
+                        </a:rPr>
+                        <a:t>()</a:t>
                       </a:r>
                       <a:endParaRPr lang="ja-JP" altLang="en-US" sz="1400">
                         <a:latin typeface="BIZ UDゴシック" panose="020B0400000000000000" pitchFamily="49" charset="-128"/>
@@ -22793,7 +15217,7 @@
                           <a:latin typeface="BIZ UDゴシック" panose="020B0400000000000000" pitchFamily="49" charset="-128"/>
                           <a:ea typeface="BIZ UDゴシック" panose="020B0400000000000000" pitchFamily="49" charset="-128"/>
                         </a:rPr>
-                        <a:t>is_temp_arart()</a:t>
+                        <a:t>handle_alert_state()</a:t>
                       </a:r>
                       <a:endParaRPr lang="ja-JP" altLang="en-US" sz="1400">
                         <a:latin typeface="BIZ UDゴシック" panose="020B0400000000000000" pitchFamily="49" charset="-128"/>
@@ -23164,7 +15588,7 @@
                           <a:latin typeface="BIZ UDゴシック" panose="020B0400000000000000" pitchFamily="49" charset="-128"/>
                           <a:ea typeface="BIZ UDゴシック" panose="020B0400000000000000" pitchFamily="49" charset="-128"/>
                         </a:rPr>
-                        <a:t>is_temp_error_Stop()</a:t>
+                        <a:t>handle_error_state()</a:t>
                       </a:r>
                       <a:endParaRPr lang="ja-JP" altLang="en-US" sz="1400">
                         <a:latin typeface="BIZ UDゴシック" panose="020B0400000000000000" pitchFamily="49" charset="-128"/>
